--- a/生鲜超市综合管理系统_毕业答辩PPT.pptx
+++ b/生鲜超市综合管理系统_毕业答辩PPT.pptx
@@ -3579,45 +3579,6 @@
           <a:ln/>
         </p:spPr>
       </p:sp>
-      <p:sp>
-        <p:nvSpPr>
-          <p:cNvPr id="19" name="Watermark"/>
-          <p:cNvSpPr txBox="1"/>
-          <p:nvPr/>
-        </p:nvSpPr>
-        <p:spPr>
-          <a:xfrm rot="0">
-            <a:off x="6836000" y="4685500"/>
-            <a:ext cx="2200000" cy="350000"/>
-          </a:xfrm>
-          <a:prstGeom prst="rect">
-            <a:avLst/>
-          </a:prstGeom>
-          <a:noFill/>
-          <a:ln>
-            <a:noFill/>
-          </a:ln>
-        </p:spPr>
-        <p:txBody>
-          <a:bodyPr wrap="square" rtlCol="0" anchor="b" lIns="0" tIns="0" rIns="91440" bIns="45720"/>
-          <a:lstStyle/>
-          <a:p>
-            <a:pPr algn="r"/>
-            <a:r>
-              <a:rPr lang="zh-CN" sz="1600" dirty="0">
-                <a:solidFill>
-                  <a:srgbClr val="808080">
-                    <a:alpha val="19999"/>
-                  </a:srgbClr>
-                </a:solidFill>
-                <a:latin typeface="Arial"/>
-                <a:ea typeface="SimSun"/>
-              </a:rPr>
-              <a:t>TRAE AI 生成</a:t>
-            </a:r>
-          </a:p>
-        </p:txBody>
-      </p:sp>
     </p:spTree>
   </p:cSld>
   <p:clrMapOvr>
@@ -3821,8 +3782,8 @@
         </p:nvSpPr>
         <p:spPr>
           <a:xfrm>
-            <a:off x="548640" y="960120"/>
-            <a:ext cx="3840480" cy="320040"/>
+            <a:off x="457200" y="914400"/>
+            <a:ext cx="2286000" cy="274320"/>
           </a:xfrm>
           <a:prstGeom prst="rect">
             <a:avLst/>
@@ -3842,7 +3803,7 @@
             <a:r>
               <a:rPr lang="en-US" sz="1100" b="1" dirty="0">
                 <a:solidFill>
-                  <a:srgbClr val="2C3E50"/>
+                  <a:srgbClr val="145C2E"/>
                 </a:solidFill>
                 <a:latin typeface="SimHei" pitchFamily="34" charset="0"/>
                 <a:ea typeface="SimHei" pitchFamily="34" charset="-122"/>
@@ -3870,8 +3831,8 @@
         </p:blipFill>
         <p:spPr>
           <a:xfrm>
-            <a:off x="548640" y="1280160"/>
-            <a:ext cx="3840480" cy="3474720"/>
+            <a:off x="365760" y="1234440"/>
+            <a:ext cx="3474720" cy="2377440"/>
           </a:xfrm>
           <a:prstGeom prst="rect">
             <a:avLst/>
@@ -3880,14 +3841,85 @@
       </p:pic>
       <p:sp>
         <p:nvSpPr>
-          <p:cNvPr id="9" name="Text 6"/>
-          <p:cNvSpPr/>
-          <p:nvPr/>
-        </p:nvSpPr>
-        <p:spPr>
-          <a:xfrm>
-            <a:off x="4754880" y="960120"/>
-            <a:ext cx="3840480" cy="320040"/>
+          <p:cNvPr id="9" name="Shape 6"/>
+          <p:cNvSpPr/>
+          <p:nvPr/>
+        </p:nvSpPr>
+        <p:spPr>
+          <a:xfrm>
+            <a:off x="365760" y="3703320"/>
+            <a:ext cx="4023360" cy="868680"/>
+          </a:xfrm>
+          <a:prstGeom prst="roundRect">
+            <a:avLst>
+              <a:gd name="adj" fmla="val 8421"/>
+            </a:avLst>
+          </a:prstGeom>
+          <a:solidFill>
+            <a:srgbClr val="F0FFF0"/>
+          </a:solidFill>
+          <a:ln w="12700">
+            <a:solidFill>
+              <a:srgbClr val="1B7A3D"/>
+            </a:solidFill>
+            <a:prstDash val="solid"/>
+          </a:ln>
+        </p:spPr>
+      </p:sp>
+      <p:sp>
+        <p:nvSpPr>
+          <p:cNvPr id="10" name="Text 7"/>
+          <p:cNvSpPr/>
+          <p:nvPr/>
+        </p:nvSpPr>
+        <p:spPr>
+          <a:xfrm>
+            <a:off x="502920" y="3749040"/>
+            <a:ext cx="3749040" cy="777240"/>
+          </a:xfrm>
+          <a:prstGeom prst="rect">
+            <a:avLst/>
+          </a:prstGeom>
+          <a:noFill/>
+          <a:ln/>
+        </p:spPr>
+        <p:txBody>
+          <a:bodyPr wrap="square" rtlCol="0" anchor="t">
+            <a:normAutofit/>
+          </a:bodyPr>
+          <a:lstStyle/>
+          <a:p>
+            <a:pPr indent="0" marL="0">
+              <a:lnSpc>
+                <a:spcPct val="130000"/>
+              </a:lnSpc>
+              <a:buNone/>
+            </a:pPr>
+            <a:r>
+              <a:rPr lang="en-US" sz="950" dirty="0">
+                <a:solidFill>
+                  <a:srgbClr val="2C3E50"/>
+                </a:solidFill>
+                <a:latin typeface="SimSun" pitchFamily="34" charset="0"/>
+                <a:ea typeface="SimSun" pitchFamily="34" charset="-122"/>
+                <a:cs typeface="SimSun" pitchFamily="34" charset="-120"/>
+              </a:rPr>
+              <a:t>管理员功能：商品管理、库存监控、订单处理、公告发布、投诉建议处理、日志查看、数据统计分析等全流程管控功能。</a:t>
+            </a:r>
+            <a:endParaRPr lang="en-US" sz="950" dirty="0"/>
+          </a:p>
+        </p:txBody>
+      </p:sp>
+      <p:sp>
+        <p:nvSpPr>
+          <p:cNvPr id="11" name="Text 8"/>
+          <p:cNvSpPr/>
+          <p:nvPr/>
+        </p:nvSpPr>
+        <p:spPr>
+          <a:xfrm>
+            <a:off x="4663440" y="914400"/>
+            <a:ext cx="2286000" cy="274320"/>
           </a:xfrm>
           <a:prstGeom prst="rect">
             <a:avLst/>
@@ -3907,7 +3939,7 @@
             <a:r>
               <a:rPr lang="en-US" sz="1100" b="1" dirty="0">
                 <a:solidFill>
-                  <a:srgbClr val="2C3E50"/>
+                  <a:srgbClr val="145C2E"/>
                 </a:solidFill>
                 <a:latin typeface="SimHei" pitchFamily="34" charset="0"/>
                 <a:ea typeface="SimHei" pitchFamily="34" charset="-122"/>
@@ -3921,7 +3953,7 @@
       </p:sp>
       <p:pic>
         <p:nvPicPr>
-          <p:cNvPr id="10" name="Image 1" descr="/workspace/assets/fig3_4_user_usecase.png">    </p:cNvPr>
+          <p:cNvPr id="12" name="Image 1" descr="/workspace/assets/fig3_4_user_usecase.png">    </p:cNvPr>
           <p:cNvPicPr>
             <a:picLocks noChangeAspect="1"/>
           </p:cNvPicPr>
@@ -3935,8 +3967,8 @@
         </p:blipFill>
         <p:spPr>
           <a:xfrm>
-            <a:off x="4754880" y="1280160"/>
-            <a:ext cx="3840480" cy="3474720"/>
+            <a:off x="4754880" y="1234440"/>
+            <a:ext cx="3474720" cy="2377440"/>
           </a:xfrm>
           <a:prstGeom prst="rect">
             <a:avLst/>
@@ -3945,40 +3977,72 @@
       </p:pic>
       <p:sp>
         <p:nvSpPr>
-          <p:cNvPr id="11" name="Watermark"/>
-          <p:cNvSpPr txBox="1"/>
-          <p:nvPr/>
-        </p:nvSpPr>
-        <p:spPr>
-          <a:xfrm rot="0">
-            <a:off x="6836000" y="4685500"/>
-            <a:ext cx="2200000" cy="350000"/>
-          </a:xfrm>
-          <a:prstGeom prst="rect">
-            <a:avLst/>
-          </a:prstGeom>
-          <a:noFill/>
-          <a:ln>
-            <a:noFill/>
+          <p:cNvPr id="13" name="Shape 9"/>
+          <p:cNvSpPr/>
+          <p:nvPr/>
+        </p:nvSpPr>
+        <p:spPr>
+          <a:xfrm>
+            <a:off x="4572000" y="3703320"/>
+            <a:ext cx="4206240" cy="868680"/>
+          </a:xfrm>
+          <a:prstGeom prst="roundRect">
+            <a:avLst>
+              <a:gd name="adj" fmla="val 8421"/>
+            </a:avLst>
+          </a:prstGeom>
+          <a:solidFill>
+            <a:srgbClr val="FFF8F0"/>
+          </a:solidFill>
+          <a:ln w="12700">
+            <a:solidFill>
+              <a:srgbClr val="FF8C00"/>
+            </a:solidFill>
+            <a:prstDash val="solid"/>
           </a:ln>
         </p:spPr>
-        <p:txBody>
-          <a:bodyPr wrap="square" rtlCol="0" anchor="b" lIns="0" tIns="0" rIns="91440" bIns="45720"/>
-          <a:lstStyle/>
-          <a:p>
-            <a:pPr algn="r"/>
-            <a:r>
-              <a:rPr lang="zh-CN" sz="1600" dirty="0">
-                <a:solidFill>
-                  <a:srgbClr val="808080">
-                    <a:alpha val="19999"/>
-                  </a:srgbClr>
-                </a:solidFill>
-                <a:latin typeface="Arial"/>
-                <a:ea typeface="SimSun"/>
-              </a:rPr>
-              <a:t>TRAE AI 生成</a:t>
-            </a:r>
+      </p:sp>
+      <p:sp>
+        <p:nvSpPr>
+          <p:cNvPr id="14" name="Text 10"/>
+          <p:cNvSpPr/>
+          <p:nvPr/>
+        </p:nvSpPr>
+        <p:spPr>
+          <a:xfrm>
+            <a:off x="4709160" y="3749040"/>
+            <a:ext cx="3931920" cy="777240"/>
+          </a:xfrm>
+          <a:prstGeom prst="rect">
+            <a:avLst/>
+          </a:prstGeom>
+          <a:noFill/>
+          <a:ln/>
+        </p:spPr>
+        <p:txBody>
+          <a:bodyPr wrap="square" rtlCol="0" anchor="t">
+            <a:normAutofit/>
+          </a:bodyPr>
+          <a:lstStyle/>
+          <a:p>
+            <a:pPr indent="0" marL="0">
+              <a:lnSpc>
+                <a:spcPct val="130000"/>
+              </a:lnSpc>
+              <a:buNone/>
+            </a:pPr>
+            <a:r>
+              <a:rPr lang="en-US" sz="950" dirty="0">
+                <a:solidFill>
+                  <a:srgbClr val="2C3E50"/>
+                </a:solidFill>
+                <a:latin typeface="SimSun" pitchFamily="34" charset="0"/>
+                <a:ea typeface="SimSun" pitchFamily="34" charset="-122"/>
+                <a:cs typeface="SimSun" pitchFamily="34" charset="-120"/>
+              </a:rPr>
+              <a:t>用户功能：商品浏览、在线购买、购物车管理、订单提交、优惠券领取、个人中心管理、投诉建议提交等购物服务功能。</a:t>
+            </a:r>
+            <a:endParaRPr lang="en-US" sz="950" dirty="0"/>
           </a:p>
         </p:txBody>
       </p:sp>
@@ -5021,45 +5085,6 @@
           </a:p>
         </p:txBody>
       </p:sp>
-      <p:sp>
-        <p:nvSpPr>
-          <p:cNvPr id="31" name="Watermark"/>
-          <p:cNvSpPr txBox="1"/>
-          <p:nvPr/>
-        </p:nvSpPr>
-        <p:spPr>
-          <a:xfrm rot="0">
-            <a:off x="6836000" y="4685500"/>
-            <a:ext cx="2200000" cy="350000"/>
-          </a:xfrm>
-          <a:prstGeom prst="rect">
-            <a:avLst/>
-          </a:prstGeom>
-          <a:noFill/>
-          <a:ln>
-            <a:noFill/>
-          </a:ln>
-        </p:spPr>
-        <p:txBody>
-          <a:bodyPr wrap="square" rtlCol="0" anchor="b" lIns="0" tIns="0" rIns="91440" bIns="45720"/>
-          <a:lstStyle/>
-          <a:p>
-            <a:pPr algn="r"/>
-            <a:r>
-              <a:rPr lang="zh-CN" sz="1600" dirty="0">
-                <a:solidFill>
-                  <a:srgbClr val="808080">
-                    <a:alpha val="19999"/>
-                  </a:srgbClr>
-                </a:solidFill>
-                <a:latin typeface="Arial"/>
-                <a:ea typeface="SimSun"/>
-              </a:rPr>
-              <a:t>TRAE AI 生成</a:t>
-            </a:r>
-          </a:p>
-        </p:txBody>
-      </p:sp>
     </p:spTree>
   </p:cSld>
   <p:clrMapOvr>
@@ -5263,7 +5288,7 @@
         </p:nvSpPr>
         <p:spPr>
           <a:xfrm>
-            <a:off x="548640" y="960120"/>
+            <a:off x="548640" y="914400"/>
             <a:ext cx="3657600" cy="274320"/>
           </a:xfrm>
           <a:prstGeom prst="rect">
@@ -5284,7 +5309,7 @@
             <a:r>
               <a:rPr lang="en-US" sz="1100" b="1" dirty="0">
                 <a:solidFill>
-                  <a:srgbClr val="2C3E50"/>
+                  <a:srgbClr val="145C2E"/>
                 </a:solidFill>
                 <a:latin typeface="SimHei" pitchFamily="34" charset="0"/>
                 <a:ea typeface="SimHei" pitchFamily="34" charset="-122"/>
@@ -5312,8 +5337,8 @@
         </p:blipFill>
         <p:spPr>
           <a:xfrm>
-            <a:off x="457200" y="1280160"/>
-            <a:ext cx="8229600" cy="3474720"/>
+            <a:off x="457200" y="1234440"/>
+            <a:ext cx="8229600" cy="2194560"/>
           </a:xfrm>
           <a:prstGeom prst="rect">
             <a:avLst/>
@@ -5322,40 +5347,113 @@
       </p:pic>
       <p:sp>
         <p:nvSpPr>
-          <p:cNvPr id="9" name="Watermark"/>
-          <p:cNvSpPr txBox="1"/>
-          <p:nvPr/>
-        </p:nvSpPr>
-        <p:spPr>
-          <a:xfrm rot="0">
-            <a:off x="6836000" y="4685500"/>
-            <a:ext cx="2200000" cy="350000"/>
-          </a:xfrm>
-          <a:prstGeom prst="rect">
-            <a:avLst/>
-          </a:prstGeom>
-          <a:noFill/>
-          <a:ln>
-            <a:noFill/>
+          <p:cNvPr id="9" name="Shape 6"/>
+          <p:cNvSpPr/>
+          <p:nvPr/>
+        </p:nvSpPr>
+        <p:spPr>
+          <a:xfrm>
+            <a:off x="457200" y="3566160"/>
+            <a:ext cx="8229600" cy="1005840"/>
+          </a:xfrm>
+          <a:prstGeom prst="roundRect">
+            <a:avLst>
+              <a:gd name="adj" fmla="val 7273"/>
+            </a:avLst>
+          </a:prstGeom>
+          <a:solidFill>
+            <a:srgbClr val="F0FFF0"/>
+          </a:solidFill>
+          <a:ln w="12700">
+            <a:solidFill>
+              <a:srgbClr val="1B7A3D"/>
+            </a:solidFill>
+            <a:prstDash val="solid"/>
           </a:ln>
         </p:spPr>
-        <p:txBody>
-          <a:bodyPr wrap="square" rtlCol="0" anchor="b" lIns="0" tIns="0" rIns="91440" bIns="45720"/>
-          <a:lstStyle/>
-          <a:p>
-            <a:pPr algn="r"/>
-            <a:r>
-              <a:rPr lang="zh-CN" sz="1600" dirty="0">
-                <a:solidFill>
-                  <a:srgbClr val="808080">
-                    <a:alpha val="19999"/>
-                  </a:srgbClr>
-                </a:solidFill>
-                <a:latin typeface="Arial"/>
-                <a:ea typeface="SimSun"/>
-              </a:rPr>
-              <a:t>TRAE AI 生成</a:t>
-            </a:r>
+      </p:sp>
+      <p:sp>
+        <p:nvSpPr>
+          <p:cNvPr id="10" name="Text 7"/>
+          <p:cNvSpPr/>
+          <p:nvPr/>
+        </p:nvSpPr>
+        <p:spPr>
+          <a:xfrm>
+            <a:off x="594360" y="3657600"/>
+            <a:ext cx="7955280" cy="274320"/>
+          </a:xfrm>
+          <a:prstGeom prst="rect">
+            <a:avLst/>
+          </a:prstGeom>
+          <a:noFill/>
+          <a:ln/>
+        </p:spPr>
+        <p:txBody>
+          <a:bodyPr wrap="square" rtlCol="0" anchor="ctr">
+            <a:normAutofit/>
+          </a:bodyPr>
+          <a:lstStyle/>
+          <a:p>
+            <a:pPr indent="0" marL="0">
+              <a:buNone/>
+            </a:pPr>
+            <a:r>
+              <a:rPr lang="en-US" sz="1000" b="1" dirty="0">
+                <a:solidFill>
+                  <a:srgbClr val="145C2E"/>
+                </a:solidFill>
+                <a:latin typeface="SimHei" pitchFamily="34" charset="0"/>
+                <a:ea typeface="SimHei" pitchFamily="34" charset="-122"/>
+                <a:cs typeface="SimHei" pitchFamily="34" charset="-120"/>
+              </a:rPr>
+              <a:t>架构说明：</a:t>
+            </a:r>
+            <a:endParaRPr lang="en-US" sz="1000" dirty="0"/>
+          </a:p>
+        </p:txBody>
+      </p:sp>
+      <p:sp>
+        <p:nvSpPr>
+          <p:cNvPr id="11" name="Text 8"/>
+          <p:cNvSpPr/>
+          <p:nvPr/>
+        </p:nvSpPr>
+        <p:spPr>
+          <a:xfrm>
+            <a:off x="594360" y="3931920"/>
+            <a:ext cx="7955280" cy="594360"/>
+          </a:xfrm>
+          <a:prstGeom prst="rect">
+            <a:avLst/>
+          </a:prstGeom>
+          <a:noFill/>
+          <a:ln/>
+        </p:spPr>
+        <p:txBody>
+          <a:bodyPr wrap="square" rtlCol="0" anchor="t">
+            <a:normAutofit/>
+          </a:bodyPr>
+          <a:lstStyle/>
+          <a:p>
+            <a:pPr indent="0" marL="0">
+              <a:lnSpc>
+                <a:spcPct val="130000"/>
+              </a:lnSpc>
+              <a:buNone/>
+            </a:pPr>
+            <a:r>
+              <a:rPr lang="en-US" sz="950" dirty="0">
+                <a:solidFill>
+                  <a:srgbClr val="2C3E50"/>
+                </a:solidFill>
+                <a:latin typeface="SimSun" pitchFamily="34" charset="0"/>
+                <a:ea typeface="SimSun" pitchFamily="34" charset="-122"/>
+                <a:cs typeface="SimSun" pitchFamily="34" charset="-120"/>
+              </a:rPr>
+              <a:t>系统采用SpringBoot+Vue前后端分离的分层架构，整体分为表现层（Vue实现用户交互）、业务逻辑层（SpringBoot处理核心业务）、数据访问层（MyBatis与MySQL交互）三层结构。各层通过接口通信，降低耦合度，满足生鲜超市多角色、全流程的管理需求。</a:t>
+            </a:r>
+            <a:endParaRPr lang="en-US" sz="950" dirty="0"/>
           </a:p>
         </p:txBody>
       </p:sp>
@@ -5562,7 +5660,7 @@
         </p:nvSpPr>
         <p:spPr>
           <a:xfrm>
-            <a:off x="548640" y="960120"/>
+            <a:off x="457200" y="914400"/>
             <a:ext cx="3657600" cy="274320"/>
           </a:xfrm>
           <a:prstGeom prst="rect">
@@ -5583,7 +5681,7 @@
             <a:r>
               <a:rPr lang="en-US" sz="1100" b="1" dirty="0">
                 <a:solidFill>
-                  <a:srgbClr val="2C3E50"/>
+                  <a:srgbClr val="145C2E"/>
                 </a:solidFill>
                 <a:latin typeface="SimHei" pitchFamily="34" charset="0"/>
                 <a:ea typeface="SimHei" pitchFamily="34" charset="-122"/>
@@ -5611,8 +5709,8 @@
         </p:blipFill>
         <p:spPr>
           <a:xfrm>
-            <a:off x="1371600" y="1234440"/>
-            <a:ext cx="6400800" cy="3566160"/>
+            <a:off x="365760" y="1234440"/>
+            <a:ext cx="5029200" cy="3108960"/>
           </a:xfrm>
           <a:prstGeom prst="rect">
             <a:avLst/>
@@ -5621,40 +5719,258 @@
       </p:pic>
       <p:sp>
         <p:nvSpPr>
-          <p:cNvPr id="9" name="Watermark"/>
-          <p:cNvSpPr txBox="1"/>
-          <p:nvPr/>
-        </p:nvSpPr>
-        <p:spPr>
-          <a:xfrm rot="0">
-            <a:off x="6836000" y="4685500"/>
-            <a:ext cx="2200000" cy="350000"/>
-          </a:xfrm>
-          <a:prstGeom prst="rect">
-            <a:avLst/>
-          </a:prstGeom>
-          <a:noFill/>
-          <a:ln>
-            <a:noFill/>
+          <p:cNvPr id="9" name="Shape 6"/>
+          <p:cNvSpPr/>
+          <p:nvPr/>
+        </p:nvSpPr>
+        <p:spPr>
+          <a:xfrm>
+            <a:off x="5577840" y="1051560"/>
+            <a:ext cx="3200400" cy="3474720"/>
+          </a:xfrm>
+          <a:prstGeom prst="roundRect">
+            <a:avLst>
+              <a:gd name="adj" fmla="val 2286"/>
+            </a:avLst>
+          </a:prstGeom>
+          <a:solidFill>
+            <a:srgbClr val="F0FFF0"/>
+          </a:solidFill>
+          <a:ln w="12700">
+            <a:solidFill>
+              <a:srgbClr val="1B7A3D"/>
+            </a:solidFill>
+            <a:prstDash val="solid"/>
           </a:ln>
         </p:spPr>
-        <p:txBody>
-          <a:bodyPr wrap="square" rtlCol="0" anchor="b" lIns="0" tIns="0" rIns="91440" bIns="45720"/>
-          <a:lstStyle/>
-          <a:p>
-            <a:pPr algn="r"/>
-            <a:r>
-              <a:rPr lang="zh-CN" sz="1600" dirty="0">
-                <a:solidFill>
-                  <a:srgbClr val="808080">
-                    <a:alpha val="19999"/>
-                  </a:srgbClr>
-                </a:solidFill>
-                <a:latin typeface="Arial"/>
-                <a:ea typeface="SimSun"/>
-              </a:rPr>
-              <a:t>TRAE AI 生成</a:t>
-            </a:r>
+      </p:sp>
+      <p:sp>
+        <p:nvSpPr>
+          <p:cNvPr id="10" name="Text 7"/>
+          <p:cNvSpPr/>
+          <p:nvPr/>
+        </p:nvSpPr>
+        <p:spPr>
+          <a:xfrm>
+            <a:off x="5715000" y="1143000"/>
+            <a:ext cx="2926080" cy="320040"/>
+          </a:xfrm>
+          <a:prstGeom prst="rect">
+            <a:avLst/>
+          </a:prstGeom>
+          <a:noFill/>
+          <a:ln/>
+        </p:spPr>
+        <p:txBody>
+          <a:bodyPr wrap="square" rtlCol="0" anchor="ctr">
+            <a:normAutofit/>
+          </a:bodyPr>
+          <a:lstStyle/>
+          <a:p>
+            <a:pPr indent="0" marL="0">
+              <a:buNone/>
+            </a:pPr>
+            <a:r>
+              <a:rPr lang="en-US" sz="1100" b="1" dirty="0">
+                <a:solidFill>
+                  <a:srgbClr val="145C2E"/>
+                </a:solidFill>
+                <a:latin typeface="SimHei" pitchFamily="34" charset="0"/>
+                <a:ea typeface="SimHei" pitchFamily="34" charset="-122"/>
+                <a:cs typeface="SimHei" pitchFamily="34" charset="-120"/>
+              </a:rPr>
+              <a:t>实体关系说明</a:t>
+            </a:r>
+            <a:endParaRPr lang="en-US" sz="1100" dirty="0"/>
+          </a:p>
+        </p:txBody>
+      </p:sp>
+      <p:sp>
+        <p:nvSpPr>
+          <p:cNvPr id="11" name="Text 8"/>
+          <p:cNvSpPr/>
+          <p:nvPr/>
+        </p:nvSpPr>
+        <p:spPr>
+          <a:xfrm>
+            <a:off x="5715000" y="1508760"/>
+            <a:ext cx="2926080" cy="2926080"/>
+          </a:xfrm>
+          <a:prstGeom prst="rect">
+            <a:avLst/>
+          </a:prstGeom>
+          <a:noFill/>
+          <a:ln/>
+        </p:spPr>
+        <p:txBody>
+          <a:bodyPr wrap="square" rtlCol="0" anchor="t">
+            <a:normAutofit/>
+          </a:bodyPr>
+          <a:lstStyle/>
+          <a:p>
+            <a:pPr indent="0" marL="0">
+              <a:lnSpc>
+                <a:spcPct val="120000"/>
+              </a:lnSpc>
+              <a:buNone/>
+            </a:pPr>
+            <a:r>
+              <a:rPr lang="en-US" sz="900" dirty="0">
+                <a:solidFill>
+                  <a:srgbClr val="2C3E50"/>
+                </a:solidFill>
+                <a:latin typeface="SimSun" pitchFamily="34" charset="0"/>
+                <a:ea typeface="SimSun" pitchFamily="34" charset="-122"/>
+                <a:cs typeface="SimSun" pitchFamily="34" charset="-120"/>
+              </a:rPr>
+              <a:t>• 管理员实体：存储管理员信息，管理优惠券、商品、公告</a:t>
+            </a:r>
+            <a:endParaRPr lang="en-US" sz="900" dirty="0"/>
+          </a:p>
+          <a:p>
+            <a:pPr indent="0" marL="0">
+              <a:lnSpc>
+                <a:spcPct val="120000"/>
+              </a:lnSpc>
+              <a:buNone/>
+            </a:pPr>
+            <a:endParaRPr lang="en-US" sz="900" dirty="0"/>
+          </a:p>
+          <a:p>
+            <a:pPr indent="0" marL="0">
+              <a:lnSpc>
+                <a:spcPct val="120000"/>
+              </a:lnSpc>
+              <a:buNone/>
+            </a:pPr>
+            <a:r>
+              <a:rPr lang="en-US" sz="900" dirty="0">
+                <a:solidFill>
+                  <a:srgbClr val="2C3E50"/>
+                </a:solidFill>
+                <a:latin typeface="SimSun" pitchFamily="34" charset="0"/>
+                <a:ea typeface="SimSun" pitchFamily="34" charset="-122"/>
+                <a:cs typeface="SimSun" pitchFamily="34" charset="-120"/>
+              </a:rPr>
+              <a:t>• 用户实体：存储用户资料，可领取优惠券、查看公告、下单购买</a:t>
+            </a:r>
+            <a:endParaRPr lang="en-US" sz="900" dirty="0"/>
+          </a:p>
+          <a:p>
+            <a:pPr indent="0" marL="0">
+              <a:lnSpc>
+                <a:spcPct val="120000"/>
+              </a:lnSpc>
+              <a:buNone/>
+            </a:pPr>
+            <a:endParaRPr lang="en-US" sz="900" dirty="0"/>
+          </a:p>
+          <a:p>
+            <a:pPr indent="0" marL="0">
+              <a:lnSpc>
+                <a:spcPct val="120000"/>
+              </a:lnSpc>
+              <a:buNone/>
+            </a:pPr>
+            <a:r>
+              <a:rPr lang="en-US" sz="900" dirty="0">
+                <a:solidFill>
+                  <a:srgbClr val="2C3E50"/>
+                </a:solidFill>
+                <a:latin typeface="SimSun" pitchFamily="34" charset="0"/>
+                <a:ea typeface="SimSun" pitchFamily="34" charset="-122"/>
+                <a:cs typeface="SimSun" pitchFamily="34" charset="-120"/>
+              </a:rPr>
+              <a:t>• 商品信息实体：存储商品详情，用户购买产生订单</a:t>
+            </a:r>
+            <a:endParaRPr lang="en-US" sz="900" dirty="0"/>
+          </a:p>
+          <a:p>
+            <a:pPr indent="0" marL="0">
+              <a:lnSpc>
+                <a:spcPct val="120000"/>
+              </a:lnSpc>
+              <a:buNone/>
+            </a:pPr>
+            <a:endParaRPr lang="en-US" sz="900" dirty="0"/>
+          </a:p>
+          <a:p>
+            <a:pPr indent="0" marL="0">
+              <a:lnSpc>
+                <a:spcPct val="120000"/>
+              </a:lnSpc>
+              <a:buNone/>
+            </a:pPr>
+            <a:r>
+              <a:rPr lang="en-US" sz="900" dirty="0">
+                <a:solidFill>
+                  <a:srgbClr val="2C3E50"/>
+                </a:solidFill>
+                <a:latin typeface="SimSun" pitchFamily="34" charset="0"/>
+                <a:ea typeface="SimSun" pitchFamily="34" charset="-122"/>
+                <a:cs typeface="SimSun" pitchFamily="34" charset="-120"/>
+              </a:rPr>
+              <a:t>• 订单实体：存储交易记录</a:t>
+            </a:r>
+            <a:endParaRPr lang="en-US" sz="900" dirty="0"/>
+          </a:p>
+          <a:p>
+            <a:pPr indent="0" marL="0">
+              <a:lnSpc>
+                <a:spcPct val="120000"/>
+              </a:lnSpc>
+              <a:buNone/>
+            </a:pPr>
+            <a:endParaRPr lang="en-US" sz="900" dirty="0"/>
+          </a:p>
+          <a:p>
+            <a:pPr indent="0" marL="0">
+              <a:lnSpc>
+                <a:spcPct val="120000"/>
+              </a:lnSpc>
+              <a:buNone/>
+            </a:pPr>
+            <a:r>
+              <a:rPr lang="en-US" sz="900" dirty="0">
+                <a:solidFill>
+                  <a:srgbClr val="2C3E50"/>
+                </a:solidFill>
+                <a:latin typeface="SimSun" pitchFamily="34" charset="0"/>
+                <a:ea typeface="SimSun" pitchFamily="34" charset="-122"/>
+                <a:cs typeface="SimSun" pitchFamily="34" charset="-120"/>
+              </a:rPr>
+              <a:t>• 优惠券实体：存储优惠信息</a:t>
+            </a:r>
+            <a:endParaRPr lang="en-US" sz="900" dirty="0"/>
+          </a:p>
+          <a:p>
+            <a:pPr indent="0" marL="0">
+              <a:lnSpc>
+                <a:spcPct val="120000"/>
+              </a:lnSpc>
+              <a:buNone/>
+            </a:pPr>
+            <a:endParaRPr lang="en-US" sz="900" dirty="0"/>
+          </a:p>
+          <a:p>
+            <a:pPr indent="0" marL="0">
+              <a:lnSpc>
+                <a:spcPct val="120000"/>
+              </a:lnSpc>
+              <a:buNone/>
+            </a:pPr>
+            <a:r>
+              <a:rPr lang="en-US" sz="900" dirty="0">
+                <a:solidFill>
+                  <a:srgbClr val="2C3E50"/>
+                </a:solidFill>
+                <a:latin typeface="SimSun" pitchFamily="34" charset="0"/>
+                <a:ea typeface="SimSun" pitchFamily="34" charset="-122"/>
+                <a:cs typeface="SimSun" pitchFamily="34" charset="-120"/>
+              </a:rPr>
+              <a:t>• 公告信息实体：存储通知内容</a:t>
+            </a:r>
+            <a:endParaRPr lang="en-US" sz="900" dirty="0"/>
           </a:p>
         </p:txBody>
       </p:sp>
@@ -6849,45 +7165,6 @@
           </a:graphicData>
         </a:graphic>
       </p:graphicFrame>
-      <p:sp>
-        <p:nvSpPr>
-          <p:cNvPr id="16" name="Watermark"/>
-          <p:cNvSpPr txBox="1"/>
-          <p:nvPr/>
-        </p:nvSpPr>
-        <p:spPr>
-          <a:xfrm rot="0">
-            <a:off x="6836000" y="4685500"/>
-            <a:ext cx="2200000" cy="350000"/>
-          </a:xfrm>
-          <a:prstGeom prst="rect">
-            <a:avLst/>
-          </a:prstGeom>
-          <a:noFill/>
-          <a:ln>
-            <a:noFill/>
-          </a:ln>
-        </p:spPr>
-        <p:txBody>
-          <a:bodyPr wrap="square" rtlCol="0" anchor="b" lIns="0" tIns="0" rIns="91440" bIns="45720"/>
-          <a:lstStyle/>
-          <a:p>
-            <a:pPr algn="r"/>
-            <a:r>
-              <a:rPr lang="zh-CN" sz="1600" dirty="0">
-                <a:solidFill>
-                  <a:srgbClr val="808080">
-                    <a:alpha val="19999"/>
-                  </a:srgbClr>
-                </a:solidFill>
-                <a:latin typeface="Arial"/>
-                <a:ea typeface="SimSun"/>
-              </a:rPr>
-              <a:t>TRAE AI 生成</a:t>
-            </a:r>
-          </a:p>
-        </p:txBody>
-      </p:sp>
     </p:spTree>
   </p:cSld>
   <p:clrMapOvr>
@@ -7091,7 +7368,7 @@
         </p:nvSpPr>
         <p:spPr>
           <a:xfrm>
-            <a:off x="548640" y="960120"/>
+            <a:off x="457200" y="914400"/>
             <a:ext cx="4572000" cy="274320"/>
           </a:xfrm>
           <a:prstGeom prst="rect">
@@ -7112,7 +7389,7 @@
             <a:r>
               <a:rPr lang="en-US" sz="1100" b="1" dirty="0">
                 <a:solidFill>
-                  <a:srgbClr val="2C3E50"/>
+                  <a:srgbClr val="145C2E"/>
                 </a:solidFill>
                 <a:latin typeface="SimHei" pitchFamily="34" charset="0"/>
                 <a:ea typeface="SimHei" pitchFamily="34" charset="-122"/>
@@ -7140,8 +7417,8 @@
         </p:blipFill>
         <p:spPr>
           <a:xfrm>
-            <a:off x="1097280" y="1234440"/>
-            <a:ext cx="6949440" cy="3566160"/>
+            <a:off x="365760" y="1234440"/>
+            <a:ext cx="5303520" cy="3291840"/>
           </a:xfrm>
           <a:prstGeom prst="rect">
             <a:avLst/>
@@ -7150,40 +7427,411 @@
       </p:pic>
       <p:sp>
         <p:nvSpPr>
-          <p:cNvPr id="9" name="Watermark"/>
-          <p:cNvSpPr txBox="1"/>
-          <p:nvPr/>
-        </p:nvSpPr>
-        <p:spPr>
-          <a:xfrm rot="0">
-            <a:off x="6836000" y="4685500"/>
-            <a:ext cx="2200000" cy="350000"/>
-          </a:xfrm>
-          <a:prstGeom prst="rect">
-            <a:avLst/>
-          </a:prstGeom>
-          <a:noFill/>
-          <a:ln>
-            <a:noFill/>
+          <p:cNvPr id="9" name="Shape 6"/>
+          <p:cNvSpPr/>
+          <p:nvPr/>
+        </p:nvSpPr>
+        <p:spPr>
+          <a:xfrm>
+            <a:off x="5852160" y="1051560"/>
+            <a:ext cx="2926080" cy="3474720"/>
+          </a:xfrm>
+          <a:prstGeom prst="roundRect">
+            <a:avLst>
+              <a:gd name="adj" fmla="val 2500"/>
+            </a:avLst>
+          </a:prstGeom>
+          <a:solidFill>
+            <a:srgbClr val="F0FFF0"/>
+          </a:solidFill>
+          <a:ln w="12700">
+            <a:solidFill>
+              <a:srgbClr val="1B7A3D"/>
+            </a:solidFill>
+            <a:prstDash val="solid"/>
           </a:ln>
         </p:spPr>
-        <p:txBody>
-          <a:bodyPr wrap="square" rtlCol="0" anchor="b" lIns="0" tIns="0" rIns="91440" bIns="45720"/>
-          <a:lstStyle/>
-          <a:p>
-            <a:pPr algn="r"/>
-            <a:r>
-              <a:rPr lang="zh-CN" sz="1600" dirty="0">
-                <a:solidFill>
-                  <a:srgbClr val="808080">
-                    <a:alpha val="19999"/>
-                  </a:srgbClr>
-                </a:solidFill>
-                <a:latin typeface="Arial"/>
-                <a:ea typeface="SimSun"/>
-              </a:rPr>
-              <a:t>TRAE AI 生成</a:t>
-            </a:r>
+      </p:sp>
+      <p:sp>
+        <p:nvSpPr>
+          <p:cNvPr id="10" name="Text 7"/>
+          <p:cNvSpPr/>
+          <p:nvPr/>
+        </p:nvSpPr>
+        <p:spPr>
+          <a:xfrm>
+            <a:off x="5989320" y="1143000"/>
+            <a:ext cx="2651760" cy="320040"/>
+          </a:xfrm>
+          <a:prstGeom prst="rect">
+            <a:avLst/>
+          </a:prstGeom>
+          <a:noFill/>
+          <a:ln/>
+        </p:spPr>
+        <p:txBody>
+          <a:bodyPr wrap="square" rtlCol="0" anchor="ctr">
+            <a:normAutofit/>
+          </a:bodyPr>
+          <a:lstStyle/>
+          <a:p>
+            <a:pPr indent="0" marL="0">
+              <a:buNone/>
+            </a:pPr>
+            <a:r>
+              <a:rPr lang="en-US" sz="1100" b="1" dirty="0">
+                <a:solidFill>
+                  <a:srgbClr val="145C2E"/>
+                </a:solidFill>
+                <a:latin typeface="SimHei" pitchFamily="34" charset="0"/>
+                <a:ea typeface="SimHei" pitchFamily="34" charset="-122"/>
+                <a:cs typeface="SimHei" pitchFamily="34" charset="-120"/>
+              </a:rPr>
+              <a:t>类图结构说明</a:t>
+            </a:r>
+            <a:endParaRPr lang="en-US" sz="1100" dirty="0"/>
+          </a:p>
+        </p:txBody>
+      </p:sp>
+      <p:sp>
+        <p:nvSpPr>
+          <p:cNvPr id="11" name="Text 8"/>
+          <p:cNvSpPr/>
+          <p:nvPr/>
+        </p:nvSpPr>
+        <p:spPr>
+          <a:xfrm>
+            <a:off x="5989320" y="1508760"/>
+            <a:ext cx="2651760" cy="2926080"/>
+          </a:xfrm>
+          <a:prstGeom prst="rect">
+            <a:avLst/>
+          </a:prstGeom>
+          <a:noFill/>
+          <a:ln/>
+        </p:spPr>
+        <p:txBody>
+          <a:bodyPr wrap="square" rtlCol="0" anchor="t">
+            <a:normAutofit/>
+          </a:bodyPr>
+          <a:lstStyle/>
+          <a:p>
+            <a:pPr indent="0" marL="0">
+              <a:lnSpc>
+                <a:spcPct val="115000"/>
+              </a:lnSpc>
+              <a:buNone/>
+            </a:pPr>
+            <a:r>
+              <a:rPr lang="en-US" sz="900" dirty="0">
+                <a:solidFill>
+                  <a:srgbClr val="2C3E50"/>
+                </a:solidFill>
+                <a:latin typeface="SimSun" pitchFamily="34" charset="0"/>
+                <a:ea typeface="SimSun" pitchFamily="34" charset="-122"/>
+                <a:cs typeface="SimSun" pitchFamily="34" charset="-120"/>
+              </a:rPr>
+              <a:t>参与者类：</a:t>
+            </a:r>
+            <a:endParaRPr lang="en-US" sz="900" dirty="0"/>
+          </a:p>
+          <a:p>
+            <a:pPr indent="0" marL="0">
+              <a:lnSpc>
+                <a:spcPct val="115000"/>
+              </a:lnSpc>
+              <a:buNone/>
+            </a:pPr>
+            <a:r>
+              <a:rPr lang="en-US" sz="900" dirty="0">
+                <a:solidFill>
+                  <a:srgbClr val="2C3E50"/>
+                </a:solidFill>
+                <a:latin typeface="SimSun" pitchFamily="34" charset="0"/>
+                <a:ea typeface="SimSun" pitchFamily="34" charset="-122"/>
+                <a:cs typeface="SimSun" pitchFamily="34" charset="-120"/>
+              </a:rPr>
+              <a:t>• 普通用户：userId, userName, phone, address</a:t>
+            </a:r>
+            <a:endParaRPr lang="en-US" sz="900" dirty="0"/>
+          </a:p>
+          <a:p>
+            <a:pPr indent="0" marL="0">
+              <a:lnSpc>
+                <a:spcPct val="115000"/>
+              </a:lnSpc>
+              <a:buNone/>
+            </a:pPr>
+            <a:r>
+              <a:rPr lang="en-US" sz="900" dirty="0">
+                <a:solidFill>
+                  <a:srgbClr val="2C3E50"/>
+                </a:solidFill>
+                <a:latin typeface="SimSun" pitchFamily="34" charset="0"/>
+                <a:ea typeface="SimSun" pitchFamily="34" charset="-122"/>
+                <a:cs typeface="SimSun" pitchFamily="34" charset="-120"/>
+              </a:rPr>
+              <a:t>• 系统管理员：adminId, adminName, role</a:t>
+            </a:r>
+            <a:endParaRPr lang="en-US" sz="900" dirty="0"/>
+          </a:p>
+          <a:p>
+            <a:pPr indent="0" marL="0">
+              <a:lnSpc>
+                <a:spcPct val="115000"/>
+              </a:lnSpc>
+              <a:buNone/>
+            </a:pPr>
+            <a:endParaRPr lang="en-US" sz="900" dirty="0"/>
+          </a:p>
+          <a:p>
+            <a:pPr indent="0" marL="0">
+              <a:lnSpc>
+                <a:spcPct val="115000"/>
+              </a:lnSpc>
+              <a:buNone/>
+            </a:pPr>
+            <a:r>
+              <a:rPr lang="en-US" sz="900" dirty="0">
+                <a:solidFill>
+                  <a:srgbClr val="2C3E50"/>
+                </a:solidFill>
+                <a:latin typeface="SimSun" pitchFamily="34" charset="0"/>
+                <a:ea typeface="SimSun" pitchFamily="34" charset="-122"/>
+                <a:cs typeface="SimSun" pitchFamily="34" charset="-120"/>
+              </a:rPr>
+              <a:t>控制层：</a:t>
+            </a:r>
+            <a:endParaRPr lang="en-US" sz="900" dirty="0"/>
+          </a:p>
+          <a:p>
+            <a:pPr indent="0" marL="0">
+              <a:lnSpc>
+                <a:spcPct val="115000"/>
+              </a:lnSpc>
+              <a:buNone/>
+            </a:pPr>
+            <a:r>
+              <a:rPr lang="en-US" sz="900" dirty="0">
+                <a:solidFill>
+                  <a:srgbClr val="2C3E50"/>
+                </a:solidFill>
+                <a:latin typeface="SimSun" pitchFamily="34" charset="0"/>
+                <a:ea typeface="SimSun" pitchFamily="34" charset="-122"/>
+                <a:cs typeface="SimSun" pitchFamily="34" charset="-120"/>
+              </a:rPr>
+              <a:t>• 用户权限管理</a:t>
+            </a:r>
+            <a:endParaRPr lang="en-US" sz="900" dirty="0"/>
+          </a:p>
+          <a:p>
+            <a:pPr indent="0" marL="0">
+              <a:lnSpc>
+                <a:spcPct val="115000"/>
+              </a:lnSpc>
+              <a:buNone/>
+            </a:pPr>
+            <a:r>
+              <a:rPr lang="en-US" sz="900" dirty="0">
+                <a:solidFill>
+                  <a:srgbClr val="2C3E50"/>
+                </a:solidFill>
+                <a:latin typeface="SimSun" pitchFamily="34" charset="0"/>
+                <a:ea typeface="SimSun" pitchFamily="34" charset="-122"/>
+                <a:cs typeface="SimSun" pitchFamily="34" charset="-120"/>
+              </a:rPr>
+              <a:t>• 订单交易管理</a:t>
+            </a:r>
+            <a:endParaRPr lang="en-US" sz="900" dirty="0"/>
+          </a:p>
+          <a:p>
+            <a:pPr indent="0" marL="0">
+              <a:lnSpc>
+                <a:spcPct val="115000"/>
+              </a:lnSpc>
+              <a:buNone/>
+            </a:pPr>
+            <a:r>
+              <a:rPr lang="en-US" sz="900" dirty="0">
+                <a:solidFill>
+                  <a:srgbClr val="2C3E50"/>
+                </a:solidFill>
+                <a:latin typeface="SimSun" pitchFamily="34" charset="0"/>
+                <a:ea typeface="SimSun" pitchFamily="34" charset="-122"/>
+                <a:cs typeface="SimSun" pitchFamily="34" charset="-120"/>
+              </a:rPr>
+              <a:t>• 商品库存管理</a:t>
+            </a:r>
+            <a:endParaRPr lang="en-US" sz="900" dirty="0"/>
+          </a:p>
+          <a:p>
+            <a:pPr indent="0" marL="0">
+              <a:lnSpc>
+                <a:spcPct val="115000"/>
+              </a:lnSpc>
+              <a:buNone/>
+            </a:pPr>
+            <a:r>
+              <a:rPr lang="en-US" sz="900" dirty="0">
+                <a:solidFill>
+                  <a:srgbClr val="2C3E50"/>
+                </a:solidFill>
+                <a:latin typeface="SimSun" pitchFamily="34" charset="0"/>
+                <a:ea typeface="SimSun" pitchFamily="34" charset="-122"/>
+                <a:cs typeface="SimSun" pitchFamily="34" charset="-120"/>
+              </a:rPr>
+              <a:t>• 系统数据管理</a:t>
+            </a:r>
+            <a:endParaRPr lang="en-US" sz="900" dirty="0"/>
+          </a:p>
+          <a:p>
+            <a:pPr indent="0" marL="0">
+              <a:lnSpc>
+                <a:spcPct val="115000"/>
+              </a:lnSpc>
+              <a:buNone/>
+            </a:pPr>
+            <a:r>
+              <a:rPr lang="en-US" sz="900" dirty="0">
+                <a:solidFill>
+                  <a:srgbClr val="2C3E50"/>
+                </a:solidFill>
+                <a:latin typeface="SimSun" pitchFamily="34" charset="0"/>
+                <a:ea typeface="SimSun" pitchFamily="34" charset="-122"/>
+                <a:cs typeface="SimSun" pitchFamily="34" charset="-120"/>
+              </a:rPr>
+              <a:t>• 营销公告管理</a:t>
+            </a:r>
+            <a:endParaRPr lang="en-US" sz="900" dirty="0"/>
+          </a:p>
+          <a:p>
+            <a:pPr indent="0" marL="0">
+              <a:lnSpc>
+                <a:spcPct val="115000"/>
+              </a:lnSpc>
+              <a:buNone/>
+            </a:pPr>
+            <a:endParaRPr lang="en-US" sz="900" dirty="0"/>
+          </a:p>
+          <a:p>
+            <a:pPr indent="0" marL="0">
+              <a:lnSpc>
+                <a:spcPct val="115000"/>
+              </a:lnSpc>
+              <a:buNone/>
+            </a:pPr>
+            <a:r>
+              <a:rPr lang="en-US" sz="900" dirty="0">
+                <a:solidFill>
+                  <a:srgbClr val="2C3E50"/>
+                </a:solidFill>
+                <a:latin typeface="SimSun" pitchFamily="34" charset="0"/>
+                <a:ea typeface="SimSun" pitchFamily="34" charset="-122"/>
+                <a:cs typeface="SimSun" pitchFamily="34" charset="-120"/>
+              </a:rPr>
+              <a:t>实体层：</a:t>
+            </a:r>
+            <a:endParaRPr lang="en-US" sz="900" dirty="0"/>
+          </a:p>
+          <a:p>
+            <a:pPr indent="0" marL="0">
+              <a:lnSpc>
+                <a:spcPct val="115000"/>
+              </a:lnSpc>
+              <a:buNone/>
+            </a:pPr>
+            <a:r>
+              <a:rPr lang="en-US" sz="900" dirty="0">
+                <a:solidFill>
+                  <a:srgbClr val="2C3E50"/>
+                </a:solidFill>
+                <a:latin typeface="SimSun" pitchFamily="34" charset="0"/>
+                <a:ea typeface="SimSun" pitchFamily="34" charset="-122"/>
+                <a:cs typeface="SimSun" pitchFamily="34" charset="-120"/>
+              </a:rPr>
+              <a:t>• 用户信息表</a:t>
+            </a:r>
+            <a:endParaRPr lang="en-US" sz="900" dirty="0"/>
+          </a:p>
+          <a:p>
+            <a:pPr indent="0" marL="0">
+              <a:lnSpc>
+                <a:spcPct val="115000"/>
+              </a:lnSpc>
+              <a:buNone/>
+            </a:pPr>
+            <a:r>
+              <a:rPr lang="en-US" sz="900" dirty="0">
+                <a:solidFill>
+                  <a:srgbClr val="2C3E50"/>
+                </a:solidFill>
+                <a:latin typeface="SimSun" pitchFamily="34" charset="0"/>
+                <a:ea typeface="SimSun" pitchFamily="34" charset="-122"/>
+                <a:cs typeface="SimSun" pitchFamily="34" charset="-120"/>
+              </a:rPr>
+              <a:t>• 订单信息表</a:t>
+            </a:r>
+            <a:endParaRPr lang="en-US" sz="900" dirty="0"/>
+          </a:p>
+          <a:p>
+            <a:pPr indent="0" marL="0">
+              <a:lnSpc>
+                <a:spcPct val="115000"/>
+              </a:lnSpc>
+              <a:buNone/>
+            </a:pPr>
+            <a:r>
+              <a:rPr lang="en-US" sz="900" dirty="0">
+                <a:solidFill>
+                  <a:srgbClr val="2C3E50"/>
+                </a:solidFill>
+                <a:latin typeface="SimSun" pitchFamily="34" charset="0"/>
+                <a:ea typeface="SimSun" pitchFamily="34" charset="-122"/>
+                <a:cs typeface="SimSun" pitchFamily="34" charset="-120"/>
+              </a:rPr>
+              <a:t>• 商品信息表</a:t>
+            </a:r>
+            <a:endParaRPr lang="en-US" sz="900" dirty="0"/>
+          </a:p>
+          <a:p>
+            <a:pPr indent="0" marL="0">
+              <a:lnSpc>
+                <a:spcPct val="115000"/>
+              </a:lnSpc>
+              <a:buNone/>
+            </a:pPr>
+            <a:r>
+              <a:rPr lang="en-US" sz="900" dirty="0">
+                <a:solidFill>
+                  <a:srgbClr val="2C3E50"/>
+                </a:solidFill>
+                <a:latin typeface="SimSun" pitchFamily="34" charset="0"/>
+                <a:ea typeface="SimSun" pitchFamily="34" charset="-122"/>
+                <a:cs typeface="SimSun" pitchFamily="34" charset="-120"/>
+              </a:rPr>
+              <a:t>• 公告信息表</a:t>
+            </a:r>
+            <a:endParaRPr lang="en-US" sz="900" dirty="0"/>
+          </a:p>
+          <a:p>
+            <a:pPr indent="0" marL="0">
+              <a:lnSpc>
+                <a:spcPct val="115000"/>
+              </a:lnSpc>
+              <a:buNone/>
+            </a:pPr>
+            <a:r>
+              <a:rPr lang="en-US" sz="900" dirty="0">
+                <a:solidFill>
+                  <a:srgbClr val="2C3E50"/>
+                </a:solidFill>
+                <a:latin typeface="SimSun" pitchFamily="34" charset="0"/>
+                <a:ea typeface="SimSun" pitchFamily="34" charset="-122"/>
+                <a:cs typeface="SimSun" pitchFamily="34" charset="-120"/>
+              </a:rPr>
+              <a:t>• 优惠信息表</a:t>
+            </a:r>
+            <a:endParaRPr lang="en-US" sz="900" dirty="0"/>
           </a:p>
         </p:txBody>
       </p:sp>
@@ -7390,8 +8038,8 @@
         </p:nvSpPr>
         <p:spPr>
           <a:xfrm>
-            <a:off x="274320" y="914400"/>
-            <a:ext cx="2011680" cy="274320"/>
+            <a:off x="182880" y="914400"/>
+            <a:ext cx="2011680" cy="228600"/>
           </a:xfrm>
           <a:prstGeom prst="rect">
             <a:avLst/>
@@ -7409,9 +8057,9 @@
               <a:buNone/>
             </a:pPr>
             <a:r>
-              <a:rPr lang="en-US" sz="1000" b="1" dirty="0">
-                <a:solidFill>
-                  <a:srgbClr val="2C3E50"/>
+              <a:rPr lang="en-US" sz="900" b="1" dirty="0">
+                <a:solidFill>
+                  <a:srgbClr val="145C2E"/>
                 </a:solidFill>
                 <a:latin typeface="SimHei" pitchFamily="34" charset="0"/>
                 <a:ea typeface="SimHei" pitchFamily="34" charset="-122"/>
@@ -7419,7 +8067,7 @@
               </a:rPr>
               <a:t>权限管理时序图</a:t>
             </a:r>
-            <a:endParaRPr lang="en-US" sz="1000" dirty="0"/>
+            <a:endParaRPr lang="en-US" sz="900" dirty="0"/>
           </a:p>
         </p:txBody>
       </p:sp>
@@ -7439,8 +8087,8 @@
         </p:blipFill>
         <p:spPr>
           <a:xfrm>
-            <a:off x="182880" y="1188720"/>
-            <a:ext cx="2834640" cy="3383280"/>
+            <a:off x="137160" y="1143000"/>
+            <a:ext cx="2651760" cy="2194560"/>
           </a:xfrm>
           <a:prstGeom prst="rect">
             <a:avLst/>
@@ -7455,8 +8103,52 @@
         </p:nvSpPr>
         <p:spPr>
           <a:xfrm>
-            <a:off x="3200400" y="914400"/>
-            <a:ext cx="2286000" cy="274320"/>
+            <a:off x="137160" y="3383280"/>
+            <a:ext cx="2651760" cy="640080"/>
+          </a:xfrm>
+          <a:prstGeom prst="rect">
+            <a:avLst/>
+          </a:prstGeom>
+          <a:noFill/>
+          <a:ln/>
+        </p:spPr>
+        <p:txBody>
+          <a:bodyPr wrap="square" rtlCol="0" anchor="t">
+            <a:normAutofit/>
+          </a:bodyPr>
+          <a:lstStyle/>
+          <a:p>
+            <a:pPr indent="0" marL="0">
+              <a:lnSpc>
+                <a:spcPct val="120000"/>
+              </a:lnSpc>
+              <a:buNone/>
+            </a:pPr>
+            <a:r>
+              <a:rPr lang="en-US" sz="800" dirty="0">
+                <a:solidFill>
+                  <a:srgbClr val="2C3E50"/>
+                </a:solidFill>
+                <a:latin typeface="SimSun" pitchFamily="34" charset="0"/>
+                <a:ea typeface="SimSun" pitchFamily="34" charset="-122"/>
+                <a:cs typeface="SimSun" pitchFamily="34" charset="-120"/>
+              </a:rPr>
+              <a:t>采用Sa-Token框架实现统一登录认证，通过角色字段区分管理员与普通用户权限。</a:t>
+            </a:r>
+            <a:endParaRPr lang="en-US" sz="800" dirty="0"/>
+          </a:p>
+        </p:txBody>
+      </p:sp>
+      <p:sp>
+        <p:nvSpPr>
+          <p:cNvPr id="10" name="Text 7"/>
+          <p:cNvSpPr/>
+          <p:nvPr/>
+        </p:nvSpPr>
+        <p:spPr>
+          <a:xfrm>
+            <a:off x="3063240" y="914400"/>
+            <a:ext cx="2286000" cy="228600"/>
           </a:xfrm>
           <a:prstGeom prst="rect">
             <a:avLst/>
@@ -7474,9 +8166,9 @@
               <a:buNone/>
             </a:pPr>
             <a:r>
-              <a:rPr lang="en-US" sz="1000" b="1" dirty="0">
-                <a:solidFill>
-                  <a:srgbClr val="2C3E50"/>
+              <a:rPr lang="en-US" sz="900" b="1" dirty="0">
+                <a:solidFill>
+                  <a:srgbClr val="145C2E"/>
                 </a:solidFill>
                 <a:latin typeface="SimHei" pitchFamily="34" charset="0"/>
                 <a:ea typeface="SimHei" pitchFamily="34" charset="-122"/>
@@ -7484,13 +8176,13 @@
               </a:rPr>
               <a:t>订单交易支付时序图</a:t>
             </a:r>
-            <a:endParaRPr lang="en-US" sz="1000" dirty="0"/>
+            <a:endParaRPr lang="en-US" sz="900" dirty="0"/>
           </a:p>
         </p:txBody>
       </p:sp>
       <p:pic>
         <p:nvPicPr>
-          <p:cNvPr id="10" name="Image 1" descr="/workspace/assets/fig4_13_order_sequence.png">    </p:cNvPr>
+          <p:cNvPr id="11" name="Image 1" descr="/workspace/assets/fig4_13_order_sequence.png">    </p:cNvPr>
           <p:cNvPicPr>
             <a:picLocks noChangeAspect="1"/>
           </p:cNvPicPr>
@@ -7504,8 +8196,8 @@
         </p:blipFill>
         <p:spPr>
           <a:xfrm>
-            <a:off x="3108960" y="1188720"/>
-            <a:ext cx="2926080" cy="3383280"/>
+            <a:off x="3017520" y="1143000"/>
+            <a:ext cx="2743200" cy="2194560"/>
           </a:xfrm>
           <a:prstGeom prst="rect">
             <a:avLst/>
@@ -7514,14 +8206,58 @@
       </p:pic>
       <p:sp>
         <p:nvSpPr>
-          <p:cNvPr id="11" name="Text 7"/>
-          <p:cNvSpPr/>
-          <p:nvPr/>
-        </p:nvSpPr>
-        <p:spPr>
-          <a:xfrm>
-            <a:off x="6217920" y="914400"/>
-            <a:ext cx="2011680" cy="274320"/>
+          <p:cNvPr id="12" name="Text 8"/>
+          <p:cNvSpPr/>
+          <p:nvPr/>
+        </p:nvSpPr>
+        <p:spPr>
+          <a:xfrm>
+            <a:off x="3017520" y="3383280"/>
+            <a:ext cx="2743200" cy="640080"/>
+          </a:xfrm>
+          <a:prstGeom prst="rect">
+            <a:avLst/>
+          </a:prstGeom>
+          <a:noFill/>
+          <a:ln/>
+        </p:spPr>
+        <p:txBody>
+          <a:bodyPr wrap="square" rtlCol="0" anchor="t">
+            <a:normAutofit/>
+          </a:bodyPr>
+          <a:lstStyle/>
+          <a:p>
+            <a:pPr indent="0" marL="0">
+              <a:lnSpc>
+                <a:spcPct val="120000"/>
+              </a:lnSpc>
+              <a:buNone/>
+            </a:pPr>
+            <a:r>
+              <a:rPr lang="en-US" sz="800" dirty="0">
+                <a:solidFill>
+                  <a:srgbClr val="2C3E50"/>
+                </a:solidFill>
+                <a:latin typeface="SimSun" pitchFamily="34" charset="0"/>
+                <a:ea typeface="SimSun" pitchFamily="34" charset="-122"/>
+                <a:cs typeface="SimSun" pitchFamily="34" charset="-120"/>
+              </a:rPr>
+              <a:t>订单创建时联动库存扣减、优惠券核销与积分累积，支持退款换货审核工作流。</a:t>
+            </a:r>
+            <a:endParaRPr lang="en-US" sz="800" dirty="0"/>
+          </a:p>
+        </p:txBody>
+      </p:sp>
+      <p:sp>
+        <p:nvSpPr>
+          <p:cNvPr id="13" name="Text 9"/>
+          <p:cNvSpPr/>
+          <p:nvPr/>
+        </p:nvSpPr>
+        <p:spPr>
+          <a:xfrm>
+            <a:off x="6080760" y="914400"/>
+            <a:ext cx="2011680" cy="228600"/>
           </a:xfrm>
           <a:prstGeom prst="rect">
             <a:avLst/>
@@ -7539,9 +8275,9 @@
               <a:buNone/>
             </a:pPr>
             <a:r>
-              <a:rPr lang="en-US" sz="1000" b="1" dirty="0">
-                <a:solidFill>
-                  <a:srgbClr val="2C3E50"/>
+              <a:rPr lang="en-US" sz="900" b="1" dirty="0">
+                <a:solidFill>
+                  <a:srgbClr val="145C2E"/>
                 </a:solidFill>
                 <a:latin typeface="SimHei" pitchFamily="34" charset="0"/>
                 <a:ea typeface="SimHei" pitchFamily="34" charset="-122"/>
@@ -7549,13 +8285,13 @@
               </a:rPr>
               <a:t>商品管理时序图</a:t>
             </a:r>
-            <a:endParaRPr lang="en-US" sz="1000" dirty="0"/>
+            <a:endParaRPr lang="en-US" sz="900" dirty="0"/>
           </a:p>
         </p:txBody>
       </p:sp>
       <p:pic>
         <p:nvPicPr>
-          <p:cNvPr id="12" name="Image 2" descr="/workspace/assets/fig4_14_product_sequence.png">    </p:cNvPr>
+          <p:cNvPr id="14" name="Image 2" descr="/workspace/assets/fig4_14_product_sequence.png">    </p:cNvPr>
           <p:cNvPicPr>
             <a:picLocks noChangeAspect="1"/>
           </p:cNvPicPr>
@@ -7569,8 +8305,8 @@
         </p:blipFill>
         <p:spPr>
           <a:xfrm>
-            <a:off x="6126480" y="1188720"/>
-            <a:ext cx="2834640" cy="3383280"/>
+            <a:off x="6035040" y="1143000"/>
+            <a:ext cx="2743200" cy="2194560"/>
           </a:xfrm>
           <a:prstGeom prst="rect">
             <a:avLst/>
@@ -7579,40 +8315,113 @@
       </p:pic>
       <p:sp>
         <p:nvSpPr>
-          <p:cNvPr id="13" name="Watermark"/>
-          <p:cNvSpPr txBox="1"/>
-          <p:nvPr/>
-        </p:nvSpPr>
-        <p:spPr>
-          <a:xfrm rot="0">
-            <a:off x="6836000" y="4685500"/>
-            <a:ext cx="2200000" cy="350000"/>
-          </a:xfrm>
-          <a:prstGeom prst="rect">
-            <a:avLst/>
-          </a:prstGeom>
-          <a:noFill/>
-          <a:ln>
-            <a:noFill/>
+          <p:cNvPr id="15" name="Text 10"/>
+          <p:cNvSpPr/>
+          <p:nvPr/>
+        </p:nvSpPr>
+        <p:spPr>
+          <a:xfrm>
+            <a:off x="6035040" y="3383280"/>
+            <a:ext cx="2743200" cy="640080"/>
+          </a:xfrm>
+          <a:prstGeom prst="rect">
+            <a:avLst/>
+          </a:prstGeom>
+          <a:noFill/>
+          <a:ln/>
+        </p:spPr>
+        <p:txBody>
+          <a:bodyPr wrap="square" rtlCol="0" anchor="t">
+            <a:normAutofit/>
+          </a:bodyPr>
+          <a:lstStyle/>
+          <a:p>
+            <a:pPr indent="0" marL="0">
+              <a:lnSpc>
+                <a:spcPct val="120000"/>
+              </a:lnSpc>
+              <a:buNone/>
+            </a:pPr>
+            <a:r>
+              <a:rPr lang="en-US" sz="800" dirty="0">
+                <a:solidFill>
+                  <a:srgbClr val="2C3E50"/>
+                </a:solidFill>
+                <a:latin typeface="SimSun" pitchFamily="34" charset="0"/>
+                <a:ea typeface="SimSun" pitchFamily="34" charset="-122"/>
+                <a:cs typeface="SimSun" pitchFamily="34" charset="-120"/>
+              </a:rPr>
+              <a:t>采用主表+明细双层架构，实时监控库存，支持库存预警阈值配置与出入库流水记录。</a:t>
+            </a:r>
+            <a:endParaRPr lang="en-US" sz="800" dirty="0"/>
+          </a:p>
+        </p:txBody>
+      </p:sp>
+      <p:sp>
+        <p:nvSpPr>
+          <p:cNvPr id="16" name="Shape 11"/>
+          <p:cNvSpPr/>
+          <p:nvPr/>
+        </p:nvSpPr>
+        <p:spPr>
+          <a:xfrm>
+            <a:off x="457200" y="4114800"/>
+            <a:ext cx="8229600" cy="502920"/>
+          </a:xfrm>
+          <a:prstGeom prst="roundRect">
+            <a:avLst>
+              <a:gd name="adj" fmla="val 10909"/>
+            </a:avLst>
+          </a:prstGeom>
+          <a:solidFill>
+            <a:srgbClr val="FFF8F0"/>
+          </a:solidFill>
+          <a:ln w="12700">
+            <a:solidFill>
+              <a:srgbClr val="FF8C00"/>
+            </a:solidFill>
+            <a:prstDash val="solid"/>
           </a:ln>
         </p:spPr>
-        <p:txBody>
-          <a:bodyPr wrap="square" rtlCol="0" anchor="b" lIns="0" tIns="0" rIns="91440" bIns="45720"/>
-          <a:lstStyle/>
-          <a:p>
-            <a:pPr algn="r"/>
-            <a:r>
-              <a:rPr lang="zh-CN" sz="1600" dirty="0">
-                <a:solidFill>
-                  <a:srgbClr val="808080">
-                    <a:alpha val="19999"/>
-                  </a:srgbClr>
-                </a:solidFill>
-                <a:latin typeface="Arial"/>
-                <a:ea typeface="SimSun"/>
-              </a:rPr>
-              <a:t>TRAE AI 生成</a:t>
-            </a:r>
+      </p:sp>
+      <p:sp>
+        <p:nvSpPr>
+          <p:cNvPr id="17" name="Text 12"/>
+          <p:cNvSpPr/>
+          <p:nvPr/>
+        </p:nvSpPr>
+        <p:spPr>
+          <a:xfrm>
+            <a:off x="594360" y="4160520"/>
+            <a:ext cx="7955280" cy="411480"/>
+          </a:xfrm>
+          <a:prstGeom prst="rect">
+            <a:avLst/>
+          </a:prstGeom>
+          <a:noFill/>
+          <a:ln/>
+        </p:spPr>
+        <p:txBody>
+          <a:bodyPr wrap="square" rtlCol="0" anchor="ctr">
+            <a:normAutofit/>
+          </a:bodyPr>
+          <a:lstStyle/>
+          <a:p>
+            <a:pPr indent="0" marL="0">
+              <a:buNone/>
+            </a:pPr>
+            <a:r>
+              <a:rPr lang="en-US" sz="950" dirty="0">
+                <a:solidFill>
+                  <a:srgbClr val="2C3E50"/>
+                </a:solidFill>
+                <a:latin typeface="SimHei" pitchFamily="34" charset="0"/>
+                <a:ea typeface="SimHei" pitchFamily="34" charset="-122"/>
+                <a:cs typeface="SimHei" pitchFamily="34" charset="-120"/>
+              </a:rPr>
+              <a:t>时序图清晰展示了系统各模块间的交互流程，为后续代码实现提供了面向对象的设计依据。</a:t>
+            </a:r>
+            <a:endParaRPr lang="en-US" sz="950" dirty="0"/>
           </a:p>
         </p:txBody>
       </p:sp>
@@ -7819,7 +8628,7 @@
         </p:nvSpPr>
         <p:spPr>
           <a:xfrm>
-            <a:off x="548640" y="914400"/>
+            <a:off x="457200" y="914400"/>
             <a:ext cx="2743200" cy="274320"/>
           </a:xfrm>
           <a:prstGeom prst="rect">
@@ -7840,7 +8649,7 @@
             <a:r>
               <a:rPr lang="en-US" sz="1000" b="1" dirty="0">
                 <a:solidFill>
-                  <a:srgbClr val="2C3E50"/>
+                  <a:srgbClr val="145C2E"/>
                 </a:solidFill>
                 <a:latin typeface="SimHei" pitchFamily="34" charset="0"/>
                 <a:ea typeface="SimHei" pitchFamily="34" charset="-122"/>
@@ -7868,8 +8677,8 @@
         </p:blipFill>
         <p:spPr>
           <a:xfrm>
-            <a:off x="457200" y="1188720"/>
-            <a:ext cx="3931920" cy="3200400"/>
+            <a:off x="365760" y="1234440"/>
+            <a:ext cx="3840480" cy="2194560"/>
           </a:xfrm>
           <a:prstGeom prst="rect">
             <a:avLst/>
@@ -7878,13 +8687,84 @@
       </p:pic>
       <p:sp>
         <p:nvSpPr>
-          <p:cNvPr id="9" name="Text 6"/>
-          <p:cNvSpPr/>
-          <p:nvPr/>
-        </p:nvSpPr>
-        <p:spPr>
-          <a:xfrm>
-            <a:off x="4754880" y="914400"/>
+          <p:cNvPr id="9" name="Shape 6"/>
+          <p:cNvSpPr/>
+          <p:nvPr/>
+        </p:nvSpPr>
+        <p:spPr>
+          <a:xfrm>
+            <a:off x="365760" y="3520440"/>
+            <a:ext cx="3840480" cy="1005840"/>
+          </a:xfrm>
+          <a:prstGeom prst="roundRect">
+            <a:avLst>
+              <a:gd name="adj" fmla="val 5455"/>
+            </a:avLst>
+          </a:prstGeom>
+          <a:solidFill>
+            <a:srgbClr val="F0FFF0"/>
+          </a:solidFill>
+          <a:ln w="12700">
+            <a:solidFill>
+              <a:srgbClr val="1B7A3D"/>
+            </a:solidFill>
+            <a:prstDash val="solid"/>
+          </a:ln>
+        </p:spPr>
+      </p:sp>
+      <p:sp>
+        <p:nvSpPr>
+          <p:cNvPr id="10" name="Text 7"/>
+          <p:cNvSpPr/>
+          <p:nvPr/>
+        </p:nvSpPr>
+        <p:spPr>
+          <a:xfrm>
+            <a:off x="457200" y="3566160"/>
+            <a:ext cx="3657600" cy="914400"/>
+          </a:xfrm>
+          <a:prstGeom prst="rect">
+            <a:avLst/>
+          </a:prstGeom>
+          <a:noFill/>
+          <a:ln/>
+        </p:spPr>
+        <p:txBody>
+          <a:bodyPr wrap="square" rtlCol="0" anchor="t">
+            <a:normAutofit/>
+          </a:bodyPr>
+          <a:lstStyle/>
+          <a:p>
+            <a:pPr indent="0" marL="0">
+              <a:lnSpc>
+                <a:spcPct val="130000"/>
+              </a:lnSpc>
+              <a:buNone/>
+            </a:pPr>
+            <a:r>
+              <a:rPr lang="en-US" sz="900" dirty="0">
+                <a:solidFill>
+                  <a:srgbClr val="2C3E50"/>
+                </a:solidFill>
+                <a:latin typeface="SimSun" pitchFamily="34" charset="0"/>
+                <a:ea typeface="SimSun" pitchFamily="34" charset="-122"/>
+                <a:cs typeface="SimSun" pitchFamily="34" charset="-120"/>
+              </a:rPr>
+              <a:t>用户登录功能：支持账号密码登录，系统通过后台验证用户身份，验证通过后生成会话令牌，跳转至系统前台首页。同时支持用户注册功能。</a:t>
+            </a:r>
+            <a:endParaRPr lang="en-US" sz="900" dirty="0"/>
+          </a:p>
+        </p:txBody>
+      </p:sp>
+      <p:sp>
+        <p:nvSpPr>
+          <p:cNvPr id="11" name="Text 8"/>
+          <p:cNvSpPr/>
+          <p:nvPr/>
+        </p:nvSpPr>
+        <p:spPr>
+          <a:xfrm>
+            <a:off x="4572000" y="914400"/>
             <a:ext cx="2743200" cy="274320"/>
           </a:xfrm>
           <a:prstGeom prst="rect">
@@ -7905,7 +8785,7 @@
             <a:r>
               <a:rPr lang="en-US" sz="1000" b="1" dirty="0">
                 <a:solidFill>
-                  <a:srgbClr val="2C3E50"/>
+                  <a:srgbClr val="145C2E"/>
                 </a:solidFill>
                 <a:latin typeface="SimHei" pitchFamily="34" charset="0"/>
                 <a:ea typeface="SimHei" pitchFamily="34" charset="-122"/>
@@ -7919,7 +8799,7 @@
       </p:sp>
       <p:pic>
         <p:nvPicPr>
-          <p:cNvPr id="10" name="Image 1" descr="/workspace/assets/fig5_3_product_purchase.png">    </p:cNvPr>
+          <p:cNvPr id="12" name="Image 1" descr="/workspace/assets/fig5_3_product_purchase.png">    </p:cNvPr>
           <p:cNvPicPr>
             <a:picLocks noChangeAspect="1"/>
           </p:cNvPicPr>
@@ -7933,8 +8813,8 @@
         </p:blipFill>
         <p:spPr>
           <a:xfrm>
-            <a:off x="4754880" y="1188720"/>
-            <a:ext cx="3931920" cy="3200400"/>
+            <a:off x="4572000" y="1234440"/>
+            <a:ext cx="4114800" cy="2194560"/>
           </a:xfrm>
           <a:prstGeom prst="rect">
             <a:avLst/>
@@ -7943,40 +8823,72 @@
       </p:pic>
       <p:sp>
         <p:nvSpPr>
-          <p:cNvPr id="11" name="Watermark"/>
-          <p:cNvSpPr txBox="1"/>
-          <p:nvPr/>
-        </p:nvSpPr>
-        <p:spPr>
-          <a:xfrm rot="0">
-            <a:off x="6836000" y="4685500"/>
-            <a:ext cx="2200000" cy="350000"/>
-          </a:xfrm>
-          <a:prstGeom prst="rect">
-            <a:avLst/>
-          </a:prstGeom>
-          <a:noFill/>
-          <a:ln>
-            <a:noFill/>
+          <p:cNvPr id="13" name="Shape 9"/>
+          <p:cNvSpPr/>
+          <p:nvPr/>
+        </p:nvSpPr>
+        <p:spPr>
+          <a:xfrm>
+            <a:off x="4572000" y="3520440"/>
+            <a:ext cx="4114800" cy="1005840"/>
+          </a:xfrm>
+          <a:prstGeom prst="roundRect">
+            <a:avLst>
+              <a:gd name="adj" fmla="val 5455"/>
+            </a:avLst>
+          </a:prstGeom>
+          <a:solidFill>
+            <a:srgbClr val="FFF8F0"/>
+          </a:solidFill>
+          <a:ln w="12700">
+            <a:solidFill>
+              <a:srgbClr val="FF8C00"/>
+            </a:solidFill>
+            <a:prstDash val="solid"/>
           </a:ln>
         </p:spPr>
-        <p:txBody>
-          <a:bodyPr wrap="square" rtlCol="0" anchor="b" lIns="0" tIns="0" rIns="91440" bIns="45720"/>
-          <a:lstStyle/>
-          <a:p>
-            <a:pPr algn="r"/>
-            <a:r>
-              <a:rPr lang="zh-CN" sz="1600" dirty="0">
-                <a:solidFill>
-                  <a:srgbClr val="808080">
-                    <a:alpha val="19999"/>
-                  </a:srgbClr>
-                </a:solidFill>
-                <a:latin typeface="Arial"/>
-                <a:ea typeface="SimSun"/>
-              </a:rPr>
-              <a:t>TRAE AI 生成</a:t>
-            </a:r>
+      </p:sp>
+      <p:sp>
+        <p:nvSpPr>
+          <p:cNvPr id="14" name="Text 10"/>
+          <p:cNvSpPr/>
+          <p:nvPr/>
+        </p:nvSpPr>
+        <p:spPr>
+          <a:xfrm>
+            <a:off x="4663440" y="3566160"/>
+            <a:ext cx="3931920" cy="914400"/>
+          </a:xfrm>
+          <a:prstGeom prst="rect">
+            <a:avLst/>
+          </a:prstGeom>
+          <a:noFill/>
+          <a:ln/>
+        </p:spPr>
+        <p:txBody>
+          <a:bodyPr wrap="square" rtlCol="0" anchor="t">
+            <a:normAutofit/>
+          </a:bodyPr>
+          <a:lstStyle/>
+          <a:p>
+            <a:pPr indent="0" marL="0">
+              <a:lnSpc>
+                <a:spcPct val="130000"/>
+              </a:lnSpc>
+              <a:buNone/>
+            </a:pPr>
+            <a:r>
+              <a:rPr lang="en-US" sz="900" dirty="0">
+                <a:solidFill>
+                  <a:srgbClr val="2C3E50"/>
+                </a:solidFill>
+                <a:latin typeface="SimSun" pitchFamily="34" charset="0"/>
+                <a:ea typeface="SimSun" pitchFamily="34" charset="-122"/>
+                <a:cs typeface="SimSun" pitchFamily="34" charset="-120"/>
+              </a:rPr>
+              <a:t>商品购买功能：用户可浏览商品列表，查看商品详情，选择商品加入购物车或直接购买，系统自动跳转至支付页面完成下单流程。</a:t>
+            </a:r>
+            <a:endParaRPr lang="en-US" sz="900" dirty="0"/>
           </a:p>
         </p:txBody>
       </p:sp>
@@ -8183,7 +9095,7 @@
         </p:nvSpPr>
         <p:spPr>
           <a:xfrm>
-            <a:off x="548640" y="914400"/>
+            <a:off x="457200" y="914400"/>
             <a:ext cx="2743200" cy="274320"/>
           </a:xfrm>
           <a:prstGeom prst="rect">
@@ -8204,7 +9116,7 @@
             <a:r>
               <a:rPr lang="en-US" sz="1000" b="1" dirty="0">
                 <a:solidFill>
-                  <a:srgbClr val="2C3E50"/>
+                  <a:srgbClr val="145C2E"/>
                 </a:solidFill>
                 <a:latin typeface="SimHei" pitchFamily="34" charset="0"/>
                 <a:ea typeface="SimHei" pitchFamily="34" charset="-122"/>
@@ -8232,8 +9144,8 @@
         </p:blipFill>
         <p:spPr>
           <a:xfrm>
-            <a:off x="457200" y="1188720"/>
-            <a:ext cx="3931920" cy="3200400"/>
+            <a:off x="365760" y="1234440"/>
+            <a:ext cx="3840480" cy="2194560"/>
           </a:xfrm>
           <a:prstGeom prst="rect">
             <a:avLst/>
@@ -8242,13 +9154,84 @@
       </p:pic>
       <p:sp>
         <p:nvSpPr>
-          <p:cNvPr id="9" name="Text 6"/>
-          <p:cNvSpPr/>
-          <p:nvPr/>
-        </p:nvSpPr>
-        <p:spPr>
-          <a:xfrm>
-            <a:off x="4754880" y="914400"/>
+          <p:cNvPr id="9" name="Shape 6"/>
+          <p:cNvSpPr/>
+          <p:nvPr/>
+        </p:nvSpPr>
+        <p:spPr>
+          <a:xfrm>
+            <a:off x="365760" y="3520440"/>
+            <a:ext cx="3840480" cy="1005840"/>
+          </a:xfrm>
+          <a:prstGeom prst="roundRect">
+            <a:avLst>
+              <a:gd name="adj" fmla="val 5455"/>
+            </a:avLst>
+          </a:prstGeom>
+          <a:solidFill>
+            <a:srgbClr val="F0FFF0"/>
+          </a:solidFill>
+          <a:ln w="12700">
+            <a:solidFill>
+              <a:srgbClr val="1B7A3D"/>
+            </a:solidFill>
+            <a:prstDash val="solid"/>
+          </a:ln>
+        </p:spPr>
+      </p:sp>
+      <p:sp>
+        <p:nvSpPr>
+          <p:cNvPr id="10" name="Text 7"/>
+          <p:cNvSpPr/>
+          <p:nvPr/>
+        </p:nvSpPr>
+        <p:spPr>
+          <a:xfrm>
+            <a:off x="457200" y="3566160"/>
+            <a:ext cx="3657600" cy="914400"/>
+          </a:xfrm>
+          <a:prstGeom prst="rect">
+            <a:avLst/>
+          </a:prstGeom>
+          <a:noFill/>
+          <a:ln/>
+        </p:spPr>
+        <p:txBody>
+          <a:bodyPr wrap="square" rtlCol="0" anchor="t">
+            <a:normAutofit/>
+          </a:bodyPr>
+          <a:lstStyle/>
+          <a:p>
+            <a:pPr indent="0" marL="0">
+              <a:lnSpc>
+                <a:spcPct val="130000"/>
+              </a:lnSpc>
+              <a:buNone/>
+            </a:pPr>
+            <a:r>
+              <a:rPr lang="en-US" sz="900" dirty="0">
+                <a:solidFill>
+                  <a:srgbClr val="2C3E50"/>
+                </a:solidFill>
+                <a:latin typeface="SimSun" pitchFamily="34" charset="0"/>
+                <a:ea typeface="SimSun" pitchFamily="34" charset="-122"/>
+                <a:cs typeface="SimSun" pitchFamily="34" charset="-120"/>
+              </a:rPr>
+              <a:t>优惠券功能：用户可浏览可用优惠券，查看优惠详情，使用积分兑换或直接领取优惠券，领取后可在购物时使用获得折扣优惠。</a:t>
+            </a:r>
+            <a:endParaRPr lang="en-US" sz="900" dirty="0"/>
+          </a:p>
+        </p:txBody>
+      </p:sp>
+      <p:sp>
+        <p:nvSpPr>
+          <p:cNvPr id="11" name="Text 8"/>
+          <p:cNvSpPr/>
+          <p:nvPr/>
+        </p:nvSpPr>
+        <p:spPr>
+          <a:xfrm>
+            <a:off x="4572000" y="914400"/>
             <a:ext cx="2743200" cy="274320"/>
           </a:xfrm>
           <a:prstGeom prst="rect">
@@ -8269,7 +9252,7 @@
             <a:r>
               <a:rPr lang="en-US" sz="1000" b="1" dirty="0">
                 <a:solidFill>
-                  <a:srgbClr val="2C3E50"/>
+                  <a:srgbClr val="145C2E"/>
                 </a:solidFill>
                 <a:latin typeface="SimHei" pitchFamily="34" charset="0"/>
                 <a:ea typeface="SimHei" pitchFamily="34" charset="-122"/>
@@ -8283,7 +9266,7 @@
       </p:sp>
       <p:pic>
         <p:nvPicPr>
-          <p:cNvPr id="10" name="Image 1" descr="/workspace/assets/fig5_7_user_center.png">    </p:cNvPr>
+          <p:cNvPr id="12" name="Image 1" descr="/workspace/assets/fig5_7_user_center.png">    </p:cNvPr>
           <p:cNvPicPr>
             <a:picLocks noChangeAspect="1"/>
           </p:cNvPicPr>
@@ -8297,8 +9280,8 @@
         </p:blipFill>
         <p:spPr>
           <a:xfrm>
-            <a:off x="4754880" y="1188720"/>
-            <a:ext cx="3931920" cy="3200400"/>
+            <a:off x="4572000" y="1234440"/>
+            <a:ext cx="4114800" cy="2194560"/>
           </a:xfrm>
           <a:prstGeom prst="rect">
             <a:avLst/>
@@ -8307,40 +9290,72 @@
       </p:pic>
       <p:sp>
         <p:nvSpPr>
-          <p:cNvPr id="11" name="Watermark"/>
-          <p:cNvSpPr txBox="1"/>
-          <p:nvPr/>
-        </p:nvSpPr>
-        <p:spPr>
-          <a:xfrm rot="0">
-            <a:off x="6836000" y="4685500"/>
-            <a:ext cx="2200000" cy="350000"/>
-          </a:xfrm>
-          <a:prstGeom prst="rect">
-            <a:avLst/>
-          </a:prstGeom>
-          <a:noFill/>
-          <a:ln>
-            <a:noFill/>
+          <p:cNvPr id="13" name="Shape 9"/>
+          <p:cNvSpPr/>
+          <p:nvPr/>
+        </p:nvSpPr>
+        <p:spPr>
+          <a:xfrm>
+            <a:off x="4572000" y="3520440"/>
+            <a:ext cx="4114800" cy="1005840"/>
+          </a:xfrm>
+          <a:prstGeom prst="roundRect">
+            <a:avLst>
+              <a:gd name="adj" fmla="val 5455"/>
+            </a:avLst>
+          </a:prstGeom>
+          <a:solidFill>
+            <a:srgbClr val="FFF8F0"/>
+          </a:solidFill>
+          <a:ln w="12700">
+            <a:solidFill>
+              <a:srgbClr val="FF8C00"/>
+            </a:solidFill>
+            <a:prstDash val="solid"/>
           </a:ln>
         </p:spPr>
-        <p:txBody>
-          <a:bodyPr wrap="square" rtlCol="0" anchor="b" lIns="0" tIns="0" rIns="91440" bIns="45720"/>
-          <a:lstStyle/>
-          <a:p>
-            <a:pPr algn="r"/>
-            <a:r>
-              <a:rPr lang="zh-CN" sz="1600" dirty="0">
-                <a:solidFill>
-                  <a:srgbClr val="808080">
-                    <a:alpha val="19999"/>
-                  </a:srgbClr>
-                </a:solidFill>
-                <a:latin typeface="Arial"/>
-                <a:ea typeface="SimSun"/>
-              </a:rPr>
-              <a:t>TRAE AI 生成</a:t>
-            </a:r>
+      </p:sp>
+      <p:sp>
+        <p:nvSpPr>
+          <p:cNvPr id="14" name="Text 10"/>
+          <p:cNvSpPr/>
+          <p:nvPr/>
+        </p:nvSpPr>
+        <p:spPr>
+          <a:xfrm>
+            <a:off x="4663440" y="3566160"/>
+            <a:ext cx="3931920" cy="914400"/>
+          </a:xfrm>
+          <a:prstGeom prst="rect">
+            <a:avLst/>
+          </a:prstGeom>
+          <a:noFill/>
+          <a:ln/>
+        </p:spPr>
+        <p:txBody>
+          <a:bodyPr wrap="square" rtlCol="0" anchor="t">
+            <a:normAutofit/>
+          </a:bodyPr>
+          <a:lstStyle/>
+          <a:p>
+            <a:pPr indent="0" marL="0">
+              <a:lnSpc>
+                <a:spcPct val="130000"/>
+              </a:lnSpc>
+              <a:buNone/>
+            </a:pPr>
+            <a:r>
+              <a:rPr lang="en-US" sz="900" dirty="0">
+                <a:solidFill>
+                  <a:srgbClr val="2C3E50"/>
+                </a:solidFill>
+                <a:latin typeface="SimSun" pitchFamily="34" charset="0"/>
+                <a:ea typeface="SimSun" pitchFamily="34" charset="-122"/>
+                <a:cs typeface="SimSun" pitchFamily="34" charset="-120"/>
+              </a:rPr>
+              <a:t>个人中心功能：用户可管理个人信息、修改密码、查看订单记录、管理收货地址、查看积分余额等，实现个性化账户管理。</a:t>
+            </a:r>
+            <a:endParaRPr lang="en-US" sz="900" dirty="0"/>
           </a:p>
         </p:txBody>
       </p:sp>
@@ -8547,7 +9562,7 @@
         </p:nvSpPr>
         <p:spPr>
           <a:xfrm>
-            <a:off x="548640" y="914400"/>
+            <a:off x="457200" y="914400"/>
             <a:ext cx="2743200" cy="274320"/>
           </a:xfrm>
           <a:prstGeom prst="rect">
@@ -8568,7 +9583,7 @@
             <a:r>
               <a:rPr lang="en-US" sz="1000" b="1" dirty="0">
                 <a:solidFill>
-                  <a:srgbClr val="2C3E50"/>
+                  <a:srgbClr val="145C2E"/>
                 </a:solidFill>
                 <a:latin typeface="SimHei" pitchFamily="34" charset="0"/>
                 <a:ea typeface="SimHei" pitchFamily="34" charset="-122"/>
@@ -8596,8 +9611,8 @@
         </p:blipFill>
         <p:spPr>
           <a:xfrm>
-            <a:off x="457200" y="1188720"/>
-            <a:ext cx="3931920" cy="3200400"/>
+            <a:off x="365760" y="1234440"/>
+            <a:ext cx="3840480" cy="2194560"/>
           </a:xfrm>
           <a:prstGeom prst="rect">
             <a:avLst/>
@@ -8606,13 +9621,84 @@
       </p:pic>
       <p:sp>
         <p:nvSpPr>
-          <p:cNvPr id="9" name="Text 6"/>
-          <p:cNvSpPr/>
-          <p:nvPr/>
-        </p:nvSpPr>
-        <p:spPr>
-          <a:xfrm>
-            <a:off x="4754880" y="914400"/>
+          <p:cNvPr id="9" name="Shape 6"/>
+          <p:cNvSpPr/>
+          <p:nvPr/>
+        </p:nvSpPr>
+        <p:spPr>
+          <a:xfrm>
+            <a:off x="365760" y="3520440"/>
+            <a:ext cx="3840480" cy="1005840"/>
+          </a:xfrm>
+          <a:prstGeom prst="roundRect">
+            <a:avLst>
+              <a:gd name="adj" fmla="val 5455"/>
+            </a:avLst>
+          </a:prstGeom>
+          <a:solidFill>
+            <a:srgbClr val="F0FFF0"/>
+          </a:solidFill>
+          <a:ln w="12700">
+            <a:solidFill>
+              <a:srgbClr val="1B7A3D"/>
+            </a:solidFill>
+            <a:prstDash val="solid"/>
+          </a:ln>
+        </p:spPr>
+      </p:sp>
+      <p:sp>
+        <p:nvSpPr>
+          <p:cNvPr id="10" name="Text 7"/>
+          <p:cNvSpPr/>
+          <p:nvPr/>
+        </p:nvSpPr>
+        <p:spPr>
+          <a:xfrm>
+            <a:off x="457200" y="3566160"/>
+            <a:ext cx="3657600" cy="914400"/>
+          </a:xfrm>
+          <a:prstGeom prst="rect">
+            <a:avLst/>
+          </a:prstGeom>
+          <a:noFill/>
+          <a:ln/>
+        </p:spPr>
+        <p:txBody>
+          <a:bodyPr wrap="square" rtlCol="0" anchor="t">
+            <a:normAutofit/>
+          </a:bodyPr>
+          <a:lstStyle/>
+          <a:p>
+            <a:pPr indent="0" marL="0">
+              <a:lnSpc>
+                <a:spcPct val="130000"/>
+              </a:lnSpc>
+              <a:buNone/>
+            </a:pPr>
+            <a:r>
+              <a:rPr lang="en-US" sz="900" dirty="0">
+                <a:solidFill>
+                  <a:srgbClr val="2C3E50"/>
+                </a:solidFill>
+                <a:latin typeface="SimSun" pitchFamily="34" charset="0"/>
+                <a:ea typeface="SimSun" pitchFamily="34" charset="-122"/>
+                <a:cs typeface="SimSun" pitchFamily="34" charset="-120"/>
+              </a:rPr>
+              <a:t>管理员登录：管理员输入账号密码，系统验证身份后生成会话标识，跳转至后台管理首页，可访问全部管理功能模块。</a:t>
+            </a:r>
+            <a:endParaRPr lang="en-US" sz="900" dirty="0"/>
+          </a:p>
+        </p:txBody>
+      </p:sp>
+      <p:sp>
+        <p:nvSpPr>
+          <p:cNvPr id="11" name="Text 8"/>
+          <p:cNvSpPr/>
+          <p:nvPr/>
+        </p:nvSpPr>
+        <p:spPr>
+          <a:xfrm>
+            <a:off x="4572000" y="914400"/>
             <a:ext cx="2743200" cy="274320"/>
           </a:xfrm>
           <a:prstGeom prst="rect">
@@ -8633,7 +9719,7 @@
             <a:r>
               <a:rPr lang="en-US" sz="1000" b="1" dirty="0">
                 <a:solidFill>
-                  <a:srgbClr val="2C3E50"/>
+                  <a:srgbClr val="145C2E"/>
                 </a:solidFill>
                 <a:latin typeface="SimHei" pitchFamily="34" charset="0"/>
                 <a:ea typeface="SimHei" pitchFamily="34" charset="-122"/>
@@ -8647,7 +9733,7 @@
       </p:sp>
       <p:pic>
         <p:nvPicPr>
-          <p:cNvPr id="10" name="Image 1" descr="/workspace/assets/fig5_10_user_manage.png">    </p:cNvPr>
+          <p:cNvPr id="12" name="Image 1" descr="/workspace/assets/fig5_10_user_manage.png">    </p:cNvPr>
           <p:cNvPicPr>
             <a:picLocks noChangeAspect="1"/>
           </p:cNvPicPr>
@@ -8661,8 +9747,8 @@
         </p:blipFill>
         <p:spPr>
           <a:xfrm>
-            <a:off x="4754880" y="1188720"/>
-            <a:ext cx="3931920" cy="3200400"/>
+            <a:off x="4572000" y="1234440"/>
+            <a:ext cx="4114800" cy="2194560"/>
           </a:xfrm>
           <a:prstGeom prst="rect">
             <a:avLst/>
@@ -8671,40 +9757,72 @@
       </p:pic>
       <p:sp>
         <p:nvSpPr>
-          <p:cNvPr id="11" name="Watermark"/>
-          <p:cNvSpPr txBox="1"/>
-          <p:nvPr/>
-        </p:nvSpPr>
-        <p:spPr>
-          <a:xfrm rot="0">
-            <a:off x="6836000" y="4685500"/>
-            <a:ext cx="2200000" cy="350000"/>
-          </a:xfrm>
-          <a:prstGeom prst="rect">
-            <a:avLst/>
-          </a:prstGeom>
-          <a:noFill/>
-          <a:ln>
-            <a:noFill/>
+          <p:cNvPr id="13" name="Shape 9"/>
+          <p:cNvSpPr/>
+          <p:nvPr/>
+        </p:nvSpPr>
+        <p:spPr>
+          <a:xfrm>
+            <a:off x="4572000" y="3520440"/>
+            <a:ext cx="4114800" cy="1005840"/>
+          </a:xfrm>
+          <a:prstGeom prst="roundRect">
+            <a:avLst>
+              <a:gd name="adj" fmla="val 5455"/>
+            </a:avLst>
+          </a:prstGeom>
+          <a:solidFill>
+            <a:srgbClr val="FFF8F0"/>
+          </a:solidFill>
+          <a:ln w="12700">
+            <a:solidFill>
+              <a:srgbClr val="FF8C00"/>
+            </a:solidFill>
+            <a:prstDash val="solid"/>
           </a:ln>
         </p:spPr>
-        <p:txBody>
-          <a:bodyPr wrap="square" rtlCol="0" anchor="b" lIns="0" tIns="0" rIns="91440" bIns="45720"/>
-          <a:lstStyle/>
-          <a:p>
-            <a:pPr algn="r"/>
-            <a:r>
-              <a:rPr lang="zh-CN" sz="1600" dirty="0">
-                <a:solidFill>
-                  <a:srgbClr val="808080">
-                    <a:alpha val="19999"/>
-                  </a:srgbClr>
-                </a:solidFill>
-                <a:latin typeface="Arial"/>
-                <a:ea typeface="SimSun"/>
-              </a:rPr>
-              <a:t>TRAE AI 生成</a:t>
-            </a:r>
+      </p:sp>
+      <p:sp>
+        <p:nvSpPr>
+          <p:cNvPr id="14" name="Text 10"/>
+          <p:cNvSpPr/>
+          <p:nvPr/>
+        </p:nvSpPr>
+        <p:spPr>
+          <a:xfrm>
+            <a:off x="4663440" y="3566160"/>
+            <a:ext cx="3931920" cy="914400"/>
+          </a:xfrm>
+          <a:prstGeom prst="rect">
+            <a:avLst/>
+          </a:prstGeom>
+          <a:noFill/>
+          <a:ln/>
+        </p:spPr>
+        <p:txBody>
+          <a:bodyPr wrap="square" rtlCol="0" anchor="t">
+            <a:normAutofit/>
+          </a:bodyPr>
+          <a:lstStyle/>
+          <a:p>
+            <a:pPr indent="0" marL="0">
+              <a:lnSpc>
+                <a:spcPct val="130000"/>
+              </a:lnSpc>
+              <a:buNone/>
+            </a:pPr>
+            <a:r>
+              <a:rPr lang="en-US" sz="900" dirty="0">
+                <a:solidFill>
+                  <a:srgbClr val="2C3E50"/>
+                </a:solidFill>
+                <a:latin typeface="SimSun" pitchFamily="34" charset="0"/>
+                <a:ea typeface="SimSun" pitchFamily="34" charset="-122"/>
+                <a:cs typeface="SimSun" pitchFamily="34" charset="-120"/>
+              </a:rPr>
+              <a:t>用户管理功能：管理员可查看所有注册用户信息，支持用户信息的增删改查操作，管理用户账号状态，保障系统访问安全。</a:t>
+            </a:r>
+            <a:endParaRPr lang="en-US" sz="900" dirty="0"/>
           </a:p>
         </p:txBody>
       </p:sp>
@@ -10024,45 +11142,6 @@
           </a:p>
         </p:txBody>
       </p:sp>
-      <p:sp>
-        <p:nvSpPr>
-          <p:cNvPr id="41" name="Watermark"/>
-          <p:cNvSpPr txBox="1"/>
-          <p:nvPr/>
-        </p:nvSpPr>
-        <p:spPr>
-          <a:xfrm rot="0">
-            <a:off x="6836000" y="4685500"/>
-            <a:ext cx="2200000" cy="350000"/>
-          </a:xfrm>
-          <a:prstGeom prst="rect">
-            <a:avLst/>
-          </a:prstGeom>
-          <a:noFill/>
-          <a:ln>
-            <a:noFill/>
-          </a:ln>
-        </p:spPr>
-        <p:txBody>
-          <a:bodyPr wrap="square" rtlCol="0" anchor="b" lIns="0" tIns="0" rIns="91440" bIns="45720"/>
-          <a:lstStyle/>
-          <a:p>
-            <a:pPr algn="r"/>
-            <a:r>
-              <a:rPr lang="zh-CN" sz="1600" dirty="0">
-                <a:solidFill>
-                  <a:srgbClr val="808080">
-                    <a:alpha val="19999"/>
-                  </a:srgbClr>
-                </a:solidFill>
-                <a:latin typeface="Arial"/>
-                <a:ea typeface="SimSun"/>
-              </a:rPr>
-              <a:t>TRAE AI 生成</a:t>
-            </a:r>
-          </a:p>
-        </p:txBody>
-      </p:sp>
     </p:spTree>
   </p:cSld>
   <p:clrMapOvr>
@@ -10266,7 +11345,7 @@
         </p:nvSpPr>
         <p:spPr>
           <a:xfrm>
-            <a:off x="548640" y="914400"/>
+            <a:off x="457200" y="914400"/>
             <a:ext cx="2743200" cy="274320"/>
           </a:xfrm>
           <a:prstGeom prst="rect">
@@ -10287,7 +11366,7 @@
             <a:r>
               <a:rPr lang="en-US" sz="1000" b="1" dirty="0">
                 <a:solidFill>
-                  <a:srgbClr val="2C3E50"/>
+                  <a:srgbClr val="145C2E"/>
                 </a:solidFill>
                 <a:latin typeface="SimHei" pitchFamily="34" charset="0"/>
                 <a:ea typeface="SimHei" pitchFamily="34" charset="-122"/>
@@ -10315,8 +11394,8 @@
         </p:blipFill>
         <p:spPr>
           <a:xfrm>
-            <a:off x="457200" y="1188720"/>
-            <a:ext cx="3931920" cy="3200400"/>
+            <a:off x="365760" y="1234440"/>
+            <a:ext cx="3840480" cy="2194560"/>
           </a:xfrm>
           <a:prstGeom prst="rect">
             <a:avLst/>
@@ -10325,13 +11404,84 @@
       </p:pic>
       <p:sp>
         <p:nvSpPr>
-          <p:cNvPr id="9" name="Text 6"/>
-          <p:cNvSpPr/>
-          <p:nvPr/>
-        </p:nvSpPr>
-        <p:spPr>
-          <a:xfrm>
-            <a:off x="4754880" y="914400"/>
+          <p:cNvPr id="9" name="Shape 6"/>
+          <p:cNvSpPr/>
+          <p:nvPr/>
+        </p:nvSpPr>
+        <p:spPr>
+          <a:xfrm>
+            <a:off x="365760" y="3520440"/>
+            <a:ext cx="3840480" cy="1005840"/>
+          </a:xfrm>
+          <a:prstGeom prst="roundRect">
+            <a:avLst>
+              <a:gd name="adj" fmla="val 5455"/>
+            </a:avLst>
+          </a:prstGeom>
+          <a:solidFill>
+            <a:srgbClr val="F0FFF0"/>
+          </a:solidFill>
+          <a:ln w="12700">
+            <a:solidFill>
+              <a:srgbClr val="1B7A3D"/>
+            </a:solidFill>
+            <a:prstDash val="solid"/>
+          </a:ln>
+        </p:spPr>
+      </p:sp>
+      <p:sp>
+        <p:nvSpPr>
+          <p:cNvPr id="10" name="Text 7"/>
+          <p:cNvSpPr/>
+          <p:nvPr/>
+        </p:nvSpPr>
+        <p:spPr>
+          <a:xfrm>
+            <a:off x="457200" y="3566160"/>
+            <a:ext cx="3657600" cy="914400"/>
+          </a:xfrm>
+          <a:prstGeom prst="rect">
+            <a:avLst/>
+          </a:prstGeom>
+          <a:noFill/>
+          <a:ln/>
+        </p:spPr>
+        <p:txBody>
+          <a:bodyPr wrap="square" rtlCol="0" anchor="t">
+            <a:normAutofit/>
+          </a:bodyPr>
+          <a:lstStyle/>
+          <a:p>
+            <a:pPr indent="0" marL="0">
+              <a:lnSpc>
+                <a:spcPct val="130000"/>
+              </a:lnSpc>
+              <a:buNone/>
+            </a:pPr>
+            <a:r>
+              <a:rPr lang="en-US" sz="900" dirty="0">
+                <a:solidFill>
+                  <a:srgbClr val="2C3E50"/>
+                </a:solidFill>
+                <a:latin typeface="SimSun" pitchFamily="34" charset="0"/>
+                <a:ea typeface="SimSun" pitchFamily="34" charset="-122"/>
+                <a:cs typeface="SimSun" pitchFamily="34" charset="-120"/>
+              </a:rPr>
+              <a:t>商品管理功能：管理员可新增、编辑、删除商品信息，设置商品价格、库存、预警值，管理商品上下架状态，查看商品浏览量统计。</a:t>
+            </a:r>
+            <a:endParaRPr lang="en-US" sz="900" dirty="0"/>
+          </a:p>
+        </p:txBody>
+      </p:sp>
+      <p:sp>
+        <p:nvSpPr>
+          <p:cNvPr id="11" name="Text 8"/>
+          <p:cNvSpPr/>
+          <p:nvPr/>
+        </p:nvSpPr>
+        <p:spPr>
+          <a:xfrm>
+            <a:off x="4572000" y="914400"/>
             <a:ext cx="2743200" cy="274320"/>
           </a:xfrm>
           <a:prstGeom prst="rect">
@@ -10352,7 +11502,7 @@
             <a:r>
               <a:rPr lang="en-US" sz="1000" b="1" dirty="0">
                 <a:solidFill>
-                  <a:srgbClr val="2C3E50"/>
+                  <a:srgbClr val="145C2E"/>
                 </a:solidFill>
                 <a:latin typeface="SimHei" pitchFamily="34" charset="0"/>
                 <a:ea typeface="SimHei" pitchFamily="34" charset="-122"/>
@@ -10366,7 +11516,7 @@
       </p:sp>
       <p:pic>
         <p:nvPicPr>
-          <p:cNvPr id="10" name="Image 1" descr="/workspace/assets/fig5_13_news_manage.png">    </p:cNvPr>
+          <p:cNvPr id="12" name="Image 1" descr="/workspace/assets/fig5_13_news_manage.png">    </p:cNvPr>
           <p:cNvPicPr>
             <a:picLocks noChangeAspect="1"/>
           </p:cNvPicPr>
@@ -10380,8 +11530,8 @@
         </p:blipFill>
         <p:spPr>
           <a:xfrm>
-            <a:off x="4754880" y="1188720"/>
-            <a:ext cx="3931920" cy="3200400"/>
+            <a:off x="4572000" y="1234440"/>
+            <a:ext cx="4114800" cy="2194560"/>
           </a:xfrm>
           <a:prstGeom prst="rect">
             <a:avLst/>
@@ -10390,40 +11540,72 @@
       </p:pic>
       <p:sp>
         <p:nvSpPr>
-          <p:cNvPr id="11" name="Watermark"/>
-          <p:cNvSpPr txBox="1"/>
-          <p:nvPr/>
-        </p:nvSpPr>
-        <p:spPr>
-          <a:xfrm rot="0">
-            <a:off x="6836000" y="4685500"/>
-            <a:ext cx="2200000" cy="350000"/>
-          </a:xfrm>
-          <a:prstGeom prst="rect">
-            <a:avLst/>
-          </a:prstGeom>
-          <a:noFill/>
-          <a:ln>
-            <a:noFill/>
+          <p:cNvPr id="13" name="Shape 9"/>
+          <p:cNvSpPr/>
+          <p:nvPr/>
+        </p:nvSpPr>
+        <p:spPr>
+          <a:xfrm>
+            <a:off x="4572000" y="3520440"/>
+            <a:ext cx="4114800" cy="1005840"/>
+          </a:xfrm>
+          <a:prstGeom prst="roundRect">
+            <a:avLst>
+              <a:gd name="adj" fmla="val 5455"/>
+            </a:avLst>
+          </a:prstGeom>
+          <a:solidFill>
+            <a:srgbClr val="FFF8F0"/>
+          </a:solidFill>
+          <a:ln w="12700">
+            <a:solidFill>
+              <a:srgbClr val="FF8C00"/>
+            </a:solidFill>
+            <a:prstDash val="solid"/>
           </a:ln>
         </p:spPr>
-        <p:txBody>
-          <a:bodyPr wrap="square" rtlCol="0" anchor="b" lIns="0" tIns="0" rIns="91440" bIns="45720"/>
-          <a:lstStyle/>
-          <a:p>
-            <a:pPr algn="r"/>
-            <a:r>
-              <a:rPr lang="zh-CN" sz="1600" dirty="0">
-                <a:solidFill>
-                  <a:srgbClr val="808080">
-                    <a:alpha val="19999"/>
-                  </a:srgbClr>
-                </a:solidFill>
-                <a:latin typeface="Arial"/>
-                <a:ea typeface="SimSun"/>
-              </a:rPr>
-              <a:t>TRAE AI 生成</a:t>
-            </a:r>
+      </p:sp>
+      <p:sp>
+        <p:nvSpPr>
+          <p:cNvPr id="14" name="Text 10"/>
+          <p:cNvSpPr/>
+          <p:nvPr/>
+        </p:nvSpPr>
+        <p:spPr>
+          <a:xfrm>
+            <a:off x="4663440" y="3566160"/>
+            <a:ext cx="3931920" cy="914400"/>
+          </a:xfrm>
+          <a:prstGeom prst="rect">
+            <a:avLst/>
+          </a:prstGeom>
+          <a:noFill/>
+          <a:ln/>
+        </p:spPr>
+        <p:txBody>
+          <a:bodyPr wrap="square" rtlCol="0" anchor="t">
+            <a:normAutofit/>
+          </a:bodyPr>
+          <a:lstStyle/>
+          <a:p>
+            <a:pPr indent="0" marL="0">
+              <a:lnSpc>
+                <a:spcPct val="130000"/>
+              </a:lnSpc>
+              <a:buNone/>
+            </a:pPr>
+            <a:r>
+              <a:rPr lang="en-US" sz="900" dirty="0">
+                <a:solidFill>
+                  <a:srgbClr val="2C3E50"/>
+                </a:solidFill>
+                <a:latin typeface="SimSun" pitchFamily="34" charset="0"/>
+                <a:ea typeface="SimSun" pitchFamily="34" charset="-122"/>
+                <a:cs typeface="SimSun" pitchFamily="34" charset="-120"/>
+              </a:rPr>
+              <a:t>公告管理功能：管理员可发布、编辑、删除公告信息，公告内容支持富文本编辑，发布后用户端可实时查看最新公告动态。</a:t>
+            </a:r>
+            <a:endParaRPr lang="en-US" sz="900" dirty="0"/>
           </a:p>
         </p:txBody>
       </p:sp>
@@ -10630,7 +11812,7 @@
         </p:nvSpPr>
         <p:spPr>
           <a:xfrm>
-            <a:off x="548640" y="914400"/>
+            <a:off x="457200" y="914400"/>
             <a:ext cx="2743200" cy="274320"/>
           </a:xfrm>
           <a:prstGeom prst="rect">
@@ -10651,7 +11833,7 @@
             <a:r>
               <a:rPr lang="en-US" sz="1000" b="1" dirty="0">
                 <a:solidFill>
-                  <a:srgbClr val="2C3E50"/>
+                  <a:srgbClr val="145C2E"/>
                 </a:solidFill>
                 <a:latin typeface="SimHei" pitchFamily="34" charset="0"/>
                 <a:ea typeface="SimHei" pitchFamily="34" charset="-122"/>
@@ -10679,8 +11861,8 @@
         </p:blipFill>
         <p:spPr>
           <a:xfrm>
-            <a:off x="457200" y="1188720"/>
-            <a:ext cx="3931920" cy="3200400"/>
+            <a:off x="365760" y="1234440"/>
+            <a:ext cx="3840480" cy="2194560"/>
           </a:xfrm>
           <a:prstGeom prst="rect">
             <a:avLst/>
@@ -10689,13 +11871,84 @@
       </p:pic>
       <p:sp>
         <p:nvSpPr>
-          <p:cNvPr id="9" name="Text 6"/>
-          <p:cNvSpPr/>
-          <p:nvPr/>
-        </p:nvSpPr>
-        <p:spPr>
-          <a:xfrm>
-            <a:off x="4754880" y="914400"/>
+          <p:cNvPr id="9" name="Shape 6"/>
+          <p:cNvSpPr/>
+          <p:nvPr/>
+        </p:nvSpPr>
+        <p:spPr>
+          <a:xfrm>
+            <a:off x="365760" y="3520440"/>
+            <a:ext cx="3840480" cy="1005840"/>
+          </a:xfrm>
+          <a:prstGeom prst="roundRect">
+            <a:avLst>
+              <a:gd name="adj" fmla="val 5455"/>
+            </a:avLst>
+          </a:prstGeom>
+          <a:solidFill>
+            <a:srgbClr val="F0FFF0"/>
+          </a:solidFill>
+          <a:ln w="12700">
+            <a:solidFill>
+              <a:srgbClr val="1B7A3D"/>
+            </a:solidFill>
+            <a:prstDash val="solid"/>
+          </a:ln>
+        </p:spPr>
+      </p:sp>
+      <p:sp>
+        <p:nvSpPr>
+          <p:cNvPr id="10" name="Text 7"/>
+          <p:cNvSpPr/>
+          <p:nvPr/>
+        </p:nvSpPr>
+        <p:spPr>
+          <a:xfrm>
+            <a:off x="457200" y="3566160"/>
+            <a:ext cx="3657600" cy="914400"/>
+          </a:xfrm>
+          <a:prstGeom prst="rect">
+            <a:avLst/>
+          </a:prstGeom>
+          <a:noFill/>
+          <a:ln/>
+        </p:spPr>
+        <p:txBody>
+          <a:bodyPr wrap="square" rtlCol="0" anchor="t">
+            <a:normAutofit/>
+          </a:bodyPr>
+          <a:lstStyle/>
+          <a:p>
+            <a:pPr indent="0" marL="0">
+              <a:lnSpc>
+                <a:spcPct val="130000"/>
+              </a:lnSpc>
+              <a:buNone/>
+            </a:pPr>
+            <a:r>
+              <a:rPr lang="en-US" sz="900" dirty="0">
+                <a:solidFill>
+                  <a:srgbClr val="2C3E50"/>
+                </a:solidFill>
+                <a:latin typeface="SimSun" pitchFamily="34" charset="0"/>
+                <a:ea typeface="SimSun" pitchFamily="34" charset="-122"/>
+                <a:cs typeface="SimSun" pitchFamily="34" charset="-120"/>
+              </a:rPr>
+              <a:t>优惠券管理功能：管理员可创建满减券、折扣券等多种类型优惠券，设置使用门槛、过期时间、所需积分，管理优惠券库存。</a:t>
+            </a:r>
+            <a:endParaRPr lang="en-US" sz="900" dirty="0"/>
+          </a:p>
+        </p:txBody>
+      </p:sp>
+      <p:sp>
+        <p:nvSpPr>
+          <p:cNvPr id="11" name="Text 8"/>
+          <p:cNvSpPr/>
+          <p:nvPr/>
+        </p:nvSpPr>
+        <p:spPr>
+          <a:xfrm>
+            <a:off x="4572000" y="914400"/>
             <a:ext cx="2743200" cy="274320"/>
           </a:xfrm>
           <a:prstGeom prst="rect">
@@ -10716,7 +11969,7 @@
             <a:r>
               <a:rPr lang="en-US" sz="1000" b="1" dirty="0">
                 <a:solidFill>
-                  <a:srgbClr val="2C3E50"/>
+                  <a:srgbClr val="145C2E"/>
                 </a:solidFill>
                 <a:latin typeface="SimHei" pitchFamily="34" charset="0"/>
                 <a:ea typeface="SimHei" pitchFamily="34" charset="-122"/>
@@ -10730,7 +11983,7 @@
       </p:sp>
       <p:pic>
         <p:nvPicPr>
-          <p:cNvPr id="10" name="Image 1" descr="/workspace/assets/fig5_17_system_manage.png">    </p:cNvPr>
+          <p:cNvPr id="12" name="Image 1" descr="/workspace/assets/fig5_17_system_manage.png">    </p:cNvPr>
           <p:cNvPicPr>
             <a:picLocks noChangeAspect="1"/>
           </p:cNvPicPr>
@@ -10744,8 +11997,8 @@
         </p:blipFill>
         <p:spPr>
           <a:xfrm>
-            <a:off x="4754880" y="1188720"/>
-            <a:ext cx="3931920" cy="3200400"/>
+            <a:off x="4572000" y="1234440"/>
+            <a:ext cx="4114800" cy="2194560"/>
           </a:xfrm>
           <a:prstGeom prst="rect">
             <a:avLst/>
@@ -10754,40 +12007,72 @@
       </p:pic>
       <p:sp>
         <p:nvSpPr>
-          <p:cNvPr id="11" name="Watermark"/>
-          <p:cNvSpPr txBox="1"/>
-          <p:nvPr/>
-        </p:nvSpPr>
-        <p:spPr>
-          <a:xfrm rot="0">
-            <a:off x="6836000" y="4685500"/>
-            <a:ext cx="2200000" cy="350000"/>
-          </a:xfrm>
-          <a:prstGeom prst="rect">
-            <a:avLst/>
-          </a:prstGeom>
-          <a:noFill/>
-          <a:ln>
-            <a:noFill/>
+          <p:cNvPr id="13" name="Shape 9"/>
+          <p:cNvSpPr/>
+          <p:nvPr/>
+        </p:nvSpPr>
+        <p:spPr>
+          <a:xfrm>
+            <a:off x="4572000" y="3520440"/>
+            <a:ext cx="4114800" cy="1005840"/>
+          </a:xfrm>
+          <a:prstGeom prst="roundRect">
+            <a:avLst>
+              <a:gd name="adj" fmla="val 5455"/>
+            </a:avLst>
+          </a:prstGeom>
+          <a:solidFill>
+            <a:srgbClr val="FFF8F0"/>
+          </a:solidFill>
+          <a:ln w="12700">
+            <a:solidFill>
+              <a:srgbClr val="FF8C00"/>
+            </a:solidFill>
+            <a:prstDash val="solid"/>
           </a:ln>
         </p:spPr>
-        <p:txBody>
-          <a:bodyPr wrap="square" rtlCol="0" anchor="b" lIns="0" tIns="0" rIns="91440" bIns="45720"/>
-          <a:lstStyle/>
-          <a:p>
-            <a:pPr algn="r"/>
-            <a:r>
-              <a:rPr lang="zh-CN" sz="1600" dirty="0">
-                <a:solidFill>
-                  <a:srgbClr val="808080">
-                    <a:alpha val="19999"/>
-                  </a:srgbClr>
-                </a:solidFill>
-                <a:latin typeface="Arial"/>
-                <a:ea typeface="SimSun"/>
-              </a:rPr>
-              <a:t>TRAE AI 生成</a:t>
-            </a:r>
+      </p:sp>
+      <p:sp>
+        <p:nvSpPr>
+          <p:cNvPr id="14" name="Text 10"/>
+          <p:cNvSpPr/>
+          <p:nvPr/>
+        </p:nvSpPr>
+        <p:spPr>
+          <a:xfrm>
+            <a:off x="4663440" y="3566160"/>
+            <a:ext cx="3931920" cy="914400"/>
+          </a:xfrm>
+          <a:prstGeom prst="rect">
+            <a:avLst/>
+          </a:prstGeom>
+          <a:noFill/>
+          <a:ln/>
+        </p:spPr>
+        <p:txBody>
+          <a:bodyPr wrap="square" rtlCol="0" anchor="t">
+            <a:normAutofit/>
+          </a:bodyPr>
+          <a:lstStyle/>
+          <a:p>
+            <a:pPr indent="0" marL="0">
+              <a:lnSpc>
+                <a:spcPct val="130000"/>
+              </a:lnSpc>
+              <a:buNone/>
+            </a:pPr>
+            <a:r>
+              <a:rPr lang="en-US" sz="900" dirty="0">
+                <a:solidFill>
+                  <a:srgbClr val="2C3E50"/>
+                </a:solidFill>
+                <a:latin typeface="SimSun" pitchFamily="34" charset="0"/>
+                <a:ea typeface="SimSun" pitchFamily="34" charset="-122"/>
+                <a:cs typeface="SimSun" pitchFamily="34" charset="-120"/>
+              </a:rPr>
+              <a:t>系统管理功能：管理员可管理轮播图、系统简介等基础信息，配置系统参数，查看操作日志，保障系统安全稳定运行。</a:t>
+            </a:r>
+            <a:endParaRPr lang="en-US" sz="900" dirty="0"/>
           </a:p>
         </p:txBody>
       </p:sp>
@@ -13248,45 +14533,6 @@
           </a:p>
         </p:txBody>
       </p:sp>
-      <p:sp>
-        <p:nvSpPr>
-          <p:cNvPr id="46" name="Watermark"/>
-          <p:cNvSpPr txBox="1"/>
-          <p:nvPr/>
-        </p:nvSpPr>
-        <p:spPr>
-          <a:xfrm rot="0">
-            <a:off x="6836000" y="4685500"/>
-            <a:ext cx="2200000" cy="350000"/>
-          </a:xfrm>
-          <a:prstGeom prst="rect">
-            <a:avLst/>
-          </a:prstGeom>
-          <a:noFill/>
-          <a:ln>
-            <a:noFill/>
-          </a:ln>
-        </p:spPr>
-        <p:txBody>
-          <a:bodyPr wrap="square" rtlCol="0" anchor="b" lIns="0" tIns="0" rIns="91440" bIns="45720"/>
-          <a:lstStyle/>
-          <a:p>
-            <a:pPr algn="r"/>
-            <a:r>
-              <a:rPr lang="zh-CN" sz="1600" dirty="0">
-                <a:solidFill>
-                  <a:srgbClr val="808080">
-                    <a:alpha val="19999"/>
-                  </a:srgbClr>
-                </a:solidFill>
-                <a:latin typeface="Arial"/>
-                <a:ea typeface="SimSun"/>
-              </a:rPr>
-              <a:t>TRAE AI 生成</a:t>
-            </a:r>
-          </a:p>
-        </p:txBody>
-      </p:sp>
     </p:spTree>
   </p:cSld>
   <p:clrMapOvr>
@@ -13982,45 +15228,6 @@
           </a:p>
         </p:txBody>
       </p:sp>
-      <p:sp>
-        <p:nvSpPr>
-          <p:cNvPr id="15" name="Watermark"/>
-          <p:cNvSpPr txBox="1"/>
-          <p:nvPr/>
-        </p:nvSpPr>
-        <p:spPr>
-          <a:xfrm rot="0">
-            <a:off x="6836000" y="4685500"/>
-            <a:ext cx="2200000" cy="350000"/>
-          </a:xfrm>
-          <a:prstGeom prst="rect">
-            <a:avLst/>
-          </a:prstGeom>
-          <a:noFill/>
-          <a:ln>
-            <a:noFill/>
-          </a:ln>
-        </p:spPr>
-        <p:txBody>
-          <a:bodyPr wrap="square" rtlCol="0" anchor="b" lIns="0" tIns="0" rIns="91440" bIns="45720"/>
-          <a:lstStyle/>
-          <a:p>
-            <a:pPr algn="r"/>
-            <a:r>
-              <a:rPr lang="zh-CN" sz="1600" dirty="0">
-                <a:solidFill>
-                  <a:srgbClr val="808080">
-                    <a:alpha val="19999"/>
-                  </a:srgbClr>
-                </a:solidFill>
-                <a:latin typeface="Arial"/>
-                <a:ea typeface="SimSun"/>
-              </a:rPr>
-              <a:t>TRAE AI 生成</a:t>
-            </a:r>
-          </a:p>
-        </p:txBody>
-      </p:sp>
     </p:spTree>
   </p:cSld>
   <p:clrMapOvr>
@@ -14238,45 +15445,6 @@
           <a:ln/>
         </p:spPr>
       </p:sp>
-      <p:sp>
-        <p:nvSpPr>
-          <p:cNvPr id="7" name="Watermark"/>
-          <p:cNvSpPr txBox="1"/>
-          <p:nvPr/>
-        </p:nvSpPr>
-        <p:spPr>
-          <a:xfrm rot="0">
-            <a:off x="6836000" y="4685500"/>
-            <a:ext cx="2200000" cy="350000"/>
-          </a:xfrm>
-          <a:prstGeom prst="rect">
-            <a:avLst/>
-          </a:prstGeom>
-          <a:noFill/>
-          <a:ln>
-            <a:noFill/>
-          </a:ln>
-        </p:spPr>
-        <p:txBody>
-          <a:bodyPr wrap="square" rtlCol="0" anchor="b" lIns="0" tIns="0" rIns="91440" bIns="45720"/>
-          <a:lstStyle/>
-          <a:p>
-            <a:pPr algn="r"/>
-            <a:r>
-              <a:rPr lang="zh-CN" sz="1600" dirty="0">
-                <a:solidFill>
-                  <a:srgbClr val="808080">
-                    <a:alpha val="19999"/>
-                  </a:srgbClr>
-                </a:solidFill>
-                <a:latin typeface="Arial"/>
-                <a:ea typeface="SimSun"/>
-              </a:rPr>
-              <a:t>TRAE AI 生成</a:t>
-            </a:r>
-          </a:p>
-        </p:txBody>
-      </p:sp>
     </p:spTree>
   </p:cSld>
   <p:clrMapOvr>
@@ -14783,45 +15951,6 @@
           </a:p>
         </p:txBody>
       </p:sp>
-      <p:sp>
-        <p:nvSpPr>
-          <p:cNvPr id="16" name="Watermark"/>
-          <p:cNvSpPr txBox="1"/>
-          <p:nvPr/>
-        </p:nvSpPr>
-        <p:spPr>
-          <a:xfrm rot="0">
-            <a:off x="6836000" y="4685500"/>
-            <a:ext cx="2200000" cy="350000"/>
-          </a:xfrm>
-          <a:prstGeom prst="rect">
-            <a:avLst/>
-          </a:prstGeom>
-          <a:noFill/>
-          <a:ln>
-            <a:noFill/>
-          </a:ln>
-        </p:spPr>
-        <p:txBody>
-          <a:bodyPr wrap="square" rtlCol="0" anchor="b" lIns="0" tIns="0" rIns="91440" bIns="45720"/>
-          <a:lstStyle/>
-          <a:p>
-            <a:pPr algn="r"/>
-            <a:r>
-              <a:rPr lang="zh-CN" sz="1600" dirty="0">
-                <a:solidFill>
-                  <a:srgbClr val="808080">
-                    <a:alpha val="19999"/>
-                  </a:srgbClr>
-                </a:solidFill>
-                <a:latin typeface="Arial"/>
-                <a:ea typeface="SimSun"/>
-              </a:rPr>
-              <a:t>TRAE AI 生成</a:t>
-            </a:r>
-          </a:p>
-        </p:txBody>
-      </p:sp>
     </p:spTree>
   </p:cSld>
   <p:clrMapOvr>
@@ -15659,45 +16788,6 @@
           </a:p>
         </p:txBody>
       </p:sp>
-      <p:sp>
-        <p:nvSpPr>
-          <p:cNvPr id="25" name="Watermark"/>
-          <p:cNvSpPr txBox="1"/>
-          <p:nvPr/>
-        </p:nvSpPr>
-        <p:spPr>
-          <a:xfrm rot="0">
-            <a:off x="6836000" y="4685500"/>
-            <a:ext cx="2200000" cy="350000"/>
-          </a:xfrm>
-          <a:prstGeom prst="rect">
-            <a:avLst/>
-          </a:prstGeom>
-          <a:noFill/>
-          <a:ln>
-            <a:noFill/>
-          </a:ln>
-        </p:spPr>
-        <p:txBody>
-          <a:bodyPr wrap="square" rtlCol="0" anchor="b" lIns="0" tIns="0" rIns="91440" bIns="45720"/>
-          <a:lstStyle/>
-          <a:p>
-            <a:pPr algn="r"/>
-            <a:r>
-              <a:rPr lang="zh-CN" sz="1600" dirty="0">
-                <a:solidFill>
-                  <a:srgbClr val="808080">
-                    <a:alpha val="19999"/>
-                  </a:srgbClr>
-                </a:solidFill>
-                <a:latin typeface="Arial"/>
-                <a:ea typeface="SimSun"/>
-              </a:rPr>
-              <a:t>TRAE AI 生成</a:t>
-            </a:r>
-          </a:p>
-        </p:txBody>
-      </p:sp>
     </p:spTree>
   </p:cSld>
   <p:clrMapOvr>
@@ -16273,67 +17363,6 @@
           </a:p>
         </p:txBody>
       </p:sp>
-      <p:sp>
-        <p:nvSpPr>
-          <p:cNvPr id="15" name="Shape 13"/>
-          <p:cNvSpPr/>
-          <p:nvPr/>
-        </p:nvSpPr>
-        <p:spPr>
-          <a:xfrm>
-            <a:off x="548640" y="4617720"/>
-            <a:ext cx="8046720" cy="0"/>
-          </a:xfrm>
-          <a:prstGeom prst="roundRect">
-            <a:avLst>
-              <a:gd name="adj" fmla="val Infinity"/>
-            </a:avLst>
-          </a:prstGeom>
-          <a:solidFill>
-            <a:srgbClr val="1B7A3D"/>
-          </a:solidFill>
-          <a:ln/>
-        </p:spPr>
-      </p:sp>
-      <p:sp>
-        <p:nvSpPr>
-          <p:cNvPr id="16" name="Watermark"/>
-          <p:cNvSpPr txBox="1"/>
-          <p:nvPr/>
-        </p:nvSpPr>
-        <p:spPr>
-          <a:xfrm rot="0">
-            <a:off x="6836000" y="4685500"/>
-            <a:ext cx="2200000" cy="350000"/>
-          </a:xfrm>
-          <a:prstGeom prst="rect">
-            <a:avLst/>
-          </a:prstGeom>
-          <a:noFill/>
-          <a:ln>
-            <a:noFill/>
-          </a:ln>
-        </p:spPr>
-        <p:txBody>
-          <a:bodyPr wrap="square" rtlCol="0" anchor="b" lIns="0" tIns="0" rIns="91440" bIns="45720"/>
-          <a:lstStyle/>
-          <a:p>
-            <a:pPr algn="r"/>
-            <a:r>
-              <a:rPr lang="zh-CN" sz="1600" dirty="0">
-                <a:solidFill>
-                  <a:srgbClr val="808080">
-                    <a:alpha val="19999"/>
-                  </a:srgbClr>
-                </a:solidFill>
-                <a:latin typeface="Arial"/>
-                <a:ea typeface="SimSun"/>
-              </a:rPr>
-              <a:t>TRAE AI 生成</a:t>
-            </a:r>
-          </a:p>
-        </p:txBody>
-      </p:sp>
     </p:spTree>
   </p:cSld>
   <p:clrMapOvr>
@@ -17101,45 +18130,6 @@
           </a:p>
         </p:txBody>
       </p:sp>
-      <p:sp>
-        <p:nvSpPr>
-          <p:cNvPr id="23" name="Watermark"/>
-          <p:cNvSpPr txBox="1"/>
-          <p:nvPr/>
-        </p:nvSpPr>
-        <p:spPr>
-          <a:xfrm rot="0">
-            <a:off x="6836000" y="4685500"/>
-            <a:ext cx="2200000" cy="350000"/>
-          </a:xfrm>
-          <a:prstGeom prst="rect">
-            <a:avLst/>
-          </a:prstGeom>
-          <a:noFill/>
-          <a:ln>
-            <a:noFill/>
-          </a:ln>
-        </p:spPr>
-        <p:txBody>
-          <a:bodyPr wrap="square" rtlCol="0" anchor="b" lIns="0" tIns="0" rIns="91440" bIns="45720"/>
-          <a:lstStyle/>
-          <a:p>
-            <a:pPr algn="r"/>
-            <a:r>
-              <a:rPr lang="zh-CN" sz="1600" dirty="0">
-                <a:solidFill>
-                  <a:srgbClr val="808080">
-                    <a:alpha val="19999"/>
-                  </a:srgbClr>
-                </a:solidFill>
-                <a:latin typeface="Arial"/>
-                <a:ea typeface="SimSun"/>
-              </a:rPr>
-              <a:t>TRAE AI 生成</a:t>
-            </a:r>
-          </a:p>
-        </p:txBody>
-      </p:sp>
     </p:spTree>
   </p:cSld>
   <p:clrMapOvr>
@@ -17971,45 +18961,6 @@
           </a:p>
         </p:txBody>
       </p:sp>
-      <p:sp>
-        <p:nvSpPr>
-          <p:cNvPr id="27" name="Watermark"/>
-          <p:cNvSpPr txBox="1"/>
-          <p:nvPr/>
-        </p:nvSpPr>
-        <p:spPr>
-          <a:xfrm rot="0">
-            <a:off x="6836000" y="4685500"/>
-            <a:ext cx="2200000" cy="350000"/>
-          </a:xfrm>
-          <a:prstGeom prst="rect">
-            <a:avLst/>
-          </a:prstGeom>
-          <a:noFill/>
-          <a:ln>
-            <a:noFill/>
-          </a:ln>
-        </p:spPr>
-        <p:txBody>
-          <a:bodyPr wrap="square" rtlCol="0" anchor="b" lIns="0" tIns="0" rIns="91440" bIns="45720"/>
-          <a:lstStyle/>
-          <a:p>
-            <a:pPr algn="r"/>
-            <a:r>
-              <a:rPr lang="zh-CN" sz="1600" dirty="0">
-                <a:solidFill>
-                  <a:srgbClr val="808080">
-                    <a:alpha val="19999"/>
-                  </a:srgbClr>
-                </a:solidFill>
-                <a:latin typeface="Arial"/>
-                <a:ea typeface="SimSun"/>
-              </a:rPr>
-              <a:t>TRAE AI 生成</a:t>
-            </a:r>
-          </a:p>
-        </p:txBody>
-      </p:sp>
     </p:spTree>
   </p:cSld>
   <p:clrMapOvr>
@@ -18967,45 +19918,6 @@
           </a:p>
         </p:txBody>
       </p:sp>
-      <p:sp>
-        <p:nvSpPr>
-          <p:cNvPr id="28" name="Watermark"/>
-          <p:cNvSpPr txBox="1"/>
-          <p:nvPr/>
-        </p:nvSpPr>
-        <p:spPr>
-          <a:xfrm rot="0">
-            <a:off x="6836000" y="4685500"/>
-            <a:ext cx="2200000" cy="350000"/>
-          </a:xfrm>
-          <a:prstGeom prst="rect">
-            <a:avLst/>
-          </a:prstGeom>
-          <a:noFill/>
-          <a:ln>
-            <a:noFill/>
-          </a:ln>
-        </p:spPr>
-        <p:txBody>
-          <a:bodyPr wrap="square" rtlCol="0" anchor="b" lIns="0" tIns="0" rIns="91440" bIns="45720"/>
-          <a:lstStyle/>
-          <a:p>
-            <a:pPr algn="r"/>
-            <a:r>
-              <a:rPr lang="zh-CN" sz="1600" dirty="0">
-                <a:solidFill>
-                  <a:srgbClr val="808080">
-                    <a:alpha val="19999"/>
-                  </a:srgbClr>
-                </a:solidFill>
-                <a:latin typeface="Arial"/>
-                <a:ea typeface="SimSun"/>
-              </a:rPr>
-              <a:t>TRAE AI 生成</a:t>
-            </a:r>
-          </a:p>
-        </p:txBody>
-      </p:sp>
     </p:spTree>
   </p:cSld>
   <p:clrMapOvr>
@@ -19209,8 +20121,8 @@
         </p:nvSpPr>
         <p:spPr>
           <a:xfrm>
-            <a:off x="548640" y="960120"/>
-            <a:ext cx="3840480" cy="320040"/>
+            <a:off x="457200" y="914400"/>
+            <a:ext cx="2286000" cy="274320"/>
           </a:xfrm>
           <a:prstGeom prst="rect">
             <a:avLst/>
@@ -19230,7 +20142,7 @@
             <a:r>
               <a:rPr lang="en-US" sz="1100" b="1" dirty="0">
                 <a:solidFill>
-                  <a:srgbClr val="2C3E50"/>
+                  <a:srgbClr val="145C2E"/>
                 </a:solidFill>
                 <a:latin typeface="SimHei" pitchFamily="34" charset="0"/>
                 <a:ea typeface="SimHei" pitchFamily="34" charset="-122"/>
@@ -19258,8 +20170,8 @@
         </p:blipFill>
         <p:spPr>
           <a:xfrm>
-            <a:off x="548640" y="1280160"/>
-            <a:ext cx="3840480" cy="1371600"/>
+            <a:off x="365760" y="1234440"/>
+            <a:ext cx="4023360" cy="1280160"/>
           </a:xfrm>
           <a:prstGeom prst="rect">
             <a:avLst/>
@@ -19268,14 +20180,41 @@
       </p:pic>
       <p:sp>
         <p:nvSpPr>
-          <p:cNvPr id="9" name="Text 6"/>
-          <p:cNvSpPr/>
-          <p:nvPr/>
-        </p:nvSpPr>
-        <p:spPr>
-          <a:xfrm>
-            <a:off x="4754880" y="960120"/>
-            <a:ext cx="3840480" cy="320040"/>
+          <p:cNvPr id="9" name="Shape 6"/>
+          <p:cNvSpPr/>
+          <p:nvPr/>
+        </p:nvSpPr>
+        <p:spPr>
+          <a:xfrm>
+            <a:off x="365760" y="2606040"/>
+            <a:ext cx="4023360" cy="1920240"/>
+          </a:xfrm>
+          <a:prstGeom prst="roundRect">
+            <a:avLst>
+              <a:gd name="adj" fmla="val 3810"/>
+            </a:avLst>
+          </a:prstGeom>
+          <a:solidFill>
+            <a:srgbClr val="F0FFF0"/>
+          </a:solidFill>
+          <a:ln w="12700">
+            <a:solidFill>
+              <a:srgbClr val="1B7A3D"/>
+            </a:solidFill>
+            <a:prstDash val="solid"/>
+          </a:ln>
+        </p:spPr>
+      </p:sp>
+      <p:sp>
+        <p:nvSpPr>
+          <p:cNvPr id="10" name="Text 7"/>
+          <p:cNvSpPr/>
+          <p:nvPr/>
+        </p:nvSpPr>
+        <p:spPr>
+          <a:xfrm>
+            <a:off x="502920" y="2697480"/>
+            <a:ext cx="3749040" cy="274320"/>
           </a:xfrm>
           <a:prstGeom prst="rect">
             <a:avLst/>
@@ -19293,14 +20232,99 @@
               <a:buNone/>
             </a:pPr>
             <a:r>
-              <a:rPr lang="en-US" sz="1100" b="1" dirty="0">
-                <a:solidFill>
-                  <a:srgbClr val="2C3E50"/>
+              <a:rPr lang="en-US" sz="1000" b="1" dirty="0">
+                <a:solidFill>
+                  <a:srgbClr val="145C2E"/>
                 </a:solidFill>
                 <a:latin typeface="SimHei" pitchFamily="34" charset="0"/>
                 <a:ea typeface="SimHei" pitchFamily="34" charset="-122"/>
                 <a:cs typeface="SimHei" pitchFamily="34" charset="-120"/>
               </a:rPr>
+              <a:t>说明：</a:t>
+            </a:r>
+            <a:endParaRPr lang="en-US" sz="1000" dirty="0"/>
+          </a:p>
+        </p:txBody>
+      </p:sp>
+      <p:sp>
+        <p:nvSpPr>
+          <p:cNvPr id="11" name="Text 8"/>
+          <p:cNvSpPr/>
+          <p:nvPr/>
+        </p:nvSpPr>
+        <p:spPr>
+          <a:xfrm>
+            <a:off x="502920" y="2971800"/>
+            <a:ext cx="3749040" cy="1463040"/>
+          </a:xfrm>
+          <a:prstGeom prst="rect">
+            <a:avLst/>
+          </a:prstGeom>
+          <a:noFill/>
+          <a:ln/>
+        </p:spPr>
+        <p:txBody>
+          <a:bodyPr wrap="square" rtlCol="0" anchor="t">
+            <a:normAutofit/>
+          </a:bodyPr>
+          <a:lstStyle/>
+          <a:p>
+            <a:pPr indent="0" marL="0">
+              <a:lnSpc>
+                <a:spcPct val="140000"/>
+              </a:lnSpc>
+              <a:buNone/>
+            </a:pPr>
+            <a:r>
+              <a:rPr lang="en-US" sz="950" dirty="0">
+                <a:solidFill>
+                  <a:srgbClr val="2C3E50"/>
+                </a:solidFill>
+                <a:latin typeface="SimSun" pitchFamily="34" charset="0"/>
+                <a:ea typeface="SimSun" pitchFamily="34" charset="-122"/>
+                <a:cs typeface="SimSun" pitchFamily="34" charset="-120"/>
+              </a:rPr>
+              <a:t>顶层数据流图展示系统与外部实体的交互关系。系统核心外部实体为管理员与普通用户，清晰呈现两类角色与系统间的核心信息交互，包括商品管理、订单处理、用户认证等数据流向。</a:t>
+            </a:r>
+            <a:endParaRPr lang="en-US" sz="950" dirty="0"/>
+          </a:p>
+        </p:txBody>
+      </p:sp>
+      <p:sp>
+        <p:nvSpPr>
+          <p:cNvPr id="12" name="Text 9"/>
+          <p:cNvSpPr/>
+          <p:nvPr/>
+        </p:nvSpPr>
+        <p:spPr>
+          <a:xfrm>
+            <a:off x="4663440" y="914400"/>
+            <a:ext cx="2286000" cy="274320"/>
+          </a:xfrm>
+          <a:prstGeom prst="rect">
+            <a:avLst/>
+          </a:prstGeom>
+          <a:noFill/>
+          <a:ln/>
+        </p:spPr>
+        <p:txBody>
+          <a:bodyPr wrap="square" rtlCol="0" anchor="ctr">
+            <a:normAutofit/>
+          </a:bodyPr>
+          <a:lstStyle/>
+          <a:p>
+            <a:pPr indent="0" marL="0">
+              <a:buNone/>
+            </a:pPr>
+            <a:r>
+              <a:rPr lang="en-US" sz="1100" b="1" dirty="0">
+                <a:solidFill>
+                  <a:srgbClr val="145C2E"/>
+                </a:solidFill>
+                <a:latin typeface="SimHei" pitchFamily="34" charset="0"/>
+                <a:ea typeface="SimHei" pitchFamily="34" charset="-122"/>
+                <a:cs typeface="SimHei" pitchFamily="34" charset="-120"/>
+              </a:rPr>
               <a:t>图3-2 系统一层数据流图</a:t>
             </a:r>
             <a:endParaRPr lang="en-US" sz="1100" dirty="0"/>
@@ -19309,7 +20333,7 @@
       </p:sp>
       <p:pic>
         <p:nvPicPr>
-          <p:cNvPr id="10" name="Image 1" descr="/workspace/assets/fig3_2_dataflow_layer1.png">    </p:cNvPr>
+          <p:cNvPr id="13" name="Image 1" descr="/workspace/assets/fig3_2_dataflow_layer1.png">    </p:cNvPr>
           <p:cNvPicPr>
             <a:picLocks noChangeAspect="1"/>
           </p:cNvPicPr>
@@ -19323,8 +20347,8 @@
         </p:blipFill>
         <p:spPr>
           <a:xfrm>
-            <a:off x="4572000" y="1280160"/>
-            <a:ext cx="4206240" cy="3200400"/>
+            <a:off x="4572000" y="1234440"/>
+            <a:ext cx="4206240" cy="1280160"/>
           </a:xfrm>
           <a:prstGeom prst="rect">
             <a:avLst/>
@@ -19333,40 +20357,113 @@
       </p:pic>
       <p:sp>
         <p:nvSpPr>
-          <p:cNvPr id="11" name="Watermark"/>
-          <p:cNvSpPr txBox="1"/>
-          <p:nvPr/>
-        </p:nvSpPr>
-        <p:spPr>
-          <a:xfrm rot="0">
-            <a:off x="6836000" y="4685500"/>
-            <a:ext cx="2200000" cy="350000"/>
-          </a:xfrm>
-          <a:prstGeom prst="rect">
-            <a:avLst/>
-          </a:prstGeom>
-          <a:noFill/>
-          <a:ln>
-            <a:noFill/>
+          <p:cNvPr id="14" name="Shape 10"/>
+          <p:cNvSpPr/>
+          <p:nvPr/>
+        </p:nvSpPr>
+        <p:spPr>
+          <a:xfrm>
+            <a:off x="4572000" y="2606040"/>
+            <a:ext cx="4206240" cy="1920240"/>
+          </a:xfrm>
+          <a:prstGeom prst="roundRect">
+            <a:avLst>
+              <a:gd name="adj" fmla="val 3810"/>
+            </a:avLst>
+          </a:prstGeom>
+          <a:solidFill>
+            <a:srgbClr val="FFF8F0"/>
+          </a:solidFill>
+          <a:ln w="12700">
+            <a:solidFill>
+              <a:srgbClr val="FF8C00"/>
+            </a:solidFill>
+            <a:prstDash val="solid"/>
           </a:ln>
         </p:spPr>
-        <p:txBody>
-          <a:bodyPr wrap="square" rtlCol="0" anchor="b" lIns="0" tIns="0" rIns="91440" bIns="45720"/>
-          <a:lstStyle/>
-          <a:p>
-            <a:pPr algn="r"/>
-            <a:r>
-              <a:rPr lang="zh-CN" sz="1600" dirty="0">
-                <a:solidFill>
-                  <a:srgbClr val="808080">
-                    <a:alpha val="19999"/>
-                  </a:srgbClr>
-                </a:solidFill>
-                <a:latin typeface="Arial"/>
-                <a:ea typeface="SimSun"/>
-              </a:rPr>
-              <a:t>TRAE AI 生成</a:t>
-            </a:r>
+      </p:sp>
+      <p:sp>
+        <p:nvSpPr>
+          <p:cNvPr id="15" name="Text 11"/>
+          <p:cNvSpPr/>
+          <p:nvPr/>
+        </p:nvSpPr>
+        <p:spPr>
+          <a:xfrm>
+            <a:off x="4709160" y="2697480"/>
+            <a:ext cx="3931920" cy="274320"/>
+          </a:xfrm>
+          <a:prstGeom prst="rect">
+            <a:avLst/>
+          </a:prstGeom>
+          <a:noFill/>
+          <a:ln/>
+        </p:spPr>
+        <p:txBody>
+          <a:bodyPr wrap="square" rtlCol="0" anchor="ctr">
+            <a:normAutofit/>
+          </a:bodyPr>
+          <a:lstStyle/>
+          <a:p>
+            <a:pPr indent="0" marL="0">
+              <a:buNone/>
+            </a:pPr>
+            <a:r>
+              <a:rPr lang="en-US" sz="1000" b="1" dirty="0">
+                <a:solidFill>
+                  <a:srgbClr val="FF8C00"/>
+                </a:solidFill>
+                <a:latin typeface="SimHei" pitchFamily="34" charset="0"/>
+                <a:ea typeface="SimHei" pitchFamily="34" charset="-122"/>
+                <a:cs typeface="SimHei" pitchFamily="34" charset="-120"/>
+              </a:rPr>
+              <a:t>说明：</a:t>
+            </a:r>
+            <a:endParaRPr lang="en-US" sz="1000" dirty="0"/>
+          </a:p>
+        </p:txBody>
+      </p:sp>
+      <p:sp>
+        <p:nvSpPr>
+          <p:cNvPr id="16" name="Text 12"/>
+          <p:cNvSpPr/>
+          <p:nvPr/>
+        </p:nvSpPr>
+        <p:spPr>
+          <a:xfrm>
+            <a:off x="4709160" y="2971800"/>
+            <a:ext cx="3931920" cy="1463040"/>
+          </a:xfrm>
+          <a:prstGeom prst="rect">
+            <a:avLst/>
+          </a:prstGeom>
+          <a:noFill/>
+          <a:ln/>
+        </p:spPr>
+        <p:txBody>
+          <a:bodyPr wrap="square" rtlCol="0" anchor="t">
+            <a:normAutofit/>
+          </a:bodyPr>
+          <a:lstStyle/>
+          <a:p>
+            <a:pPr indent="0" marL="0">
+              <a:lnSpc>
+                <a:spcPct val="140000"/>
+              </a:lnSpc>
+              <a:buNone/>
+            </a:pPr>
+            <a:r>
+              <a:rPr lang="en-US" sz="950" dirty="0">
+                <a:solidFill>
+                  <a:srgbClr val="2C3E50"/>
+                </a:solidFill>
+                <a:latin typeface="SimSun" pitchFamily="34" charset="0"/>
+                <a:ea typeface="SimSun" pitchFamily="34" charset="-122"/>
+                <a:cs typeface="SimSun" pitchFamily="34" charset="-120"/>
+              </a:rPr>
+              <a:t>一层数据流图将系统拆分为五大核心处理过程：用户权限管理、商品库存管理、订单交易管理、营销公告管理、系统数据管理，明确了各过程间的数据流转关系与数据存储节点。</a:t>
+            </a:r>
+            <a:endParaRPr lang="en-US" sz="950" dirty="0"/>
           </a:p>
         </p:txBody>
       </p:sp>

--- a/生鲜超市综合管理系统_毕业答辩PPT.pptx
+++ b/生鲜超市综合管理系统_毕业答辩PPT.pptx
@@ -4331,24 +4331,24 @@
         </p:nvSpPr>
         <p:spPr>
           <a:xfrm>
-            <a:off x="457200" y="320040"/>
-            <a:ext cx="8229600" cy="457200"/>
-          </a:xfrm>
-          <a:prstGeom prst="rect">
-            <a:avLst/>
-          </a:prstGeom>
-          <a:noFill/>
-          <a:ln/>
-        </p:spPr>
-        <p:txBody>
-          <a:bodyPr wrap="square" rtlCol="0" anchor="ctr"/>
-          <a:lstStyle/>
-          <a:p>
-            <a:pPr indent="0" marL="0">
-              <a:buNone/>
-            </a:pPr>
-            <a:r>
-              <a:rPr lang="en-US" sz="2200" b="1" dirty="0">
+            <a:off x="457200" y="274320"/>
+            <a:ext cx="8229600" cy="411480"/>
+          </a:xfrm>
+          <a:prstGeom prst="rect">
+            <a:avLst/>
+          </a:prstGeom>
+          <a:noFill/>
+          <a:ln/>
+        </p:spPr>
+        <p:txBody>
+          <a:bodyPr wrap="square" rtlCol="0" anchor="ctr"/>
+          <a:lstStyle/>
+          <a:p>
+            <a:pPr indent="0" marL="0">
+              <a:buNone/>
+            </a:pPr>
+            <a:r>
+              <a:rPr lang="en-US" sz="2000" b="1" dirty="0">
                 <a:solidFill>
                   <a:srgbClr val="1E3A5F"/>
                 </a:solidFill>
@@ -4358,7 +4358,7 @@
               </a:rPr>
               <a:t>图3-1 顶层数据流图</a:t>
             </a:r>
-            <a:endParaRPr lang="en-US" sz="2200" dirty="0"/>
+            <a:endParaRPr lang="en-US" sz="2000" dirty="0"/>
           </a:p>
         </p:txBody>
       </p:sp>
@@ -4370,8 +4370,8 @@
         </p:nvSpPr>
         <p:spPr>
           <a:xfrm>
-            <a:off x="457200" y="777240"/>
-            <a:ext cx="1371600" cy="27432"/>
+            <a:off x="457200" y="685800"/>
+            <a:ext cx="1097280" cy="27432"/>
           </a:xfrm>
           <a:prstGeom prst="rect">
             <a:avLst/>
@@ -4390,12 +4390,12 @@
         </p:nvSpPr>
         <p:spPr>
           <a:xfrm>
-            <a:off x="365760" y="1005840"/>
-            <a:ext cx="4572000" cy="3657600"/>
+            <a:off x="365760" y="914400"/>
+            <a:ext cx="8412480" cy="2286000"/>
           </a:xfrm>
           <a:prstGeom prst="roundRect">
             <a:avLst>
-              <a:gd name="adj" fmla="val 2500"/>
+              <a:gd name="adj" fmla="val 3200"/>
             </a:avLst>
           </a:prstGeom>
           <a:solidFill>
@@ -4403,8 +4403,8 @@
           </a:solidFill>
           <a:ln/>
           <a:effectLst>
-            <a:outerShdw sx="100000" sy="100000" kx="0" ky="0" algn="bl" rotWithShape="0" blurRad="50800" dist="25400" dir="16200000">
-              <a:srgbClr val="00000015">
+            <a:outerShdw sx="100000" sy="100000" kx="0" ky="0" algn="bl" rotWithShape="0" blurRad="38100" dist="12700" dir="16200000">
+              <a:srgbClr val="00000010">
                 <a:alpha val="75000"/>
               </a:srgbClr>
             </a:outerShdw>
@@ -4427,8 +4427,8 @@
         </p:blipFill>
         <p:spPr>
           <a:xfrm>
-            <a:off x="457200" y="1097280"/>
-            <a:ext cx="4389120" cy="3474720"/>
+            <a:off x="457200" y="1005840"/>
+            <a:ext cx="8229600" cy="2103120"/>
           </a:xfrm>
           <a:prstGeom prst="rect">
             <a:avLst/>
@@ -4443,12 +4443,12 @@
         </p:nvSpPr>
         <p:spPr>
           <a:xfrm>
-            <a:off x="5120640" y="1005840"/>
-            <a:ext cx="3657600" cy="3657600"/>
+            <a:off x="365760" y="3337560"/>
+            <a:ext cx="8412480" cy="1417320"/>
           </a:xfrm>
           <a:prstGeom prst="roundRect">
             <a:avLst>
-              <a:gd name="adj" fmla="val 2500"/>
+              <a:gd name="adj" fmla="val 5161"/>
             </a:avLst>
           </a:prstGeom>
           <a:solidFill>
@@ -4456,8 +4456,8 @@
           </a:solidFill>
           <a:ln/>
           <a:effectLst>
-            <a:outerShdw sx="100000" sy="100000" kx="0" ky="0" algn="bl" rotWithShape="0" blurRad="50800" dist="25400" dir="16200000">
-              <a:srgbClr val="00000015">
+            <a:outerShdw sx="100000" sy="100000" kx="0" ky="0" algn="bl" rotWithShape="0" blurRad="38100" dist="12700" dir="16200000">
+              <a:srgbClr val="00000010">
                 <a:alpha val="75000"/>
               </a:srgbClr>
             </a:outerShdw>
@@ -4472,14 +4472,14 @@
         </p:nvSpPr>
         <p:spPr>
           <a:xfrm>
-            <a:off x="5120640" y="1005840"/>
-            <a:ext cx="3657600" cy="457200"/>
-          </a:xfrm>
-          <a:prstGeom prst="rect">
-            <a:avLst/>
-          </a:prstGeom>
-          <a:solidFill>
-            <a:srgbClr val="1E3A5F"/>
+            <a:off x="365760" y="3337560"/>
+            <a:ext cx="54864" cy="1417320"/>
+          </a:xfrm>
+          <a:prstGeom prst="rect">
+            <a:avLst/>
+          </a:prstGeom>
+          <a:solidFill>
+            <a:srgbClr val="C9A227"/>
           </a:solidFill>
           <a:ln/>
         </p:spPr>
@@ -4492,26 +4492,26 @@
         </p:nvSpPr>
         <p:spPr>
           <a:xfrm>
-            <a:off x="5120640" y="1005840"/>
-            <a:ext cx="3657600" cy="457200"/>
-          </a:xfrm>
-          <a:prstGeom prst="rect">
-            <a:avLst/>
-          </a:prstGeom>
-          <a:noFill/>
-          <a:ln/>
-        </p:spPr>
-        <p:txBody>
-          <a:bodyPr wrap="square" rtlCol="0" anchor="ctr"/>
-          <a:lstStyle/>
-          <a:p>
-            <a:pPr algn="ctr" indent="0" marL="0">
-              <a:buNone/>
-            </a:pPr>
-            <a:r>
-              <a:rPr lang="en-US" sz="1400" b="1" dirty="0">
-                <a:solidFill>
-                  <a:srgbClr val="FFFFFF"/>
+            <a:off x="548640" y="3429000"/>
+            <a:ext cx="1828800" cy="320040"/>
+          </a:xfrm>
+          <a:prstGeom prst="rect">
+            <a:avLst/>
+          </a:prstGeom>
+          <a:noFill/>
+          <a:ln/>
+        </p:spPr>
+        <p:txBody>
+          <a:bodyPr wrap="square" rtlCol="0" anchor="ctr"/>
+          <a:lstStyle/>
+          <a:p>
+            <a:pPr indent="0" marL="0">
+              <a:buNone/>
+            </a:pPr>
+            <a:r>
+              <a:rPr lang="en-US" sz="1300" b="1" dirty="0">
+                <a:solidFill>
+                  <a:srgbClr val="1E3A5F"/>
                 </a:solidFill>
                 <a:latin typeface="SimHei" pitchFamily="34" charset="0"/>
                 <a:ea typeface="SimHei" pitchFamily="34" charset="-122"/>
@@ -4519,7 +4519,7 @@
               </a:rPr>
               <a:t>功能说明</a:t>
             </a:r>
-            <a:endParaRPr lang="en-US" sz="1400" dirty="0"/>
+            <a:endParaRPr lang="en-US" sz="1300" dirty="0"/>
           </a:p>
         </p:txBody>
       </p:sp>
@@ -4531,8 +4531,8 @@
         </p:nvSpPr>
         <p:spPr>
           <a:xfrm>
-            <a:off x="5303520" y="1600200"/>
-            <a:ext cx="3291840" cy="731520"/>
+            <a:off x="548640" y="3749040"/>
+            <a:ext cx="8046720" cy="365760"/>
           </a:xfrm>
           <a:prstGeom prst="rect">
             <a:avLst/>
@@ -4545,13 +4545,10 @@
           <a:lstStyle/>
           <a:p>
             <a:pPr indent="0" marL="0">
-              <a:lnSpc>
-                <a:spcPct val="140000"/>
-              </a:lnSpc>
-              <a:buNone/>
-            </a:pPr>
-            <a:r>
-              <a:rPr lang="en-US" sz="1100" dirty="0">
+              <a:buNone/>
+            </a:pPr>
+            <a:r>
+              <a:rPr lang="en-US" sz="1000" dirty="0">
                 <a:solidFill>
                   <a:srgbClr val="2C3E50"/>
                 </a:solidFill>
@@ -4561,56 +4558,36 @@
               </a:rPr>
               <a:t>顶层数据流图展示系统与外部实体的交互关系，清晰呈现两类角色与系统间的核心信息交互。</a:t>
             </a:r>
-            <a:endParaRPr lang="en-US" sz="1100" dirty="0"/>
-          </a:p>
-        </p:txBody>
-      </p:sp>
-      <p:sp>
-        <p:nvSpPr>
-          <p:cNvPr id="11" name="Shape 8"/>
-          <p:cNvSpPr/>
-          <p:nvPr/>
-        </p:nvSpPr>
-        <p:spPr>
-          <a:xfrm>
-            <a:off x="5303520" y="2331720"/>
-            <a:ext cx="3291840" cy="18288"/>
-          </a:xfrm>
-          <a:prstGeom prst="rect">
-            <a:avLst/>
-          </a:prstGeom>
-          <a:solidFill>
-            <a:srgbClr val="E9ECEF"/>
-          </a:solidFill>
-          <a:ln/>
-        </p:spPr>
-      </p:sp>
-      <p:sp>
-        <p:nvSpPr>
-          <p:cNvPr id="12" name="Text 9"/>
-          <p:cNvSpPr/>
-          <p:nvPr/>
-        </p:nvSpPr>
-        <p:spPr>
-          <a:xfrm>
-            <a:off x="5303520" y="2468880"/>
-            <a:ext cx="3291840" cy="411480"/>
-          </a:xfrm>
-          <a:prstGeom prst="rect">
-            <a:avLst/>
-          </a:prstGeom>
-          <a:noFill/>
-          <a:ln/>
-        </p:spPr>
-        <p:txBody>
-          <a:bodyPr wrap="square" rtlCol="0" anchor="ctr"/>
-          <a:lstStyle/>
-          <a:p>
-            <a:pPr indent="0" marL="0">
-              <a:buNone/>
-            </a:pPr>
-            <a:r>
-              <a:rPr lang="en-US" sz="1000" dirty="0">
+            <a:endParaRPr lang="en-US" sz="1000" dirty="0"/>
+          </a:p>
+        </p:txBody>
+      </p:sp>
+      <p:sp>
+        <p:nvSpPr>
+          <p:cNvPr id="11" name="Text 8"/>
+          <p:cNvSpPr/>
+          <p:nvPr/>
+        </p:nvSpPr>
+        <p:spPr>
+          <a:xfrm>
+            <a:off x="548640" y="4160520"/>
+            <a:ext cx="2011680" cy="274320"/>
+          </a:xfrm>
+          <a:prstGeom prst="rect">
+            <a:avLst/>
+          </a:prstGeom>
+          <a:noFill/>
+          <a:ln/>
+        </p:spPr>
+        <p:txBody>
+          <a:bodyPr wrap="square" rtlCol="0" anchor="ctr"/>
+          <a:lstStyle/>
+          <a:p>
+            <a:pPr indent="0" marL="0">
+              <a:buNone/>
+            </a:pPr>
+            <a:r>
+              <a:rPr lang="en-US" sz="900" dirty="0">
                 <a:solidFill>
                   <a:srgbClr val="2C3E50"/>
                 </a:solidFill>
@@ -4620,36 +4597,36 @@
               </a:rPr>
               <a:t>✓ 管理员与用户为系统核心外部实体</a:t>
             </a:r>
-            <a:endParaRPr lang="en-US" sz="1000" dirty="0"/>
-          </a:p>
-        </p:txBody>
-      </p:sp>
-      <p:sp>
-        <p:nvSpPr>
-          <p:cNvPr id="13" name="Text 10"/>
-          <p:cNvSpPr/>
-          <p:nvPr/>
-        </p:nvSpPr>
-        <p:spPr>
-          <a:xfrm>
-            <a:off x="5303520" y="2926080"/>
-            <a:ext cx="3291840" cy="411480"/>
-          </a:xfrm>
-          <a:prstGeom prst="rect">
-            <a:avLst/>
-          </a:prstGeom>
-          <a:noFill/>
-          <a:ln/>
-        </p:spPr>
-        <p:txBody>
-          <a:bodyPr wrap="square" rtlCol="0" anchor="ctr"/>
-          <a:lstStyle/>
-          <a:p>
-            <a:pPr indent="0" marL="0">
-              <a:buNone/>
-            </a:pPr>
-            <a:r>
-              <a:rPr lang="en-US" sz="1000" dirty="0">
+            <a:endParaRPr lang="en-US" sz="900" dirty="0"/>
+          </a:p>
+        </p:txBody>
+      </p:sp>
+      <p:sp>
+        <p:nvSpPr>
+          <p:cNvPr id="12" name="Text 9"/>
+          <p:cNvSpPr/>
+          <p:nvPr/>
+        </p:nvSpPr>
+        <p:spPr>
+          <a:xfrm>
+            <a:off x="2651760" y="4160520"/>
+            <a:ext cx="2011680" cy="274320"/>
+          </a:xfrm>
+          <a:prstGeom prst="rect">
+            <a:avLst/>
+          </a:prstGeom>
+          <a:noFill/>
+          <a:ln/>
+        </p:spPr>
+        <p:txBody>
+          <a:bodyPr wrap="square" rtlCol="0" anchor="ctr"/>
+          <a:lstStyle/>
+          <a:p>
+            <a:pPr indent="0" marL="0">
+              <a:buNone/>
+            </a:pPr>
+            <a:r>
+              <a:rPr lang="en-US" sz="900" dirty="0">
                 <a:solidFill>
                   <a:srgbClr val="2C3E50"/>
                 </a:solidFill>
@@ -4659,36 +4636,36 @@
               </a:rPr>
               <a:t>✓ 展示商品管理、订单处理等数据流向</a:t>
             </a:r>
-            <a:endParaRPr lang="en-US" sz="1000" dirty="0"/>
-          </a:p>
-        </p:txBody>
-      </p:sp>
-      <p:sp>
-        <p:nvSpPr>
-          <p:cNvPr id="14" name="Text 11"/>
-          <p:cNvSpPr/>
-          <p:nvPr/>
-        </p:nvSpPr>
-        <p:spPr>
-          <a:xfrm>
-            <a:off x="5303520" y="3383280"/>
-            <a:ext cx="3291840" cy="411480"/>
-          </a:xfrm>
-          <a:prstGeom prst="rect">
-            <a:avLst/>
-          </a:prstGeom>
-          <a:noFill/>
-          <a:ln/>
-        </p:spPr>
-        <p:txBody>
-          <a:bodyPr wrap="square" rtlCol="0" anchor="ctr"/>
-          <a:lstStyle/>
-          <a:p>
-            <a:pPr indent="0" marL="0">
-              <a:buNone/>
-            </a:pPr>
-            <a:r>
-              <a:rPr lang="en-US" sz="1000" dirty="0">
+            <a:endParaRPr lang="en-US" sz="900" dirty="0"/>
+          </a:p>
+        </p:txBody>
+      </p:sp>
+      <p:sp>
+        <p:nvSpPr>
+          <p:cNvPr id="13" name="Text 10"/>
+          <p:cNvSpPr/>
+          <p:nvPr/>
+        </p:nvSpPr>
+        <p:spPr>
+          <a:xfrm>
+            <a:off x="4754880" y="4160520"/>
+            <a:ext cx="2011680" cy="274320"/>
+          </a:xfrm>
+          <a:prstGeom prst="rect">
+            <a:avLst/>
+          </a:prstGeom>
+          <a:noFill/>
+          <a:ln/>
+        </p:spPr>
+        <p:txBody>
+          <a:bodyPr wrap="square" rtlCol="0" anchor="ctr"/>
+          <a:lstStyle/>
+          <a:p>
+            <a:pPr indent="0" marL="0">
+              <a:buNone/>
+            </a:pPr>
+            <a:r>
+              <a:rPr lang="en-US" sz="900" dirty="0">
                 <a:solidFill>
                   <a:srgbClr val="2C3E50"/>
                 </a:solidFill>
@@ -4698,7 +4675,7 @@
               </a:rPr>
               <a:t>✓ 体现系统边界与外部交互</a:t>
             </a:r>
-            <a:endParaRPr lang="en-US" sz="1000" dirty="0"/>
+            <a:endParaRPr lang="en-US" sz="900" dirty="0"/>
           </a:p>
         </p:txBody>
       </p:sp>
@@ -4762,24 +4739,24 @@
         </p:nvSpPr>
         <p:spPr>
           <a:xfrm>
-            <a:off x="457200" y="320040"/>
-            <a:ext cx="8229600" cy="457200"/>
-          </a:xfrm>
-          <a:prstGeom prst="rect">
-            <a:avLst/>
-          </a:prstGeom>
-          <a:noFill/>
-          <a:ln/>
-        </p:spPr>
-        <p:txBody>
-          <a:bodyPr wrap="square" rtlCol="0" anchor="ctr"/>
-          <a:lstStyle/>
-          <a:p>
-            <a:pPr indent="0" marL="0">
-              <a:buNone/>
-            </a:pPr>
-            <a:r>
-              <a:rPr lang="en-US" sz="2200" b="1" dirty="0">
+            <a:off x="457200" y="274320"/>
+            <a:ext cx="8229600" cy="411480"/>
+          </a:xfrm>
+          <a:prstGeom prst="rect">
+            <a:avLst/>
+          </a:prstGeom>
+          <a:noFill/>
+          <a:ln/>
+        </p:spPr>
+        <p:txBody>
+          <a:bodyPr wrap="square" rtlCol="0" anchor="ctr"/>
+          <a:lstStyle/>
+          <a:p>
+            <a:pPr indent="0" marL="0">
+              <a:buNone/>
+            </a:pPr>
+            <a:r>
+              <a:rPr lang="en-US" sz="2000" b="1" dirty="0">
                 <a:solidFill>
                   <a:srgbClr val="1E3A5F"/>
                 </a:solidFill>
@@ -4789,7 +4766,7 @@
               </a:rPr>
               <a:t>图3-2 系统一层数据流图</a:t>
             </a:r>
-            <a:endParaRPr lang="en-US" sz="2200" dirty="0"/>
+            <a:endParaRPr lang="en-US" sz="2000" dirty="0"/>
           </a:p>
         </p:txBody>
       </p:sp>
@@ -4801,8 +4778,8 @@
         </p:nvSpPr>
         <p:spPr>
           <a:xfrm>
-            <a:off x="457200" y="777240"/>
-            <a:ext cx="1371600" cy="27432"/>
+            <a:off x="457200" y="685800"/>
+            <a:ext cx="1097280" cy="27432"/>
           </a:xfrm>
           <a:prstGeom prst="rect">
             <a:avLst/>
@@ -4821,12 +4798,12 @@
         </p:nvSpPr>
         <p:spPr>
           <a:xfrm>
-            <a:off x="365760" y="1005840"/>
-            <a:ext cx="4572000" cy="3657600"/>
+            <a:off x="365760" y="914400"/>
+            <a:ext cx="8412480" cy="2286000"/>
           </a:xfrm>
           <a:prstGeom prst="roundRect">
             <a:avLst>
-              <a:gd name="adj" fmla="val 2500"/>
+              <a:gd name="adj" fmla="val 3200"/>
             </a:avLst>
           </a:prstGeom>
           <a:solidFill>
@@ -4834,8 +4811,8 @@
           </a:solidFill>
           <a:ln/>
           <a:effectLst>
-            <a:outerShdw sx="100000" sy="100000" kx="0" ky="0" algn="bl" rotWithShape="0" blurRad="50800" dist="25400" dir="16200000">
-              <a:srgbClr val="00000015">
+            <a:outerShdw sx="100000" sy="100000" kx="0" ky="0" algn="bl" rotWithShape="0" blurRad="38100" dist="12700" dir="16200000">
+              <a:srgbClr val="00000010">
                 <a:alpha val="75000"/>
               </a:srgbClr>
             </a:outerShdw>
@@ -4858,8 +4835,8 @@
         </p:blipFill>
         <p:spPr>
           <a:xfrm>
-            <a:off x="457200" y="1097280"/>
-            <a:ext cx="4389120" cy="3474720"/>
+            <a:off x="457200" y="1005840"/>
+            <a:ext cx="8229600" cy="2103120"/>
           </a:xfrm>
           <a:prstGeom prst="rect">
             <a:avLst/>
@@ -4874,12 +4851,12 @@
         </p:nvSpPr>
         <p:spPr>
           <a:xfrm>
-            <a:off x="5120640" y="1005840"/>
-            <a:ext cx="3657600" cy="3657600"/>
+            <a:off x="365760" y="3337560"/>
+            <a:ext cx="8412480" cy="1417320"/>
           </a:xfrm>
           <a:prstGeom prst="roundRect">
             <a:avLst>
-              <a:gd name="adj" fmla="val 2500"/>
+              <a:gd name="adj" fmla="val 5161"/>
             </a:avLst>
           </a:prstGeom>
           <a:solidFill>
@@ -4887,8 +4864,8 @@
           </a:solidFill>
           <a:ln/>
           <a:effectLst>
-            <a:outerShdw sx="100000" sy="100000" kx="0" ky="0" algn="bl" rotWithShape="0" blurRad="50800" dist="25400" dir="16200000">
-              <a:srgbClr val="00000015">
+            <a:outerShdw sx="100000" sy="100000" kx="0" ky="0" algn="bl" rotWithShape="0" blurRad="38100" dist="12700" dir="16200000">
+              <a:srgbClr val="00000010">
                 <a:alpha val="75000"/>
               </a:srgbClr>
             </a:outerShdw>
@@ -4903,14 +4880,14 @@
         </p:nvSpPr>
         <p:spPr>
           <a:xfrm>
-            <a:off x="5120640" y="1005840"/>
-            <a:ext cx="3657600" cy="457200"/>
-          </a:xfrm>
-          <a:prstGeom prst="rect">
-            <a:avLst/>
-          </a:prstGeom>
-          <a:solidFill>
-            <a:srgbClr val="1E3A5F"/>
+            <a:off x="365760" y="3337560"/>
+            <a:ext cx="54864" cy="1417320"/>
+          </a:xfrm>
+          <a:prstGeom prst="rect">
+            <a:avLst/>
+          </a:prstGeom>
+          <a:solidFill>
+            <a:srgbClr val="C9A227"/>
           </a:solidFill>
           <a:ln/>
         </p:spPr>
@@ -4923,26 +4900,26 @@
         </p:nvSpPr>
         <p:spPr>
           <a:xfrm>
-            <a:off x="5120640" y="1005840"/>
-            <a:ext cx="3657600" cy="457200"/>
-          </a:xfrm>
-          <a:prstGeom prst="rect">
-            <a:avLst/>
-          </a:prstGeom>
-          <a:noFill/>
-          <a:ln/>
-        </p:spPr>
-        <p:txBody>
-          <a:bodyPr wrap="square" rtlCol="0" anchor="ctr"/>
-          <a:lstStyle/>
-          <a:p>
-            <a:pPr algn="ctr" indent="0" marL="0">
-              <a:buNone/>
-            </a:pPr>
-            <a:r>
-              <a:rPr lang="en-US" sz="1400" b="1" dirty="0">
-                <a:solidFill>
-                  <a:srgbClr val="FFFFFF"/>
+            <a:off x="548640" y="3429000"/>
+            <a:ext cx="1828800" cy="320040"/>
+          </a:xfrm>
+          <a:prstGeom prst="rect">
+            <a:avLst/>
+          </a:prstGeom>
+          <a:noFill/>
+          <a:ln/>
+        </p:spPr>
+        <p:txBody>
+          <a:bodyPr wrap="square" rtlCol="0" anchor="ctr"/>
+          <a:lstStyle/>
+          <a:p>
+            <a:pPr indent="0" marL="0">
+              <a:buNone/>
+            </a:pPr>
+            <a:r>
+              <a:rPr lang="en-US" sz="1300" b="1" dirty="0">
+                <a:solidFill>
+                  <a:srgbClr val="1E3A5F"/>
                 </a:solidFill>
                 <a:latin typeface="SimHei" pitchFamily="34" charset="0"/>
                 <a:ea typeface="SimHei" pitchFamily="34" charset="-122"/>
@@ -4950,7 +4927,7 @@
               </a:rPr>
               <a:t>功能说明</a:t>
             </a:r>
-            <a:endParaRPr lang="en-US" sz="1400" dirty="0"/>
+            <a:endParaRPr lang="en-US" sz="1300" dirty="0"/>
           </a:p>
         </p:txBody>
       </p:sp>
@@ -4962,8 +4939,8 @@
         </p:nvSpPr>
         <p:spPr>
           <a:xfrm>
-            <a:off x="5303520" y="1600200"/>
-            <a:ext cx="3291840" cy="731520"/>
+            <a:off x="548640" y="3749040"/>
+            <a:ext cx="8046720" cy="365760"/>
           </a:xfrm>
           <a:prstGeom prst="rect">
             <a:avLst/>
@@ -4976,13 +4953,10 @@
           <a:lstStyle/>
           <a:p>
             <a:pPr indent="0" marL="0">
-              <a:lnSpc>
-                <a:spcPct val="140000"/>
-              </a:lnSpc>
-              <a:buNone/>
-            </a:pPr>
-            <a:r>
-              <a:rPr lang="en-US" sz="1100" dirty="0">
+              <a:buNone/>
+            </a:pPr>
+            <a:r>
+              <a:rPr lang="en-US" sz="1000" dirty="0">
                 <a:solidFill>
                   <a:srgbClr val="2C3E50"/>
                 </a:solidFill>
@@ -4992,56 +4966,36 @@
               </a:rPr>
               <a:t>一层数据流图将系统拆分为五大核心处理过程，明确各过程间的数据流转关系。</a:t>
             </a:r>
-            <a:endParaRPr lang="en-US" sz="1100" dirty="0"/>
-          </a:p>
-        </p:txBody>
-      </p:sp>
-      <p:sp>
-        <p:nvSpPr>
-          <p:cNvPr id="11" name="Shape 8"/>
-          <p:cNvSpPr/>
-          <p:nvPr/>
-        </p:nvSpPr>
-        <p:spPr>
-          <a:xfrm>
-            <a:off x="5303520" y="2331720"/>
-            <a:ext cx="3291840" cy="18288"/>
-          </a:xfrm>
-          <a:prstGeom prst="rect">
-            <a:avLst/>
-          </a:prstGeom>
-          <a:solidFill>
-            <a:srgbClr val="E9ECEF"/>
-          </a:solidFill>
-          <a:ln/>
-        </p:spPr>
-      </p:sp>
-      <p:sp>
-        <p:nvSpPr>
-          <p:cNvPr id="12" name="Text 9"/>
-          <p:cNvSpPr/>
-          <p:nvPr/>
-        </p:nvSpPr>
-        <p:spPr>
-          <a:xfrm>
-            <a:off x="5303520" y="2468880"/>
-            <a:ext cx="3291840" cy="411480"/>
-          </a:xfrm>
-          <a:prstGeom prst="rect">
-            <a:avLst/>
-          </a:prstGeom>
-          <a:noFill/>
-          <a:ln/>
-        </p:spPr>
-        <p:txBody>
-          <a:bodyPr wrap="square" rtlCol="0" anchor="ctr"/>
-          <a:lstStyle/>
-          <a:p>
-            <a:pPr indent="0" marL="0">
-              <a:buNone/>
-            </a:pPr>
-            <a:r>
-              <a:rPr lang="en-US" sz="1000" dirty="0">
+            <a:endParaRPr lang="en-US" sz="1000" dirty="0"/>
+          </a:p>
+        </p:txBody>
+      </p:sp>
+      <p:sp>
+        <p:nvSpPr>
+          <p:cNvPr id="11" name="Text 8"/>
+          <p:cNvSpPr/>
+          <p:nvPr/>
+        </p:nvSpPr>
+        <p:spPr>
+          <a:xfrm>
+            <a:off x="548640" y="4160520"/>
+            <a:ext cx="2011680" cy="274320"/>
+          </a:xfrm>
+          <a:prstGeom prst="rect">
+            <a:avLst/>
+          </a:prstGeom>
+          <a:noFill/>
+          <a:ln/>
+        </p:spPr>
+        <p:txBody>
+          <a:bodyPr wrap="square" rtlCol="0" anchor="ctr"/>
+          <a:lstStyle/>
+          <a:p>
+            <a:pPr indent="0" marL="0">
+              <a:buNone/>
+            </a:pPr>
+            <a:r>
+              <a:rPr lang="en-US" sz="900" dirty="0">
                 <a:solidFill>
                   <a:srgbClr val="2C3E50"/>
                 </a:solidFill>
@@ -5051,36 +5005,36 @@
               </a:rPr>
               <a:t>✓ 用户权限管理</a:t>
             </a:r>
-            <a:endParaRPr lang="en-US" sz="1000" dirty="0"/>
-          </a:p>
-        </p:txBody>
-      </p:sp>
-      <p:sp>
-        <p:nvSpPr>
-          <p:cNvPr id="13" name="Text 10"/>
-          <p:cNvSpPr/>
-          <p:nvPr/>
-        </p:nvSpPr>
-        <p:spPr>
-          <a:xfrm>
-            <a:off x="5303520" y="2926080"/>
-            <a:ext cx="3291840" cy="411480"/>
-          </a:xfrm>
-          <a:prstGeom prst="rect">
-            <a:avLst/>
-          </a:prstGeom>
-          <a:noFill/>
-          <a:ln/>
-        </p:spPr>
-        <p:txBody>
-          <a:bodyPr wrap="square" rtlCol="0" anchor="ctr"/>
-          <a:lstStyle/>
-          <a:p>
-            <a:pPr indent="0" marL="0">
-              <a:buNone/>
-            </a:pPr>
-            <a:r>
-              <a:rPr lang="en-US" sz="1000" dirty="0">
+            <a:endParaRPr lang="en-US" sz="900" dirty="0"/>
+          </a:p>
+        </p:txBody>
+      </p:sp>
+      <p:sp>
+        <p:nvSpPr>
+          <p:cNvPr id="12" name="Text 9"/>
+          <p:cNvSpPr/>
+          <p:nvPr/>
+        </p:nvSpPr>
+        <p:spPr>
+          <a:xfrm>
+            <a:off x="2651760" y="4160520"/>
+            <a:ext cx="2011680" cy="274320"/>
+          </a:xfrm>
+          <a:prstGeom prst="rect">
+            <a:avLst/>
+          </a:prstGeom>
+          <a:noFill/>
+          <a:ln/>
+        </p:spPr>
+        <p:txBody>
+          <a:bodyPr wrap="square" rtlCol="0" anchor="ctr"/>
+          <a:lstStyle/>
+          <a:p>
+            <a:pPr indent="0" marL="0">
+              <a:buNone/>
+            </a:pPr>
+            <a:r>
+              <a:rPr lang="en-US" sz="900" dirty="0">
                 <a:solidFill>
                   <a:srgbClr val="2C3E50"/>
                 </a:solidFill>
@@ -5090,36 +5044,36 @@
               </a:rPr>
               <a:t>✓ 商品库存管理</a:t>
             </a:r>
-            <a:endParaRPr lang="en-US" sz="1000" dirty="0"/>
-          </a:p>
-        </p:txBody>
-      </p:sp>
-      <p:sp>
-        <p:nvSpPr>
-          <p:cNvPr id="14" name="Text 11"/>
-          <p:cNvSpPr/>
-          <p:nvPr/>
-        </p:nvSpPr>
-        <p:spPr>
-          <a:xfrm>
-            <a:off x="5303520" y="3383280"/>
-            <a:ext cx="3291840" cy="411480"/>
-          </a:xfrm>
-          <a:prstGeom prst="rect">
-            <a:avLst/>
-          </a:prstGeom>
-          <a:noFill/>
-          <a:ln/>
-        </p:spPr>
-        <p:txBody>
-          <a:bodyPr wrap="square" rtlCol="0" anchor="ctr"/>
-          <a:lstStyle/>
-          <a:p>
-            <a:pPr indent="0" marL="0">
-              <a:buNone/>
-            </a:pPr>
-            <a:r>
-              <a:rPr lang="en-US" sz="1000" dirty="0">
+            <a:endParaRPr lang="en-US" sz="900" dirty="0"/>
+          </a:p>
+        </p:txBody>
+      </p:sp>
+      <p:sp>
+        <p:nvSpPr>
+          <p:cNvPr id="13" name="Text 10"/>
+          <p:cNvSpPr/>
+          <p:nvPr/>
+        </p:nvSpPr>
+        <p:spPr>
+          <a:xfrm>
+            <a:off x="4754880" y="4160520"/>
+            <a:ext cx="2011680" cy="274320"/>
+          </a:xfrm>
+          <a:prstGeom prst="rect">
+            <a:avLst/>
+          </a:prstGeom>
+          <a:noFill/>
+          <a:ln/>
+        </p:spPr>
+        <p:txBody>
+          <a:bodyPr wrap="square" rtlCol="0" anchor="ctr"/>
+          <a:lstStyle/>
+          <a:p>
+            <a:pPr indent="0" marL="0">
+              <a:buNone/>
+            </a:pPr>
+            <a:r>
+              <a:rPr lang="en-US" sz="900" dirty="0">
                 <a:solidFill>
                   <a:srgbClr val="2C3E50"/>
                 </a:solidFill>
@@ -5129,36 +5083,36 @@
               </a:rPr>
               <a:t>✓ 订单交易管理</a:t>
             </a:r>
-            <a:endParaRPr lang="en-US" sz="1000" dirty="0"/>
-          </a:p>
-        </p:txBody>
-      </p:sp>
-      <p:sp>
-        <p:nvSpPr>
-          <p:cNvPr id="15" name="Text 12"/>
-          <p:cNvSpPr/>
-          <p:nvPr/>
-        </p:nvSpPr>
-        <p:spPr>
-          <a:xfrm>
-            <a:off x="5303520" y="3840480"/>
-            <a:ext cx="3291840" cy="411480"/>
-          </a:xfrm>
-          <a:prstGeom prst="rect">
-            <a:avLst/>
-          </a:prstGeom>
-          <a:noFill/>
-          <a:ln/>
-        </p:spPr>
-        <p:txBody>
-          <a:bodyPr wrap="square" rtlCol="0" anchor="ctr"/>
-          <a:lstStyle/>
-          <a:p>
-            <a:pPr indent="0" marL="0">
-              <a:buNone/>
-            </a:pPr>
-            <a:r>
-              <a:rPr lang="en-US" sz="1000" dirty="0">
+            <a:endParaRPr lang="en-US" sz="900" dirty="0"/>
+          </a:p>
+        </p:txBody>
+      </p:sp>
+      <p:sp>
+        <p:nvSpPr>
+          <p:cNvPr id="14" name="Text 11"/>
+          <p:cNvSpPr/>
+          <p:nvPr/>
+        </p:nvSpPr>
+        <p:spPr>
+          <a:xfrm>
+            <a:off x="6858000" y="4160520"/>
+            <a:ext cx="2011680" cy="274320"/>
+          </a:xfrm>
+          <a:prstGeom prst="rect">
+            <a:avLst/>
+          </a:prstGeom>
+          <a:noFill/>
+          <a:ln/>
+        </p:spPr>
+        <p:txBody>
+          <a:bodyPr wrap="square" rtlCol="0" anchor="ctr"/>
+          <a:lstStyle/>
+          <a:p>
+            <a:pPr indent="0" marL="0">
+              <a:buNone/>
+            </a:pPr>
+            <a:r>
+              <a:rPr lang="en-US" sz="900" dirty="0">
                 <a:solidFill>
                   <a:srgbClr val="2C3E50"/>
                 </a:solidFill>
@@ -5168,36 +5122,36 @@
               </a:rPr>
               <a:t>✓ 营销公告管理</a:t>
             </a:r>
-            <a:endParaRPr lang="en-US" sz="1000" dirty="0"/>
-          </a:p>
-        </p:txBody>
-      </p:sp>
-      <p:sp>
-        <p:nvSpPr>
-          <p:cNvPr id="16" name="Text 13"/>
-          <p:cNvSpPr/>
-          <p:nvPr/>
-        </p:nvSpPr>
-        <p:spPr>
-          <a:xfrm>
-            <a:off x="5303520" y="4297680"/>
-            <a:ext cx="3291840" cy="411480"/>
-          </a:xfrm>
-          <a:prstGeom prst="rect">
-            <a:avLst/>
-          </a:prstGeom>
-          <a:noFill/>
-          <a:ln/>
-        </p:spPr>
-        <p:txBody>
-          <a:bodyPr wrap="square" rtlCol="0" anchor="ctr"/>
-          <a:lstStyle/>
-          <a:p>
-            <a:pPr indent="0" marL="0">
-              <a:buNone/>
-            </a:pPr>
-            <a:r>
-              <a:rPr lang="en-US" sz="1000" dirty="0">
+            <a:endParaRPr lang="en-US" sz="900" dirty="0"/>
+          </a:p>
+        </p:txBody>
+      </p:sp>
+      <p:sp>
+        <p:nvSpPr>
+          <p:cNvPr id="15" name="Text 12"/>
+          <p:cNvSpPr/>
+          <p:nvPr/>
+        </p:nvSpPr>
+        <p:spPr>
+          <a:xfrm>
+            <a:off x="548640" y="4480560"/>
+            <a:ext cx="2011680" cy="274320"/>
+          </a:xfrm>
+          <a:prstGeom prst="rect">
+            <a:avLst/>
+          </a:prstGeom>
+          <a:noFill/>
+          <a:ln/>
+        </p:spPr>
+        <p:txBody>
+          <a:bodyPr wrap="square" rtlCol="0" anchor="ctr"/>
+          <a:lstStyle/>
+          <a:p>
+            <a:pPr indent="0" marL="0">
+              <a:buNone/>
+            </a:pPr>
+            <a:r>
+              <a:rPr lang="en-US" sz="900" dirty="0">
                 <a:solidFill>
                   <a:srgbClr val="2C3E50"/>
                 </a:solidFill>
@@ -5207,7 +5161,7 @@
               </a:rPr>
               <a:t>✓ 系统数据管理</a:t>
             </a:r>
-            <a:endParaRPr lang="en-US" sz="1000" dirty="0"/>
+            <a:endParaRPr lang="en-US" sz="900" dirty="0"/>
           </a:p>
         </p:txBody>
       </p:sp>
@@ -5271,24 +5225,24 @@
         </p:nvSpPr>
         <p:spPr>
           <a:xfrm>
-            <a:off x="457200" y="320040"/>
-            <a:ext cx="8229600" cy="457200"/>
-          </a:xfrm>
-          <a:prstGeom prst="rect">
-            <a:avLst/>
-          </a:prstGeom>
-          <a:noFill/>
-          <a:ln/>
-        </p:spPr>
-        <p:txBody>
-          <a:bodyPr wrap="square" rtlCol="0" anchor="ctr"/>
-          <a:lstStyle/>
-          <a:p>
-            <a:pPr indent="0" marL="0">
-              <a:buNone/>
-            </a:pPr>
-            <a:r>
-              <a:rPr lang="en-US" sz="2200" b="1" dirty="0">
+            <a:off x="457200" y="274320"/>
+            <a:ext cx="8229600" cy="411480"/>
+          </a:xfrm>
+          <a:prstGeom prst="rect">
+            <a:avLst/>
+          </a:prstGeom>
+          <a:noFill/>
+          <a:ln/>
+        </p:spPr>
+        <p:txBody>
+          <a:bodyPr wrap="square" rtlCol="0" anchor="ctr"/>
+          <a:lstStyle/>
+          <a:p>
+            <a:pPr indent="0" marL="0">
+              <a:buNone/>
+            </a:pPr>
+            <a:r>
+              <a:rPr lang="en-US" sz="2000" b="1" dirty="0">
                 <a:solidFill>
                   <a:srgbClr val="1E3A5F"/>
                 </a:solidFill>
@@ -5298,7 +5252,7 @@
               </a:rPr>
               <a:t>图3-3 管理员用例图</a:t>
             </a:r>
-            <a:endParaRPr lang="en-US" sz="2200" dirty="0"/>
+            <a:endParaRPr lang="en-US" sz="2000" dirty="0"/>
           </a:p>
         </p:txBody>
       </p:sp>
@@ -5310,8 +5264,8 @@
         </p:nvSpPr>
         <p:spPr>
           <a:xfrm>
-            <a:off x="457200" y="777240"/>
-            <a:ext cx="1371600" cy="27432"/>
+            <a:off x="457200" y="685800"/>
+            <a:ext cx="1097280" cy="27432"/>
           </a:xfrm>
           <a:prstGeom prst="rect">
             <a:avLst/>
@@ -5330,12 +5284,12 @@
         </p:nvSpPr>
         <p:spPr>
           <a:xfrm>
-            <a:off x="365760" y="1005840"/>
-            <a:ext cx="4572000" cy="3657600"/>
+            <a:off x="365760" y="914400"/>
+            <a:ext cx="4114800" cy="3657600"/>
           </a:xfrm>
           <a:prstGeom prst="roundRect">
             <a:avLst>
-              <a:gd name="adj" fmla="val 2500"/>
+              <a:gd name="adj" fmla="val 2000"/>
             </a:avLst>
           </a:prstGeom>
           <a:solidFill>
@@ -5343,8 +5297,8 @@
           </a:solidFill>
           <a:ln/>
           <a:effectLst>
-            <a:outerShdw sx="100000" sy="100000" kx="0" ky="0" algn="bl" rotWithShape="0" blurRad="50800" dist="25400" dir="16200000">
-              <a:srgbClr val="00000015">
+            <a:outerShdw sx="100000" sy="100000" kx="0" ky="0" algn="bl" rotWithShape="0" blurRad="38100" dist="12700" dir="16200000">
+              <a:srgbClr val="00000010">
                 <a:alpha val="75000"/>
               </a:srgbClr>
             </a:outerShdw>
@@ -5367,8 +5321,8 @@
         </p:blipFill>
         <p:spPr>
           <a:xfrm>
-            <a:off x="457200" y="1097280"/>
-            <a:ext cx="4389120" cy="3474720"/>
+            <a:off x="457200" y="1005840"/>
+            <a:ext cx="3931920" cy="3474720"/>
           </a:xfrm>
           <a:prstGeom prst="rect">
             <a:avLst/>
@@ -5383,12 +5337,12 @@
         </p:nvSpPr>
         <p:spPr>
           <a:xfrm>
-            <a:off x="5120640" y="1005840"/>
-            <a:ext cx="3657600" cy="3657600"/>
+            <a:off x="4663440" y="914400"/>
+            <a:ext cx="4114800" cy="3657600"/>
           </a:xfrm>
           <a:prstGeom prst="roundRect">
             <a:avLst>
-              <a:gd name="adj" fmla="val 2500"/>
+              <a:gd name="adj" fmla="val 2000"/>
             </a:avLst>
           </a:prstGeom>
           <a:solidFill>
@@ -5396,8 +5350,8 @@
           </a:solidFill>
           <a:ln/>
           <a:effectLst>
-            <a:outerShdw sx="100000" sy="100000" kx="0" ky="0" algn="bl" rotWithShape="0" blurRad="50800" dist="25400" dir="16200000">
-              <a:srgbClr val="00000015">
+            <a:outerShdw sx="100000" sy="100000" kx="0" ky="0" algn="bl" rotWithShape="0" blurRad="38100" dist="12700" dir="16200000">
+              <a:srgbClr val="00000010">
                 <a:alpha val="75000"/>
               </a:srgbClr>
             </a:outerShdw>
@@ -5412,8 +5366,8 @@
         </p:nvSpPr>
         <p:spPr>
           <a:xfrm>
-            <a:off x="5120640" y="1005840"/>
-            <a:ext cx="3657600" cy="457200"/>
+            <a:off x="4663440" y="914400"/>
+            <a:ext cx="4114800" cy="457200"/>
           </a:xfrm>
           <a:prstGeom prst="rect">
             <a:avLst/>
@@ -5432,8 +5386,8 @@
         </p:nvSpPr>
         <p:spPr>
           <a:xfrm>
-            <a:off x="5120640" y="1005840"/>
-            <a:ext cx="3657600" cy="457200"/>
+            <a:off x="4663440" y="914400"/>
+            <a:ext cx="4114800" cy="457200"/>
           </a:xfrm>
           <a:prstGeom prst="rect">
             <a:avLst/>
@@ -5471,8 +5425,8 @@
         </p:nvSpPr>
         <p:spPr>
           <a:xfrm>
-            <a:off x="5303520" y="1600200"/>
-            <a:ext cx="3291840" cy="731520"/>
+            <a:off x="4846320" y="1508760"/>
+            <a:ext cx="3749040" cy="731520"/>
           </a:xfrm>
           <a:prstGeom prst="rect">
             <a:avLst/>
@@ -5491,7 +5445,7 @@
               <a:buNone/>
             </a:pPr>
             <a:r>
-              <a:rPr lang="en-US" sz="1100" dirty="0">
+              <a:rPr lang="en-US" sz="1000" dirty="0">
                 <a:solidFill>
                   <a:srgbClr val="2C3E50"/>
                 </a:solidFill>
@@ -5501,7 +5455,7 @@
               </a:rPr>
               <a:t>管理员用例图展示管理员角色的全部功能权限，涵盖系统全流程管控功能。</a:t>
             </a:r>
-            <a:endParaRPr lang="en-US" sz="1100" dirty="0"/>
+            <a:endParaRPr lang="en-US" sz="1000" dirty="0"/>
           </a:p>
         </p:txBody>
       </p:sp>
@@ -5513,8 +5467,8 @@
         </p:nvSpPr>
         <p:spPr>
           <a:xfrm>
-            <a:off x="5303520" y="2331720"/>
-            <a:ext cx="3291840" cy="18288"/>
+            <a:off x="4846320" y="2240280"/>
+            <a:ext cx="3749040" cy="18288"/>
           </a:xfrm>
           <a:prstGeom prst="rect">
             <a:avLst/>
@@ -5533,8 +5487,8 @@
         </p:nvSpPr>
         <p:spPr>
           <a:xfrm>
-            <a:off x="5303520" y="2468880"/>
-            <a:ext cx="3291840" cy="411480"/>
+            <a:off x="4846320" y="2377440"/>
+            <a:ext cx="3749040" cy="365760"/>
           </a:xfrm>
           <a:prstGeom prst="rect">
             <a:avLst/>
@@ -5572,8 +5526,8 @@
         </p:nvSpPr>
         <p:spPr>
           <a:xfrm>
-            <a:off x="5303520" y="2926080"/>
-            <a:ext cx="3291840" cy="411480"/>
+            <a:off x="4846320" y="2788920"/>
+            <a:ext cx="3749040" cy="365760"/>
           </a:xfrm>
           <a:prstGeom prst="rect">
             <a:avLst/>
@@ -5611,8 +5565,8 @@
         </p:nvSpPr>
         <p:spPr>
           <a:xfrm>
-            <a:off x="5303520" y="3383280"/>
-            <a:ext cx="3291840" cy="411480"/>
+            <a:off x="4846320" y="3200400"/>
+            <a:ext cx="3749040" cy="365760"/>
           </a:xfrm>
           <a:prstGeom prst="rect">
             <a:avLst/>
@@ -5650,8 +5604,8 @@
         </p:nvSpPr>
         <p:spPr>
           <a:xfrm>
-            <a:off x="5303520" y="3840480"/>
-            <a:ext cx="3291840" cy="411480"/>
+            <a:off x="4846320" y="3611880"/>
+            <a:ext cx="3749040" cy="365760"/>
           </a:xfrm>
           <a:prstGeom prst="rect">
             <a:avLst/>
@@ -5741,24 +5695,24 @@
         </p:nvSpPr>
         <p:spPr>
           <a:xfrm>
-            <a:off x="457200" y="320040"/>
-            <a:ext cx="8229600" cy="457200"/>
-          </a:xfrm>
-          <a:prstGeom prst="rect">
-            <a:avLst/>
-          </a:prstGeom>
-          <a:noFill/>
-          <a:ln/>
-        </p:spPr>
-        <p:txBody>
-          <a:bodyPr wrap="square" rtlCol="0" anchor="ctr"/>
-          <a:lstStyle/>
-          <a:p>
-            <a:pPr indent="0" marL="0">
-              <a:buNone/>
-            </a:pPr>
-            <a:r>
-              <a:rPr lang="en-US" sz="2200" b="1" dirty="0">
+            <a:off x="457200" y="274320"/>
+            <a:ext cx="8229600" cy="411480"/>
+          </a:xfrm>
+          <a:prstGeom prst="rect">
+            <a:avLst/>
+          </a:prstGeom>
+          <a:noFill/>
+          <a:ln/>
+        </p:spPr>
+        <p:txBody>
+          <a:bodyPr wrap="square" rtlCol="0" anchor="ctr"/>
+          <a:lstStyle/>
+          <a:p>
+            <a:pPr indent="0" marL="0">
+              <a:buNone/>
+            </a:pPr>
+            <a:r>
+              <a:rPr lang="en-US" sz="2000" b="1" dirty="0">
                 <a:solidFill>
                   <a:srgbClr val="1E3A5F"/>
                 </a:solidFill>
@@ -5768,7 +5722,7 @@
               </a:rPr>
               <a:t>图3-4 用户用例图</a:t>
             </a:r>
-            <a:endParaRPr lang="en-US" sz="2200" dirty="0"/>
+            <a:endParaRPr lang="en-US" sz="2000" dirty="0"/>
           </a:p>
         </p:txBody>
       </p:sp>
@@ -5780,8 +5734,8 @@
         </p:nvSpPr>
         <p:spPr>
           <a:xfrm>
-            <a:off x="457200" y="777240"/>
-            <a:ext cx="1371600" cy="27432"/>
+            <a:off x="457200" y="685800"/>
+            <a:ext cx="1097280" cy="27432"/>
           </a:xfrm>
           <a:prstGeom prst="rect">
             <a:avLst/>
@@ -5800,12 +5754,12 @@
         </p:nvSpPr>
         <p:spPr>
           <a:xfrm>
-            <a:off x="365760" y="1005840"/>
-            <a:ext cx="4572000" cy="3657600"/>
+            <a:off x="365760" y="914400"/>
+            <a:ext cx="8412480" cy="2286000"/>
           </a:xfrm>
           <a:prstGeom prst="roundRect">
             <a:avLst>
-              <a:gd name="adj" fmla="val 2500"/>
+              <a:gd name="adj" fmla="val 3200"/>
             </a:avLst>
           </a:prstGeom>
           <a:solidFill>
@@ -5813,8 +5767,8 @@
           </a:solidFill>
           <a:ln/>
           <a:effectLst>
-            <a:outerShdw sx="100000" sy="100000" kx="0" ky="0" algn="bl" rotWithShape="0" blurRad="50800" dist="25400" dir="16200000">
-              <a:srgbClr val="00000015">
+            <a:outerShdw sx="100000" sy="100000" kx="0" ky="0" algn="bl" rotWithShape="0" blurRad="38100" dist="12700" dir="16200000">
+              <a:srgbClr val="00000010">
                 <a:alpha val="75000"/>
               </a:srgbClr>
             </a:outerShdw>
@@ -5837,8 +5791,8 @@
         </p:blipFill>
         <p:spPr>
           <a:xfrm>
-            <a:off x="457200" y="1097280"/>
-            <a:ext cx="4389120" cy="3474720"/>
+            <a:off x="457200" y="1005840"/>
+            <a:ext cx="8229600" cy="2103120"/>
           </a:xfrm>
           <a:prstGeom prst="rect">
             <a:avLst/>
@@ -5853,12 +5807,12 @@
         </p:nvSpPr>
         <p:spPr>
           <a:xfrm>
-            <a:off x="5120640" y="1005840"/>
-            <a:ext cx="3657600" cy="3657600"/>
+            <a:off x="365760" y="3337560"/>
+            <a:ext cx="8412480" cy="1417320"/>
           </a:xfrm>
           <a:prstGeom prst="roundRect">
             <a:avLst>
-              <a:gd name="adj" fmla="val 2500"/>
+              <a:gd name="adj" fmla="val 5161"/>
             </a:avLst>
           </a:prstGeom>
           <a:solidFill>
@@ -5866,8 +5820,8 @@
           </a:solidFill>
           <a:ln/>
           <a:effectLst>
-            <a:outerShdw sx="100000" sy="100000" kx="0" ky="0" algn="bl" rotWithShape="0" blurRad="50800" dist="25400" dir="16200000">
-              <a:srgbClr val="00000015">
+            <a:outerShdw sx="100000" sy="100000" kx="0" ky="0" algn="bl" rotWithShape="0" blurRad="38100" dist="12700" dir="16200000">
+              <a:srgbClr val="00000010">
                 <a:alpha val="75000"/>
               </a:srgbClr>
             </a:outerShdw>
@@ -5882,14 +5836,14 @@
         </p:nvSpPr>
         <p:spPr>
           <a:xfrm>
-            <a:off x="5120640" y="1005840"/>
-            <a:ext cx="3657600" cy="457200"/>
-          </a:xfrm>
-          <a:prstGeom prst="rect">
-            <a:avLst/>
-          </a:prstGeom>
-          <a:solidFill>
-            <a:srgbClr val="1E3A5F"/>
+            <a:off x="365760" y="3337560"/>
+            <a:ext cx="54864" cy="1417320"/>
+          </a:xfrm>
+          <a:prstGeom prst="rect">
+            <a:avLst/>
+          </a:prstGeom>
+          <a:solidFill>
+            <a:srgbClr val="C9A227"/>
           </a:solidFill>
           <a:ln/>
         </p:spPr>
@@ -5902,26 +5856,26 @@
         </p:nvSpPr>
         <p:spPr>
           <a:xfrm>
-            <a:off x="5120640" y="1005840"/>
-            <a:ext cx="3657600" cy="457200"/>
-          </a:xfrm>
-          <a:prstGeom prst="rect">
-            <a:avLst/>
-          </a:prstGeom>
-          <a:noFill/>
-          <a:ln/>
-        </p:spPr>
-        <p:txBody>
-          <a:bodyPr wrap="square" rtlCol="0" anchor="ctr"/>
-          <a:lstStyle/>
-          <a:p>
-            <a:pPr algn="ctr" indent="0" marL="0">
-              <a:buNone/>
-            </a:pPr>
-            <a:r>
-              <a:rPr lang="en-US" sz="1400" b="1" dirty="0">
-                <a:solidFill>
-                  <a:srgbClr val="FFFFFF"/>
+            <a:off x="548640" y="3429000"/>
+            <a:ext cx="1828800" cy="320040"/>
+          </a:xfrm>
+          <a:prstGeom prst="rect">
+            <a:avLst/>
+          </a:prstGeom>
+          <a:noFill/>
+          <a:ln/>
+        </p:spPr>
+        <p:txBody>
+          <a:bodyPr wrap="square" rtlCol="0" anchor="ctr"/>
+          <a:lstStyle/>
+          <a:p>
+            <a:pPr indent="0" marL="0">
+              <a:buNone/>
+            </a:pPr>
+            <a:r>
+              <a:rPr lang="en-US" sz="1300" b="1" dirty="0">
+                <a:solidFill>
+                  <a:srgbClr val="1E3A5F"/>
                 </a:solidFill>
                 <a:latin typeface="SimHei" pitchFamily="34" charset="0"/>
                 <a:ea typeface="SimHei" pitchFamily="34" charset="-122"/>
@@ -5929,7 +5883,7 @@
               </a:rPr>
               <a:t>功能说明</a:t>
             </a:r>
-            <a:endParaRPr lang="en-US" sz="1400" dirty="0"/>
+            <a:endParaRPr lang="en-US" sz="1300" dirty="0"/>
           </a:p>
         </p:txBody>
       </p:sp>
@@ -5941,8 +5895,8 @@
         </p:nvSpPr>
         <p:spPr>
           <a:xfrm>
-            <a:off x="5303520" y="1600200"/>
-            <a:ext cx="3291840" cy="731520"/>
+            <a:off x="548640" y="3749040"/>
+            <a:ext cx="8046720" cy="365760"/>
           </a:xfrm>
           <a:prstGeom prst="rect">
             <a:avLst/>
@@ -5955,13 +5909,10 @@
           <a:lstStyle/>
           <a:p>
             <a:pPr indent="0" marL="0">
-              <a:lnSpc>
-                <a:spcPct val="140000"/>
-              </a:lnSpc>
-              <a:buNone/>
-            </a:pPr>
-            <a:r>
-              <a:rPr lang="en-US" sz="1100" dirty="0">
+              <a:buNone/>
+            </a:pPr>
+            <a:r>
+              <a:rPr lang="en-US" sz="1000" dirty="0">
                 <a:solidFill>
                   <a:srgbClr val="2C3E50"/>
                 </a:solidFill>
@@ -5971,56 +5922,36 @@
               </a:rPr>
               <a:t>用户用例图展示普通用户角色的全部功能，涵盖完整的购物服务流程。</a:t>
             </a:r>
-            <a:endParaRPr lang="en-US" sz="1100" dirty="0"/>
-          </a:p>
-        </p:txBody>
-      </p:sp>
-      <p:sp>
-        <p:nvSpPr>
-          <p:cNvPr id="11" name="Shape 8"/>
-          <p:cNvSpPr/>
-          <p:nvPr/>
-        </p:nvSpPr>
-        <p:spPr>
-          <a:xfrm>
-            <a:off x="5303520" y="2331720"/>
-            <a:ext cx="3291840" cy="18288"/>
-          </a:xfrm>
-          <a:prstGeom prst="rect">
-            <a:avLst/>
-          </a:prstGeom>
-          <a:solidFill>
-            <a:srgbClr val="E9ECEF"/>
-          </a:solidFill>
-          <a:ln/>
-        </p:spPr>
-      </p:sp>
-      <p:sp>
-        <p:nvSpPr>
-          <p:cNvPr id="12" name="Text 9"/>
-          <p:cNvSpPr/>
-          <p:nvPr/>
-        </p:nvSpPr>
-        <p:spPr>
-          <a:xfrm>
-            <a:off x="5303520" y="2468880"/>
-            <a:ext cx="3291840" cy="411480"/>
-          </a:xfrm>
-          <a:prstGeom prst="rect">
-            <a:avLst/>
-          </a:prstGeom>
-          <a:noFill/>
-          <a:ln/>
-        </p:spPr>
-        <p:txBody>
-          <a:bodyPr wrap="square" rtlCol="0" anchor="ctr"/>
-          <a:lstStyle/>
-          <a:p>
-            <a:pPr indent="0" marL="0">
-              <a:buNone/>
-            </a:pPr>
-            <a:r>
-              <a:rPr lang="en-US" sz="1000" dirty="0">
+            <a:endParaRPr lang="en-US" sz="1000" dirty="0"/>
+          </a:p>
+        </p:txBody>
+      </p:sp>
+      <p:sp>
+        <p:nvSpPr>
+          <p:cNvPr id="11" name="Text 8"/>
+          <p:cNvSpPr/>
+          <p:nvPr/>
+        </p:nvSpPr>
+        <p:spPr>
+          <a:xfrm>
+            <a:off x="548640" y="4160520"/>
+            <a:ext cx="2011680" cy="274320"/>
+          </a:xfrm>
+          <a:prstGeom prst="rect">
+            <a:avLst/>
+          </a:prstGeom>
+          <a:noFill/>
+          <a:ln/>
+        </p:spPr>
+        <p:txBody>
+          <a:bodyPr wrap="square" rtlCol="0" anchor="ctr"/>
+          <a:lstStyle/>
+          <a:p>
+            <a:pPr indent="0" marL="0">
+              <a:buNone/>
+            </a:pPr>
+            <a:r>
+              <a:rPr lang="en-US" sz="900" dirty="0">
                 <a:solidFill>
                   <a:srgbClr val="2C3E50"/>
                 </a:solidFill>
@@ -6030,36 +5961,36 @@
               </a:rPr>
               <a:t>✓ 商品浏览、在线购买</a:t>
             </a:r>
-            <a:endParaRPr lang="en-US" sz="1000" dirty="0"/>
-          </a:p>
-        </p:txBody>
-      </p:sp>
-      <p:sp>
-        <p:nvSpPr>
-          <p:cNvPr id="13" name="Text 10"/>
-          <p:cNvSpPr/>
-          <p:nvPr/>
-        </p:nvSpPr>
-        <p:spPr>
-          <a:xfrm>
-            <a:off x="5303520" y="2926080"/>
-            <a:ext cx="3291840" cy="411480"/>
-          </a:xfrm>
-          <a:prstGeom prst="rect">
-            <a:avLst/>
-          </a:prstGeom>
-          <a:noFill/>
-          <a:ln/>
-        </p:spPr>
-        <p:txBody>
-          <a:bodyPr wrap="square" rtlCol="0" anchor="ctr"/>
-          <a:lstStyle/>
-          <a:p>
-            <a:pPr indent="0" marL="0">
-              <a:buNone/>
-            </a:pPr>
-            <a:r>
-              <a:rPr lang="en-US" sz="1000" dirty="0">
+            <a:endParaRPr lang="en-US" sz="900" dirty="0"/>
+          </a:p>
+        </p:txBody>
+      </p:sp>
+      <p:sp>
+        <p:nvSpPr>
+          <p:cNvPr id="12" name="Text 9"/>
+          <p:cNvSpPr/>
+          <p:nvPr/>
+        </p:nvSpPr>
+        <p:spPr>
+          <a:xfrm>
+            <a:off x="2651760" y="4160520"/>
+            <a:ext cx="2011680" cy="274320"/>
+          </a:xfrm>
+          <a:prstGeom prst="rect">
+            <a:avLst/>
+          </a:prstGeom>
+          <a:noFill/>
+          <a:ln/>
+        </p:spPr>
+        <p:txBody>
+          <a:bodyPr wrap="square" rtlCol="0" anchor="ctr"/>
+          <a:lstStyle/>
+          <a:p>
+            <a:pPr indent="0" marL="0">
+              <a:buNone/>
+            </a:pPr>
+            <a:r>
+              <a:rPr lang="en-US" sz="900" dirty="0">
                 <a:solidFill>
                   <a:srgbClr val="2C3E50"/>
                 </a:solidFill>
@@ -6069,36 +6000,36 @@
               </a:rPr>
               <a:t>✓ 购物车管理</a:t>
             </a:r>
-            <a:endParaRPr lang="en-US" sz="1000" dirty="0"/>
-          </a:p>
-        </p:txBody>
-      </p:sp>
-      <p:sp>
-        <p:nvSpPr>
-          <p:cNvPr id="14" name="Text 11"/>
-          <p:cNvSpPr/>
-          <p:nvPr/>
-        </p:nvSpPr>
-        <p:spPr>
-          <a:xfrm>
-            <a:off x="5303520" y="3383280"/>
-            <a:ext cx="3291840" cy="411480"/>
-          </a:xfrm>
-          <a:prstGeom prst="rect">
-            <a:avLst/>
-          </a:prstGeom>
-          <a:noFill/>
-          <a:ln/>
-        </p:spPr>
-        <p:txBody>
-          <a:bodyPr wrap="square" rtlCol="0" anchor="ctr"/>
-          <a:lstStyle/>
-          <a:p>
-            <a:pPr indent="0" marL="0">
-              <a:buNone/>
-            </a:pPr>
-            <a:r>
-              <a:rPr lang="en-US" sz="1000" dirty="0">
+            <a:endParaRPr lang="en-US" sz="900" dirty="0"/>
+          </a:p>
+        </p:txBody>
+      </p:sp>
+      <p:sp>
+        <p:nvSpPr>
+          <p:cNvPr id="13" name="Text 10"/>
+          <p:cNvSpPr/>
+          <p:nvPr/>
+        </p:nvSpPr>
+        <p:spPr>
+          <a:xfrm>
+            <a:off x="4754880" y="4160520"/>
+            <a:ext cx="2011680" cy="274320"/>
+          </a:xfrm>
+          <a:prstGeom prst="rect">
+            <a:avLst/>
+          </a:prstGeom>
+          <a:noFill/>
+          <a:ln/>
+        </p:spPr>
+        <p:txBody>
+          <a:bodyPr wrap="square" rtlCol="0" anchor="ctr"/>
+          <a:lstStyle/>
+          <a:p>
+            <a:pPr indent="0" marL="0">
+              <a:buNone/>
+            </a:pPr>
+            <a:r>
+              <a:rPr lang="en-US" sz="900" dirty="0">
                 <a:solidFill>
                   <a:srgbClr val="2C3E50"/>
                 </a:solidFill>
@@ -6108,36 +6039,36 @@
               </a:rPr>
               <a:t>✓ 订单提交、优惠券领取</a:t>
             </a:r>
-            <a:endParaRPr lang="en-US" sz="1000" dirty="0"/>
-          </a:p>
-        </p:txBody>
-      </p:sp>
-      <p:sp>
-        <p:nvSpPr>
-          <p:cNvPr id="15" name="Text 12"/>
-          <p:cNvSpPr/>
-          <p:nvPr/>
-        </p:nvSpPr>
-        <p:spPr>
-          <a:xfrm>
-            <a:off x="5303520" y="3840480"/>
-            <a:ext cx="3291840" cy="411480"/>
-          </a:xfrm>
-          <a:prstGeom prst="rect">
-            <a:avLst/>
-          </a:prstGeom>
-          <a:noFill/>
-          <a:ln/>
-        </p:spPr>
-        <p:txBody>
-          <a:bodyPr wrap="square" rtlCol="0" anchor="ctr"/>
-          <a:lstStyle/>
-          <a:p>
-            <a:pPr indent="0" marL="0">
-              <a:buNone/>
-            </a:pPr>
-            <a:r>
-              <a:rPr lang="en-US" sz="1000" dirty="0">
+            <a:endParaRPr lang="en-US" sz="900" dirty="0"/>
+          </a:p>
+        </p:txBody>
+      </p:sp>
+      <p:sp>
+        <p:nvSpPr>
+          <p:cNvPr id="14" name="Text 11"/>
+          <p:cNvSpPr/>
+          <p:nvPr/>
+        </p:nvSpPr>
+        <p:spPr>
+          <a:xfrm>
+            <a:off x="6858000" y="4160520"/>
+            <a:ext cx="2011680" cy="274320"/>
+          </a:xfrm>
+          <a:prstGeom prst="rect">
+            <a:avLst/>
+          </a:prstGeom>
+          <a:noFill/>
+          <a:ln/>
+        </p:spPr>
+        <p:txBody>
+          <a:bodyPr wrap="square" rtlCol="0" anchor="ctr"/>
+          <a:lstStyle/>
+          <a:p>
+            <a:pPr indent="0" marL="0">
+              <a:buNone/>
+            </a:pPr>
+            <a:r>
+              <a:rPr lang="en-US" sz="900" dirty="0">
                 <a:solidFill>
                   <a:srgbClr val="2C3E50"/>
                 </a:solidFill>
@@ -6147,7 +6078,7 @@
               </a:rPr>
               <a:t>✓ 个人中心管理</a:t>
             </a:r>
-            <a:endParaRPr lang="en-US" sz="1000" dirty="0"/>
+            <a:endParaRPr lang="en-US" sz="900" dirty="0"/>
           </a:p>
         </p:txBody>
       </p:sp>
@@ -6487,24 +6418,24 @@
         </p:nvSpPr>
         <p:spPr>
           <a:xfrm>
-            <a:off x="457200" y="320040"/>
-            <a:ext cx="8229600" cy="457200"/>
-          </a:xfrm>
-          <a:prstGeom prst="rect">
-            <a:avLst/>
-          </a:prstGeom>
-          <a:noFill/>
-          <a:ln/>
-        </p:spPr>
-        <p:txBody>
-          <a:bodyPr wrap="square" rtlCol="0" anchor="ctr"/>
-          <a:lstStyle/>
-          <a:p>
-            <a:pPr indent="0" marL="0">
-              <a:buNone/>
-            </a:pPr>
-            <a:r>
-              <a:rPr lang="en-US" sz="2200" b="1" dirty="0">
+            <a:off x="457200" y="274320"/>
+            <a:ext cx="8229600" cy="411480"/>
+          </a:xfrm>
+          <a:prstGeom prst="rect">
+            <a:avLst/>
+          </a:prstGeom>
+          <a:noFill/>
+          <a:ln/>
+        </p:spPr>
+        <p:txBody>
+          <a:bodyPr wrap="square" rtlCol="0" anchor="ctr"/>
+          <a:lstStyle/>
+          <a:p>
+            <a:pPr indent="0" marL="0">
+              <a:buNone/>
+            </a:pPr>
+            <a:r>
+              <a:rPr lang="en-US" sz="2000" b="1" dirty="0">
                 <a:solidFill>
                   <a:srgbClr val="1E3A5F"/>
                 </a:solidFill>
@@ -6514,7 +6445,7 @@
               </a:rPr>
               <a:t>图4-1 系统总体架构图</a:t>
             </a:r>
-            <a:endParaRPr lang="en-US" sz="2200" dirty="0"/>
+            <a:endParaRPr lang="en-US" sz="2000" dirty="0"/>
           </a:p>
         </p:txBody>
       </p:sp>
@@ -6526,8 +6457,8 @@
         </p:nvSpPr>
         <p:spPr>
           <a:xfrm>
-            <a:off x="457200" y="777240"/>
-            <a:ext cx="1371600" cy="27432"/>
+            <a:off x="457200" y="685800"/>
+            <a:ext cx="1097280" cy="27432"/>
           </a:xfrm>
           <a:prstGeom prst="rect">
             <a:avLst/>
@@ -6546,12 +6477,12 @@
         </p:nvSpPr>
         <p:spPr>
           <a:xfrm>
-            <a:off x="365760" y="1005840"/>
-            <a:ext cx="4572000" cy="3657600"/>
+            <a:off x="365760" y="914400"/>
+            <a:ext cx="8412480" cy="2286000"/>
           </a:xfrm>
           <a:prstGeom prst="roundRect">
             <a:avLst>
-              <a:gd name="adj" fmla="val 2500"/>
+              <a:gd name="adj" fmla="val 3200"/>
             </a:avLst>
           </a:prstGeom>
           <a:solidFill>
@@ -6559,8 +6490,8 @@
           </a:solidFill>
           <a:ln/>
           <a:effectLst>
-            <a:outerShdw sx="100000" sy="100000" kx="0" ky="0" algn="bl" rotWithShape="0" blurRad="50800" dist="25400" dir="16200000">
-              <a:srgbClr val="00000015">
+            <a:outerShdw sx="100000" sy="100000" kx="0" ky="0" algn="bl" rotWithShape="0" blurRad="38100" dist="12700" dir="16200000">
+              <a:srgbClr val="00000010">
                 <a:alpha val="75000"/>
               </a:srgbClr>
             </a:outerShdw>
@@ -6583,8 +6514,8 @@
         </p:blipFill>
         <p:spPr>
           <a:xfrm>
-            <a:off x="457200" y="1097280"/>
-            <a:ext cx="4389120" cy="3474720"/>
+            <a:off x="457200" y="1005840"/>
+            <a:ext cx="8229600" cy="2103120"/>
           </a:xfrm>
           <a:prstGeom prst="rect">
             <a:avLst/>
@@ -6599,12 +6530,12 @@
         </p:nvSpPr>
         <p:spPr>
           <a:xfrm>
-            <a:off x="5120640" y="1005840"/>
-            <a:ext cx="3657600" cy="3657600"/>
+            <a:off x="365760" y="3337560"/>
+            <a:ext cx="8412480" cy="1417320"/>
           </a:xfrm>
           <a:prstGeom prst="roundRect">
             <a:avLst>
-              <a:gd name="adj" fmla="val 2500"/>
+              <a:gd name="adj" fmla="val 5161"/>
             </a:avLst>
           </a:prstGeom>
           <a:solidFill>
@@ -6612,8 +6543,8 @@
           </a:solidFill>
           <a:ln/>
           <a:effectLst>
-            <a:outerShdw sx="100000" sy="100000" kx="0" ky="0" algn="bl" rotWithShape="0" blurRad="50800" dist="25400" dir="16200000">
-              <a:srgbClr val="00000015">
+            <a:outerShdw sx="100000" sy="100000" kx="0" ky="0" algn="bl" rotWithShape="0" blurRad="38100" dist="12700" dir="16200000">
+              <a:srgbClr val="00000010">
                 <a:alpha val="75000"/>
               </a:srgbClr>
             </a:outerShdw>
@@ -6628,14 +6559,14 @@
         </p:nvSpPr>
         <p:spPr>
           <a:xfrm>
-            <a:off x="5120640" y="1005840"/>
-            <a:ext cx="3657600" cy="457200"/>
-          </a:xfrm>
-          <a:prstGeom prst="rect">
-            <a:avLst/>
-          </a:prstGeom>
-          <a:solidFill>
-            <a:srgbClr val="1E3A5F"/>
+            <a:off x="365760" y="3337560"/>
+            <a:ext cx="54864" cy="1417320"/>
+          </a:xfrm>
+          <a:prstGeom prst="rect">
+            <a:avLst/>
+          </a:prstGeom>
+          <a:solidFill>
+            <a:srgbClr val="C9A227"/>
           </a:solidFill>
           <a:ln/>
         </p:spPr>
@@ -6648,26 +6579,26 @@
         </p:nvSpPr>
         <p:spPr>
           <a:xfrm>
-            <a:off x="5120640" y="1005840"/>
-            <a:ext cx="3657600" cy="457200"/>
-          </a:xfrm>
-          <a:prstGeom prst="rect">
-            <a:avLst/>
-          </a:prstGeom>
-          <a:noFill/>
-          <a:ln/>
-        </p:spPr>
-        <p:txBody>
-          <a:bodyPr wrap="square" rtlCol="0" anchor="ctr"/>
-          <a:lstStyle/>
-          <a:p>
-            <a:pPr algn="ctr" indent="0" marL="0">
-              <a:buNone/>
-            </a:pPr>
-            <a:r>
-              <a:rPr lang="en-US" sz="1400" b="1" dirty="0">
-                <a:solidFill>
-                  <a:srgbClr val="FFFFFF"/>
+            <a:off x="548640" y="3429000"/>
+            <a:ext cx="1828800" cy="320040"/>
+          </a:xfrm>
+          <a:prstGeom prst="rect">
+            <a:avLst/>
+          </a:prstGeom>
+          <a:noFill/>
+          <a:ln/>
+        </p:spPr>
+        <p:txBody>
+          <a:bodyPr wrap="square" rtlCol="0" anchor="ctr"/>
+          <a:lstStyle/>
+          <a:p>
+            <a:pPr indent="0" marL="0">
+              <a:buNone/>
+            </a:pPr>
+            <a:r>
+              <a:rPr lang="en-US" sz="1300" b="1" dirty="0">
+                <a:solidFill>
+                  <a:srgbClr val="1E3A5F"/>
                 </a:solidFill>
                 <a:latin typeface="SimHei" pitchFamily="34" charset="0"/>
                 <a:ea typeface="SimHei" pitchFamily="34" charset="-122"/>
@@ -6675,7 +6606,7 @@
               </a:rPr>
               <a:t>功能说明</a:t>
             </a:r>
-            <a:endParaRPr lang="en-US" sz="1400" dirty="0"/>
+            <a:endParaRPr lang="en-US" sz="1300" dirty="0"/>
           </a:p>
         </p:txBody>
       </p:sp>
@@ -6687,8 +6618,8 @@
         </p:nvSpPr>
         <p:spPr>
           <a:xfrm>
-            <a:off x="5303520" y="1600200"/>
-            <a:ext cx="3291840" cy="731520"/>
+            <a:off x="548640" y="3749040"/>
+            <a:ext cx="8046720" cy="365760"/>
           </a:xfrm>
           <a:prstGeom prst="rect">
             <a:avLst/>
@@ -6701,13 +6632,10 @@
           <a:lstStyle/>
           <a:p>
             <a:pPr indent="0" marL="0">
-              <a:lnSpc>
-                <a:spcPct val="140000"/>
-              </a:lnSpc>
-              <a:buNone/>
-            </a:pPr>
-            <a:r>
-              <a:rPr lang="en-US" sz="1100" dirty="0">
+              <a:buNone/>
+            </a:pPr>
+            <a:r>
+              <a:rPr lang="en-US" sz="1000" dirty="0">
                 <a:solidFill>
                   <a:srgbClr val="2C3E50"/>
                 </a:solidFill>
@@ -6717,56 +6645,36 @@
               </a:rPr>
               <a:t>系统采用SpringBoot+Vue前后端分离的分层架构，各层通过接口通信，降低耦合度。</a:t>
             </a:r>
-            <a:endParaRPr lang="en-US" sz="1100" dirty="0"/>
-          </a:p>
-        </p:txBody>
-      </p:sp>
-      <p:sp>
-        <p:nvSpPr>
-          <p:cNvPr id="11" name="Shape 8"/>
-          <p:cNvSpPr/>
-          <p:nvPr/>
-        </p:nvSpPr>
-        <p:spPr>
-          <a:xfrm>
-            <a:off x="5303520" y="2331720"/>
-            <a:ext cx="3291840" cy="18288"/>
-          </a:xfrm>
-          <a:prstGeom prst="rect">
-            <a:avLst/>
-          </a:prstGeom>
-          <a:solidFill>
-            <a:srgbClr val="E9ECEF"/>
-          </a:solidFill>
-          <a:ln/>
-        </p:spPr>
-      </p:sp>
-      <p:sp>
-        <p:nvSpPr>
-          <p:cNvPr id="12" name="Text 9"/>
-          <p:cNvSpPr/>
-          <p:nvPr/>
-        </p:nvSpPr>
-        <p:spPr>
-          <a:xfrm>
-            <a:off x="5303520" y="2468880"/>
-            <a:ext cx="3291840" cy="411480"/>
-          </a:xfrm>
-          <a:prstGeom prst="rect">
-            <a:avLst/>
-          </a:prstGeom>
-          <a:noFill/>
-          <a:ln/>
-        </p:spPr>
-        <p:txBody>
-          <a:bodyPr wrap="square" rtlCol="0" anchor="ctr"/>
-          <a:lstStyle/>
-          <a:p>
-            <a:pPr indent="0" marL="0">
-              <a:buNone/>
-            </a:pPr>
-            <a:r>
-              <a:rPr lang="en-US" sz="1000" dirty="0">
+            <a:endParaRPr lang="en-US" sz="1000" dirty="0"/>
+          </a:p>
+        </p:txBody>
+      </p:sp>
+      <p:sp>
+        <p:nvSpPr>
+          <p:cNvPr id="11" name="Text 8"/>
+          <p:cNvSpPr/>
+          <p:nvPr/>
+        </p:nvSpPr>
+        <p:spPr>
+          <a:xfrm>
+            <a:off x="548640" y="4160520"/>
+            <a:ext cx="2011680" cy="274320"/>
+          </a:xfrm>
+          <a:prstGeom prst="rect">
+            <a:avLst/>
+          </a:prstGeom>
+          <a:noFill/>
+          <a:ln/>
+        </p:spPr>
+        <p:txBody>
+          <a:bodyPr wrap="square" rtlCol="0" anchor="ctr"/>
+          <a:lstStyle/>
+          <a:p>
+            <a:pPr indent="0" marL="0">
+              <a:buNone/>
+            </a:pPr>
+            <a:r>
+              <a:rPr lang="en-US" sz="900" dirty="0">
                 <a:solidFill>
                   <a:srgbClr val="2C3E50"/>
                 </a:solidFill>
@@ -6776,36 +6684,36 @@
               </a:rPr>
               <a:t>✓ 表现层：Vue实现用户交互</a:t>
             </a:r>
-            <a:endParaRPr lang="en-US" sz="1000" dirty="0"/>
-          </a:p>
-        </p:txBody>
-      </p:sp>
-      <p:sp>
-        <p:nvSpPr>
-          <p:cNvPr id="13" name="Text 10"/>
-          <p:cNvSpPr/>
-          <p:nvPr/>
-        </p:nvSpPr>
-        <p:spPr>
-          <a:xfrm>
-            <a:off x="5303520" y="2926080"/>
-            <a:ext cx="3291840" cy="411480"/>
-          </a:xfrm>
-          <a:prstGeom prst="rect">
-            <a:avLst/>
-          </a:prstGeom>
-          <a:noFill/>
-          <a:ln/>
-        </p:spPr>
-        <p:txBody>
-          <a:bodyPr wrap="square" rtlCol="0" anchor="ctr"/>
-          <a:lstStyle/>
-          <a:p>
-            <a:pPr indent="0" marL="0">
-              <a:buNone/>
-            </a:pPr>
-            <a:r>
-              <a:rPr lang="en-US" sz="1000" dirty="0">
+            <a:endParaRPr lang="en-US" sz="900" dirty="0"/>
+          </a:p>
+        </p:txBody>
+      </p:sp>
+      <p:sp>
+        <p:nvSpPr>
+          <p:cNvPr id="12" name="Text 9"/>
+          <p:cNvSpPr/>
+          <p:nvPr/>
+        </p:nvSpPr>
+        <p:spPr>
+          <a:xfrm>
+            <a:off x="2651760" y="4160520"/>
+            <a:ext cx="2011680" cy="274320"/>
+          </a:xfrm>
+          <a:prstGeom prst="rect">
+            <a:avLst/>
+          </a:prstGeom>
+          <a:noFill/>
+          <a:ln/>
+        </p:spPr>
+        <p:txBody>
+          <a:bodyPr wrap="square" rtlCol="0" anchor="ctr"/>
+          <a:lstStyle/>
+          <a:p>
+            <a:pPr indent="0" marL="0">
+              <a:buNone/>
+            </a:pPr>
+            <a:r>
+              <a:rPr lang="en-US" sz="900" dirty="0">
                 <a:solidFill>
                   <a:srgbClr val="2C3E50"/>
                 </a:solidFill>
@@ -6815,36 +6723,36 @@
               </a:rPr>
               <a:t>✓ 业务逻辑层：SpringBoot处理核心业务</a:t>
             </a:r>
-            <a:endParaRPr lang="en-US" sz="1000" dirty="0"/>
-          </a:p>
-        </p:txBody>
-      </p:sp>
-      <p:sp>
-        <p:nvSpPr>
-          <p:cNvPr id="14" name="Text 11"/>
-          <p:cNvSpPr/>
-          <p:nvPr/>
-        </p:nvSpPr>
-        <p:spPr>
-          <a:xfrm>
-            <a:off x="5303520" y="3383280"/>
-            <a:ext cx="3291840" cy="411480"/>
-          </a:xfrm>
-          <a:prstGeom prst="rect">
-            <a:avLst/>
-          </a:prstGeom>
-          <a:noFill/>
-          <a:ln/>
-        </p:spPr>
-        <p:txBody>
-          <a:bodyPr wrap="square" rtlCol="0" anchor="ctr"/>
-          <a:lstStyle/>
-          <a:p>
-            <a:pPr indent="0" marL="0">
-              <a:buNone/>
-            </a:pPr>
-            <a:r>
-              <a:rPr lang="en-US" sz="1000" dirty="0">
+            <a:endParaRPr lang="en-US" sz="900" dirty="0"/>
+          </a:p>
+        </p:txBody>
+      </p:sp>
+      <p:sp>
+        <p:nvSpPr>
+          <p:cNvPr id="13" name="Text 10"/>
+          <p:cNvSpPr/>
+          <p:nvPr/>
+        </p:nvSpPr>
+        <p:spPr>
+          <a:xfrm>
+            <a:off x="4754880" y="4160520"/>
+            <a:ext cx="2011680" cy="274320"/>
+          </a:xfrm>
+          <a:prstGeom prst="rect">
+            <a:avLst/>
+          </a:prstGeom>
+          <a:noFill/>
+          <a:ln/>
+        </p:spPr>
+        <p:txBody>
+          <a:bodyPr wrap="square" rtlCol="0" anchor="ctr"/>
+          <a:lstStyle/>
+          <a:p>
+            <a:pPr indent="0" marL="0">
+              <a:buNone/>
+            </a:pPr>
+            <a:r>
+              <a:rPr lang="en-US" sz="900" dirty="0">
                 <a:solidFill>
                   <a:srgbClr val="2C3E50"/>
                 </a:solidFill>
@@ -6854,7 +6762,7 @@
               </a:rPr>
               <a:t>✓ 数据访问层：MyBatis与MySQL交互</a:t>
             </a:r>
-            <a:endParaRPr lang="en-US" sz="1000" dirty="0"/>
+            <a:endParaRPr lang="en-US" sz="900" dirty="0"/>
           </a:p>
         </p:txBody>
       </p:sp>
@@ -6918,24 +6826,24 @@
         </p:nvSpPr>
         <p:spPr>
           <a:xfrm>
-            <a:off x="457200" y="320040"/>
-            <a:ext cx="8229600" cy="457200"/>
-          </a:xfrm>
-          <a:prstGeom prst="rect">
-            <a:avLst/>
-          </a:prstGeom>
-          <a:noFill/>
-          <a:ln/>
-        </p:spPr>
-        <p:txBody>
-          <a:bodyPr wrap="square" rtlCol="0" anchor="ctr"/>
-          <a:lstStyle/>
-          <a:p>
-            <a:pPr indent="0" marL="0">
-              <a:buNone/>
-            </a:pPr>
-            <a:r>
-              <a:rPr lang="en-US" sz="2200" b="1" dirty="0">
+            <a:off x="457200" y="274320"/>
+            <a:ext cx="8229600" cy="411480"/>
+          </a:xfrm>
+          <a:prstGeom prst="rect">
+            <a:avLst/>
+          </a:prstGeom>
+          <a:noFill/>
+          <a:ln/>
+        </p:spPr>
+        <p:txBody>
+          <a:bodyPr wrap="square" rtlCol="0" anchor="ctr"/>
+          <a:lstStyle/>
+          <a:p>
+            <a:pPr indent="0" marL="0">
+              <a:buNone/>
+            </a:pPr>
+            <a:r>
+              <a:rPr lang="en-US" sz="2000" b="1" dirty="0">
                 <a:solidFill>
                   <a:srgbClr val="1E3A5F"/>
                 </a:solidFill>
@@ -6945,7 +6853,7 @@
               </a:rPr>
               <a:t>图4-9 系统总体E-R图</a:t>
             </a:r>
-            <a:endParaRPr lang="en-US" sz="2200" dirty="0"/>
+            <a:endParaRPr lang="en-US" sz="2000" dirty="0"/>
           </a:p>
         </p:txBody>
       </p:sp>
@@ -6957,8 +6865,8 @@
         </p:nvSpPr>
         <p:spPr>
           <a:xfrm>
-            <a:off x="457200" y="777240"/>
-            <a:ext cx="1371600" cy="27432"/>
+            <a:off x="457200" y="685800"/>
+            <a:ext cx="1097280" cy="27432"/>
           </a:xfrm>
           <a:prstGeom prst="rect">
             <a:avLst/>
@@ -6977,12 +6885,12 @@
         </p:nvSpPr>
         <p:spPr>
           <a:xfrm>
-            <a:off x="365760" y="1005840"/>
-            <a:ext cx="4572000" cy="3657600"/>
+            <a:off x="365760" y="914400"/>
+            <a:ext cx="8412480" cy="2286000"/>
           </a:xfrm>
           <a:prstGeom prst="roundRect">
             <a:avLst>
-              <a:gd name="adj" fmla="val 2500"/>
+              <a:gd name="adj" fmla="val 3200"/>
             </a:avLst>
           </a:prstGeom>
           <a:solidFill>
@@ -6990,8 +6898,8 @@
           </a:solidFill>
           <a:ln/>
           <a:effectLst>
-            <a:outerShdw sx="100000" sy="100000" kx="0" ky="0" algn="bl" rotWithShape="0" blurRad="50800" dist="25400" dir="16200000">
-              <a:srgbClr val="00000015">
+            <a:outerShdw sx="100000" sy="100000" kx="0" ky="0" algn="bl" rotWithShape="0" blurRad="38100" dist="12700" dir="16200000">
+              <a:srgbClr val="00000010">
                 <a:alpha val="75000"/>
               </a:srgbClr>
             </a:outerShdw>
@@ -7014,8 +6922,8 @@
         </p:blipFill>
         <p:spPr>
           <a:xfrm>
-            <a:off x="457200" y="1097280"/>
-            <a:ext cx="4389120" cy="3474720"/>
+            <a:off x="457200" y="1005840"/>
+            <a:ext cx="8229600" cy="2103120"/>
           </a:xfrm>
           <a:prstGeom prst="rect">
             <a:avLst/>
@@ -7030,12 +6938,12 @@
         </p:nvSpPr>
         <p:spPr>
           <a:xfrm>
-            <a:off x="5120640" y="1005840"/>
-            <a:ext cx="3657600" cy="3657600"/>
+            <a:off x="365760" y="3337560"/>
+            <a:ext cx="8412480" cy="1417320"/>
           </a:xfrm>
           <a:prstGeom prst="roundRect">
             <a:avLst>
-              <a:gd name="adj" fmla="val 2500"/>
+              <a:gd name="adj" fmla="val 5161"/>
             </a:avLst>
           </a:prstGeom>
           <a:solidFill>
@@ -7043,8 +6951,8 @@
           </a:solidFill>
           <a:ln/>
           <a:effectLst>
-            <a:outerShdw sx="100000" sy="100000" kx="0" ky="0" algn="bl" rotWithShape="0" blurRad="50800" dist="25400" dir="16200000">
-              <a:srgbClr val="00000015">
+            <a:outerShdw sx="100000" sy="100000" kx="0" ky="0" algn="bl" rotWithShape="0" blurRad="38100" dist="12700" dir="16200000">
+              <a:srgbClr val="00000010">
                 <a:alpha val="75000"/>
               </a:srgbClr>
             </a:outerShdw>
@@ -7059,14 +6967,14 @@
         </p:nvSpPr>
         <p:spPr>
           <a:xfrm>
-            <a:off x="5120640" y="1005840"/>
-            <a:ext cx="3657600" cy="457200"/>
-          </a:xfrm>
-          <a:prstGeom prst="rect">
-            <a:avLst/>
-          </a:prstGeom>
-          <a:solidFill>
-            <a:srgbClr val="1E3A5F"/>
+            <a:off x="365760" y="3337560"/>
+            <a:ext cx="54864" cy="1417320"/>
+          </a:xfrm>
+          <a:prstGeom prst="rect">
+            <a:avLst/>
+          </a:prstGeom>
+          <a:solidFill>
+            <a:srgbClr val="C9A227"/>
           </a:solidFill>
           <a:ln/>
         </p:spPr>
@@ -7079,26 +6987,26 @@
         </p:nvSpPr>
         <p:spPr>
           <a:xfrm>
-            <a:off x="5120640" y="1005840"/>
-            <a:ext cx="3657600" cy="457200"/>
-          </a:xfrm>
-          <a:prstGeom prst="rect">
-            <a:avLst/>
-          </a:prstGeom>
-          <a:noFill/>
-          <a:ln/>
-        </p:spPr>
-        <p:txBody>
-          <a:bodyPr wrap="square" rtlCol="0" anchor="ctr"/>
-          <a:lstStyle/>
-          <a:p>
-            <a:pPr algn="ctr" indent="0" marL="0">
-              <a:buNone/>
-            </a:pPr>
-            <a:r>
-              <a:rPr lang="en-US" sz="1400" b="1" dirty="0">
-                <a:solidFill>
-                  <a:srgbClr val="FFFFFF"/>
+            <a:off x="548640" y="3429000"/>
+            <a:ext cx="1828800" cy="320040"/>
+          </a:xfrm>
+          <a:prstGeom prst="rect">
+            <a:avLst/>
+          </a:prstGeom>
+          <a:noFill/>
+          <a:ln/>
+        </p:spPr>
+        <p:txBody>
+          <a:bodyPr wrap="square" rtlCol="0" anchor="ctr"/>
+          <a:lstStyle/>
+          <a:p>
+            <a:pPr indent="0" marL="0">
+              <a:buNone/>
+            </a:pPr>
+            <a:r>
+              <a:rPr lang="en-US" sz="1300" b="1" dirty="0">
+                <a:solidFill>
+                  <a:srgbClr val="1E3A5F"/>
                 </a:solidFill>
                 <a:latin typeface="SimHei" pitchFamily="34" charset="0"/>
                 <a:ea typeface="SimHei" pitchFamily="34" charset="-122"/>
@@ -7106,7 +7014,7 @@
               </a:rPr>
               <a:t>功能说明</a:t>
             </a:r>
-            <a:endParaRPr lang="en-US" sz="1400" dirty="0"/>
+            <a:endParaRPr lang="en-US" sz="1300" dirty="0"/>
           </a:p>
         </p:txBody>
       </p:sp>
@@ -7118,8 +7026,8 @@
         </p:nvSpPr>
         <p:spPr>
           <a:xfrm>
-            <a:off x="5303520" y="1600200"/>
-            <a:ext cx="3291840" cy="731520"/>
+            <a:off x="548640" y="3749040"/>
+            <a:ext cx="8046720" cy="365760"/>
           </a:xfrm>
           <a:prstGeom prst="rect">
             <a:avLst/>
@@ -7132,13 +7040,10 @@
           <a:lstStyle/>
           <a:p>
             <a:pPr indent="0" marL="0">
-              <a:lnSpc>
-                <a:spcPct val="140000"/>
-              </a:lnSpc>
-              <a:buNone/>
-            </a:pPr>
-            <a:r>
-              <a:rPr lang="en-US" sz="1100" dirty="0">
+              <a:buNone/>
+            </a:pPr>
+            <a:r>
+              <a:rPr lang="en-US" sz="1000" dirty="0">
                 <a:solidFill>
                   <a:srgbClr val="2C3E50"/>
                 </a:solidFill>
@@ -7148,56 +7053,36 @@
               </a:rPr>
               <a:t>E-R图展示系统各实体间的关系，包括管理员、用户、商品、订单、优惠券、公告等核心实体。</a:t>
             </a:r>
-            <a:endParaRPr lang="en-US" sz="1100" dirty="0"/>
-          </a:p>
-        </p:txBody>
-      </p:sp>
-      <p:sp>
-        <p:nvSpPr>
-          <p:cNvPr id="11" name="Shape 8"/>
-          <p:cNvSpPr/>
-          <p:nvPr/>
-        </p:nvSpPr>
-        <p:spPr>
-          <a:xfrm>
-            <a:off x="5303520" y="2331720"/>
-            <a:ext cx="3291840" cy="18288"/>
-          </a:xfrm>
-          <a:prstGeom prst="rect">
-            <a:avLst/>
-          </a:prstGeom>
-          <a:solidFill>
-            <a:srgbClr val="E9ECEF"/>
-          </a:solidFill>
-          <a:ln/>
-        </p:spPr>
-      </p:sp>
-      <p:sp>
-        <p:nvSpPr>
-          <p:cNvPr id="12" name="Text 9"/>
-          <p:cNvSpPr/>
-          <p:nvPr/>
-        </p:nvSpPr>
-        <p:spPr>
-          <a:xfrm>
-            <a:off x="5303520" y="2468880"/>
-            <a:ext cx="3291840" cy="411480"/>
-          </a:xfrm>
-          <a:prstGeom prst="rect">
-            <a:avLst/>
-          </a:prstGeom>
-          <a:noFill/>
-          <a:ln/>
-        </p:spPr>
-        <p:txBody>
-          <a:bodyPr wrap="square" rtlCol="0" anchor="ctr"/>
-          <a:lstStyle/>
-          <a:p>
-            <a:pPr indent="0" marL="0">
-              <a:buNone/>
-            </a:pPr>
-            <a:r>
-              <a:rPr lang="en-US" sz="1000" dirty="0">
+            <a:endParaRPr lang="en-US" sz="1000" dirty="0"/>
+          </a:p>
+        </p:txBody>
+      </p:sp>
+      <p:sp>
+        <p:nvSpPr>
+          <p:cNvPr id="11" name="Text 8"/>
+          <p:cNvSpPr/>
+          <p:nvPr/>
+        </p:nvSpPr>
+        <p:spPr>
+          <a:xfrm>
+            <a:off x="548640" y="4160520"/>
+            <a:ext cx="2011680" cy="274320"/>
+          </a:xfrm>
+          <a:prstGeom prst="rect">
+            <a:avLst/>
+          </a:prstGeom>
+          <a:noFill/>
+          <a:ln/>
+        </p:spPr>
+        <p:txBody>
+          <a:bodyPr wrap="square" rtlCol="0" anchor="ctr"/>
+          <a:lstStyle/>
+          <a:p>
+            <a:pPr indent="0" marL="0">
+              <a:buNone/>
+            </a:pPr>
+            <a:r>
+              <a:rPr lang="en-US" sz="900" dirty="0">
                 <a:solidFill>
                   <a:srgbClr val="2C3E50"/>
                 </a:solidFill>
@@ -7207,36 +7092,36 @@
               </a:rPr>
               <a:t>✓ 管理员实体：管理优惠券、商品、公告</a:t>
             </a:r>
-            <a:endParaRPr lang="en-US" sz="1000" dirty="0"/>
-          </a:p>
-        </p:txBody>
-      </p:sp>
-      <p:sp>
-        <p:nvSpPr>
-          <p:cNvPr id="13" name="Text 10"/>
-          <p:cNvSpPr/>
-          <p:nvPr/>
-        </p:nvSpPr>
-        <p:spPr>
-          <a:xfrm>
-            <a:off x="5303520" y="2926080"/>
-            <a:ext cx="3291840" cy="411480"/>
-          </a:xfrm>
-          <a:prstGeom prst="rect">
-            <a:avLst/>
-          </a:prstGeom>
-          <a:noFill/>
-          <a:ln/>
-        </p:spPr>
-        <p:txBody>
-          <a:bodyPr wrap="square" rtlCol="0" anchor="ctr"/>
-          <a:lstStyle/>
-          <a:p>
-            <a:pPr indent="0" marL="0">
-              <a:buNone/>
-            </a:pPr>
-            <a:r>
-              <a:rPr lang="en-US" sz="1000" dirty="0">
+            <a:endParaRPr lang="en-US" sz="900" dirty="0"/>
+          </a:p>
+        </p:txBody>
+      </p:sp>
+      <p:sp>
+        <p:nvSpPr>
+          <p:cNvPr id="12" name="Text 9"/>
+          <p:cNvSpPr/>
+          <p:nvPr/>
+        </p:nvSpPr>
+        <p:spPr>
+          <a:xfrm>
+            <a:off x="2651760" y="4160520"/>
+            <a:ext cx="2011680" cy="274320"/>
+          </a:xfrm>
+          <a:prstGeom prst="rect">
+            <a:avLst/>
+          </a:prstGeom>
+          <a:noFill/>
+          <a:ln/>
+        </p:spPr>
+        <p:txBody>
+          <a:bodyPr wrap="square" rtlCol="0" anchor="ctr"/>
+          <a:lstStyle/>
+          <a:p>
+            <a:pPr indent="0" marL="0">
+              <a:buNone/>
+            </a:pPr>
+            <a:r>
+              <a:rPr lang="en-US" sz="900" dirty="0">
                 <a:solidFill>
                   <a:srgbClr val="2C3E50"/>
                 </a:solidFill>
@@ -7246,36 +7131,36 @@
               </a:rPr>
               <a:t>✓ 用户实体：领取优惠券、下单购买</a:t>
             </a:r>
-            <a:endParaRPr lang="en-US" sz="1000" dirty="0"/>
-          </a:p>
-        </p:txBody>
-      </p:sp>
-      <p:sp>
-        <p:nvSpPr>
-          <p:cNvPr id="14" name="Text 11"/>
-          <p:cNvSpPr/>
-          <p:nvPr/>
-        </p:nvSpPr>
-        <p:spPr>
-          <a:xfrm>
-            <a:off x="5303520" y="3383280"/>
-            <a:ext cx="3291840" cy="411480"/>
-          </a:xfrm>
-          <a:prstGeom prst="rect">
-            <a:avLst/>
-          </a:prstGeom>
-          <a:noFill/>
-          <a:ln/>
-        </p:spPr>
-        <p:txBody>
-          <a:bodyPr wrap="square" rtlCol="0" anchor="ctr"/>
-          <a:lstStyle/>
-          <a:p>
-            <a:pPr indent="0" marL="0">
-              <a:buNone/>
-            </a:pPr>
-            <a:r>
-              <a:rPr lang="en-US" sz="1000" dirty="0">
+            <a:endParaRPr lang="en-US" sz="900" dirty="0"/>
+          </a:p>
+        </p:txBody>
+      </p:sp>
+      <p:sp>
+        <p:nvSpPr>
+          <p:cNvPr id="13" name="Text 10"/>
+          <p:cNvSpPr/>
+          <p:nvPr/>
+        </p:nvSpPr>
+        <p:spPr>
+          <a:xfrm>
+            <a:off x="4754880" y="4160520"/>
+            <a:ext cx="2011680" cy="274320"/>
+          </a:xfrm>
+          <a:prstGeom prst="rect">
+            <a:avLst/>
+          </a:prstGeom>
+          <a:noFill/>
+          <a:ln/>
+        </p:spPr>
+        <p:txBody>
+          <a:bodyPr wrap="square" rtlCol="0" anchor="ctr"/>
+          <a:lstStyle/>
+          <a:p>
+            <a:pPr indent="0" marL="0">
+              <a:buNone/>
+            </a:pPr>
+            <a:r>
+              <a:rPr lang="en-US" sz="900" dirty="0">
                 <a:solidFill>
                   <a:srgbClr val="2C3E50"/>
                 </a:solidFill>
@@ -7285,36 +7170,36 @@
               </a:rPr>
               <a:t>✓ 商品信息实体：商品详情存储</a:t>
             </a:r>
-            <a:endParaRPr lang="en-US" sz="1000" dirty="0"/>
-          </a:p>
-        </p:txBody>
-      </p:sp>
-      <p:sp>
-        <p:nvSpPr>
-          <p:cNvPr id="15" name="Text 12"/>
-          <p:cNvSpPr/>
-          <p:nvPr/>
-        </p:nvSpPr>
-        <p:spPr>
-          <a:xfrm>
-            <a:off x="5303520" y="3840480"/>
-            <a:ext cx="3291840" cy="411480"/>
-          </a:xfrm>
-          <a:prstGeom prst="rect">
-            <a:avLst/>
-          </a:prstGeom>
-          <a:noFill/>
-          <a:ln/>
-        </p:spPr>
-        <p:txBody>
-          <a:bodyPr wrap="square" rtlCol="0" anchor="ctr"/>
-          <a:lstStyle/>
-          <a:p>
-            <a:pPr indent="0" marL="0">
-              <a:buNone/>
-            </a:pPr>
-            <a:r>
-              <a:rPr lang="en-US" sz="1000" dirty="0">
+            <a:endParaRPr lang="en-US" sz="900" dirty="0"/>
+          </a:p>
+        </p:txBody>
+      </p:sp>
+      <p:sp>
+        <p:nvSpPr>
+          <p:cNvPr id="14" name="Text 11"/>
+          <p:cNvSpPr/>
+          <p:nvPr/>
+        </p:nvSpPr>
+        <p:spPr>
+          <a:xfrm>
+            <a:off x="6858000" y="4160520"/>
+            <a:ext cx="2011680" cy="274320"/>
+          </a:xfrm>
+          <a:prstGeom prst="rect">
+            <a:avLst/>
+          </a:prstGeom>
+          <a:noFill/>
+          <a:ln/>
+        </p:spPr>
+        <p:txBody>
+          <a:bodyPr wrap="square" rtlCol="0" anchor="ctr"/>
+          <a:lstStyle/>
+          <a:p>
+            <a:pPr indent="0" marL="0">
+              <a:buNone/>
+            </a:pPr>
+            <a:r>
+              <a:rPr lang="en-US" sz="900" dirty="0">
                 <a:solidFill>
                   <a:srgbClr val="2C3E50"/>
                 </a:solidFill>
@@ -7324,7 +7209,7 @@
               </a:rPr>
               <a:t>✓ 订单实体：交易记录存储</a:t>
             </a:r>
-            <a:endParaRPr lang="en-US" sz="1000" dirty="0"/>
+            <a:endParaRPr lang="en-US" sz="900" dirty="0"/>
           </a:p>
         </p:txBody>
       </p:sp>
@@ -7664,24 +7549,24 @@
         </p:nvSpPr>
         <p:spPr>
           <a:xfrm>
-            <a:off x="457200" y="320040"/>
-            <a:ext cx="8229600" cy="457200"/>
-          </a:xfrm>
-          <a:prstGeom prst="rect">
-            <a:avLst/>
-          </a:prstGeom>
-          <a:noFill/>
-          <a:ln/>
-        </p:spPr>
-        <p:txBody>
-          <a:bodyPr wrap="square" rtlCol="0" anchor="ctr"/>
-          <a:lstStyle/>
-          <a:p>
-            <a:pPr indent="0" marL="0">
-              <a:buNone/>
-            </a:pPr>
-            <a:r>
-              <a:rPr lang="en-US" sz="2200" b="1" dirty="0">
+            <a:off x="457200" y="274320"/>
+            <a:ext cx="8229600" cy="411480"/>
+          </a:xfrm>
+          <a:prstGeom prst="rect">
+            <a:avLst/>
+          </a:prstGeom>
+          <a:noFill/>
+          <a:ln/>
+        </p:spPr>
+        <p:txBody>
+          <a:bodyPr wrap="square" rtlCol="0" anchor="ctr"/>
+          <a:lstStyle/>
+          <a:p>
+            <a:pPr indent="0" marL="0">
+              <a:buNone/>
+            </a:pPr>
+            <a:r>
+              <a:rPr lang="en-US" sz="2000" b="1" dirty="0">
                 <a:solidFill>
                   <a:srgbClr val="1E3A5F"/>
                 </a:solidFill>
@@ -7691,7 +7576,7 @@
               </a:rPr>
               <a:t>图5-1 用户登录页面</a:t>
             </a:r>
-            <a:endParaRPr lang="en-US" sz="2200" dirty="0"/>
+            <a:endParaRPr lang="en-US" sz="2000" dirty="0"/>
           </a:p>
         </p:txBody>
       </p:sp>
@@ -7703,8 +7588,8 @@
         </p:nvSpPr>
         <p:spPr>
           <a:xfrm>
-            <a:off x="457200" y="777240"/>
-            <a:ext cx="1371600" cy="27432"/>
+            <a:off x="457200" y="685800"/>
+            <a:ext cx="1097280" cy="27432"/>
           </a:xfrm>
           <a:prstGeom prst="rect">
             <a:avLst/>
@@ -7723,12 +7608,12 @@
         </p:nvSpPr>
         <p:spPr>
           <a:xfrm>
-            <a:off x="365760" y="1005840"/>
-            <a:ext cx="4572000" cy="3657600"/>
+            <a:off x="365760" y="914400"/>
+            <a:ext cx="8412480" cy="2286000"/>
           </a:xfrm>
           <a:prstGeom prst="roundRect">
             <a:avLst>
-              <a:gd name="adj" fmla="val 2500"/>
+              <a:gd name="adj" fmla="val 3200"/>
             </a:avLst>
           </a:prstGeom>
           <a:solidFill>
@@ -7736,8 +7621,8 @@
           </a:solidFill>
           <a:ln/>
           <a:effectLst>
-            <a:outerShdw sx="100000" sy="100000" kx="0" ky="0" algn="bl" rotWithShape="0" blurRad="50800" dist="25400" dir="16200000">
-              <a:srgbClr val="00000015">
+            <a:outerShdw sx="100000" sy="100000" kx="0" ky="0" algn="bl" rotWithShape="0" blurRad="38100" dist="12700" dir="16200000">
+              <a:srgbClr val="00000010">
                 <a:alpha val="75000"/>
               </a:srgbClr>
             </a:outerShdw>
@@ -7760,8 +7645,8 @@
         </p:blipFill>
         <p:spPr>
           <a:xfrm>
-            <a:off x="457200" y="1097280"/>
-            <a:ext cx="4389120" cy="3474720"/>
+            <a:off x="457200" y="1005840"/>
+            <a:ext cx="8229600" cy="2103120"/>
           </a:xfrm>
           <a:prstGeom prst="rect">
             <a:avLst/>
@@ -7776,12 +7661,12 @@
         </p:nvSpPr>
         <p:spPr>
           <a:xfrm>
-            <a:off x="5120640" y="1005840"/>
-            <a:ext cx="3657600" cy="3657600"/>
+            <a:off x="365760" y="3337560"/>
+            <a:ext cx="8412480" cy="1417320"/>
           </a:xfrm>
           <a:prstGeom prst="roundRect">
             <a:avLst>
-              <a:gd name="adj" fmla="val 2500"/>
+              <a:gd name="adj" fmla="val 5161"/>
             </a:avLst>
           </a:prstGeom>
           <a:solidFill>
@@ -7789,8 +7674,8 @@
           </a:solidFill>
           <a:ln/>
           <a:effectLst>
-            <a:outerShdw sx="100000" sy="100000" kx="0" ky="0" algn="bl" rotWithShape="0" blurRad="50800" dist="25400" dir="16200000">
-              <a:srgbClr val="00000015">
+            <a:outerShdw sx="100000" sy="100000" kx="0" ky="0" algn="bl" rotWithShape="0" blurRad="38100" dist="12700" dir="16200000">
+              <a:srgbClr val="00000010">
                 <a:alpha val="75000"/>
               </a:srgbClr>
             </a:outerShdw>
@@ -7805,14 +7690,14 @@
         </p:nvSpPr>
         <p:spPr>
           <a:xfrm>
-            <a:off x="5120640" y="1005840"/>
-            <a:ext cx="3657600" cy="457200"/>
-          </a:xfrm>
-          <a:prstGeom prst="rect">
-            <a:avLst/>
-          </a:prstGeom>
-          <a:solidFill>
-            <a:srgbClr val="1E3A5F"/>
+            <a:off x="365760" y="3337560"/>
+            <a:ext cx="54864" cy="1417320"/>
+          </a:xfrm>
+          <a:prstGeom prst="rect">
+            <a:avLst/>
+          </a:prstGeom>
+          <a:solidFill>
+            <a:srgbClr val="C9A227"/>
           </a:solidFill>
           <a:ln/>
         </p:spPr>
@@ -7825,26 +7710,26 @@
         </p:nvSpPr>
         <p:spPr>
           <a:xfrm>
-            <a:off x="5120640" y="1005840"/>
-            <a:ext cx="3657600" cy="457200"/>
-          </a:xfrm>
-          <a:prstGeom prst="rect">
-            <a:avLst/>
-          </a:prstGeom>
-          <a:noFill/>
-          <a:ln/>
-        </p:spPr>
-        <p:txBody>
-          <a:bodyPr wrap="square" rtlCol="0" anchor="ctr"/>
-          <a:lstStyle/>
-          <a:p>
-            <a:pPr algn="ctr" indent="0" marL="0">
-              <a:buNone/>
-            </a:pPr>
-            <a:r>
-              <a:rPr lang="en-US" sz="1400" b="1" dirty="0">
-                <a:solidFill>
-                  <a:srgbClr val="FFFFFF"/>
+            <a:off x="548640" y="3429000"/>
+            <a:ext cx="1828800" cy="320040"/>
+          </a:xfrm>
+          <a:prstGeom prst="rect">
+            <a:avLst/>
+          </a:prstGeom>
+          <a:noFill/>
+          <a:ln/>
+        </p:spPr>
+        <p:txBody>
+          <a:bodyPr wrap="square" rtlCol="0" anchor="ctr"/>
+          <a:lstStyle/>
+          <a:p>
+            <a:pPr indent="0" marL="0">
+              <a:buNone/>
+            </a:pPr>
+            <a:r>
+              <a:rPr lang="en-US" sz="1300" b="1" dirty="0">
+                <a:solidFill>
+                  <a:srgbClr val="1E3A5F"/>
                 </a:solidFill>
                 <a:latin typeface="SimHei" pitchFamily="34" charset="0"/>
                 <a:ea typeface="SimHei" pitchFamily="34" charset="-122"/>
@@ -7852,7 +7737,7 @@
               </a:rPr>
               <a:t>功能说明</a:t>
             </a:r>
-            <a:endParaRPr lang="en-US" sz="1400" dirty="0"/>
+            <a:endParaRPr lang="en-US" sz="1300" dirty="0"/>
           </a:p>
         </p:txBody>
       </p:sp>
@@ -7864,8 +7749,8 @@
         </p:nvSpPr>
         <p:spPr>
           <a:xfrm>
-            <a:off x="5303520" y="1600200"/>
-            <a:ext cx="3291840" cy="731520"/>
+            <a:off x="548640" y="3749040"/>
+            <a:ext cx="8046720" cy="365760"/>
           </a:xfrm>
           <a:prstGeom prst="rect">
             <a:avLst/>
@@ -7878,13 +7763,10 @@
           <a:lstStyle/>
           <a:p>
             <a:pPr indent="0" marL="0">
-              <a:lnSpc>
-                <a:spcPct val="140000"/>
-              </a:lnSpc>
-              <a:buNone/>
-            </a:pPr>
-            <a:r>
-              <a:rPr lang="en-US" sz="1100" dirty="0">
+              <a:buNone/>
+            </a:pPr>
+            <a:r>
+              <a:rPr lang="en-US" sz="1000" dirty="0">
                 <a:solidFill>
                   <a:srgbClr val="2C3E50"/>
                 </a:solidFill>
@@ -7894,56 +7776,36 @@
               </a:rPr>
               <a:t>用户登录功能支持账号密码登录，系统通过后台验证用户身份，验证通过后生成会话令牌，跳转至系统前台首页。</a:t>
             </a:r>
-            <a:endParaRPr lang="en-US" sz="1100" dirty="0"/>
-          </a:p>
-        </p:txBody>
-      </p:sp>
-      <p:sp>
-        <p:nvSpPr>
-          <p:cNvPr id="11" name="Shape 8"/>
-          <p:cNvSpPr/>
-          <p:nvPr/>
-        </p:nvSpPr>
-        <p:spPr>
-          <a:xfrm>
-            <a:off x="5303520" y="2331720"/>
-            <a:ext cx="3291840" cy="18288"/>
-          </a:xfrm>
-          <a:prstGeom prst="rect">
-            <a:avLst/>
-          </a:prstGeom>
-          <a:solidFill>
-            <a:srgbClr val="E9ECEF"/>
-          </a:solidFill>
-          <a:ln/>
-        </p:spPr>
-      </p:sp>
-      <p:sp>
-        <p:nvSpPr>
-          <p:cNvPr id="12" name="Text 9"/>
-          <p:cNvSpPr/>
-          <p:nvPr/>
-        </p:nvSpPr>
-        <p:spPr>
-          <a:xfrm>
-            <a:off x="5303520" y="2468880"/>
-            <a:ext cx="3291840" cy="411480"/>
-          </a:xfrm>
-          <a:prstGeom prst="rect">
-            <a:avLst/>
-          </a:prstGeom>
-          <a:noFill/>
-          <a:ln/>
-        </p:spPr>
-        <p:txBody>
-          <a:bodyPr wrap="square" rtlCol="0" anchor="ctr"/>
-          <a:lstStyle/>
-          <a:p>
-            <a:pPr indent="0" marL="0">
-              <a:buNone/>
-            </a:pPr>
-            <a:r>
-              <a:rPr lang="en-US" sz="1000" dirty="0">
+            <a:endParaRPr lang="en-US" sz="1000" dirty="0"/>
+          </a:p>
+        </p:txBody>
+      </p:sp>
+      <p:sp>
+        <p:nvSpPr>
+          <p:cNvPr id="11" name="Text 8"/>
+          <p:cNvSpPr/>
+          <p:nvPr/>
+        </p:nvSpPr>
+        <p:spPr>
+          <a:xfrm>
+            <a:off x="548640" y="4160520"/>
+            <a:ext cx="2011680" cy="274320"/>
+          </a:xfrm>
+          <a:prstGeom prst="rect">
+            <a:avLst/>
+          </a:prstGeom>
+          <a:noFill/>
+          <a:ln/>
+        </p:spPr>
+        <p:txBody>
+          <a:bodyPr wrap="square" rtlCol="0" anchor="ctr"/>
+          <a:lstStyle/>
+          <a:p>
+            <a:pPr indent="0" marL="0">
+              <a:buNone/>
+            </a:pPr>
+            <a:r>
+              <a:rPr lang="en-US" sz="900" dirty="0">
                 <a:solidFill>
                   <a:srgbClr val="2C3E50"/>
                 </a:solidFill>
@@ -7953,36 +7815,36 @@
               </a:rPr>
               <a:t>✓ 账号密码登录验证</a:t>
             </a:r>
-            <a:endParaRPr lang="en-US" sz="1000" dirty="0"/>
-          </a:p>
-        </p:txBody>
-      </p:sp>
-      <p:sp>
-        <p:nvSpPr>
-          <p:cNvPr id="13" name="Text 10"/>
-          <p:cNvSpPr/>
-          <p:nvPr/>
-        </p:nvSpPr>
-        <p:spPr>
-          <a:xfrm>
-            <a:off x="5303520" y="2926080"/>
-            <a:ext cx="3291840" cy="411480"/>
-          </a:xfrm>
-          <a:prstGeom prst="rect">
-            <a:avLst/>
-          </a:prstGeom>
-          <a:noFill/>
-          <a:ln/>
-        </p:spPr>
-        <p:txBody>
-          <a:bodyPr wrap="square" rtlCol="0" anchor="ctr"/>
-          <a:lstStyle/>
-          <a:p>
-            <a:pPr indent="0" marL="0">
-              <a:buNone/>
-            </a:pPr>
-            <a:r>
-              <a:rPr lang="en-US" sz="1000" dirty="0">
+            <a:endParaRPr lang="en-US" sz="900" dirty="0"/>
+          </a:p>
+        </p:txBody>
+      </p:sp>
+      <p:sp>
+        <p:nvSpPr>
+          <p:cNvPr id="12" name="Text 9"/>
+          <p:cNvSpPr/>
+          <p:nvPr/>
+        </p:nvSpPr>
+        <p:spPr>
+          <a:xfrm>
+            <a:off x="2651760" y="4160520"/>
+            <a:ext cx="2011680" cy="274320"/>
+          </a:xfrm>
+          <a:prstGeom prst="rect">
+            <a:avLst/>
+          </a:prstGeom>
+          <a:noFill/>
+          <a:ln/>
+        </p:spPr>
+        <p:txBody>
+          <a:bodyPr wrap="square" rtlCol="0" anchor="ctr"/>
+          <a:lstStyle/>
+          <a:p>
+            <a:pPr indent="0" marL="0">
+              <a:buNone/>
+            </a:pPr>
+            <a:r>
+              <a:rPr lang="en-US" sz="900" dirty="0">
                 <a:solidFill>
                   <a:srgbClr val="2C3E50"/>
                 </a:solidFill>
@@ -7992,36 +7854,36 @@
               </a:rPr>
               <a:t>✓ 会话令牌生成</a:t>
             </a:r>
-            <a:endParaRPr lang="en-US" sz="1000" dirty="0"/>
-          </a:p>
-        </p:txBody>
-      </p:sp>
-      <p:sp>
-        <p:nvSpPr>
-          <p:cNvPr id="14" name="Text 11"/>
-          <p:cNvSpPr/>
-          <p:nvPr/>
-        </p:nvSpPr>
-        <p:spPr>
-          <a:xfrm>
-            <a:off x="5303520" y="3383280"/>
-            <a:ext cx="3291840" cy="411480"/>
-          </a:xfrm>
-          <a:prstGeom prst="rect">
-            <a:avLst/>
-          </a:prstGeom>
-          <a:noFill/>
-          <a:ln/>
-        </p:spPr>
-        <p:txBody>
-          <a:bodyPr wrap="square" rtlCol="0" anchor="ctr"/>
-          <a:lstStyle/>
-          <a:p>
-            <a:pPr indent="0" marL="0">
-              <a:buNone/>
-            </a:pPr>
-            <a:r>
-              <a:rPr lang="en-US" sz="1000" dirty="0">
+            <a:endParaRPr lang="en-US" sz="900" dirty="0"/>
+          </a:p>
+        </p:txBody>
+      </p:sp>
+      <p:sp>
+        <p:nvSpPr>
+          <p:cNvPr id="13" name="Text 10"/>
+          <p:cNvSpPr/>
+          <p:nvPr/>
+        </p:nvSpPr>
+        <p:spPr>
+          <a:xfrm>
+            <a:off x="4754880" y="4160520"/>
+            <a:ext cx="2011680" cy="274320"/>
+          </a:xfrm>
+          <a:prstGeom prst="rect">
+            <a:avLst/>
+          </a:prstGeom>
+          <a:noFill/>
+          <a:ln/>
+        </p:spPr>
+        <p:txBody>
+          <a:bodyPr wrap="square" rtlCol="0" anchor="ctr"/>
+          <a:lstStyle/>
+          <a:p>
+            <a:pPr indent="0" marL="0">
+              <a:buNone/>
+            </a:pPr>
+            <a:r>
+              <a:rPr lang="en-US" sz="900" dirty="0">
                 <a:solidFill>
                   <a:srgbClr val="2C3E50"/>
                 </a:solidFill>
@@ -8031,36 +7893,36 @@
               </a:rPr>
               <a:t>✓ 支持用户注册功能</a:t>
             </a:r>
-            <a:endParaRPr lang="en-US" sz="1000" dirty="0"/>
-          </a:p>
-        </p:txBody>
-      </p:sp>
-      <p:sp>
-        <p:nvSpPr>
-          <p:cNvPr id="15" name="Text 12"/>
-          <p:cNvSpPr/>
-          <p:nvPr/>
-        </p:nvSpPr>
-        <p:spPr>
-          <a:xfrm>
-            <a:off x="5303520" y="3840480"/>
-            <a:ext cx="3291840" cy="411480"/>
-          </a:xfrm>
-          <a:prstGeom prst="rect">
-            <a:avLst/>
-          </a:prstGeom>
-          <a:noFill/>
-          <a:ln/>
-        </p:spPr>
-        <p:txBody>
-          <a:bodyPr wrap="square" rtlCol="0" anchor="ctr"/>
-          <a:lstStyle/>
-          <a:p>
-            <a:pPr indent="0" marL="0">
-              <a:buNone/>
-            </a:pPr>
-            <a:r>
-              <a:rPr lang="en-US" sz="1000" dirty="0">
+            <a:endParaRPr lang="en-US" sz="900" dirty="0"/>
+          </a:p>
+        </p:txBody>
+      </p:sp>
+      <p:sp>
+        <p:nvSpPr>
+          <p:cNvPr id="14" name="Text 11"/>
+          <p:cNvSpPr/>
+          <p:nvPr/>
+        </p:nvSpPr>
+        <p:spPr>
+          <a:xfrm>
+            <a:off x="6858000" y="4160520"/>
+            <a:ext cx="2011680" cy="274320"/>
+          </a:xfrm>
+          <a:prstGeom prst="rect">
+            <a:avLst/>
+          </a:prstGeom>
+          <a:noFill/>
+          <a:ln/>
+        </p:spPr>
+        <p:txBody>
+          <a:bodyPr wrap="square" rtlCol="0" anchor="ctr"/>
+          <a:lstStyle/>
+          <a:p>
+            <a:pPr indent="0" marL="0">
+              <a:buNone/>
+            </a:pPr>
+            <a:r>
+              <a:rPr lang="en-US" sz="900" dirty="0">
                 <a:solidFill>
                   <a:srgbClr val="2C3E50"/>
                 </a:solidFill>
@@ -8070,7 +7932,7 @@
               </a:rPr>
               <a:t>✓ 安全身份认证</a:t>
             </a:r>
-            <a:endParaRPr lang="en-US" sz="1000" dirty="0"/>
+            <a:endParaRPr lang="en-US" sz="900" dirty="0"/>
           </a:p>
         </p:txBody>
       </p:sp>
@@ -8134,24 +7996,24 @@
         </p:nvSpPr>
         <p:spPr>
           <a:xfrm>
-            <a:off x="457200" y="320040"/>
-            <a:ext cx="8229600" cy="457200"/>
-          </a:xfrm>
-          <a:prstGeom prst="rect">
-            <a:avLst/>
-          </a:prstGeom>
-          <a:noFill/>
-          <a:ln/>
-        </p:spPr>
-        <p:txBody>
-          <a:bodyPr wrap="square" rtlCol="0" anchor="ctr"/>
-          <a:lstStyle/>
-          <a:p>
-            <a:pPr indent="0" marL="0">
-              <a:buNone/>
-            </a:pPr>
-            <a:r>
-              <a:rPr lang="en-US" sz="2200" b="1" dirty="0">
+            <a:off x="457200" y="274320"/>
+            <a:ext cx="8229600" cy="411480"/>
+          </a:xfrm>
+          <a:prstGeom prst="rect">
+            <a:avLst/>
+          </a:prstGeom>
+          <a:noFill/>
+          <a:ln/>
+        </p:spPr>
+        <p:txBody>
+          <a:bodyPr wrap="square" rtlCol="0" anchor="ctr"/>
+          <a:lstStyle/>
+          <a:p>
+            <a:pPr indent="0" marL="0">
+              <a:buNone/>
+            </a:pPr>
+            <a:r>
+              <a:rPr lang="en-US" sz="2000" b="1" dirty="0">
                 <a:solidFill>
                   <a:srgbClr val="1E3A5F"/>
                 </a:solidFill>
@@ -8161,7 +8023,7 @@
               </a:rPr>
               <a:t>图5-3 生鲜商品购买页面</a:t>
             </a:r>
-            <a:endParaRPr lang="en-US" sz="2200" dirty="0"/>
+            <a:endParaRPr lang="en-US" sz="2000" dirty="0"/>
           </a:p>
         </p:txBody>
       </p:sp>
@@ -8173,8 +8035,8 @@
         </p:nvSpPr>
         <p:spPr>
           <a:xfrm>
-            <a:off x="457200" y="777240"/>
-            <a:ext cx="1371600" cy="27432"/>
+            <a:off x="457200" y="685800"/>
+            <a:ext cx="1097280" cy="27432"/>
           </a:xfrm>
           <a:prstGeom prst="rect">
             <a:avLst/>
@@ -8193,12 +8055,12 @@
         </p:nvSpPr>
         <p:spPr>
           <a:xfrm>
-            <a:off x="365760" y="1005840"/>
-            <a:ext cx="4572000" cy="3657600"/>
+            <a:off x="365760" y="914400"/>
+            <a:ext cx="8412480" cy="2286000"/>
           </a:xfrm>
           <a:prstGeom prst="roundRect">
             <a:avLst>
-              <a:gd name="adj" fmla="val 2500"/>
+              <a:gd name="adj" fmla="val 3200"/>
             </a:avLst>
           </a:prstGeom>
           <a:solidFill>
@@ -8206,8 +8068,8 @@
           </a:solidFill>
           <a:ln/>
           <a:effectLst>
-            <a:outerShdw sx="100000" sy="100000" kx="0" ky="0" algn="bl" rotWithShape="0" blurRad="50800" dist="25400" dir="16200000">
-              <a:srgbClr val="00000015">
+            <a:outerShdw sx="100000" sy="100000" kx="0" ky="0" algn="bl" rotWithShape="0" blurRad="38100" dist="12700" dir="16200000">
+              <a:srgbClr val="00000010">
                 <a:alpha val="75000"/>
               </a:srgbClr>
             </a:outerShdw>
@@ -8230,8 +8092,8 @@
         </p:blipFill>
         <p:spPr>
           <a:xfrm>
-            <a:off x="457200" y="1097280"/>
-            <a:ext cx="4389120" cy="3474720"/>
+            <a:off x="457200" y="1005840"/>
+            <a:ext cx="8229600" cy="2103120"/>
           </a:xfrm>
           <a:prstGeom prst="rect">
             <a:avLst/>
@@ -8246,12 +8108,12 @@
         </p:nvSpPr>
         <p:spPr>
           <a:xfrm>
-            <a:off x="5120640" y="1005840"/>
-            <a:ext cx="3657600" cy="3657600"/>
+            <a:off x="365760" y="3337560"/>
+            <a:ext cx="8412480" cy="1417320"/>
           </a:xfrm>
           <a:prstGeom prst="roundRect">
             <a:avLst>
-              <a:gd name="adj" fmla="val 2500"/>
+              <a:gd name="adj" fmla="val 5161"/>
             </a:avLst>
           </a:prstGeom>
           <a:solidFill>
@@ -8259,8 +8121,8 @@
           </a:solidFill>
           <a:ln/>
           <a:effectLst>
-            <a:outerShdw sx="100000" sy="100000" kx="0" ky="0" algn="bl" rotWithShape="0" blurRad="50800" dist="25400" dir="16200000">
-              <a:srgbClr val="00000015">
+            <a:outerShdw sx="100000" sy="100000" kx="0" ky="0" algn="bl" rotWithShape="0" blurRad="38100" dist="12700" dir="16200000">
+              <a:srgbClr val="00000010">
                 <a:alpha val="75000"/>
               </a:srgbClr>
             </a:outerShdw>
@@ -8275,14 +8137,14 @@
         </p:nvSpPr>
         <p:spPr>
           <a:xfrm>
-            <a:off x="5120640" y="1005840"/>
-            <a:ext cx="3657600" cy="457200"/>
-          </a:xfrm>
-          <a:prstGeom prst="rect">
-            <a:avLst/>
-          </a:prstGeom>
-          <a:solidFill>
-            <a:srgbClr val="1E3A5F"/>
+            <a:off x="365760" y="3337560"/>
+            <a:ext cx="54864" cy="1417320"/>
+          </a:xfrm>
+          <a:prstGeom prst="rect">
+            <a:avLst/>
+          </a:prstGeom>
+          <a:solidFill>
+            <a:srgbClr val="C9A227"/>
           </a:solidFill>
           <a:ln/>
         </p:spPr>
@@ -8295,26 +8157,26 @@
         </p:nvSpPr>
         <p:spPr>
           <a:xfrm>
-            <a:off x="5120640" y="1005840"/>
-            <a:ext cx="3657600" cy="457200"/>
-          </a:xfrm>
-          <a:prstGeom prst="rect">
-            <a:avLst/>
-          </a:prstGeom>
-          <a:noFill/>
-          <a:ln/>
-        </p:spPr>
-        <p:txBody>
-          <a:bodyPr wrap="square" rtlCol="0" anchor="ctr"/>
-          <a:lstStyle/>
-          <a:p>
-            <a:pPr algn="ctr" indent="0" marL="0">
-              <a:buNone/>
-            </a:pPr>
-            <a:r>
-              <a:rPr lang="en-US" sz="1400" b="1" dirty="0">
-                <a:solidFill>
-                  <a:srgbClr val="FFFFFF"/>
+            <a:off x="548640" y="3429000"/>
+            <a:ext cx="1828800" cy="320040"/>
+          </a:xfrm>
+          <a:prstGeom prst="rect">
+            <a:avLst/>
+          </a:prstGeom>
+          <a:noFill/>
+          <a:ln/>
+        </p:spPr>
+        <p:txBody>
+          <a:bodyPr wrap="square" rtlCol="0" anchor="ctr"/>
+          <a:lstStyle/>
+          <a:p>
+            <a:pPr indent="0" marL="0">
+              <a:buNone/>
+            </a:pPr>
+            <a:r>
+              <a:rPr lang="en-US" sz="1300" b="1" dirty="0">
+                <a:solidFill>
+                  <a:srgbClr val="1E3A5F"/>
                 </a:solidFill>
                 <a:latin typeface="SimHei" pitchFamily="34" charset="0"/>
                 <a:ea typeface="SimHei" pitchFamily="34" charset="-122"/>
@@ -8322,7 +8184,7 @@
               </a:rPr>
               <a:t>功能说明</a:t>
             </a:r>
-            <a:endParaRPr lang="en-US" sz="1400" dirty="0"/>
+            <a:endParaRPr lang="en-US" sz="1300" dirty="0"/>
           </a:p>
         </p:txBody>
       </p:sp>
@@ -8334,8 +8196,8 @@
         </p:nvSpPr>
         <p:spPr>
           <a:xfrm>
-            <a:off x="5303520" y="1600200"/>
-            <a:ext cx="3291840" cy="731520"/>
+            <a:off x="548640" y="3749040"/>
+            <a:ext cx="8046720" cy="365760"/>
           </a:xfrm>
           <a:prstGeom prst="rect">
             <a:avLst/>
@@ -8348,13 +8210,10 @@
           <a:lstStyle/>
           <a:p>
             <a:pPr indent="0" marL="0">
-              <a:lnSpc>
-                <a:spcPct val="140000"/>
-              </a:lnSpc>
-              <a:buNone/>
-            </a:pPr>
-            <a:r>
-              <a:rPr lang="en-US" sz="1100" dirty="0">
+              <a:buNone/>
+            </a:pPr>
+            <a:r>
+              <a:rPr lang="en-US" sz="1000" dirty="0">
                 <a:solidFill>
                   <a:srgbClr val="2C3E50"/>
                 </a:solidFill>
@@ -8364,56 +8223,36 @@
               </a:rPr>
               <a:t>商品购买功能允许用户浏览商品列表，查看商品详情，选择商品加入购物车或直接购买，系统自动跳转至支付页面完成下单流程。</a:t>
             </a:r>
-            <a:endParaRPr lang="en-US" sz="1100" dirty="0"/>
-          </a:p>
-        </p:txBody>
-      </p:sp>
-      <p:sp>
-        <p:nvSpPr>
-          <p:cNvPr id="11" name="Shape 8"/>
-          <p:cNvSpPr/>
-          <p:nvPr/>
-        </p:nvSpPr>
-        <p:spPr>
-          <a:xfrm>
-            <a:off x="5303520" y="2331720"/>
-            <a:ext cx="3291840" cy="18288"/>
-          </a:xfrm>
-          <a:prstGeom prst="rect">
-            <a:avLst/>
-          </a:prstGeom>
-          <a:solidFill>
-            <a:srgbClr val="E9ECEF"/>
-          </a:solidFill>
-          <a:ln/>
-        </p:spPr>
-      </p:sp>
-      <p:sp>
-        <p:nvSpPr>
-          <p:cNvPr id="12" name="Text 9"/>
-          <p:cNvSpPr/>
-          <p:nvPr/>
-        </p:nvSpPr>
-        <p:spPr>
-          <a:xfrm>
-            <a:off x="5303520" y="2468880"/>
-            <a:ext cx="3291840" cy="411480"/>
-          </a:xfrm>
-          <a:prstGeom prst="rect">
-            <a:avLst/>
-          </a:prstGeom>
-          <a:noFill/>
-          <a:ln/>
-        </p:spPr>
-        <p:txBody>
-          <a:bodyPr wrap="square" rtlCol="0" anchor="ctr"/>
-          <a:lstStyle/>
-          <a:p>
-            <a:pPr indent="0" marL="0">
-              <a:buNone/>
-            </a:pPr>
-            <a:r>
-              <a:rPr lang="en-US" sz="1000" dirty="0">
+            <a:endParaRPr lang="en-US" sz="1000" dirty="0"/>
+          </a:p>
+        </p:txBody>
+      </p:sp>
+      <p:sp>
+        <p:nvSpPr>
+          <p:cNvPr id="11" name="Text 8"/>
+          <p:cNvSpPr/>
+          <p:nvPr/>
+        </p:nvSpPr>
+        <p:spPr>
+          <a:xfrm>
+            <a:off x="548640" y="4160520"/>
+            <a:ext cx="2011680" cy="274320"/>
+          </a:xfrm>
+          <a:prstGeom prst="rect">
+            <a:avLst/>
+          </a:prstGeom>
+          <a:noFill/>
+          <a:ln/>
+        </p:spPr>
+        <p:txBody>
+          <a:bodyPr wrap="square" rtlCol="0" anchor="ctr"/>
+          <a:lstStyle/>
+          <a:p>
+            <a:pPr indent="0" marL="0">
+              <a:buNone/>
+            </a:pPr>
+            <a:r>
+              <a:rPr lang="en-US" sz="900" dirty="0">
                 <a:solidFill>
                   <a:srgbClr val="2C3E50"/>
                 </a:solidFill>
@@ -8423,36 +8262,36 @@
               </a:rPr>
               <a:t>✓ 商品列表浏览</a:t>
             </a:r>
-            <a:endParaRPr lang="en-US" sz="1000" dirty="0"/>
-          </a:p>
-        </p:txBody>
-      </p:sp>
-      <p:sp>
-        <p:nvSpPr>
-          <p:cNvPr id="13" name="Text 10"/>
-          <p:cNvSpPr/>
-          <p:nvPr/>
-        </p:nvSpPr>
-        <p:spPr>
-          <a:xfrm>
-            <a:off x="5303520" y="2926080"/>
-            <a:ext cx="3291840" cy="411480"/>
-          </a:xfrm>
-          <a:prstGeom prst="rect">
-            <a:avLst/>
-          </a:prstGeom>
-          <a:noFill/>
-          <a:ln/>
-        </p:spPr>
-        <p:txBody>
-          <a:bodyPr wrap="square" rtlCol="0" anchor="ctr"/>
-          <a:lstStyle/>
-          <a:p>
-            <a:pPr indent="0" marL="0">
-              <a:buNone/>
-            </a:pPr>
-            <a:r>
-              <a:rPr lang="en-US" sz="1000" dirty="0">
+            <a:endParaRPr lang="en-US" sz="900" dirty="0"/>
+          </a:p>
+        </p:txBody>
+      </p:sp>
+      <p:sp>
+        <p:nvSpPr>
+          <p:cNvPr id="12" name="Text 9"/>
+          <p:cNvSpPr/>
+          <p:nvPr/>
+        </p:nvSpPr>
+        <p:spPr>
+          <a:xfrm>
+            <a:off x="2651760" y="4160520"/>
+            <a:ext cx="2011680" cy="274320"/>
+          </a:xfrm>
+          <a:prstGeom prst="rect">
+            <a:avLst/>
+          </a:prstGeom>
+          <a:noFill/>
+          <a:ln/>
+        </p:spPr>
+        <p:txBody>
+          <a:bodyPr wrap="square" rtlCol="0" anchor="ctr"/>
+          <a:lstStyle/>
+          <a:p>
+            <a:pPr indent="0" marL="0">
+              <a:buNone/>
+            </a:pPr>
+            <a:r>
+              <a:rPr lang="en-US" sz="900" dirty="0">
                 <a:solidFill>
                   <a:srgbClr val="2C3E50"/>
                 </a:solidFill>
@@ -8462,36 +8301,36 @@
               </a:rPr>
               <a:t>✓ 商品详情查看</a:t>
             </a:r>
-            <a:endParaRPr lang="en-US" sz="1000" dirty="0"/>
-          </a:p>
-        </p:txBody>
-      </p:sp>
-      <p:sp>
-        <p:nvSpPr>
-          <p:cNvPr id="14" name="Text 11"/>
-          <p:cNvSpPr/>
-          <p:nvPr/>
-        </p:nvSpPr>
-        <p:spPr>
-          <a:xfrm>
-            <a:off x="5303520" y="3383280"/>
-            <a:ext cx="3291840" cy="411480"/>
-          </a:xfrm>
-          <a:prstGeom prst="rect">
-            <a:avLst/>
-          </a:prstGeom>
-          <a:noFill/>
-          <a:ln/>
-        </p:spPr>
-        <p:txBody>
-          <a:bodyPr wrap="square" rtlCol="0" anchor="ctr"/>
-          <a:lstStyle/>
-          <a:p>
-            <a:pPr indent="0" marL="0">
-              <a:buNone/>
-            </a:pPr>
-            <a:r>
-              <a:rPr lang="en-US" sz="1000" dirty="0">
+            <a:endParaRPr lang="en-US" sz="900" dirty="0"/>
+          </a:p>
+        </p:txBody>
+      </p:sp>
+      <p:sp>
+        <p:nvSpPr>
+          <p:cNvPr id="13" name="Text 10"/>
+          <p:cNvSpPr/>
+          <p:nvPr/>
+        </p:nvSpPr>
+        <p:spPr>
+          <a:xfrm>
+            <a:off x="4754880" y="4160520"/>
+            <a:ext cx="2011680" cy="274320"/>
+          </a:xfrm>
+          <a:prstGeom prst="rect">
+            <a:avLst/>
+          </a:prstGeom>
+          <a:noFill/>
+          <a:ln/>
+        </p:spPr>
+        <p:txBody>
+          <a:bodyPr wrap="square" rtlCol="0" anchor="ctr"/>
+          <a:lstStyle/>
+          <a:p>
+            <a:pPr indent="0" marL="0">
+              <a:buNone/>
+            </a:pPr>
+            <a:r>
+              <a:rPr lang="en-US" sz="900" dirty="0">
                 <a:solidFill>
                   <a:srgbClr val="2C3E50"/>
                 </a:solidFill>
@@ -8501,36 +8340,36 @@
               </a:rPr>
               <a:t>✓ 购物车管理</a:t>
             </a:r>
-            <a:endParaRPr lang="en-US" sz="1000" dirty="0"/>
-          </a:p>
-        </p:txBody>
-      </p:sp>
-      <p:sp>
-        <p:nvSpPr>
-          <p:cNvPr id="15" name="Text 12"/>
-          <p:cNvSpPr/>
-          <p:nvPr/>
-        </p:nvSpPr>
-        <p:spPr>
-          <a:xfrm>
-            <a:off x="5303520" y="3840480"/>
-            <a:ext cx="3291840" cy="411480"/>
-          </a:xfrm>
-          <a:prstGeom prst="rect">
-            <a:avLst/>
-          </a:prstGeom>
-          <a:noFill/>
-          <a:ln/>
-        </p:spPr>
-        <p:txBody>
-          <a:bodyPr wrap="square" rtlCol="0" anchor="ctr"/>
-          <a:lstStyle/>
-          <a:p>
-            <a:pPr indent="0" marL="0">
-              <a:buNone/>
-            </a:pPr>
-            <a:r>
-              <a:rPr lang="en-US" sz="1000" dirty="0">
+            <a:endParaRPr lang="en-US" sz="900" dirty="0"/>
+          </a:p>
+        </p:txBody>
+      </p:sp>
+      <p:sp>
+        <p:nvSpPr>
+          <p:cNvPr id="14" name="Text 11"/>
+          <p:cNvSpPr/>
+          <p:nvPr/>
+        </p:nvSpPr>
+        <p:spPr>
+          <a:xfrm>
+            <a:off x="6858000" y="4160520"/>
+            <a:ext cx="2011680" cy="274320"/>
+          </a:xfrm>
+          <a:prstGeom prst="rect">
+            <a:avLst/>
+          </a:prstGeom>
+          <a:noFill/>
+          <a:ln/>
+        </p:spPr>
+        <p:txBody>
+          <a:bodyPr wrap="square" rtlCol="0" anchor="ctr"/>
+          <a:lstStyle/>
+          <a:p>
+            <a:pPr indent="0" marL="0">
+              <a:buNone/>
+            </a:pPr>
+            <a:r>
+              <a:rPr lang="en-US" sz="900" dirty="0">
                 <a:solidFill>
                   <a:srgbClr val="2C3E50"/>
                 </a:solidFill>
@@ -8540,7 +8379,7 @@
               </a:rPr>
               <a:t>✓ 在线支付下单</a:t>
             </a:r>
-            <a:endParaRPr lang="en-US" sz="1000" dirty="0"/>
+            <a:endParaRPr lang="en-US" sz="900" dirty="0"/>
           </a:p>
         </p:txBody>
       </p:sp>
@@ -9566,24 +9405,24 @@
         </p:nvSpPr>
         <p:spPr>
           <a:xfrm>
-            <a:off x="457200" y="320040"/>
-            <a:ext cx="8229600" cy="457200"/>
-          </a:xfrm>
-          <a:prstGeom prst="rect">
-            <a:avLst/>
-          </a:prstGeom>
-          <a:noFill/>
-          <a:ln/>
-        </p:spPr>
-        <p:txBody>
-          <a:bodyPr wrap="square" rtlCol="0" anchor="ctr"/>
-          <a:lstStyle/>
-          <a:p>
-            <a:pPr indent="0" marL="0">
-              <a:buNone/>
-            </a:pPr>
-            <a:r>
-              <a:rPr lang="en-US" sz="2200" b="1" dirty="0">
+            <a:off x="457200" y="274320"/>
+            <a:ext cx="8229600" cy="411480"/>
+          </a:xfrm>
+          <a:prstGeom prst="rect">
+            <a:avLst/>
+          </a:prstGeom>
+          <a:noFill/>
+          <a:ln/>
+        </p:spPr>
+        <p:txBody>
+          <a:bodyPr wrap="square" rtlCol="0" anchor="ctr"/>
+          <a:lstStyle/>
+          <a:p>
+            <a:pPr indent="0" marL="0">
+              <a:buNone/>
+            </a:pPr>
+            <a:r>
+              <a:rPr lang="en-US" sz="2000" b="1" dirty="0">
                 <a:solidFill>
                   <a:srgbClr val="1E3A5F"/>
                 </a:solidFill>
@@ -9593,7 +9432,7 @@
               </a:rPr>
               <a:t>图5-5 优惠券领取页面</a:t>
             </a:r>
-            <a:endParaRPr lang="en-US" sz="2200" dirty="0"/>
+            <a:endParaRPr lang="en-US" sz="2000" dirty="0"/>
           </a:p>
         </p:txBody>
       </p:sp>
@@ -9605,8 +9444,8 @@
         </p:nvSpPr>
         <p:spPr>
           <a:xfrm>
-            <a:off x="457200" y="777240"/>
-            <a:ext cx="1371600" cy="27432"/>
+            <a:off x="457200" y="685800"/>
+            <a:ext cx="1097280" cy="27432"/>
           </a:xfrm>
           <a:prstGeom prst="rect">
             <a:avLst/>
@@ -9625,12 +9464,12 @@
         </p:nvSpPr>
         <p:spPr>
           <a:xfrm>
-            <a:off x="365760" y="1005840"/>
-            <a:ext cx="4572000" cy="3657600"/>
+            <a:off x="365760" y="914400"/>
+            <a:ext cx="8412480" cy="2286000"/>
           </a:xfrm>
           <a:prstGeom prst="roundRect">
             <a:avLst>
-              <a:gd name="adj" fmla="val 2500"/>
+              <a:gd name="adj" fmla="val 3200"/>
             </a:avLst>
           </a:prstGeom>
           <a:solidFill>
@@ -9638,8 +9477,8 @@
           </a:solidFill>
           <a:ln/>
           <a:effectLst>
-            <a:outerShdw sx="100000" sy="100000" kx="0" ky="0" algn="bl" rotWithShape="0" blurRad="50800" dist="25400" dir="16200000">
-              <a:srgbClr val="00000015">
+            <a:outerShdw sx="100000" sy="100000" kx="0" ky="0" algn="bl" rotWithShape="0" blurRad="38100" dist="12700" dir="16200000">
+              <a:srgbClr val="00000010">
                 <a:alpha val="75000"/>
               </a:srgbClr>
             </a:outerShdw>
@@ -9662,8 +9501,8 @@
         </p:blipFill>
         <p:spPr>
           <a:xfrm>
-            <a:off x="457200" y="1097280"/>
-            <a:ext cx="4389120" cy="3474720"/>
+            <a:off x="457200" y="1005840"/>
+            <a:ext cx="8229600" cy="2103120"/>
           </a:xfrm>
           <a:prstGeom prst="rect">
             <a:avLst/>
@@ -9678,12 +9517,12 @@
         </p:nvSpPr>
         <p:spPr>
           <a:xfrm>
-            <a:off x="5120640" y="1005840"/>
-            <a:ext cx="3657600" cy="3657600"/>
+            <a:off x="365760" y="3337560"/>
+            <a:ext cx="8412480" cy="1417320"/>
           </a:xfrm>
           <a:prstGeom prst="roundRect">
             <a:avLst>
-              <a:gd name="adj" fmla="val 2500"/>
+              <a:gd name="adj" fmla="val 5161"/>
             </a:avLst>
           </a:prstGeom>
           <a:solidFill>
@@ -9691,8 +9530,8 @@
           </a:solidFill>
           <a:ln/>
           <a:effectLst>
-            <a:outerShdw sx="100000" sy="100000" kx="0" ky="0" algn="bl" rotWithShape="0" blurRad="50800" dist="25400" dir="16200000">
-              <a:srgbClr val="00000015">
+            <a:outerShdw sx="100000" sy="100000" kx="0" ky="0" algn="bl" rotWithShape="0" blurRad="38100" dist="12700" dir="16200000">
+              <a:srgbClr val="00000010">
                 <a:alpha val="75000"/>
               </a:srgbClr>
             </a:outerShdw>
@@ -9707,14 +9546,14 @@
         </p:nvSpPr>
         <p:spPr>
           <a:xfrm>
-            <a:off x="5120640" y="1005840"/>
-            <a:ext cx="3657600" cy="457200"/>
-          </a:xfrm>
-          <a:prstGeom prst="rect">
-            <a:avLst/>
-          </a:prstGeom>
-          <a:solidFill>
-            <a:srgbClr val="1E3A5F"/>
+            <a:off x="365760" y="3337560"/>
+            <a:ext cx="54864" cy="1417320"/>
+          </a:xfrm>
+          <a:prstGeom prst="rect">
+            <a:avLst/>
+          </a:prstGeom>
+          <a:solidFill>
+            <a:srgbClr val="C9A227"/>
           </a:solidFill>
           <a:ln/>
         </p:spPr>
@@ -9727,26 +9566,26 @@
         </p:nvSpPr>
         <p:spPr>
           <a:xfrm>
-            <a:off x="5120640" y="1005840"/>
-            <a:ext cx="3657600" cy="457200"/>
-          </a:xfrm>
-          <a:prstGeom prst="rect">
-            <a:avLst/>
-          </a:prstGeom>
-          <a:noFill/>
-          <a:ln/>
-        </p:spPr>
-        <p:txBody>
-          <a:bodyPr wrap="square" rtlCol="0" anchor="ctr"/>
-          <a:lstStyle/>
-          <a:p>
-            <a:pPr algn="ctr" indent="0" marL="0">
-              <a:buNone/>
-            </a:pPr>
-            <a:r>
-              <a:rPr lang="en-US" sz="1400" b="1" dirty="0">
-                <a:solidFill>
-                  <a:srgbClr val="FFFFFF"/>
+            <a:off x="548640" y="3429000"/>
+            <a:ext cx="1828800" cy="320040"/>
+          </a:xfrm>
+          <a:prstGeom prst="rect">
+            <a:avLst/>
+          </a:prstGeom>
+          <a:noFill/>
+          <a:ln/>
+        </p:spPr>
+        <p:txBody>
+          <a:bodyPr wrap="square" rtlCol="0" anchor="ctr"/>
+          <a:lstStyle/>
+          <a:p>
+            <a:pPr indent="0" marL="0">
+              <a:buNone/>
+            </a:pPr>
+            <a:r>
+              <a:rPr lang="en-US" sz="1300" b="1" dirty="0">
+                <a:solidFill>
+                  <a:srgbClr val="1E3A5F"/>
                 </a:solidFill>
                 <a:latin typeface="SimHei" pitchFamily="34" charset="0"/>
                 <a:ea typeface="SimHei" pitchFamily="34" charset="-122"/>
@@ -9754,7 +9593,7 @@
               </a:rPr>
               <a:t>功能说明</a:t>
             </a:r>
-            <a:endParaRPr lang="en-US" sz="1400" dirty="0"/>
+            <a:endParaRPr lang="en-US" sz="1300" dirty="0"/>
           </a:p>
         </p:txBody>
       </p:sp>
@@ -9766,8 +9605,8 @@
         </p:nvSpPr>
         <p:spPr>
           <a:xfrm>
-            <a:off x="5303520" y="1600200"/>
-            <a:ext cx="3291840" cy="731520"/>
+            <a:off x="548640" y="3749040"/>
+            <a:ext cx="8046720" cy="365760"/>
           </a:xfrm>
           <a:prstGeom prst="rect">
             <a:avLst/>
@@ -9780,13 +9619,10 @@
           <a:lstStyle/>
           <a:p>
             <a:pPr indent="0" marL="0">
-              <a:lnSpc>
-                <a:spcPct val="140000"/>
-              </a:lnSpc>
-              <a:buNone/>
-            </a:pPr>
-            <a:r>
-              <a:rPr lang="en-US" sz="1100" dirty="0">
+              <a:buNone/>
+            </a:pPr>
+            <a:r>
+              <a:rPr lang="en-US" sz="1000" dirty="0">
                 <a:solidFill>
                   <a:srgbClr val="2C3E50"/>
                 </a:solidFill>
@@ -9796,56 +9632,36 @@
               </a:rPr>
               <a:t>优惠券功能允许用户浏览可用优惠券，查看优惠详情，使用积分兑换或直接领取优惠券，领取后可在购物时使用获得折扣优惠。</a:t>
             </a:r>
-            <a:endParaRPr lang="en-US" sz="1100" dirty="0"/>
-          </a:p>
-        </p:txBody>
-      </p:sp>
-      <p:sp>
-        <p:nvSpPr>
-          <p:cNvPr id="11" name="Shape 8"/>
-          <p:cNvSpPr/>
-          <p:nvPr/>
-        </p:nvSpPr>
-        <p:spPr>
-          <a:xfrm>
-            <a:off x="5303520" y="2331720"/>
-            <a:ext cx="3291840" cy="18288"/>
-          </a:xfrm>
-          <a:prstGeom prst="rect">
-            <a:avLst/>
-          </a:prstGeom>
-          <a:solidFill>
-            <a:srgbClr val="E9ECEF"/>
-          </a:solidFill>
-          <a:ln/>
-        </p:spPr>
-      </p:sp>
-      <p:sp>
-        <p:nvSpPr>
-          <p:cNvPr id="12" name="Text 9"/>
-          <p:cNvSpPr/>
-          <p:nvPr/>
-        </p:nvSpPr>
-        <p:spPr>
-          <a:xfrm>
-            <a:off x="5303520" y="2468880"/>
-            <a:ext cx="3291840" cy="411480"/>
-          </a:xfrm>
-          <a:prstGeom prst="rect">
-            <a:avLst/>
-          </a:prstGeom>
-          <a:noFill/>
-          <a:ln/>
-        </p:spPr>
-        <p:txBody>
-          <a:bodyPr wrap="square" rtlCol="0" anchor="ctr"/>
-          <a:lstStyle/>
-          <a:p>
-            <a:pPr indent="0" marL="0">
-              <a:buNone/>
-            </a:pPr>
-            <a:r>
-              <a:rPr lang="en-US" sz="1000" dirty="0">
+            <a:endParaRPr lang="en-US" sz="1000" dirty="0"/>
+          </a:p>
+        </p:txBody>
+      </p:sp>
+      <p:sp>
+        <p:nvSpPr>
+          <p:cNvPr id="11" name="Text 8"/>
+          <p:cNvSpPr/>
+          <p:nvPr/>
+        </p:nvSpPr>
+        <p:spPr>
+          <a:xfrm>
+            <a:off x="548640" y="4160520"/>
+            <a:ext cx="2011680" cy="274320"/>
+          </a:xfrm>
+          <a:prstGeom prst="rect">
+            <a:avLst/>
+          </a:prstGeom>
+          <a:noFill/>
+          <a:ln/>
+        </p:spPr>
+        <p:txBody>
+          <a:bodyPr wrap="square" rtlCol="0" anchor="ctr"/>
+          <a:lstStyle/>
+          <a:p>
+            <a:pPr indent="0" marL="0">
+              <a:buNone/>
+            </a:pPr>
+            <a:r>
+              <a:rPr lang="en-US" sz="900" dirty="0">
                 <a:solidFill>
                   <a:srgbClr val="2C3E50"/>
                 </a:solidFill>
@@ -9855,36 +9671,36 @@
               </a:rPr>
               <a:t>✓ 优惠券列表展示</a:t>
             </a:r>
-            <a:endParaRPr lang="en-US" sz="1000" dirty="0"/>
-          </a:p>
-        </p:txBody>
-      </p:sp>
-      <p:sp>
-        <p:nvSpPr>
-          <p:cNvPr id="13" name="Text 10"/>
-          <p:cNvSpPr/>
-          <p:nvPr/>
-        </p:nvSpPr>
-        <p:spPr>
-          <a:xfrm>
-            <a:off x="5303520" y="2926080"/>
-            <a:ext cx="3291840" cy="411480"/>
-          </a:xfrm>
-          <a:prstGeom prst="rect">
-            <a:avLst/>
-          </a:prstGeom>
-          <a:noFill/>
-          <a:ln/>
-        </p:spPr>
-        <p:txBody>
-          <a:bodyPr wrap="square" rtlCol="0" anchor="ctr"/>
-          <a:lstStyle/>
-          <a:p>
-            <a:pPr indent="0" marL="0">
-              <a:buNone/>
-            </a:pPr>
-            <a:r>
-              <a:rPr lang="en-US" sz="1000" dirty="0">
+            <a:endParaRPr lang="en-US" sz="900" dirty="0"/>
+          </a:p>
+        </p:txBody>
+      </p:sp>
+      <p:sp>
+        <p:nvSpPr>
+          <p:cNvPr id="12" name="Text 9"/>
+          <p:cNvSpPr/>
+          <p:nvPr/>
+        </p:nvSpPr>
+        <p:spPr>
+          <a:xfrm>
+            <a:off x="2651760" y="4160520"/>
+            <a:ext cx="2011680" cy="274320"/>
+          </a:xfrm>
+          <a:prstGeom prst="rect">
+            <a:avLst/>
+          </a:prstGeom>
+          <a:noFill/>
+          <a:ln/>
+        </p:spPr>
+        <p:txBody>
+          <a:bodyPr wrap="square" rtlCol="0" anchor="ctr"/>
+          <a:lstStyle/>
+          <a:p>
+            <a:pPr indent="0" marL="0">
+              <a:buNone/>
+            </a:pPr>
+            <a:r>
+              <a:rPr lang="en-US" sz="900" dirty="0">
                 <a:solidFill>
                   <a:srgbClr val="2C3E50"/>
                 </a:solidFill>
@@ -9894,36 +9710,36 @@
               </a:rPr>
               <a:t>✓ 积分兑换功能</a:t>
             </a:r>
-            <a:endParaRPr lang="en-US" sz="1000" dirty="0"/>
-          </a:p>
-        </p:txBody>
-      </p:sp>
-      <p:sp>
-        <p:nvSpPr>
-          <p:cNvPr id="14" name="Text 11"/>
-          <p:cNvSpPr/>
-          <p:nvPr/>
-        </p:nvSpPr>
-        <p:spPr>
-          <a:xfrm>
-            <a:off x="5303520" y="3383280"/>
-            <a:ext cx="3291840" cy="411480"/>
-          </a:xfrm>
-          <a:prstGeom prst="rect">
-            <a:avLst/>
-          </a:prstGeom>
-          <a:noFill/>
-          <a:ln/>
-        </p:spPr>
-        <p:txBody>
-          <a:bodyPr wrap="square" rtlCol="0" anchor="ctr"/>
-          <a:lstStyle/>
-          <a:p>
-            <a:pPr indent="0" marL="0">
-              <a:buNone/>
-            </a:pPr>
-            <a:r>
-              <a:rPr lang="en-US" sz="1000" dirty="0">
+            <a:endParaRPr lang="en-US" sz="900" dirty="0"/>
+          </a:p>
+        </p:txBody>
+      </p:sp>
+      <p:sp>
+        <p:nvSpPr>
+          <p:cNvPr id="13" name="Text 10"/>
+          <p:cNvSpPr/>
+          <p:nvPr/>
+        </p:nvSpPr>
+        <p:spPr>
+          <a:xfrm>
+            <a:off x="4754880" y="4160520"/>
+            <a:ext cx="2011680" cy="274320"/>
+          </a:xfrm>
+          <a:prstGeom prst="rect">
+            <a:avLst/>
+          </a:prstGeom>
+          <a:noFill/>
+          <a:ln/>
+        </p:spPr>
+        <p:txBody>
+          <a:bodyPr wrap="square" rtlCol="0" anchor="ctr"/>
+          <a:lstStyle/>
+          <a:p>
+            <a:pPr indent="0" marL="0">
+              <a:buNone/>
+            </a:pPr>
+            <a:r>
+              <a:rPr lang="en-US" sz="900" dirty="0">
                 <a:solidFill>
                   <a:srgbClr val="2C3E50"/>
                 </a:solidFill>
@@ -9933,36 +9749,36 @@
               </a:rPr>
               <a:t>✓ 优惠券领取</a:t>
             </a:r>
-            <a:endParaRPr lang="en-US" sz="1000" dirty="0"/>
-          </a:p>
-        </p:txBody>
-      </p:sp>
-      <p:sp>
-        <p:nvSpPr>
-          <p:cNvPr id="15" name="Text 12"/>
-          <p:cNvSpPr/>
-          <p:nvPr/>
-        </p:nvSpPr>
-        <p:spPr>
-          <a:xfrm>
-            <a:off x="5303520" y="3840480"/>
-            <a:ext cx="3291840" cy="411480"/>
-          </a:xfrm>
-          <a:prstGeom prst="rect">
-            <a:avLst/>
-          </a:prstGeom>
-          <a:noFill/>
-          <a:ln/>
-        </p:spPr>
-        <p:txBody>
-          <a:bodyPr wrap="square" rtlCol="0" anchor="ctr"/>
-          <a:lstStyle/>
-          <a:p>
-            <a:pPr indent="0" marL="0">
-              <a:buNone/>
-            </a:pPr>
-            <a:r>
-              <a:rPr lang="en-US" sz="1000" dirty="0">
+            <a:endParaRPr lang="en-US" sz="900" dirty="0"/>
+          </a:p>
+        </p:txBody>
+      </p:sp>
+      <p:sp>
+        <p:nvSpPr>
+          <p:cNvPr id="14" name="Text 11"/>
+          <p:cNvSpPr/>
+          <p:nvPr/>
+        </p:nvSpPr>
+        <p:spPr>
+          <a:xfrm>
+            <a:off x="6858000" y="4160520"/>
+            <a:ext cx="2011680" cy="274320"/>
+          </a:xfrm>
+          <a:prstGeom prst="rect">
+            <a:avLst/>
+          </a:prstGeom>
+          <a:noFill/>
+          <a:ln/>
+        </p:spPr>
+        <p:txBody>
+          <a:bodyPr wrap="square" rtlCol="0" anchor="ctr"/>
+          <a:lstStyle/>
+          <a:p>
+            <a:pPr indent="0" marL="0">
+              <a:buNone/>
+            </a:pPr>
+            <a:r>
+              <a:rPr lang="en-US" sz="900" dirty="0">
                 <a:solidFill>
                   <a:srgbClr val="2C3E50"/>
                 </a:solidFill>
@@ -9972,7 +9788,7 @@
               </a:rPr>
               <a:t>✓ 购物抵扣使用</a:t>
             </a:r>
-            <a:endParaRPr lang="en-US" sz="1000" dirty="0"/>
+            <a:endParaRPr lang="en-US" sz="900" dirty="0"/>
           </a:p>
         </p:txBody>
       </p:sp>
@@ -10036,24 +9852,24 @@
         </p:nvSpPr>
         <p:spPr>
           <a:xfrm>
-            <a:off x="457200" y="320040"/>
-            <a:ext cx="8229600" cy="457200"/>
-          </a:xfrm>
-          <a:prstGeom prst="rect">
-            <a:avLst/>
-          </a:prstGeom>
-          <a:noFill/>
-          <a:ln/>
-        </p:spPr>
-        <p:txBody>
-          <a:bodyPr wrap="square" rtlCol="0" anchor="ctr"/>
-          <a:lstStyle/>
-          <a:p>
-            <a:pPr indent="0" marL="0">
-              <a:buNone/>
-            </a:pPr>
-            <a:r>
-              <a:rPr lang="en-US" sz="2200" b="1" dirty="0">
+            <a:off x="457200" y="274320"/>
+            <a:ext cx="8229600" cy="411480"/>
+          </a:xfrm>
+          <a:prstGeom prst="rect">
+            <a:avLst/>
+          </a:prstGeom>
+          <a:noFill/>
+          <a:ln/>
+        </p:spPr>
+        <p:txBody>
+          <a:bodyPr wrap="square" rtlCol="0" anchor="ctr"/>
+          <a:lstStyle/>
+          <a:p>
+            <a:pPr indent="0" marL="0">
+              <a:buNone/>
+            </a:pPr>
+            <a:r>
+              <a:rPr lang="en-US" sz="2000" b="1" dirty="0">
                 <a:solidFill>
                   <a:srgbClr val="1E3A5F"/>
                 </a:solidFill>
@@ -10063,7 +9879,7 @@
               </a:rPr>
               <a:t>图5-7 个人中心页面</a:t>
             </a:r>
-            <a:endParaRPr lang="en-US" sz="2200" dirty="0"/>
+            <a:endParaRPr lang="en-US" sz="2000" dirty="0"/>
           </a:p>
         </p:txBody>
       </p:sp>
@@ -10075,8 +9891,8 @@
         </p:nvSpPr>
         <p:spPr>
           <a:xfrm>
-            <a:off x="457200" y="777240"/>
-            <a:ext cx="1371600" cy="27432"/>
+            <a:off x="457200" y="685800"/>
+            <a:ext cx="1097280" cy="27432"/>
           </a:xfrm>
           <a:prstGeom prst="rect">
             <a:avLst/>
@@ -10095,12 +9911,12 @@
         </p:nvSpPr>
         <p:spPr>
           <a:xfrm>
-            <a:off x="365760" y="1005840"/>
-            <a:ext cx="4572000" cy="3657600"/>
+            <a:off x="365760" y="914400"/>
+            <a:ext cx="8412480" cy="2286000"/>
           </a:xfrm>
           <a:prstGeom prst="roundRect">
             <a:avLst>
-              <a:gd name="adj" fmla="val 2500"/>
+              <a:gd name="adj" fmla="val 3200"/>
             </a:avLst>
           </a:prstGeom>
           <a:solidFill>
@@ -10108,8 +9924,8 @@
           </a:solidFill>
           <a:ln/>
           <a:effectLst>
-            <a:outerShdw sx="100000" sy="100000" kx="0" ky="0" algn="bl" rotWithShape="0" blurRad="50800" dist="25400" dir="16200000">
-              <a:srgbClr val="00000015">
+            <a:outerShdw sx="100000" sy="100000" kx="0" ky="0" algn="bl" rotWithShape="0" blurRad="38100" dist="12700" dir="16200000">
+              <a:srgbClr val="00000010">
                 <a:alpha val="75000"/>
               </a:srgbClr>
             </a:outerShdw>
@@ -10132,8 +9948,8 @@
         </p:blipFill>
         <p:spPr>
           <a:xfrm>
-            <a:off x="457200" y="1097280"/>
-            <a:ext cx="4389120" cy="3474720"/>
+            <a:off x="457200" y="1005840"/>
+            <a:ext cx="8229600" cy="2103120"/>
           </a:xfrm>
           <a:prstGeom prst="rect">
             <a:avLst/>
@@ -10148,12 +9964,12 @@
         </p:nvSpPr>
         <p:spPr>
           <a:xfrm>
-            <a:off x="5120640" y="1005840"/>
-            <a:ext cx="3657600" cy="3657600"/>
+            <a:off x="365760" y="3337560"/>
+            <a:ext cx="8412480" cy="1417320"/>
           </a:xfrm>
           <a:prstGeom prst="roundRect">
             <a:avLst>
-              <a:gd name="adj" fmla="val 2500"/>
+              <a:gd name="adj" fmla="val 5161"/>
             </a:avLst>
           </a:prstGeom>
           <a:solidFill>
@@ -10161,8 +9977,8 @@
           </a:solidFill>
           <a:ln/>
           <a:effectLst>
-            <a:outerShdw sx="100000" sy="100000" kx="0" ky="0" algn="bl" rotWithShape="0" blurRad="50800" dist="25400" dir="16200000">
-              <a:srgbClr val="00000015">
+            <a:outerShdw sx="100000" sy="100000" kx="0" ky="0" algn="bl" rotWithShape="0" blurRad="38100" dist="12700" dir="16200000">
+              <a:srgbClr val="00000010">
                 <a:alpha val="75000"/>
               </a:srgbClr>
             </a:outerShdw>
@@ -10177,14 +9993,14 @@
         </p:nvSpPr>
         <p:spPr>
           <a:xfrm>
-            <a:off x="5120640" y="1005840"/>
-            <a:ext cx="3657600" cy="457200"/>
-          </a:xfrm>
-          <a:prstGeom prst="rect">
-            <a:avLst/>
-          </a:prstGeom>
-          <a:solidFill>
-            <a:srgbClr val="1E3A5F"/>
+            <a:off x="365760" y="3337560"/>
+            <a:ext cx="54864" cy="1417320"/>
+          </a:xfrm>
+          <a:prstGeom prst="rect">
+            <a:avLst/>
+          </a:prstGeom>
+          <a:solidFill>
+            <a:srgbClr val="C9A227"/>
           </a:solidFill>
           <a:ln/>
         </p:spPr>
@@ -10197,26 +10013,26 @@
         </p:nvSpPr>
         <p:spPr>
           <a:xfrm>
-            <a:off x="5120640" y="1005840"/>
-            <a:ext cx="3657600" cy="457200"/>
-          </a:xfrm>
-          <a:prstGeom prst="rect">
-            <a:avLst/>
-          </a:prstGeom>
-          <a:noFill/>
-          <a:ln/>
-        </p:spPr>
-        <p:txBody>
-          <a:bodyPr wrap="square" rtlCol="0" anchor="ctr"/>
-          <a:lstStyle/>
-          <a:p>
-            <a:pPr algn="ctr" indent="0" marL="0">
-              <a:buNone/>
-            </a:pPr>
-            <a:r>
-              <a:rPr lang="en-US" sz="1400" b="1" dirty="0">
-                <a:solidFill>
-                  <a:srgbClr val="FFFFFF"/>
+            <a:off x="548640" y="3429000"/>
+            <a:ext cx="1828800" cy="320040"/>
+          </a:xfrm>
+          <a:prstGeom prst="rect">
+            <a:avLst/>
+          </a:prstGeom>
+          <a:noFill/>
+          <a:ln/>
+        </p:spPr>
+        <p:txBody>
+          <a:bodyPr wrap="square" rtlCol="0" anchor="ctr"/>
+          <a:lstStyle/>
+          <a:p>
+            <a:pPr indent="0" marL="0">
+              <a:buNone/>
+            </a:pPr>
+            <a:r>
+              <a:rPr lang="en-US" sz="1300" b="1" dirty="0">
+                <a:solidFill>
+                  <a:srgbClr val="1E3A5F"/>
                 </a:solidFill>
                 <a:latin typeface="SimHei" pitchFamily="34" charset="0"/>
                 <a:ea typeface="SimHei" pitchFamily="34" charset="-122"/>
@@ -10224,7 +10040,7 @@
               </a:rPr>
               <a:t>功能说明</a:t>
             </a:r>
-            <a:endParaRPr lang="en-US" sz="1400" dirty="0"/>
+            <a:endParaRPr lang="en-US" sz="1300" dirty="0"/>
           </a:p>
         </p:txBody>
       </p:sp>
@@ -10236,8 +10052,8 @@
         </p:nvSpPr>
         <p:spPr>
           <a:xfrm>
-            <a:off x="5303520" y="1600200"/>
-            <a:ext cx="3291840" cy="731520"/>
+            <a:off x="548640" y="3749040"/>
+            <a:ext cx="8046720" cy="365760"/>
           </a:xfrm>
           <a:prstGeom prst="rect">
             <a:avLst/>
@@ -10250,13 +10066,10 @@
           <a:lstStyle/>
           <a:p>
             <a:pPr indent="0" marL="0">
-              <a:lnSpc>
-                <a:spcPct val="140000"/>
-              </a:lnSpc>
-              <a:buNone/>
-            </a:pPr>
-            <a:r>
-              <a:rPr lang="en-US" sz="1100" dirty="0">
+              <a:buNone/>
+            </a:pPr>
+            <a:r>
+              <a:rPr lang="en-US" sz="1000" dirty="0">
                 <a:solidFill>
                   <a:srgbClr val="2C3E50"/>
                 </a:solidFill>
@@ -10266,56 +10079,36 @@
               </a:rPr>
               <a:t>个人中心功能允许用户管理个人信息、修改密码、查看订单记录、管理收货地址、查看积分余额等，实现个性化账户管理。</a:t>
             </a:r>
-            <a:endParaRPr lang="en-US" sz="1100" dirty="0"/>
-          </a:p>
-        </p:txBody>
-      </p:sp>
-      <p:sp>
-        <p:nvSpPr>
-          <p:cNvPr id="11" name="Shape 8"/>
-          <p:cNvSpPr/>
-          <p:nvPr/>
-        </p:nvSpPr>
-        <p:spPr>
-          <a:xfrm>
-            <a:off x="5303520" y="2331720"/>
-            <a:ext cx="3291840" cy="18288"/>
-          </a:xfrm>
-          <a:prstGeom prst="rect">
-            <a:avLst/>
-          </a:prstGeom>
-          <a:solidFill>
-            <a:srgbClr val="E9ECEF"/>
-          </a:solidFill>
-          <a:ln/>
-        </p:spPr>
-      </p:sp>
-      <p:sp>
-        <p:nvSpPr>
-          <p:cNvPr id="12" name="Text 9"/>
-          <p:cNvSpPr/>
-          <p:nvPr/>
-        </p:nvSpPr>
-        <p:spPr>
-          <a:xfrm>
-            <a:off x="5303520" y="2468880"/>
-            <a:ext cx="3291840" cy="411480"/>
-          </a:xfrm>
-          <a:prstGeom prst="rect">
-            <a:avLst/>
-          </a:prstGeom>
-          <a:noFill/>
-          <a:ln/>
-        </p:spPr>
-        <p:txBody>
-          <a:bodyPr wrap="square" rtlCol="0" anchor="ctr"/>
-          <a:lstStyle/>
-          <a:p>
-            <a:pPr indent="0" marL="0">
-              <a:buNone/>
-            </a:pPr>
-            <a:r>
-              <a:rPr lang="en-US" sz="1000" dirty="0">
+            <a:endParaRPr lang="en-US" sz="1000" dirty="0"/>
+          </a:p>
+        </p:txBody>
+      </p:sp>
+      <p:sp>
+        <p:nvSpPr>
+          <p:cNvPr id="11" name="Text 8"/>
+          <p:cNvSpPr/>
+          <p:nvPr/>
+        </p:nvSpPr>
+        <p:spPr>
+          <a:xfrm>
+            <a:off x="548640" y="4160520"/>
+            <a:ext cx="2011680" cy="274320"/>
+          </a:xfrm>
+          <a:prstGeom prst="rect">
+            <a:avLst/>
+          </a:prstGeom>
+          <a:noFill/>
+          <a:ln/>
+        </p:spPr>
+        <p:txBody>
+          <a:bodyPr wrap="square" rtlCol="0" anchor="ctr"/>
+          <a:lstStyle/>
+          <a:p>
+            <a:pPr indent="0" marL="0">
+              <a:buNone/>
+            </a:pPr>
+            <a:r>
+              <a:rPr lang="en-US" sz="900" dirty="0">
                 <a:solidFill>
                   <a:srgbClr val="2C3E50"/>
                 </a:solidFill>
@@ -10325,36 +10118,36 @@
               </a:rPr>
               <a:t>✓ 个人信息管理</a:t>
             </a:r>
-            <a:endParaRPr lang="en-US" sz="1000" dirty="0"/>
-          </a:p>
-        </p:txBody>
-      </p:sp>
-      <p:sp>
-        <p:nvSpPr>
-          <p:cNvPr id="13" name="Text 10"/>
-          <p:cNvSpPr/>
-          <p:nvPr/>
-        </p:nvSpPr>
-        <p:spPr>
-          <a:xfrm>
-            <a:off x="5303520" y="2926080"/>
-            <a:ext cx="3291840" cy="411480"/>
-          </a:xfrm>
-          <a:prstGeom prst="rect">
-            <a:avLst/>
-          </a:prstGeom>
-          <a:noFill/>
-          <a:ln/>
-        </p:spPr>
-        <p:txBody>
-          <a:bodyPr wrap="square" rtlCol="0" anchor="ctr"/>
-          <a:lstStyle/>
-          <a:p>
-            <a:pPr indent="0" marL="0">
-              <a:buNone/>
-            </a:pPr>
-            <a:r>
-              <a:rPr lang="en-US" sz="1000" dirty="0">
+            <a:endParaRPr lang="en-US" sz="900" dirty="0"/>
+          </a:p>
+        </p:txBody>
+      </p:sp>
+      <p:sp>
+        <p:nvSpPr>
+          <p:cNvPr id="12" name="Text 9"/>
+          <p:cNvSpPr/>
+          <p:nvPr/>
+        </p:nvSpPr>
+        <p:spPr>
+          <a:xfrm>
+            <a:off x="2651760" y="4160520"/>
+            <a:ext cx="2011680" cy="274320"/>
+          </a:xfrm>
+          <a:prstGeom prst="rect">
+            <a:avLst/>
+          </a:prstGeom>
+          <a:noFill/>
+          <a:ln/>
+        </p:spPr>
+        <p:txBody>
+          <a:bodyPr wrap="square" rtlCol="0" anchor="ctr"/>
+          <a:lstStyle/>
+          <a:p>
+            <a:pPr indent="0" marL="0">
+              <a:buNone/>
+            </a:pPr>
+            <a:r>
+              <a:rPr lang="en-US" sz="900" dirty="0">
                 <a:solidFill>
                   <a:srgbClr val="2C3E50"/>
                 </a:solidFill>
@@ -10364,36 +10157,36 @@
               </a:rPr>
               <a:t>✓ 订单记录查看</a:t>
             </a:r>
-            <a:endParaRPr lang="en-US" sz="1000" dirty="0"/>
-          </a:p>
-        </p:txBody>
-      </p:sp>
-      <p:sp>
-        <p:nvSpPr>
-          <p:cNvPr id="14" name="Text 11"/>
-          <p:cNvSpPr/>
-          <p:nvPr/>
-        </p:nvSpPr>
-        <p:spPr>
-          <a:xfrm>
-            <a:off x="5303520" y="3383280"/>
-            <a:ext cx="3291840" cy="411480"/>
-          </a:xfrm>
-          <a:prstGeom prst="rect">
-            <a:avLst/>
-          </a:prstGeom>
-          <a:noFill/>
-          <a:ln/>
-        </p:spPr>
-        <p:txBody>
-          <a:bodyPr wrap="square" rtlCol="0" anchor="ctr"/>
-          <a:lstStyle/>
-          <a:p>
-            <a:pPr indent="0" marL="0">
-              <a:buNone/>
-            </a:pPr>
-            <a:r>
-              <a:rPr lang="en-US" sz="1000" dirty="0">
+            <a:endParaRPr lang="en-US" sz="900" dirty="0"/>
+          </a:p>
+        </p:txBody>
+      </p:sp>
+      <p:sp>
+        <p:nvSpPr>
+          <p:cNvPr id="13" name="Text 10"/>
+          <p:cNvSpPr/>
+          <p:nvPr/>
+        </p:nvSpPr>
+        <p:spPr>
+          <a:xfrm>
+            <a:off x="4754880" y="4160520"/>
+            <a:ext cx="2011680" cy="274320"/>
+          </a:xfrm>
+          <a:prstGeom prst="rect">
+            <a:avLst/>
+          </a:prstGeom>
+          <a:noFill/>
+          <a:ln/>
+        </p:spPr>
+        <p:txBody>
+          <a:bodyPr wrap="square" rtlCol="0" anchor="ctr"/>
+          <a:lstStyle/>
+          <a:p>
+            <a:pPr indent="0" marL="0">
+              <a:buNone/>
+            </a:pPr>
+            <a:r>
+              <a:rPr lang="en-US" sz="900" dirty="0">
                 <a:solidFill>
                   <a:srgbClr val="2C3E50"/>
                 </a:solidFill>
@@ -10403,36 +10196,36 @@
               </a:rPr>
               <a:t>✓ 收货地址管理</a:t>
             </a:r>
-            <a:endParaRPr lang="en-US" sz="1000" dirty="0"/>
-          </a:p>
-        </p:txBody>
-      </p:sp>
-      <p:sp>
-        <p:nvSpPr>
-          <p:cNvPr id="15" name="Text 12"/>
-          <p:cNvSpPr/>
-          <p:nvPr/>
-        </p:nvSpPr>
-        <p:spPr>
-          <a:xfrm>
-            <a:off x="5303520" y="3840480"/>
-            <a:ext cx="3291840" cy="411480"/>
-          </a:xfrm>
-          <a:prstGeom prst="rect">
-            <a:avLst/>
-          </a:prstGeom>
-          <a:noFill/>
-          <a:ln/>
-        </p:spPr>
-        <p:txBody>
-          <a:bodyPr wrap="square" rtlCol="0" anchor="ctr"/>
-          <a:lstStyle/>
-          <a:p>
-            <a:pPr indent="0" marL="0">
-              <a:buNone/>
-            </a:pPr>
-            <a:r>
-              <a:rPr lang="en-US" sz="1000" dirty="0">
+            <a:endParaRPr lang="en-US" sz="900" dirty="0"/>
+          </a:p>
+        </p:txBody>
+      </p:sp>
+      <p:sp>
+        <p:nvSpPr>
+          <p:cNvPr id="14" name="Text 11"/>
+          <p:cNvSpPr/>
+          <p:nvPr/>
+        </p:nvSpPr>
+        <p:spPr>
+          <a:xfrm>
+            <a:off x="6858000" y="4160520"/>
+            <a:ext cx="2011680" cy="274320"/>
+          </a:xfrm>
+          <a:prstGeom prst="rect">
+            <a:avLst/>
+          </a:prstGeom>
+          <a:noFill/>
+          <a:ln/>
+        </p:spPr>
+        <p:txBody>
+          <a:bodyPr wrap="square" rtlCol="0" anchor="ctr"/>
+          <a:lstStyle/>
+          <a:p>
+            <a:pPr indent="0" marL="0">
+              <a:buNone/>
+            </a:pPr>
+            <a:r>
+              <a:rPr lang="en-US" sz="900" dirty="0">
                 <a:solidFill>
                   <a:srgbClr val="2C3E50"/>
                 </a:solidFill>
@@ -10442,7 +10235,7 @@
               </a:rPr>
               <a:t>✓ 积分余额查询</a:t>
             </a:r>
-            <a:endParaRPr lang="en-US" sz="1000" dirty="0"/>
+            <a:endParaRPr lang="en-US" sz="900" dirty="0"/>
           </a:p>
         </p:txBody>
       </p:sp>
@@ -10506,24 +10299,24 @@
         </p:nvSpPr>
         <p:spPr>
           <a:xfrm>
-            <a:off x="457200" y="320040"/>
-            <a:ext cx="8229600" cy="457200"/>
-          </a:xfrm>
-          <a:prstGeom prst="rect">
-            <a:avLst/>
-          </a:prstGeom>
-          <a:noFill/>
-          <a:ln/>
-        </p:spPr>
-        <p:txBody>
-          <a:bodyPr wrap="square" rtlCol="0" anchor="ctr"/>
-          <a:lstStyle/>
-          <a:p>
-            <a:pPr indent="0" marL="0">
-              <a:buNone/>
-            </a:pPr>
-            <a:r>
-              <a:rPr lang="en-US" sz="2200" b="1" dirty="0">
+            <a:off x="457200" y="274320"/>
+            <a:ext cx="8229600" cy="411480"/>
+          </a:xfrm>
+          <a:prstGeom prst="rect">
+            <a:avLst/>
+          </a:prstGeom>
+          <a:noFill/>
+          <a:ln/>
+        </p:spPr>
+        <p:txBody>
+          <a:bodyPr wrap="square" rtlCol="0" anchor="ctr"/>
+          <a:lstStyle/>
+          <a:p>
+            <a:pPr indent="0" marL="0">
+              <a:buNone/>
+            </a:pPr>
+            <a:r>
+              <a:rPr lang="en-US" sz="2000" b="1" dirty="0">
                 <a:solidFill>
                   <a:srgbClr val="1E3A5F"/>
                 </a:solidFill>
@@ -10533,7 +10326,7 @@
               </a:rPr>
               <a:t>图5-8 后台登录页面</a:t>
             </a:r>
-            <a:endParaRPr lang="en-US" sz="2200" dirty="0"/>
+            <a:endParaRPr lang="en-US" sz="2000" dirty="0"/>
           </a:p>
         </p:txBody>
       </p:sp>
@@ -10545,8 +10338,8 @@
         </p:nvSpPr>
         <p:spPr>
           <a:xfrm>
-            <a:off x="457200" y="777240"/>
-            <a:ext cx="1371600" cy="27432"/>
+            <a:off x="457200" y="685800"/>
+            <a:ext cx="1097280" cy="27432"/>
           </a:xfrm>
           <a:prstGeom prst="rect">
             <a:avLst/>
@@ -10565,12 +10358,12 @@
         </p:nvSpPr>
         <p:spPr>
           <a:xfrm>
-            <a:off x="365760" y="1005840"/>
-            <a:ext cx="4572000" cy="3657600"/>
+            <a:off x="365760" y="914400"/>
+            <a:ext cx="8412480" cy="2286000"/>
           </a:xfrm>
           <a:prstGeom prst="roundRect">
             <a:avLst>
-              <a:gd name="adj" fmla="val 2500"/>
+              <a:gd name="adj" fmla="val 3200"/>
             </a:avLst>
           </a:prstGeom>
           <a:solidFill>
@@ -10578,8 +10371,8 @@
           </a:solidFill>
           <a:ln/>
           <a:effectLst>
-            <a:outerShdw sx="100000" sy="100000" kx="0" ky="0" algn="bl" rotWithShape="0" blurRad="50800" dist="25400" dir="16200000">
-              <a:srgbClr val="00000015">
+            <a:outerShdw sx="100000" sy="100000" kx="0" ky="0" algn="bl" rotWithShape="0" blurRad="38100" dist="12700" dir="16200000">
+              <a:srgbClr val="00000010">
                 <a:alpha val="75000"/>
               </a:srgbClr>
             </a:outerShdw>
@@ -10602,8 +10395,8 @@
         </p:blipFill>
         <p:spPr>
           <a:xfrm>
-            <a:off x="457200" y="1097280"/>
-            <a:ext cx="4389120" cy="3474720"/>
+            <a:off x="457200" y="1005840"/>
+            <a:ext cx="8229600" cy="2103120"/>
           </a:xfrm>
           <a:prstGeom prst="rect">
             <a:avLst/>
@@ -10618,12 +10411,12 @@
         </p:nvSpPr>
         <p:spPr>
           <a:xfrm>
-            <a:off x="5120640" y="1005840"/>
-            <a:ext cx="3657600" cy="3657600"/>
+            <a:off x="365760" y="3337560"/>
+            <a:ext cx="8412480" cy="1417320"/>
           </a:xfrm>
           <a:prstGeom prst="roundRect">
             <a:avLst>
-              <a:gd name="adj" fmla="val 2500"/>
+              <a:gd name="adj" fmla="val 5161"/>
             </a:avLst>
           </a:prstGeom>
           <a:solidFill>
@@ -10631,8 +10424,8 @@
           </a:solidFill>
           <a:ln/>
           <a:effectLst>
-            <a:outerShdw sx="100000" sy="100000" kx="0" ky="0" algn="bl" rotWithShape="0" blurRad="50800" dist="25400" dir="16200000">
-              <a:srgbClr val="00000015">
+            <a:outerShdw sx="100000" sy="100000" kx="0" ky="0" algn="bl" rotWithShape="0" blurRad="38100" dist="12700" dir="16200000">
+              <a:srgbClr val="00000010">
                 <a:alpha val="75000"/>
               </a:srgbClr>
             </a:outerShdw>
@@ -10647,14 +10440,14 @@
         </p:nvSpPr>
         <p:spPr>
           <a:xfrm>
-            <a:off x="5120640" y="1005840"/>
-            <a:ext cx="3657600" cy="457200"/>
-          </a:xfrm>
-          <a:prstGeom prst="rect">
-            <a:avLst/>
-          </a:prstGeom>
-          <a:solidFill>
-            <a:srgbClr val="1E3A5F"/>
+            <a:off x="365760" y="3337560"/>
+            <a:ext cx="54864" cy="1417320"/>
+          </a:xfrm>
+          <a:prstGeom prst="rect">
+            <a:avLst/>
+          </a:prstGeom>
+          <a:solidFill>
+            <a:srgbClr val="C9A227"/>
           </a:solidFill>
           <a:ln/>
         </p:spPr>
@@ -10667,26 +10460,26 @@
         </p:nvSpPr>
         <p:spPr>
           <a:xfrm>
-            <a:off x="5120640" y="1005840"/>
-            <a:ext cx="3657600" cy="457200"/>
-          </a:xfrm>
-          <a:prstGeom prst="rect">
-            <a:avLst/>
-          </a:prstGeom>
-          <a:noFill/>
-          <a:ln/>
-        </p:spPr>
-        <p:txBody>
-          <a:bodyPr wrap="square" rtlCol="0" anchor="ctr"/>
-          <a:lstStyle/>
-          <a:p>
-            <a:pPr algn="ctr" indent="0" marL="0">
-              <a:buNone/>
-            </a:pPr>
-            <a:r>
-              <a:rPr lang="en-US" sz="1400" b="1" dirty="0">
-                <a:solidFill>
-                  <a:srgbClr val="FFFFFF"/>
+            <a:off x="548640" y="3429000"/>
+            <a:ext cx="1828800" cy="320040"/>
+          </a:xfrm>
+          <a:prstGeom prst="rect">
+            <a:avLst/>
+          </a:prstGeom>
+          <a:noFill/>
+          <a:ln/>
+        </p:spPr>
+        <p:txBody>
+          <a:bodyPr wrap="square" rtlCol="0" anchor="ctr"/>
+          <a:lstStyle/>
+          <a:p>
+            <a:pPr indent="0" marL="0">
+              <a:buNone/>
+            </a:pPr>
+            <a:r>
+              <a:rPr lang="en-US" sz="1300" b="1" dirty="0">
+                <a:solidFill>
+                  <a:srgbClr val="1E3A5F"/>
                 </a:solidFill>
                 <a:latin typeface="SimHei" pitchFamily="34" charset="0"/>
                 <a:ea typeface="SimHei" pitchFamily="34" charset="-122"/>
@@ -10694,7 +10487,7 @@
               </a:rPr>
               <a:t>功能说明</a:t>
             </a:r>
-            <a:endParaRPr lang="en-US" sz="1400" dirty="0"/>
+            <a:endParaRPr lang="en-US" sz="1300" dirty="0"/>
           </a:p>
         </p:txBody>
       </p:sp>
@@ -10706,8 +10499,8 @@
         </p:nvSpPr>
         <p:spPr>
           <a:xfrm>
-            <a:off x="5303520" y="1600200"/>
-            <a:ext cx="3291840" cy="731520"/>
+            <a:off x="548640" y="3749040"/>
+            <a:ext cx="8046720" cy="365760"/>
           </a:xfrm>
           <a:prstGeom prst="rect">
             <a:avLst/>
@@ -10720,13 +10513,10 @@
           <a:lstStyle/>
           <a:p>
             <a:pPr indent="0" marL="0">
-              <a:lnSpc>
-                <a:spcPct val="140000"/>
-              </a:lnSpc>
-              <a:buNone/>
-            </a:pPr>
-            <a:r>
-              <a:rPr lang="en-US" sz="1100" dirty="0">
+              <a:buNone/>
+            </a:pPr>
+            <a:r>
+              <a:rPr lang="en-US" sz="1000" dirty="0">
                 <a:solidFill>
                   <a:srgbClr val="2C3E50"/>
                 </a:solidFill>
@@ -10736,56 +10526,36 @@
               </a:rPr>
               <a:t>管理员登录功能，管理员输入账号密码，系统验证身份后生成会话标识，跳转至后台管理首页，可访问全部管理功能模块。</a:t>
             </a:r>
-            <a:endParaRPr lang="en-US" sz="1100" dirty="0"/>
-          </a:p>
-        </p:txBody>
-      </p:sp>
-      <p:sp>
-        <p:nvSpPr>
-          <p:cNvPr id="11" name="Shape 8"/>
-          <p:cNvSpPr/>
-          <p:nvPr/>
-        </p:nvSpPr>
-        <p:spPr>
-          <a:xfrm>
-            <a:off x="5303520" y="2331720"/>
-            <a:ext cx="3291840" cy="18288"/>
-          </a:xfrm>
-          <a:prstGeom prst="rect">
-            <a:avLst/>
-          </a:prstGeom>
-          <a:solidFill>
-            <a:srgbClr val="E9ECEF"/>
-          </a:solidFill>
-          <a:ln/>
-        </p:spPr>
-      </p:sp>
-      <p:sp>
-        <p:nvSpPr>
-          <p:cNvPr id="12" name="Text 9"/>
-          <p:cNvSpPr/>
-          <p:nvPr/>
-        </p:nvSpPr>
-        <p:spPr>
-          <a:xfrm>
-            <a:off x="5303520" y="2468880"/>
-            <a:ext cx="3291840" cy="411480"/>
-          </a:xfrm>
-          <a:prstGeom prst="rect">
-            <a:avLst/>
-          </a:prstGeom>
-          <a:noFill/>
-          <a:ln/>
-        </p:spPr>
-        <p:txBody>
-          <a:bodyPr wrap="square" rtlCol="0" anchor="ctr"/>
-          <a:lstStyle/>
-          <a:p>
-            <a:pPr indent="0" marL="0">
-              <a:buNone/>
-            </a:pPr>
-            <a:r>
-              <a:rPr lang="en-US" sz="1000" dirty="0">
+            <a:endParaRPr lang="en-US" sz="1000" dirty="0"/>
+          </a:p>
+        </p:txBody>
+      </p:sp>
+      <p:sp>
+        <p:nvSpPr>
+          <p:cNvPr id="11" name="Text 8"/>
+          <p:cNvSpPr/>
+          <p:nvPr/>
+        </p:nvSpPr>
+        <p:spPr>
+          <a:xfrm>
+            <a:off x="548640" y="4160520"/>
+            <a:ext cx="2011680" cy="274320"/>
+          </a:xfrm>
+          <a:prstGeom prst="rect">
+            <a:avLst/>
+          </a:prstGeom>
+          <a:noFill/>
+          <a:ln/>
+        </p:spPr>
+        <p:txBody>
+          <a:bodyPr wrap="square" rtlCol="0" anchor="ctr"/>
+          <a:lstStyle/>
+          <a:p>
+            <a:pPr indent="0" marL="0">
+              <a:buNone/>
+            </a:pPr>
+            <a:r>
+              <a:rPr lang="en-US" sz="900" dirty="0">
                 <a:solidFill>
                   <a:srgbClr val="2C3E50"/>
                 </a:solidFill>
@@ -10795,36 +10565,36 @@
               </a:rPr>
               <a:t>✓ 管理员身份验证</a:t>
             </a:r>
-            <a:endParaRPr lang="en-US" sz="1000" dirty="0"/>
-          </a:p>
-        </p:txBody>
-      </p:sp>
-      <p:sp>
-        <p:nvSpPr>
-          <p:cNvPr id="13" name="Text 10"/>
-          <p:cNvSpPr/>
-          <p:nvPr/>
-        </p:nvSpPr>
-        <p:spPr>
-          <a:xfrm>
-            <a:off x="5303520" y="2926080"/>
-            <a:ext cx="3291840" cy="411480"/>
-          </a:xfrm>
-          <a:prstGeom prst="rect">
-            <a:avLst/>
-          </a:prstGeom>
-          <a:noFill/>
-          <a:ln/>
-        </p:spPr>
-        <p:txBody>
-          <a:bodyPr wrap="square" rtlCol="0" anchor="ctr"/>
-          <a:lstStyle/>
-          <a:p>
-            <a:pPr indent="0" marL="0">
-              <a:buNone/>
-            </a:pPr>
-            <a:r>
-              <a:rPr lang="en-US" sz="1000" dirty="0">
+            <a:endParaRPr lang="en-US" sz="900" dirty="0"/>
+          </a:p>
+        </p:txBody>
+      </p:sp>
+      <p:sp>
+        <p:nvSpPr>
+          <p:cNvPr id="12" name="Text 9"/>
+          <p:cNvSpPr/>
+          <p:nvPr/>
+        </p:nvSpPr>
+        <p:spPr>
+          <a:xfrm>
+            <a:off x="2651760" y="4160520"/>
+            <a:ext cx="2011680" cy="274320"/>
+          </a:xfrm>
+          <a:prstGeom prst="rect">
+            <a:avLst/>
+          </a:prstGeom>
+          <a:noFill/>
+          <a:ln/>
+        </p:spPr>
+        <p:txBody>
+          <a:bodyPr wrap="square" rtlCol="0" anchor="ctr"/>
+          <a:lstStyle/>
+          <a:p>
+            <a:pPr indent="0" marL="0">
+              <a:buNone/>
+            </a:pPr>
+            <a:r>
+              <a:rPr lang="en-US" sz="900" dirty="0">
                 <a:solidFill>
                   <a:srgbClr val="2C3E50"/>
                 </a:solidFill>
@@ -10834,36 +10604,36 @@
               </a:rPr>
               <a:t>✓ 会话标识生成</a:t>
             </a:r>
-            <a:endParaRPr lang="en-US" sz="1000" dirty="0"/>
-          </a:p>
-        </p:txBody>
-      </p:sp>
-      <p:sp>
-        <p:nvSpPr>
-          <p:cNvPr id="14" name="Text 11"/>
-          <p:cNvSpPr/>
-          <p:nvPr/>
-        </p:nvSpPr>
-        <p:spPr>
-          <a:xfrm>
-            <a:off x="5303520" y="3383280"/>
-            <a:ext cx="3291840" cy="411480"/>
-          </a:xfrm>
-          <a:prstGeom prst="rect">
-            <a:avLst/>
-          </a:prstGeom>
-          <a:noFill/>
-          <a:ln/>
-        </p:spPr>
-        <p:txBody>
-          <a:bodyPr wrap="square" rtlCol="0" anchor="ctr"/>
-          <a:lstStyle/>
-          <a:p>
-            <a:pPr indent="0" marL="0">
-              <a:buNone/>
-            </a:pPr>
-            <a:r>
-              <a:rPr lang="en-US" sz="1000" dirty="0">
+            <a:endParaRPr lang="en-US" sz="900" dirty="0"/>
+          </a:p>
+        </p:txBody>
+      </p:sp>
+      <p:sp>
+        <p:nvSpPr>
+          <p:cNvPr id="13" name="Text 10"/>
+          <p:cNvSpPr/>
+          <p:nvPr/>
+        </p:nvSpPr>
+        <p:spPr>
+          <a:xfrm>
+            <a:off x="4754880" y="4160520"/>
+            <a:ext cx="2011680" cy="274320"/>
+          </a:xfrm>
+          <a:prstGeom prst="rect">
+            <a:avLst/>
+          </a:prstGeom>
+          <a:noFill/>
+          <a:ln/>
+        </p:spPr>
+        <p:txBody>
+          <a:bodyPr wrap="square" rtlCol="0" anchor="ctr"/>
+          <a:lstStyle/>
+          <a:p>
+            <a:pPr indent="0" marL="0">
+              <a:buNone/>
+            </a:pPr>
+            <a:r>
+              <a:rPr lang="en-US" sz="900" dirty="0">
                 <a:solidFill>
                   <a:srgbClr val="2C3E50"/>
                 </a:solidFill>
@@ -10873,36 +10643,36 @@
               </a:rPr>
               <a:t>✓ 权限控制</a:t>
             </a:r>
-            <a:endParaRPr lang="en-US" sz="1000" dirty="0"/>
-          </a:p>
-        </p:txBody>
-      </p:sp>
-      <p:sp>
-        <p:nvSpPr>
-          <p:cNvPr id="15" name="Text 12"/>
-          <p:cNvSpPr/>
-          <p:nvPr/>
-        </p:nvSpPr>
-        <p:spPr>
-          <a:xfrm>
-            <a:off x="5303520" y="3840480"/>
-            <a:ext cx="3291840" cy="411480"/>
-          </a:xfrm>
-          <a:prstGeom prst="rect">
-            <a:avLst/>
-          </a:prstGeom>
-          <a:noFill/>
-          <a:ln/>
-        </p:spPr>
-        <p:txBody>
-          <a:bodyPr wrap="square" rtlCol="0" anchor="ctr"/>
-          <a:lstStyle/>
-          <a:p>
-            <a:pPr indent="0" marL="0">
-              <a:buNone/>
-            </a:pPr>
-            <a:r>
-              <a:rPr lang="en-US" sz="1000" dirty="0">
+            <a:endParaRPr lang="en-US" sz="900" dirty="0"/>
+          </a:p>
+        </p:txBody>
+      </p:sp>
+      <p:sp>
+        <p:nvSpPr>
+          <p:cNvPr id="14" name="Text 11"/>
+          <p:cNvSpPr/>
+          <p:nvPr/>
+        </p:nvSpPr>
+        <p:spPr>
+          <a:xfrm>
+            <a:off x="6858000" y="4160520"/>
+            <a:ext cx="2011680" cy="274320"/>
+          </a:xfrm>
+          <a:prstGeom prst="rect">
+            <a:avLst/>
+          </a:prstGeom>
+          <a:noFill/>
+          <a:ln/>
+        </p:spPr>
+        <p:txBody>
+          <a:bodyPr wrap="square" rtlCol="0" anchor="ctr"/>
+          <a:lstStyle/>
+          <a:p>
+            <a:pPr indent="0" marL="0">
+              <a:buNone/>
+            </a:pPr>
+            <a:r>
+              <a:rPr lang="en-US" sz="900" dirty="0">
                 <a:solidFill>
                   <a:srgbClr val="2C3E50"/>
                 </a:solidFill>
@@ -10912,7 +10682,7 @@
               </a:rPr>
               <a:t>✓ 后台首页跳转</a:t>
             </a:r>
-            <a:endParaRPr lang="en-US" sz="1000" dirty="0"/>
+            <a:endParaRPr lang="en-US" sz="900" dirty="0"/>
           </a:p>
         </p:txBody>
       </p:sp>
@@ -10976,24 +10746,24 @@
         </p:nvSpPr>
         <p:spPr>
           <a:xfrm>
-            <a:off x="457200" y="320040"/>
-            <a:ext cx="8229600" cy="457200"/>
-          </a:xfrm>
-          <a:prstGeom prst="rect">
-            <a:avLst/>
-          </a:prstGeom>
-          <a:noFill/>
-          <a:ln/>
-        </p:spPr>
-        <p:txBody>
-          <a:bodyPr wrap="square" rtlCol="0" anchor="ctr"/>
-          <a:lstStyle/>
-          <a:p>
-            <a:pPr indent="0" marL="0">
-              <a:buNone/>
-            </a:pPr>
-            <a:r>
-              <a:rPr lang="en-US" sz="2200" b="1" dirty="0">
+            <a:off x="457200" y="274320"/>
+            <a:ext cx="8229600" cy="411480"/>
+          </a:xfrm>
+          <a:prstGeom prst="rect">
+            <a:avLst/>
+          </a:prstGeom>
+          <a:noFill/>
+          <a:ln/>
+        </p:spPr>
+        <p:txBody>
+          <a:bodyPr wrap="square" rtlCol="0" anchor="ctr"/>
+          <a:lstStyle/>
+          <a:p>
+            <a:pPr indent="0" marL="0">
+              <a:buNone/>
+            </a:pPr>
+            <a:r>
+              <a:rPr lang="en-US" sz="2000" b="1" dirty="0">
                 <a:solidFill>
                   <a:srgbClr val="1E3A5F"/>
                 </a:solidFill>
@@ -11003,7 +10773,7 @@
               </a:rPr>
               <a:t>图5-10 用户管理页面</a:t>
             </a:r>
-            <a:endParaRPr lang="en-US" sz="2200" dirty="0"/>
+            <a:endParaRPr lang="en-US" sz="2000" dirty="0"/>
           </a:p>
         </p:txBody>
       </p:sp>
@@ -11015,8 +10785,8 @@
         </p:nvSpPr>
         <p:spPr>
           <a:xfrm>
-            <a:off x="457200" y="777240"/>
-            <a:ext cx="1371600" cy="27432"/>
+            <a:off x="457200" y="685800"/>
+            <a:ext cx="1097280" cy="27432"/>
           </a:xfrm>
           <a:prstGeom prst="rect">
             <a:avLst/>
@@ -11035,12 +10805,12 @@
         </p:nvSpPr>
         <p:spPr>
           <a:xfrm>
-            <a:off x="365760" y="1005840"/>
-            <a:ext cx="4572000" cy="3657600"/>
+            <a:off x="365760" y="914400"/>
+            <a:ext cx="8412480" cy="2286000"/>
           </a:xfrm>
           <a:prstGeom prst="roundRect">
             <a:avLst>
-              <a:gd name="adj" fmla="val 2500"/>
+              <a:gd name="adj" fmla="val 3200"/>
             </a:avLst>
           </a:prstGeom>
           <a:solidFill>
@@ -11048,8 +10818,8 @@
           </a:solidFill>
           <a:ln/>
           <a:effectLst>
-            <a:outerShdw sx="100000" sy="100000" kx="0" ky="0" algn="bl" rotWithShape="0" blurRad="50800" dist="25400" dir="16200000">
-              <a:srgbClr val="00000015">
+            <a:outerShdw sx="100000" sy="100000" kx="0" ky="0" algn="bl" rotWithShape="0" blurRad="38100" dist="12700" dir="16200000">
+              <a:srgbClr val="00000010">
                 <a:alpha val="75000"/>
               </a:srgbClr>
             </a:outerShdw>
@@ -11072,8 +10842,8 @@
         </p:blipFill>
         <p:spPr>
           <a:xfrm>
-            <a:off x="457200" y="1097280"/>
-            <a:ext cx="4389120" cy="3474720"/>
+            <a:off x="457200" y="1005840"/>
+            <a:ext cx="8229600" cy="2103120"/>
           </a:xfrm>
           <a:prstGeom prst="rect">
             <a:avLst/>
@@ -11088,12 +10858,12 @@
         </p:nvSpPr>
         <p:spPr>
           <a:xfrm>
-            <a:off x="5120640" y="1005840"/>
-            <a:ext cx="3657600" cy="3657600"/>
+            <a:off x="365760" y="3337560"/>
+            <a:ext cx="8412480" cy="1417320"/>
           </a:xfrm>
           <a:prstGeom prst="roundRect">
             <a:avLst>
-              <a:gd name="adj" fmla="val 2500"/>
+              <a:gd name="adj" fmla="val 5161"/>
             </a:avLst>
           </a:prstGeom>
           <a:solidFill>
@@ -11101,8 +10871,8 @@
           </a:solidFill>
           <a:ln/>
           <a:effectLst>
-            <a:outerShdw sx="100000" sy="100000" kx="0" ky="0" algn="bl" rotWithShape="0" blurRad="50800" dist="25400" dir="16200000">
-              <a:srgbClr val="00000015">
+            <a:outerShdw sx="100000" sy="100000" kx="0" ky="0" algn="bl" rotWithShape="0" blurRad="38100" dist="12700" dir="16200000">
+              <a:srgbClr val="00000010">
                 <a:alpha val="75000"/>
               </a:srgbClr>
             </a:outerShdw>
@@ -11117,14 +10887,14 @@
         </p:nvSpPr>
         <p:spPr>
           <a:xfrm>
-            <a:off x="5120640" y="1005840"/>
-            <a:ext cx="3657600" cy="457200"/>
-          </a:xfrm>
-          <a:prstGeom prst="rect">
-            <a:avLst/>
-          </a:prstGeom>
-          <a:solidFill>
-            <a:srgbClr val="1E3A5F"/>
+            <a:off x="365760" y="3337560"/>
+            <a:ext cx="54864" cy="1417320"/>
+          </a:xfrm>
+          <a:prstGeom prst="rect">
+            <a:avLst/>
+          </a:prstGeom>
+          <a:solidFill>
+            <a:srgbClr val="C9A227"/>
           </a:solidFill>
           <a:ln/>
         </p:spPr>
@@ -11137,26 +10907,26 @@
         </p:nvSpPr>
         <p:spPr>
           <a:xfrm>
-            <a:off x="5120640" y="1005840"/>
-            <a:ext cx="3657600" cy="457200"/>
-          </a:xfrm>
-          <a:prstGeom prst="rect">
-            <a:avLst/>
-          </a:prstGeom>
-          <a:noFill/>
-          <a:ln/>
-        </p:spPr>
-        <p:txBody>
-          <a:bodyPr wrap="square" rtlCol="0" anchor="ctr"/>
-          <a:lstStyle/>
-          <a:p>
-            <a:pPr algn="ctr" indent="0" marL="0">
-              <a:buNone/>
-            </a:pPr>
-            <a:r>
-              <a:rPr lang="en-US" sz="1400" b="1" dirty="0">
-                <a:solidFill>
-                  <a:srgbClr val="FFFFFF"/>
+            <a:off x="548640" y="3429000"/>
+            <a:ext cx="1828800" cy="320040"/>
+          </a:xfrm>
+          <a:prstGeom prst="rect">
+            <a:avLst/>
+          </a:prstGeom>
+          <a:noFill/>
+          <a:ln/>
+        </p:spPr>
+        <p:txBody>
+          <a:bodyPr wrap="square" rtlCol="0" anchor="ctr"/>
+          <a:lstStyle/>
+          <a:p>
+            <a:pPr indent="0" marL="0">
+              <a:buNone/>
+            </a:pPr>
+            <a:r>
+              <a:rPr lang="en-US" sz="1300" b="1" dirty="0">
+                <a:solidFill>
+                  <a:srgbClr val="1E3A5F"/>
                 </a:solidFill>
                 <a:latin typeface="SimHei" pitchFamily="34" charset="0"/>
                 <a:ea typeface="SimHei" pitchFamily="34" charset="-122"/>
@@ -11164,7 +10934,7 @@
               </a:rPr>
               <a:t>功能说明</a:t>
             </a:r>
-            <a:endParaRPr lang="en-US" sz="1400" dirty="0"/>
+            <a:endParaRPr lang="en-US" sz="1300" dirty="0"/>
           </a:p>
         </p:txBody>
       </p:sp>
@@ -11176,8 +10946,8 @@
         </p:nvSpPr>
         <p:spPr>
           <a:xfrm>
-            <a:off x="5303520" y="1600200"/>
-            <a:ext cx="3291840" cy="731520"/>
+            <a:off x="548640" y="3749040"/>
+            <a:ext cx="8046720" cy="365760"/>
           </a:xfrm>
           <a:prstGeom prst="rect">
             <a:avLst/>
@@ -11190,13 +10960,10 @@
           <a:lstStyle/>
           <a:p>
             <a:pPr indent="0" marL="0">
-              <a:lnSpc>
-                <a:spcPct val="140000"/>
-              </a:lnSpc>
-              <a:buNone/>
-            </a:pPr>
-            <a:r>
-              <a:rPr lang="en-US" sz="1100" dirty="0">
+              <a:buNone/>
+            </a:pPr>
+            <a:r>
+              <a:rPr lang="en-US" sz="1000" dirty="0">
                 <a:solidFill>
                   <a:srgbClr val="2C3E50"/>
                 </a:solidFill>
@@ -11206,56 +10973,36 @@
               </a:rPr>
               <a:t>用户管理功能允许管理员查看所有注册用户信息，支持用户信息的增删改查操作，管理用户账号状态，保障系统访问安全。</a:t>
             </a:r>
-            <a:endParaRPr lang="en-US" sz="1100" dirty="0"/>
-          </a:p>
-        </p:txBody>
-      </p:sp>
-      <p:sp>
-        <p:nvSpPr>
-          <p:cNvPr id="11" name="Shape 8"/>
-          <p:cNvSpPr/>
-          <p:nvPr/>
-        </p:nvSpPr>
-        <p:spPr>
-          <a:xfrm>
-            <a:off x="5303520" y="2331720"/>
-            <a:ext cx="3291840" cy="18288"/>
-          </a:xfrm>
-          <a:prstGeom prst="rect">
-            <a:avLst/>
-          </a:prstGeom>
-          <a:solidFill>
-            <a:srgbClr val="E9ECEF"/>
-          </a:solidFill>
-          <a:ln/>
-        </p:spPr>
-      </p:sp>
-      <p:sp>
-        <p:nvSpPr>
-          <p:cNvPr id="12" name="Text 9"/>
-          <p:cNvSpPr/>
-          <p:nvPr/>
-        </p:nvSpPr>
-        <p:spPr>
-          <a:xfrm>
-            <a:off x="5303520" y="2468880"/>
-            <a:ext cx="3291840" cy="411480"/>
-          </a:xfrm>
-          <a:prstGeom prst="rect">
-            <a:avLst/>
-          </a:prstGeom>
-          <a:noFill/>
-          <a:ln/>
-        </p:spPr>
-        <p:txBody>
-          <a:bodyPr wrap="square" rtlCol="0" anchor="ctr"/>
-          <a:lstStyle/>
-          <a:p>
-            <a:pPr indent="0" marL="0">
-              <a:buNone/>
-            </a:pPr>
-            <a:r>
-              <a:rPr lang="en-US" sz="1000" dirty="0">
+            <a:endParaRPr lang="en-US" sz="1000" dirty="0"/>
+          </a:p>
+        </p:txBody>
+      </p:sp>
+      <p:sp>
+        <p:nvSpPr>
+          <p:cNvPr id="11" name="Text 8"/>
+          <p:cNvSpPr/>
+          <p:nvPr/>
+        </p:nvSpPr>
+        <p:spPr>
+          <a:xfrm>
+            <a:off x="548640" y="4160520"/>
+            <a:ext cx="2011680" cy="274320"/>
+          </a:xfrm>
+          <a:prstGeom prst="rect">
+            <a:avLst/>
+          </a:prstGeom>
+          <a:noFill/>
+          <a:ln/>
+        </p:spPr>
+        <p:txBody>
+          <a:bodyPr wrap="square" rtlCol="0" anchor="ctr"/>
+          <a:lstStyle/>
+          <a:p>
+            <a:pPr indent="0" marL="0">
+              <a:buNone/>
+            </a:pPr>
+            <a:r>
+              <a:rPr lang="en-US" sz="900" dirty="0">
                 <a:solidFill>
                   <a:srgbClr val="2C3E50"/>
                 </a:solidFill>
@@ -11265,36 +11012,36 @@
               </a:rPr>
               <a:t>✓ 用户信息查看</a:t>
             </a:r>
-            <a:endParaRPr lang="en-US" sz="1000" dirty="0"/>
-          </a:p>
-        </p:txBody>
-      </p:sp>
-      <p:sp>
-        <p:nvSpPr>
-          <p:cNvPr id="13" name="Text 10"/>
-          <p:cNvSpPr/>
-          <p:nvPr/>
-        </p:nvSpPr>
-        <p:spPr>
-          <a:xfrm>
-            <a:off x="5303520" y="2926080"/>
-            <a:ext cx="3291840" cy="411480"/>
-          </a:xfrm>
-          <a:prstGeom prst="rect">
-            <a:avLst/>
-          </a:prstGeom>
-          <a:noFill/>
-          <a:ln/>
-        </p:spPr>
-        <p:txBody>
-          <a:bodyPr wrap="square" rtlCol="0" anchor="ctr"/>
-          <a:lstStyle/>
-          <a:p>
-            <a:pPr indent="0" marL="0">
-              <a:buNone/>
-            </a:pPr>
-            <a:r>
-              <a:rPr lang="en-US" sz="1000" dirty="0">
+            <a:endParaRPr lang="en-US" sz="900" dirty="0"/>
+          </a:p>
+        </p:txBody>
+      </p:sp>
+      <p:sp>
+        <p:nvSpPr>
+          <p:cNvPr id="12" name="Text 9"/>
+          <p:cNvSpPr/>
+          <p:nvPr/>
+        </p:nvSpPr>
+        <p:spPr>
+          <a:xfrm>
+            <a:off x="2651760" y="4160520"/>
+            <a:ext cx="2011680" cy="274320"/>
+          </a:xfrm>
+          <a:prstGeom prst="rect">
+            <a:avLst/>
+          </a:prstGeom>
+          <a:noFill/>
+          <a:ln/>
+        </p:spPr>
+        <p:txBody>
+          <a:bodyPr wrap="square" rtlCol="0" anchor="ctr"/>
+          <a:lstStyle/>
+          <a:p>
+            <a:pPr indent="0" marL="0">
+              <a:buNone/>
+            </a:pPr>
+            <a:r>
+              <a:rPr lang="en-US" sz="900" dirty="0">
                 <a:solidFill>
                   <a:srgbClr val="2C3E50"/>
                 </a:solidFill>
@@ -11304,36 +11051,36 @@
               </a:rPr>
               <a:t>✓ 用户增删改查</a:t>
             </a:r>
-            <a:endParaRPr lang="en-US" sz="1000" dirty="0"/>
-          </a:p>
-        </p:txBody>
-      </p:sp>
-      <p:sp>
-        <p:nvSpPr>
-          <p:cNvPr id="14" name="Text 11"/>
-          <p:cNvSpPr/>
-          <p:nvPr/>
-        </p:nvSpPr>
-        <p:spPr>
-          <a:xfrm>
-            <a:off x="5303520" y="3383280"/>
-            <a:ext cx="3291840" cy="411480"/>
-          </a:xfrm>
-          <a:prstGeom prst="rect">
-            <a:avLst/>
-          </a:prstGeom>
-          <a:noFill/>
-          <a:ln/>
-        </p:spPr>
-        <p:txBody>
-          <a:bodyPr wrap="square" rtlCol="0" anchor="ctr"/>
-          <a:lstStyle/>
-          <a:p>
-            <a:pPr indent="0" marL="0">
-              <a:buNone/>
-            </a:pPr>
-            <a:r>
-              <a:rPr lang="en-US" sz="1000" dirty="0">
+            <a:endParaRPr lang="en-US" sz="900" dirty="0"/>
+          </a:p>
+        </p:txBody>
+      </p:sp>
+      <p:sp>
+        <p:nvSpPr>
+          <p:cNvPr id="13" name="Text 10"/>
+          <p:cNvSpPr/>
+          <p:nvPr/>
+        </p:nvSpPr>
+        <p:spPr>
+          <a:xfrm>
+            <a:off x="4754880" y="4160520"/>
+            <a:ext cx="2011680" cy="274320"/>
+          </a:xfrm>
+          <a:prstGeom prst="rect">
+            <a:avLst/>
+          </a:prstGeom>
+          <a:noFill/>
+          <a:ln/>
+        </p:spPr>
+        <p:txBody>
+          <a:bodyPr wrap="square" rtlCol="0" anchor="ctr"/>
+          <a:lstStyle/>
+          <a:p>
+            <a:pPr indent="0" marL="0">
+              <a:buNone/>
+            </a:pPr>
+            <a:r>
+              <a:rPr lang="en-US" sz="900" dirty="0">
                 <a:solidFill>
                   <a:srgbClr val="2C3E50"/>
                 </a:solidFill>
@@ -11343,36 +11090,36 @@
               </a:rPr>
               <a:t>✓ 账号状态管理</a:t>
             </a:r>
-            <a:endParaRPr lang="en-US" sz="1000" dirty="0"/>
-          </a:p>
-        </p:txBody>
-      </p:sp>
-      <p:sp>
-        <p:nvSpPr>
-          <p:cNvPr id="15" name="Text 12"/>
-          <p:cNvSpPr/>
-          <p:nvPr/>
-        </p:nvSpPr>
-        <p:spPr>
-          <a:xfrm>
-            <a:off x="5303520" y="3840480"/>
-            <a:ext cx="3291840" cy="411480"/>
-          </a:xfrm>
-          <a:prstGeom prst="rect">
-            <a:avLst/>
-          </a:prstGeom>
-          <a:noFill/>
-          <a:ln/>
-        </p:spPr>
-        <p:txBody>
-          <a:bodyPr wrap="square" rtlCol="0" anchor="ctr"/>
-          <a:lstStyle/>
-          <a:p>
-            <a:pPr indent="0" marL="0">
-              <a:buNone/>
-            </a:pPr>
-            <a:r>
-              <a:rPr lang="en-US" sz="1000" dirty="0">
+            <a:endParaRPr lang="en-US" sz="900" dirty="0"/>
+          </a:p>
+        </p:txBody>
+      </p:sp>
+      <p:sp>
+        <p:nvSpPr>
+          <p:cNvPr id="14" name="Text 11"/>
+          <p:cNvSpPr/>
+          <p:nvPr/>
+        </p:nvSpPr>
+        <p:spPr>
+          <a:xfrm>
+            <a:off x="6858000" y="4160520"/>
+            <a:ext cx="2011680" cy="274320"/>
+          </a:xfrm>
+          <a:prstGeom prst="rect">
+            <a:avLst/>
+          </a:prstGeom>
+          <a:noFill/>
+          <a:ln/>
+        </p:spPr>
+        <p:txBody>
+          <a:bodyPr wrap="square" rtlCol="0" anchor="ctr"/>
+          <a:lstStyle/>
+          <a:p>
+            <a:pPr indent="0" marL="0">
+              <a:buNone/>
+            </a:pPr>
+            <a:r>
+              <a:rPr lang="en-US" sz="900" dirty="0">
                 <a:solidFill>
                   <a:srgbClr val="2C3E50"/>
                 </a:solidFill>
@@ -11382,7 +11129,7 @@
               </a:rPr>
               <a:t>✓ 访问安全保障</a:t>
             </a:r>
-            <a:endParaRPr lang="en-US" sz="1000" dirty="0"/>
+            <a:endParaRPr lang="en-US" sz="900" dirty="0"/>
           </a:p>
         </p:txBody>
       </p:sp>
@@ -11446,24 +11193,24 @@
         </p:nvSpPr>
         <p:spPr>
           <a:xfrm>
-            <a:off x="457200" y="320040"/>
-            <a:ext cx="8229600" cy="457200"/>
-          </a:xfrm>
-          <a:prstGeom prst="rect">
-            <a:avLst/>
-          </a:prstGeom>
-          <a:noFill/>
-          <a:ln/>
-        </p:spPr>
-        <p:txBody>
-          <a:bodyPr wrap="square" rtlCol="0" anchor="ctr"/>
-          <a:lstStyle/>
-          <a:p>
-            <a:pPr indent="0" marL="0">
-              <a:buNone/>
-            </a:pPr>
-            <a:r>
-              <a:rPr lang="en-US" sz="2200" b="1" dirty="0">
+            <a:off x="457200" y="274320"/>
+            <a:ext cx="8229600" cy="411480"/>
+          </a:xfrm>
+          <a:prstGeom prst="rect">
+            <a:avLst/>
+          </a:prstGeom>
+          <a:noFill/>
+          <a:ln/>
+        </p:spPr>
+        <p:txBody>
+          <a:bodyPr wrap="square" rtlCol="0" anchor="ctr"/>
+          <a:lstStyle/>
+          <a:p>
+            <a:pPr indent="0" marL="0">
+              <a:buNone/>
+            </a:pPr>
+            <a:r>
+              <a:rPr lang="en-US" sz="2000" b="1" dirty="0">
                 <a:solidFill>
                   <a:srgbClr val="1E3A5F"/>
                 </a:solidFill>
@@ -11473,7 +11220,7 @@
               </a:rPr>
               <a:t>图5-11 商品信息管理页面</a:t>
             </a:r>
-            <a:endParaRPr lang="en-US" sz="2200" dirty="0"/>
+            <a:endParaRPr lang="en-US" sz="2000" dirty="0"/>
           </a:p>
         </p:txBody>
       </p:sp>
@@ -11485,8 +11232,8 @@
         </p:nvSpPr>
         <p:spPr>
           <a:xfrm>
-            <a:off x="457200" y="777240"/>
-            <a:ext cx="1371600" cy="27432"/>
+            <a:off x="457200" y="685800"/>
+            <a:ext cx="1097280" cy="27432"/>
           </a:xfrm>
           <a:prstGeom prst="rect">
             <a:avLst/>
@@ -11505,12 +11252,12 @@
         </p:nvSpPr>
         <p:spPr>
           <a:xfrm>
-            <a:off x="365760" y="1005840"/>
-            <a:ext cx="4572000" cy="3657600"/>
+            <a:off x="365760" y="914400"/>
+            <a:ext cx="8412480" cy="2286000"/>
           </a:xfrm>
           <a:prstGeom prst="roundRect">
             <a:avLst>
-              <a:gd name="adj" fmla="val 2500"/>
+              <a:gd name="adj" fmla="val 3200"/>
             </a:avLst>
           </a:prstGeom>
           <a:solidFill>
@@ -11518,8 +11265,8 @@
           </a:solidFill>
           <a:ln/>
           <a:effectLst>
-            <a:outerShdw sx="100000" sy="100000" kx="0" ky="0" algn="bl" rotWithShape="0" blurRad="50800" dist="25400" dir="16200000">
-              <a:srgbClr val="00000015">
+            <a:outerShdw sx="100000" sy="100000" kx="0" ky="0" algn="bl" rotWithShape="0" blurRad="38100" dist="12700" dir="16200000">
+              <a:srgbClr val="00000010">
                 <a:alpha val="75000"/>
               </a:srgbClr>
             </a:outerShdw>
@@ -11542,8 +11289,8 @@
         </p:blipFill>
         <p:spPr>
           <a:xfrm>
-            <a:off x="457200" y="1097280"/>
-            <a:ext cx="4389120" cy="3474720"/>
+            <a:off x="457200" y="1005840"/>
+            <a:ext cx="8229600" cy="2103120"/>
           </a:xfrm>
           <a:prstGeom prst="rect">
             <a:avLst/>
@@ -11558,12 +11305,12 @@
         </p:nvSpPr>
         <p:spPr>
           <a:xfrm>
-            <a:off x="5120640" y="1005840"/>
-            <a:ext cx="3657600" cy="3657600"/>
+            <a:off x="365760" y="3337560"/>
+            <a:ext cx="8412480" cy="1417320"/>
           </a:xfrm>
           <a:prstGeom prst="roundRect">
             <a:avLst>
-              <a:gd name="adj" fmla="val 2500"/>
+              <a:gd name="adj" fmla="val 5161"/>
             </a:avLst>
           </a:prstGeom>
           <a:solidFill>
@@ -11571,8 +11318,8 @@
           </a:solidFill>
           <a:ln/>
           <a:effectLst>
-            <a:outerShdw sx="100000" sy="100000" kx="0" ky="0" algn="bl" rotWithShape="0" blurRad="50800" dist="25400" dir="16200000">
-              <a:srgbClr val="00000015">
+            <a:outerShdw sx="100000" sy="100000" kx="0" ky="0" algn="bl" rotWithShape="0" blurRad="38100" dist="12700" dir="16200000">
+              <a:srgbClr val="00000010">
                 <a:alpha val="75000"/>
               </a:srgbClr>
             </a:outerShdw>
@@ -11587,14 +11334,14 @@
         </p:nvSpPr>
         <p:spPr>
           <a:xfrm>
-            <a:off x="5120640" y="1005840"/>
-            <a:ext cx="3657600" cy="457200"/>
-          </a:xfrm>
-          <a:prstGeom prst="rect">
-            <a:avLst/>
-          </a:prstGeom>
-          <a:solidFill>
-            <a:srgbClr val="1E3A5F"/>
+            <a:off x="365760" y="3337560"/>
+            <a:ext cx="54864" cy="1417320"/>
+          </a:xfrm>
+          <a:prstGeom prst="rect">
+            <a:avLst/>
+          </a:prstGeom>
+          <a:solidFill>
+            <a:srgbClr val="C9A227"/>
           </a:solidFill>
           <a:ln/>
         </p:spPr>
@@ -11607,26 +11354,26 @@
         </p:nvSpPr>
         <p:spPr>
           <a:xfrm>
-            <a:off x="5120640" y="1005840"/>
-            <a:ext cx="3657600" cy="457200"/>
-          </a:xfrm>
-          <a:prstGeom prst="rect">
-            <a:avLst/>
-          </a:prstGeom>
-          <a:noFill/>
-          <a:ln/>
-        </p:spPr>
-        <p:txBody>
-          <a:bodyPr wrap="square" rtlCol="0" anchor="ctr"/>
-          <a:lstStyle/>
-          <a:p>
-            <a:pPr algn="ctr" indent="0" marL="0">
-              <a:buNone/>
-            </a:pPr>
-            <a:r>
-              <a:rPr lang="en-US" sz="1400" b="1" dirty="0">
-                <a:solidFill>
-                  <a:srgbClr val="FFFFFF"/>
+            <a:off x="548640" y="3429000"/>
+            <a:ext cx="1828800" cy="320040"/>
+          </a:xfrm>
+          <a:prstGeom prst="rect">
+            <a:avLst/>
+          </a:prstGeom>
+          <a:noFill/>
+          <a:ln/>
+        </p:spPr>
+        <p:txBody>
+          <a:bodyPr wrap="square" rtlCol="0" anchor="ctr"/>
+          <a:lstStyle/>
+          <a:p>
+            <a:pPr indent="0" marL="0">
+              <a:buNone/>
+            </a:pPr>
+            <a:r>
+              <a:rPr lang="en-US" sz="1300" b="1" dirty="0">
+                <a:solidFill>
+                  <a:srgbClr val="1E3A5F"/>
                 </a:solidFill>
                 <a:latin typeface="SimHei" pitchFamily="34" charset="0"/>
                 <a:ea typeface="SimHei" pitchFamily="34" charset="-122"/>
@@ -11634,7 +11381,7 @@
               </a:rPr>
               <a:t>功能说明</a:t>
             </a:r>
-            <a:endParaRPr lang="en-US" sz="1400" dirty="0"/>
+            <a:endParaRPr lang="en-US" sz="1300" dirty="0"/>
           </a:p>
         </p:txBody>
       </p:sp>
@@ -11646,8 +11393,8 @@
         </p:nvSpPr>
         <p:spPr>
           <a:xfrm>
-            <a:off x="5303520" y="1600200"/>
-            <a:ext cx="3291840" cy="731520"/>
+            <a:off x="548640" y="3749040"/>
+            <a:ext cx="8046720" cy="365760"/>
           </a:xfrm>
           <a:prstGeom prst="rect">
             <a:avLst/>
@@ -11660,13 +11407,10 @@
           <a:lstStyle/>
           <a:p>
             <a:pPr indent="0" marL="0">
-              <a:lnSpc>
-                <a:spcPct val="140000"/>
-              </a:lnSpc>
-              <a:buNone/>
-            </a:pPr>
-            <a:r>
-              <a:rPr lang="en-US" sz="1100" dirty="0">
+              <a:buNone/>
+            </a:pPr>
+            <a:r>
+              <a:rPr lang="en-US" sz="1000" dirty="0">
                 <a:solidFill>
                   <a:srgbClr val="2C3E50"/>
                 </a:solidFill>
@@ -11676,56 +11420,36 @@
               </a:rPr>
               <a:t>商品管理功能允许管理员新增、编辑、删除商品信息，设置商品价格、库存、预警值，管理商品上下架状态，查看商品浏览量统计。</a:t>
             </a:r>
-            <a:endParaRPr lang="en-US" sz="1100" dirty="0"/>
-          </a:p>
-        </p:txBody>
-      </p:sp>
-      <p:sp>
-        <p:nvSpPr>
-          <p:cNvPr id="11" name="Shape 8"/>
-          <p:cNvSpPr/>
-          <p:nvPr/>
-        </p:nvSpPr>
-        <p:spPr>
-          <a:xfrm>
-            <a:off x="5303520" y="2331720"/>
-            <a:ext cx="3291840" cy="18288"/>
-          </a:xfrm>
-          <a:prstGeom prst="rect">
-            <a:avLst/>
-          </a:prstGeom>
-          <a:solidFill>
-            <a:srgbClr val="E9ECEF"/>
-          </a:solidFill>
-          <a:ln/>
-        </p:spPr>
-      </p:sp>
-      <p:sp>
-        <p:nvSpPr>
-          <p:cNvPr id="12" name="Text 9"/>
-          <p:cNvSpPr/>
-          <p:nvPr/>
-        </p:nvSpPr>
-        <p:spPr>
-          <a:xfrm>
-            <a:off x="5303520" y="2468880"/>
-            <a:ext cx="3291840" cy="411480"/>
-          </a:xfrm>
-          <a:prstGeom prst="rect">
-            <a:avLst/>
-          </a:prstGeom>
-          <a:noFill/>
-          <a:ln/>
-        </p:spPr>
-        <p:txBody>
-          <a:bodyPr wrap="square" rtlCol="0" anchor="ctr"/>
-          <a:lstStyle/>
-          <a:p>
-            <a:pPr indent="0" marL="0">
-              <a:buNone/>
-            </a:pPr>
-            <a:r>
-              <a:rPr lang="en-US" sz="1000" dirty="0">
+            <a:endParaRPr lang="en-US" sz="1000" dirty="0"/>
+          </a:p>
+        </p:txBody>
+      </p:sp>
+      <p:sp>
+        <p:nvSpPr>
+          <p:cNvPr id="11" name="Text 8"/>
+          <p:cNvSpPr/>
+          <p:nvPr/>
+        </p:nvSpPr>
+        <p:spPr>
+          <a:xfrm>
+            <a:off x="548640" y="4160520"/>
+            <a:ext cx="2011680" cy="274320"/>
+          </a:xfrm>
+          <a:prstGeom prst="rect">
+            <a:avLst/>
+          </a:prstGeom>
+          <a:noFill/>
+          <a:ln/>
+        </p:spPr>
+        <p:txBody>
+          <a:bodyPr wrap="square" rtlCol="0" anchor="ctr"/>
+          <a:lstStyle/>
+          <a:p>
+            <a:pPr indent="0" marL="0">
+              <a:buNone/>
+            </a:pPr>
+            <a:r>
+              <a:rPr lang="en-US" sz="900" dirty="0">
                 <a:solidFill>
                   <a:srgbClr val="2C3E50"/>
                 </a:solidFill>
@@ -11735,36 +11459,36 @@
               </a:rPr>
               <a:t>✓ 商品信息增删改</a:t>
             </a:r>
-            <a:endParaRPr lang="en-US" sz="1000" dirty="0"/>
-          </a:p>
-        </p:txBody>
-      </p:sp>
-      <p:sp>
-        <p:nvSpPr>
-          <p:cNvPr id="13" name="Text 10"/>
-          <p:cNvSpPr/>
-          <p:nvPr/>
-        </p:nvSpPr>
-        <p:spPr>
-          <a:xfrm>
-            <a:off x="5303520" y="2926080"/>
-            <a:ext cx="3291840" cy="411480"/>
-          </a:xfrm>
-          <a:prstGeom prst="rect">
-            <a:avLst/>
-          </a:prstGeom>
-          <a:noFill/>
-          <a:ln/>
-        </p:spPr>
-        <p:txBody>
-          <a:bodyPr wrap="square" rtlCol="0" anchor="ctr"/>
-          <a:lstStyle/>
-          <a:p>
-            <a:pPr indent="0" marL="0">
-              <a:buNone/>
-            </a:pPr>
-            <a:r>
-              <a:rPr lang="en-US" sz="1000" dirty="0">
+            <a:endParaRPr lang="en-US" sz="900" dirty="0"/>
+          </a:p>
+        </p:txBody>
+      </p:sp>
+      <p:sp>
+        <p:nvSpPr>
+          <p:cNvPr id="12" name="Text 9"/>
+          <p:cNvSpPr/>
+          <p:nvPr/>
+        </p:nvSpPr>
+        <p:spPr>
+          <a:xfrm>
+            <a:off x="2651760" y="4160520"/>
+            <a:ext cx="2011680" cy="274320"/>
+          </a:xfrm>
+          <a:prstGeom prst="rect">
+            <a:avLst/>
+          </a:prstGeom>
+          <a:noFill/>
+          <a:ln/>
+        </p:spPr>
+        <p:txBody>
+          <a:bodyPr wrap="square" rtlCol="0" anchor="ctr"/>
+          <a:lstStyle/>
+          <a:p>
+            <a:pPr indent="0" marL="0">
+              <a:buNone/>
+            </a:pPr>
+            <a:r>
+              <a:rPr lang="en-US" sz="900" dirty="0">
                 <a:solidFill>
                   <a:srgbClr val="2C3E50"/>
                 </a:solidFill>
@@ -11774,36 +11498,36 @@
               </a:rPr>
               <a:t>✓ 价格库存设置</a:t>
             </a:r>
-            <a:endParaRPr lang="en-US" sz="1000" dirty="0"/>
-          </a:p>
-        </p:txBody>
-      </p:sp>
-      <p:sp>
-        <p:nvSpPr>
-          <p:cNvPr id="14" name="Text 11"/>
-          <p:cNvSpPr/>
-          <p:nvPr/>
-        </p:nvSpPr>
-        <p:spPr>
-          <a:xfrm>
-            <a:off x="5303520" y="3383280"/>
-            <a:ext cx="3291840" cy="411480"/>
-          </a:xfrm>
-          <a:prstGeom prst="rect">
-            <a:avLst/>
-          </a:prstGeom>
-          <a:noFill/>
-          <a:ln/>
-        </p:spPr>
-        <p:txBody>
-          <a:bodyPr wrap="square" rtlCol="0" anchor="ctr"/>
-          <a:lstStyle/>
-          <a:p>
-            <a:pPr indent="0" marL="0">
-              <a:buNone/>
-            </a:pPr>
-            <a:r>
-              <a:rPr lang="en-US" sz="1000" dirty="0">
+            <a:endParaRPr lang="en-US" sz="900" dirty="0"/>
+          </a:p>
+        </p:txBody>
+      </p:sp>
+      <p:sp>
+        <p:nvSpPr>
+          <p:cNvPr id="13" name="Text 10"/>
+          <p:cNvSpPr/>
+          <p:nvPr/>
+        </p:nvSpPr>
+        <p:spPr>
+          <a:xfrm>
+            <a:off x="4754880" y="4160520"/>
+            <a:ext cx="2011680" cy="274320"/>
+          </a:xfrm>
+          <a:prstGeom prst="rect">
+            <a:avLst/>
+          </a:prstGeom>
+          <a:noFill/>
+          <a:ln/>
+        </p:spPr>
+        <p:txBody>
+          <a:bodyPr wrap="square" rtlCol="0" anchor="ctr"/>
+          <a:lstStyle/>
+          <a:p>
+            <a:pPr indent="0" marL="0">
+              <a:buNone/>
+            </a:pPr>
+            <a:r>
+              <a:rPr lang="en-US" sz="900" dirty="0">
                 <a:solidFill>
                   <a:srgbClr val="2C3E50"/>
                 </a:solidFill>
@@ -11813,36 +11537,36 @@
               </a:rPr>
               <a:t>✓ 库存预警配置</a:t>
             </a:r>
-            <a:endParaRPr lang="en-US" sz="1000" dirty="0"/>
-          </a:p>
-        </p:txBody>
-      </p:sp>
-      <p:sp>
-        <p:nvSpPr>
-          <p:cNvPr id="15" name="Text 12"/>
-          <p:cNvSpPr/>
-          <p:nvPr/>
-        </p:nvSpPr>
-        <p:spPr>
-          <a:xfrm>
-            <a:off x="5303520" y="3840480"/>
-            <a:ext cx="3291840" cy="411480"/>
-          </a:xfrm>
-          <a:prstGeom prst="rect">
-            <a:avLst/>
-          </a:prstGeom>
-          <a:noFill/>
-          <a:ln/>
-        </p:spPr>
-        <p:txBody>
-          <a:bodyPr wrap="square" rtlCol="0" anchor="ctr"/>
-          <a:lstStyle/>
-          <a:p>
-            <a:pPr indent="0" marL="0">
-              <a:buNone/>
-            </a:pPr>
-            <a:r>
-              <a:rPr lang="en-US" sz="1000" dirty="0">
+            <a:endParaRPr lang="en-US" sz="900" dirty="0"/>
+          </a:p>
+        </p:txBody>
+      </p:sp>
+      <p:sp>
+        <p:nvSpPr>
+          <p:cNvPr id="14" name="Text 11"/>
+          <p:cNvSpPr/>
+          <p:nvPr/>
+        </p:nvSpPr>
+        <p:spPr>
+          <a:xfrm>
+            <a:off x="6858000" y="4160520"/>
+            <a:ext cx="2011680" cy="274320"/>
+          </a:xfrm>
+          <a:prstGeom prst="rect">
+            <a:avLst/>
+          </a:prstGeom>
+          <a:noFill/>
+          <a:ln/>
+        </p:spPr>
+        <p:txBody>
+          <a:bodyPr wrap="square" rtlCol="0" anchor="ctr"/>
+          <a:lstStyle/>
+          <a:p>
+            <a:pPr indent="0" marL="0">
+              <a:buNone/>
+            </a:pPr>
+            <a:r>
+              <a:rPr lang="en-US" sz="900" dirty="0">
                 <a:solidFill>
                   <a:srgbClr val="2C3E50"/>
                 </a:solidFill>
@@ -11852,7 +11576,7 @@
               </a:rPr>
               <a:t>✓ 上下架状态管理</a:t>
             </a:r>
-            <a:endParaRPr lang="en-US" sz="1000" dirty="0"/>
+            <a:endParaRPr lang="en-US" sz="900" dirty="0"/>
           </a:p>
         </p:txBody>
       </p:sp>
@@ -11916,24 +11640,24 @@
         </p:nvSpPr>
         <p:spPr>
           <a:xfrm>
-            <a:off x="457200" y="320040"/>
-            <a:ext cx="8229600" cy="457200"/>
-          </a:xfrm>
-          <a:prstGeom prst="rect">
-            <a:avLst/>
-          </a:prstGeom>
-          <a:noFill/>
-          <a:ln/>
-        </p:spPr>
-        <p:txBody>
-          <a:bodyPr wrap="square" rtlCol="0" anchor="ctr"/>
-          <a:lstStyle/>
-          <a:p>
-            <a:pPr indent="0" marL="0">
-              <a:buNone/>
-            </a:pPr>
-            <a:r>
-              <a:rPr lang="en-US" sz="2200" b="1" dirty="0">
+            <a:off x="457200" y="274320"/>
+            <a:ext cx="8229600" cy="411480"/>
+          </a:xfrm>
+          <a:prstGeom prst="rect">
+            <a:avLst/>
+          </a:prstGeom>
+          <a:noFill/>
+          <a:ln/>
+        </p:spPr>
+        <p:txBody>
+          <a:bodyPr wrap="square" rtlCol="0" anchor="ctr"/>
+          <a:lstStyle/>
+          <a:p>
+            <a:pPr indent="0" marL="0">
+              <a:buNone/>
+            </a:pPr>
+            <a:r>
+              <a:rPr lang="en-US" sz="2000" b="1" dirty="0">
                 <a:solidFill>
                   <a:srgbClr val="1E3A5F"/>
                 </a:solidFill>
@@ -11943,7 +11667,7 @@
               </a:rPr>
               <a:t>图5-13 公告信息管理页面</a:t>
             </a:r>
-            <a:endParaRPr lang="en-US" sz="2200" dirty="0"/>
+            <a:endParaRPr lang="en-US" sz="2000" dirty="0"/>
           </a:p>
         </p:txBody>
       </p:sp>
@@ -11955,8 +11679,8 @@
         </p:nvSpPr>
         <p:spPr>
           <a:xfrm>
-            <a:off x="457200" y="777240"/>
-            <a:ext cx="1371600" cy="27432"/>
+            <a:off x="457200" y="685800"/>
+            <a:ext cx="1097280" cy="27432"/>
           </a:xfrm>
           <a:prstGeom prst="rect">
             <a:avLst/>
@@ -11975,12 +11699,12 @@
         </p:nvSpPr>
         <p:spPr>
           <a:xfrm>
-            <a:off x="365760" y="1005840"/>
-            <a:ext cx="4572000" cy="3657600"/>
+            <a:off x="365760" y="914400"/>
+            <a:ext cx="8412480" cy="2286000"/>
           </a:xfrm>
           <a:prstGeom prst="roundRect">
             <a:avLst>
-              <a:gd name="adj" fmla="val 2500"/>
+              <a:gd name="adj" fmla="val 3200"/>
             </a:avLst>
           </a:prstGeom>
           <a:solidFill>
@@ -11988,8 +11712,8 @@
           </a:solidFill>
           <a:ln/>
           <a:effectLst>
-            <a:outerShdw sx="100000" sy="100000" kx="0" ky="0" algn="bl" rotWithShape="0" blurRad="50800" dist="25400" dir="16200000">
-              <a:srgbClr val="00000015">
+            <a:outerShdw sx="100000" sy="100000" kx="0" ky="0" algn="bl" rotWithShape="0" blurRad="38100" dist="12700" dir="16200000">
+              <a:srgbClr val="00000010">
                 <a:alpha val="75000"/>
               </a:srgbClr>
             </a:outerShdw>
@@ -12012,8 +11736,8 @@
         </p:blipFill>
         <p:spPr>
           <a:xfrm>
-            <a:off x="457200" y="1097280"/>
-            <a:ext cx="4389120" cy="3474720"/>
+            <a:off x="457200" y="1005840"/>
+            <a:ext cx="8229600" cy="2103120"/>
           </a:xfrm>
           <a:prstGeom prst="rect">
             <a:avLst/>
@@ -12028,12 +11752,12 @@
         </p:nvSpPr>
         <p:spPr>
           <a:xfrm>
-            <a:off x="5120640" y="1005840"/>
-            <a:ext cx="3657600" cy="3657600"/>
+            <a:off x="365760" y="3337560"/>
+            <a:ext cx="8412480" cy="1417320"/>
           </a:xfrm>
           <a:prstGeom prst="roundRect">
             <a:avLst>
-              <a:gd name="adj" fmla="val 2500"/>
+              <a:gd name="adj" fmla="val 5161"/>
             </a:avLst>
           </a:prstGeom>
           <a:solidFill>
@@ -12041,8 +11765,8 @@
           </a:solidFill>
           <a:ln/>
           <a:effectLst>
-            <a:outerShdw sx="100000" sy="100000" kx="0" ky="0" algn="bl" rotWithShape="0" blurRad="50800" dist="25400" dir="16200000">
-              <a:srgbClr val="00000015">
+            <a:outerShdw sx="100000" sy="100000" kx="0" ky="0" algn="bl" rotWithShape="0" blurRad="38100" dist="12700" dir="16200000">
+              <a:srgbClr val="00000010">
                 <a:alpha val="75000"/>
               </a:srgbClr>
             </a:outerShdw>
@@ -12057,14 +11781,14 @@
         </p:nvSpPr>
         <p:spPr>
           <a:xfrm>
-            <a:off x="5120640" y="1005840"/>
-            <a:ext cx="3657600" cy="457200"/>
-          </a:xfrm>
-          <a:prstGeom prst="rect">
-            <a:avLst/>
-          </a:prstGeom>
-          <a:solidFill>
-            <a:srgbClr val="1E3A5F"/>
+            <a:off x="365760" y="3337560"/>
+            <a:ext cx="54864" cy="1417320"/>
+          </a:xfrm>
+          <a:prstGeom prst="rect">
+            <a:avLst/>
+          </a:prstGeom>
+          <a:solidFill>
+            <a:srgbClr val="C9A227"/>
           </a:solidFill>
           <a:ln/>
         </p:spPr>
@@ -12077,26 +11801,26 @@
         </p:nvSpPr>
         <p:spPr>
           <a:xfrm>
-            <a:off x="5120640" y="1005840"/>
-            <a:ext cx="3657600" cy="457200"/>
-          </a:xfrm>
-          <a:prstGeom prst="rect">
-            <a:avLst/>
-          </a:prstGeom>
-          <a:noFill/>
-          <a:ln/>
-        </p:spPr>
-        <p:txBody>
-          <a:bodyPr wrap="square" rtlCol="0" anchor="ctr"/>
-          <a:lstStyle/>
-          <a:p>
-            <a:pPr algn="ctr" indent="0" marL="0">
-              <a:buNone/>
-            </a:pPr>
-            <a:r>
-              <a:rPr lang="en-US" sz="1400" b="1" dirty="0">
-                <a:solidFill>
-                  <a:srgbClr val="FFFFFF"/>
+            <a:off x="548640" y="3429000"/>
+            <a:ext cx="1828800" cy="320040"/>
+          </a:xfrm>
+          <a:prstGeom prst="rect">
+            <a:avLst/>
+          </a:prstGeom>
+          <a:noFill/>
+          <a:ln/>
+        </p:spPr>
+        <p:txBody>
+          <a:bodyPr wrap="square" rtlCol="0" anchor="ctr"/>
+          <a:lstStyle/>
+          <a:p>
+            <a:pPr indent="0" marL="0">
+              <a:buNone/>
+            </a:pPr>
+            <a:r>
+              <a:rPr lang="en-US" sz="1300" b="1" dirty="0">
+                <a:solidFill>
+                  <a:srgbClr val="1E3A5F"/>
                 </a:solidFill>
                 <a:latin typeface="SimHei" pitchFamily="34" charset="0"/>
                 <a:ea typeface="SimHei" pitchFamily="34" charset="-122"/>
@@ -12104,7 +11828,7 @@
               </a:rPr>
               <a:t>功能说明</a:t>
             </a:r>
-            <a:endParaRPr lang="en-US" sz="1400" dirty="0"/>
+            <a:endParaRPr lang="en-US" sz="1300" dirty="0"/>
           </a:p>
         </p:txBody>
       </p:sp>
@@ -12116,8 +11840,8 @@
         </p:nvSpPr>
         <p:spPr>
           <a:xfrm>
-            <a:off x="5303520" y="1600200"/>
-            <a:ext cx="3291840" cy="731520"/>
+            <a:off x="548640" y="3749040"/>
+            <a:ext cx="8046720" cy="365760"/>
           </a:xfrm>
           <a:prstGeom prst="rect">
             <a:avLst/>
@@ -12130,13 +11854,10 @@
           <a:lstStyle/>
           <a:p>
             <a:pPr indent="0" marL="0">
-              <a:lnSpc>
-                <a:spcPct val="140000"/>
-              </a:lnSpc>
-              <a:buNone/>
-            </a:pPr>
-            <a:r>
-              <a:rPr lang="en-US" sz="1100" dirty="0">
+              <a:buNone/>
+            </a:pPr>
+            <a:r>
+              <a:rPr lang="en-US" sz="1000" dirty="0">
                 <a:solidFill>
                   <a:srgbClr val="2C3E50"/>
                 </a:solidFill>
@@ -12146,56 +11867,36 @@
               </a:rPr>
               <a:t>公告管理功能允许管理员发布、编辑、删除公告信息，公告内容支持富文本编辑，发布后用户端可实时查看最新公告动态。</a:t>
             </a:r>
-            <a:endParaRPr lang="en-US" sz="1100" dirty="0"/>
-          </a:p>
-        </p:txBody>
-      </p:sp>
-      <p:sp>
-        <p:nvSpPr>
-          <p:cNvPr id="11" name="Shape 8"/>
-          <p:cNvSpPr/>
-          <p:nvPr/>
-        </p:nvSpPr>
-        <p:spPr>
-          <a:xfrm>
-            <a:off x="5303520" y="2331720"/>
-            <a:ext cx="3291840" cy="18288"/>
-          </a:xfrm>
-          <a:prstGeom prst="rect">
-            <a:avLst/>
-          </a:prstGeom>
-          <a:solidFill>
-            <a:srgbClr val="E9ECEF"/>
-          </a:solidFill>
-          <a:ln/>
-        </p:spPr>
-      </p:sp>
-      <p:sp>
-        <p:nvSpPr>
-          <p:cNvPr id="12" name="Text 9"/>
-          <p:cNvSpPr/>
-          <p:nvPr/>
-        </p:nvSpPr>
-        <p:spPr>
-          <a:xfrm>
-            <a:off x="5303520" y="2468880"/>
-            <a:ext cx="3291840" cy="411480"/>
-          </a:xfrm>
-          <a:prstGeom prst="rect">
-            <a:avLst/>
-          </a:prstGeom>
-          <a:noFill/>
-          <a:ln/>
-        </p:spPr>
-        <p:txBody>
-          <a:bodyPr wrap="square" rtlCol="0" anchor="ctr"/>
-          <a:lstStyle/>
-          <a:p>
-            <a:pPr indent="0" marL="0">
-              <a:buNone/>
-            </a:pPr>
-            <a:r>
-              <a:rPr lang="en-US" sz="1000" dirty="0">
+            <a:endParaRPr lang="en-US" sz="1000" dirty="0"/>
+          </a:p>
+        </p:txBody>
+      </p:sp>
+      <p:sp>
+        <p:nvSpPr>
+          <p:cNvPr id="11" name="Text 8"/>
+          <p:cNvSpPr/>
+          <p:nvPr/>
+        </p:nvSpPr>
+        <p:spPr>
+          <a:xfrm>
+            <a:off x="548640" y="4160520"/>
+            <a:ext cx="2011680" cy="274320"/>
+          </a:xfrm>
+          <a:prstGeom prst="rect">
+            <a:avLst/>
+          </a:prstGeom>
+          <a:noFill/>
+          <a:ln/>
+        </p:spPr>
+        <p:txBody>
+          <a:bodyPr wrap="square" rtlCol="0" anchor="ctr"/>
+          <a:lstStyle/>
+          <a:p>
+            <a:pPr indent="0" marL="0">
+              <a:buNone/>
+            </a:pPr>
+            <a:r>
+              <a:rPr lang="en-US" sz="900" dirty="0">
                 <a:solidFill>
                   <a:srgbClr val="2C3E50"/>
                 </a:solidFill>
@@ -12205,36 +11906,36 @@
               </a:rPr>
               <a:t>✓ 公告发布编辑</a:t>
             </a:r>
-            <a:endParaRPr lang="en-US" sz="1000" dirty="0"/>
-          </a:p>
-        </p:txBody>
-      </p:sp>
-      <p:sp>
-        <p:nvSpPr>
-          <p:cNvPr id="13" name="Text 10"/>
-          <p:cNvSpPr/>
-          <p:nvPr/>
-        </p:nvSpPr>
-        <p:spPr>
-          <a:xfrm>
-            <a:off x="5303520" y="2926080"/>
-            <a:ext cx="3291840" cy="411480"/>
-          </a:xfrm>
-          <a:prstGeom prst="rect">
-            <a:avLst/>
-          </a:prstGeom>
-          <a:noFill/>
-          <a:ln/>
-        </p:spPr>
-        <p:txBody>
-          <a:bodyPr wrap="square" rtlCol="0" anchor="ctr"/>
-          <a:lstStyle/>
-          <a:p>
-            <a:pPr indent="0" marL="0">
-              <a:buNone/>
-            </a:pPr>
-            <a:r>
-              <a:rPr lang="en-US" sz="1000" dirty="0">
+            <a:endParaRPr lang="en-US" sz="900" dirty="0"/>
+          </a:p>
+        </p:txBody>
+      </p:sp>
+      <p:sp>
+        <p:nvSpPr>
+          <p:cNvPr id="12" name="Text 9"/>
+          <p:cNvSpPr/>
+          <p:nvPr/>
+        </p:nvSpPr>
+        <p:spPr>
+          <a:xfrm>
+            <a:off x="2651760" y="4160520"/>
+            <a:ext cx="2011680" cy="274320"/>
+          </a:xfrm>
+          <a:prstGeom prst="rect">
+            <a:avLst/>
+          </a:prstGeom>
+          <a:noFill/>
+          <a:ln/>
+        </p:spPr>
+        <p:txBody>
+          <a:bodyPr wrap="square" rtlCol="0" anchor="ctr"/>
+          <a:lstStyle/>
+          <a:p>
+            <a:pPr indent="0" marL="0">
+              <a:buNone/>
+            </a:pPr>
+            <a:r>
+              <a:rPr lang="en-US" sz="900" dirty="0">
                 <a:solidFill>
                   <a:srgbClr val="2C3E50"/>
                 </a:solidFill>
@@ -12244,36 +11945,36 @@
               </a:rPr>
               <a:t>✓ 富文本编辑支持</a:t>
             </a:r>
-            <a:endParaRPr lang="en-US" sz="1000" dirty="0"/>
-          </a:p>
-        </p:txBody>
-      </p:sp>
-      <p:sp>
-        <p:nvSpPr>
-          <p:cNvPr id="14" name="Text 11"/>
-          <p:cNvSpPr/>
-          <p:nvPr/>
-        </p:nvSpPr>
-        <p:spPr>
-          <a:xfrm>
-            <a:off x="5303520" y="3383280"/>
-            <a:ext cx="3291840" cy="411480"/>
-          </a:xfrm>
-          <a:prstGeom prst="rect">
-            <a:avLst/>
-          </a:prstGeom>
-          <a:noFill/>
-          <a:ln/>
-        </p:spPr>
-        <p:txBody>
-          <a:bodyPr wrap="square" rtlCol="0" anchor="ctr"/>
-          <a:lstStyle/>
-          <a:p>
-            <a:pPr indent="0" marL="0">
-              <a:buNone/>
-            </a:pPr>
-            <a:r>
-              <a:rPr lang="en-US" sz="1000" dirty="0">
+            <a:endParaRPr lang="en-US" sz="900" dirty="0"/>
+          </a:p>
+        </p:txBody>
+      </p:sp>
+      <p:sp>
+        <p:nvSpPr>
+          <p:cNvPr id="13" name="Text 10"/>
+          <p:cNvSpPr/>
+          <p:nvPr/>
+        </p:nvSpPr>
+        <p:spPr>
+          <a:xfrm>
+            <a:off x="4754880" y="4160520"/>
+            <a:ext cx="2011680" cy="274320"/>
+          </a:xfrm>
+          <a:prstGeom prst="rect">
+            <a:avLst/>
+          </a:prstGeom>
+          <a:noFill/>
+          <a:ln/>
+        </p:spPr>
+        <p:txBody>
+          <a:bodyPr wrap="square" rtlCol="0" anchor="ctr"/>
+          <a:lstStyle/>
+          <a:p>
+            <a:pPr indent="0" marL="0">
+              <a:buNone/>
+            </a:pPr>
+            <a:r>
+              <a:rPr lang="en-US" sz="900" dirty="0">
                 <a:solidFill>
                   <a:srgbClr val="2C3E50"/>
                 </a:solidFill>
@@ -12283,36 +11984,36 @@
               </a:rPr>
               <a:t>✓ 公告删除管理</a:t>
             </a:r>
-            <a:endParaRPr lang="en-US" sz="1000" dirty="0"/>
-          </a:p>
-        </p:txBody>
-      </p:sp>
-      <p:sp>
-        <p:nvSpPr>
-          <p:cNvPr id="15" name="Text 12"/>
-          <p:cNvSpPr/>
-          <p:nvPr/>
-        </p:nvSpPr>
-        <p:spPr>
-          <a:xfrm>
-            <a:off x="5303520" y="3840480"/>
-            <a:ext cx="3291840" cy="411480"/>
-          </a:xfrm>
-          <a:prstGeom prst="rect">
-            <a:avLst/>
-          </a:prstGeom>
-          <a:noFill/>
-          <a:ln/>
-        </p:spPr>
-        <p:txBody>
-          <a:bodyPr wrap="square" rtlCol="0" anchor="ctr"/>
-          <a:lstStyle/>
-          <a:p>
-            <a:pPr indent="0" marL="0">
-              <a:buNone/>
-            </a:pPr>
-            <a:r>
-              <a:rPr lang="en-US" sz="1000" dirty="0">
+            <a:endParaRPr lang="en-US" sz="900" dirty="0"/>
+          </a:p>
+        </p:txBody>
+      </p:sp>
+      <p:sp>
+        <p:nvSpPr>
+          <p:cNvPr id="14" name="Text 11"/>
+          <p:cNvSpPr/>
+          <p:nvPr/>
+        </p:nvSpPr>
+        <p:spPr>
+          <a:xfrm>
+            <a:off x="6858000" y="4160520"/>
+            <a:ext cx="2011680" cy="274320"/>
+          </a:xfrm>
+          <a:prstGeom prst="rect">
+            <a:avLst/>
+          </a:prstGeom>
+          <a:noFill/>
+          <a:ln/>
+        </p:spPr>
+        <p:txBody>
+          <a:bodyPr wrap="square" rtlCol="0" anchor="ctr"/>
+          <a:lstStyle/>
+          <a:p>
+            <a:pPr indent="0" marL="0">
+              <a:buNone/>
+            </a:pPr>
+            <a:r>
+              <a:rPr lang="en-US" sz="900" dirty="0">
                 <a:solidFill>
                   <a:srgbClr val="2C3E50"/>
                 </a:solidFill>
@@ -12322,7 +12023,7 @@
               </a:rPr>
               <a:t>✓ 用户端实时展示</a:t>
             </a:r>
-            <a:endParaRPr lang="en-US" sz="1000" dirty="0"/>
+            <a:endParaRPr lang="en-US" sz="900" dirty="0"/>
           </a:p>
         </p:txBody>
       </p:sp>
@@ -12386,24 +12087,24 @@
         </p:nvSpPr>
         <p:spPr>
           <a:xfrm>
-            <a:off x="457200" y="320040"/>
-            <a:ext cx="8229600" cy="457200"/>
-          </a:xfrm>
-          <a:prstGeom prst="rect">
-            <a:avLst/>
-          </a:prstGeom>
-          <a:noFill/>
-          <a:ln/>
-        </p:spPr>
-        <p:txBody>
-          <a:bodyPr wrap="square" rtlCol="0" anchor="ctr"/>
-          <a:lstStyle/>
-          <a:p>
-            <a:pPr indent="0" marL="0">
-              <a:buNone/>
-            </a:pPr>
-            <a:r>
-              <a:rPr lang="en-US" sz="2200" b="1" dirty="0">
+            <a:off x="457200" y="274320"/>
+            <a:ext cx="8229600" cy="411480"/>
+          </a:xfrm>
+          <a:prstGeom prst="rect">
+            <a:avLst/>
+          </a:prstGeom>
+          <a:noFill/>
+          <a:ln/>
+        </p:spPr>
+        <p:txBody>
+          <a:bodyPr wrap="square" rtlCol="0" anchor="ctr"/>
+          <a:lstStyle/>
+          <a:p>
+            <a:pPr indent="0" marL="0">
+              <a:buNone/>
+            </a:pPr>
+            <a:r>
+              <a:rPr lang="en-US" sz="2000" b="1" dirty="0">
                 <a:solidFill>
                   <a:srgbClr val="1E3A5F"/>
                 </a:solidFill>
@@ -12413,7 +12114,7 @@
               </a:rPr>
               <a:t>图5-15 优惠券管理页面</a:t>
             </a:r>
-            <a:endParaRPr lang="en-US" sz="2200" dirty="0"/>
+            <a:endParaRPr lang="en-US" sz="2000" dirty="0"/>
           </a:p>
         </p:txBody>
       </p:sp>
@@ -12425,8 +12126,8 @@
         </p:nvSpPr>
         <p:spPr>
           <a:xfrm>
-            <a:off x="457200" y="777240"/>
-            <a:ext cx="1371600" cy="27432"/>
+            <a:off x="457200" y="685800"/>
+            <a:ext cx="1097280" cy="27432"/>
           </a:xfrm>
           <a:prstGeom prst="rect">
             <a:avLst/>
@@ -12445,12 +12146,12 @@
         </p:nvSpPr>
         <p:spPr>
           <a:xfrm>
-            <a:off x="365760" y="1005840"/>
-            <a:ext cx="4572000" cy="3657600"/>
+            <a:off x="365760" y="914400"/>
+            <a:ext cx="8412480" cy="2286000"/>
           </a:xfrm>
           <a:prstGeom prst="roundRect">
             <a:avLst>
-              <a:gd name="adj" fmla="val 2500"/>
+              <a:gd name="adj" fmla="val 3200"/>
             </a:avLst>
           </a:prstGeom>
           <a:solidFill>
@@ -12458,8 +12159,8 @@
           </a:solidFill>
           <a:ln/>
           <a:effectLst>
-            <a:outerShdw sx="100000" sy="100000" kx="0" ky="0" algn="bl" rotWithShape="0" blurRad="50800" dist="25400" dir="16200000">
-              <a:srgbClr val="00000015">
+            <a:outerShdw sx="100000" sy="100000" kx="0" ky="0" algn="bl" rotWithShape="0" blurRad="38100" dist="12700" dir="16200000">
+              <a:srgbClr val="00000010">
                 <a:alpha val="75000"/>
               </a:srgbClr>
             </a:outerShdw>
@@ -12482,8 +12183,8 @@
         </p:blipFill>
         <p:spPr>
           <a:xfrm>
-            <a:off x="457200" y="1097280"/>
-            <a:ext cx="4389120" cy="3474720"/>
+            <a:off x="457200" y="1005840"/>
+            <a:ext cx="8229600" cy="2103120"/>
           </a:xfrm>
           <a:prstGeom prst="rect">
             <a:avLst/>
@@ -12498,12 +12199,12 @@
         </p:nvSpPr>
         <p:spPr>
           <a:xfrm>
-            <a:off x="5120640" y="1005840"/>
-            <a:ext cx="3657600" cy="3657600"/>
+            <a:off x="365760" y="3337560"/>
+            <a:ext cx="8412480" cy="1417320"/>
           </a:xfrm>
           <a:prstGeom prst="roundRect">
             <a:avLst>
-              <a:gd name="adj" fmla="val 2500"/>
+              <a:gd name="adj" fmla="val 5161"/>
             </a:avLst>
           </a:prstGeom>
           <a:solidFill>
@@ -12511,8 +12212,8 @@
           </a:solidFill>
           <a:ln/>
           <a:effectLst>
-            <a:outerShdw sx="100000" sy="100000" kx="0" ky="0" algn="bl" rotWithShape="0" blurRad="50800" dist="25400" dir="16200000">
-              <a:srgbClr val="00000015">
+            <a:outerShdw sx="100000" sy="100000" kx="0" ky="0" algn="bl" rotWithShape="0" blurRad="38100" dist="12700" dir="16200000">
+              <a:srgbClr val="00000010">
                 <a:alpha val="75000"/>
               </a:srgbClr>
             </a:outerShdw>
@@ -12527,14 +12228,14 @@
         </p:nvSpPr>
         <p:spPr>
           <a:xfrm>
-            <a:off x="5120640" y="1005840"/>
-            <a:ext cx="3657600" cy="457200"/>
-          </a:xfrm>
-          <a:prstGeom prst="rect">
-            <a:avLst/>
-          </a:prstGeom>
-          <a:solidFill>
-            <a:srgbClr val="1E3A5F"/>
+            <a:off x="365760" y="3337560"/>
+            <a:ext cx="54864" cy="1417320"/>
+          </a:xfrm>
+          <a:prstGeom prst="rect">
+            <a:avLst/>
+          </a:prstGeom>
+          <a:solidFill>
+            <a:srgbClr val="C9A227"/>
           </a:solidFill>
           <a:ln/>
         </p:spPr>
@@ -12547,26 +12248,26 @@
         </p:nvSpPr>
         <p:spPr>
           <a:xfrm>
-            <a:off x="5120640" y="1005840"/>
-            <a:ext cx="3657600" cy="457200"/>
-          </a:xfrm>
-          <a:prstGeom prst="rect">
-            <a:avLst/>
-          </a:prstGeom>
-          <a:noFill/>
-          <a:ln/>
-        </p:spPr>
-        <p:txBody>
-          <a:bodyPr wrap="square" rtlCol="0" anchor="ctr"/>
-          <a:lstStyle/>
-          <a:p>
-            <a:pPr algn="ctr" indent="0" marL="0">
-              <a:buNone/>
-            </a:pPr>
-            <a:r>
-              <a:rPr lang="en-US" sz="1400" b="1" dirty="0">
-                <a:solidFill>
-                  <a:srgbClr val="FFFFFF"/>
+            <a:off x="548640" y="3429000"/>
+            <a:ext cx="1828800" cy="320040"/>
+          </a:xfrm>
+          <a:prstGeom prst="rect">
+            <a:avLst/>
+          </a:prstGeom>
+          <a:noFill/>
+          <a:ln/>
+        </p:spPr>
+        <p:txBody>
+          <a:bodyPr wrap="square" rtlCol="0" anchor="ctr"/>
+          <a:lstStyle/>
+          <a:p>
+            <a:pPr indent="0" marL="0">
+              <a:buNone/>
+            </a:pPr>
+            <a:r>
+              <a:rPr lang="en-US" sz="1300" b="1" dirty="0">
+                <a:solidFill>
+                  <a:srgbClr val="1E3A5F"/>
                 </a:solidFill>
                 <a:latin typeface="SimHei" pitchFamily="34" charset="0"/>
                 <a:ea typeface="SimHei" pitchFamily="34" charset="-122"/>
@@ -12574,7 +12275,7 @@
               </a:rPr>
               <a:t>功能说明</a:t>
             </a:r>
-            <a:endParaRPr lang="en-US" sz="1400" dirty="0"/>
+            <a:endParaRPr lang="en-US" sz="1300" dirty="0"/>
           </a:p>
         </p:txBody>
       </p:sp>
@@ -12586,8 +12287,8 @@
         </p:nvSpPr>
         <p:spPr>
           <a:xfrm>
-            <a:off x="5303520" y="1600200"/>
-            <a:ext cx="3291840" cy="731520"/>
+            <a:off x="548640" y="3749040"/>
+            <a:ext cx="8046720" cy="365760"/>
           </a:xfrm>
           <a:prstGeom prst="rect">
             <a:avLst/>
@@ -12600,13 +12301,10 @@
           <a:lstStyle/>
           <a:p>
             <a:pPr indent="0" marL="0">
-              <a:lnSpc>
-                <a:spcPct val="140000"/>
-              </a:lnSpc>
-              <a:buNone/>
-            </a:pPr>
-            <a:r>
-              <a:rPr lang="en-US" sz="1100" dirty="0">
+              <a:buNone/>
+            </a:pPr>
+            <a:r>
+              <a:rPr lang="en-US" sz="1000" dirty="0">
                 <a:solidFill>
                   <a:srgbClr val="2C3E50"/>
                 </a:solidFill>
@@ -12616,56 +12314,36 @@
               </a:rPr>
               <a:t>优惠券管理功能允许管理员创建满减券、折扣券等多种类型优惠券，设置使用门槛、过期时间、所需积分，管理优惠券库存。</a:t>
             </a:r>
-            <a:endParaRPr lang="en-US" sz="1100" dirty="0"/>
-          </a:p>
-        </p:txBody>
-      </p:sp>
-      <p:sp>
-        <p:nvSpPr>
-          <p:cNvPr id="11" name="Shape 8"/>
-          <p:cNvSpPr/>
-          <p:nvPr/>
-        </p:nvSpPr>
-        <p:spPr>
-          <a:xfrm>
-            <a:off x="5303520" y="2331720"/>
-            <a:ext cx="3291840" cy="18288"/>
-          </a:xfrm>
-          <a:prstGeom prst="rect">
-            <a:avLst/>
-          </a:prstGeom>
-          <a:solidFill>
-            <a:srgbClr val="E9ECEF"/>
-          </a:solidFill>
-          <a:ln/>
-        </p:spPr>
-      </p:sp>
-      <p:sp>
-        <p:nvSpPr>
-          <p:cNvPr id="12" name="Text 9"/>
-          <p:cNvSpPr/>
-          <p:nvPr/>
-        </p:nvSpPr>
-        <p:spPr>
-          <a:xfrm>
-            <a:off x="5303520" y="2468880"/>
-            <a:ext cx="3291840" cy="411480"/>
-          </a:xfrm>
-          <a:prstGeom prst="rect">
-            <a:avLst/>
-          </a:prstGeom>
-          <a:noFill/>
-          <a:ln/>
-        </p:spPr>
-        <p:txBody>
-          <a:bodyPr wrap="square" rtlCol="0" anchor="ctr"/>
-          <a:lstStyle/>
-          <a:p>
-            <a:pPr indent="0" marL="0">
-              <a:buNone/>
-            </a:pPr>
-            <a:r>
-              <a:rPr lang="en-US" sz="1000" dirty="0">
+            <a:endParaRPr lang="en-US" sz="1000" dirty="0"/>
+          </a:p>
+        </p:txBody>
+      </p:sp>
+      <p:sp>
+        <p:nvSpPr>
+          <p:cNvPr id="11" name="Text 8"/>
+          <p:cNvSpPr/>
+          <p:nvPr/>
+        </p:nvSpPr>
+        <p:spPr>
+          <a:xfrm>
+            <a:off x="548640" y="4160520"/>
+            <a:ext cx="2011680" cy="274320"/>
+          </a:xfrm>
+          <a:prstGeom prst="rect">
+            <a:avLst/>
+          </a:prstGeom>
+          <a:noFill/>
+          <a:ln/>
+        </p:spPr>
+        <p:txBody>
+          <a:bodyPr wrap="square" rtlCol="0" anchor="ctr"/>
+          <a:lstStyle/>
+          <a:p>
+            <a:pPr indent="0" marL="0">
+              <a:buNone/>
+            </a:pPr>
+            <a:r>
+              <a:rPr lang="en-US" sz="900" dirty="0">
                 <a:solidFill>
                   <a:srgbClr val="2C3E50"/>
                 </a:solidFill>
@@ -12675,36 +12353,36 @@
               </a:rPr>
               <a:t>✓ 满减券/折扣券创建</a:t>
             </a:r>
-            <a:endParaRPr lang="en-US" sz="1000" dirty="0"/>
-          </a:p>
-        </p:txBody>
-      </p:sp>
-      <p:sp>
-        <p:nvSpPr>
-          <p:cNvPr id="13" name="Text 10"/>
-          <p:cNvSpPr/>
-          <p:nvPr/>
-        </p:nvSpPr>
-        <p:spPr>
-          <a:xfrm>
-            <a:off x="5303520" y="2926080"/>
-            <a:ext cx="3291840" cy="411480"/>
-          </a:xfrm>
-          <a:prstGeom prst="rect">
-            <a:avLst/>
-          </a:prstGeom>
-          <a:noFill/>
-          <a:ln/>
-        </p:spPr>
-        <p:txBody>
-          <a:bodyPr wrap="square" rtlCol="0" anchor="ctr"/>
-          <a:lstStyle/>
-          <a:p>
-            <a:pPr indent="0" marL="0">
-              <a:buNone/>
-            </a:pPr>
-            <a:r>
-              <a:rPr lang="en-US" sz="1000" dirty="0">
+            <a:endParaRPr lang="en-US" sz="900" dirty="0"/>
+          </a:p>
+        </p:txBody>
+      </p:sp>
+      <p:sp>
+        <p:nvSpPr>
+          <p:cNvPr id="12" name="Text 9"/>
+          <p:cNvSpPr/>
+          <p:nvPr/>
+        </p:nvSpPr>
+        <p:spPr>
+          <a:xfrm>
+            <a:off x="2651760" y="4160520"/>
+            <a:ext cx="2011680" cy="274320"/>
+          </a:xfrm>
+          <a:prstGeom prst="rect">
+            <a:avLst/>
+          </a:prstGeom>
+          <a:noFill/>
+          <a:ln/>
+        </p:spPr>
+        <p:txBody>
+          <a:bodyPr wrap="square" rtlCol="0" anchor="ctr"/>
+          <a:lstStyle/>
+          <a:p>
+            <a:pPr indent="0" marL="0">
+              <a:buNone/>
+            </a:pPr>
+            <a:r>
+              <a:rPr lang="en-US" sz="900" dirty="0">
                 <a:solidFill>
                   <a:srgbClr val="2C3E50"/>
                 </a:solidFill>
@@ -12714,36 +12392,36 @@
               </a:rPr>
               <a:t>✓ 使用门槛设置</a:t>
             </a:r>
-            <a:endParaRPr lang="en-US" sz="1000" dirty="0"/>
-          </a:p>
-        </p:txBody>
-      </p:sp>
-      <p:sp>
-        <p:nvSpPr>
-          <p:cNvPr id="14" name="Text 11"/>
-          <p:cNvSpPr/>
-          <p:nvPr/>
-        </p:nvSpPr>
-        <p:spPr>
-          <a:xfrm>
-            <a:off x="5303520" y="3383280"/>
-            <a:ext cx="3291840" cy="411480"/>
-          </a:xfrm>
-          <a:prstGeom prst="rect">
-            <a:avLst/>
-          </a:prstGeom>
-          <a:noFill/>
-          <a:ln/>
-        </p:spPr>
-        <p:txBody>
-          <a:bodyPr wrap="square" rtlCol="0" anchor="ctr"/>
-          <a:lstStyle/>
-          <a:p>
-            <a:pPr indent="0" marL="0">
-              <a:buNone/>
-            </a:pPr>
-            <a:r>
-              <a:rPr lang="en-US" sz="1000" dirty="0">
+            <a:endParaRPr lang="en-US" sz="900" dirty="0"/>
+          </a:p>
+        </p:txBody>
+      </p:sp>
+      <p:sp>
+        <p:nvSpPr>
+          <p:cNvPr id="13" name="Text 10"/>
+          <p:cNvSpPr/>
+          <p:nvPr/>
+        </p:nvSpPr>
+        <p:spPr>
+          <a:xfrm>
+            <a:off x="4754880" y="4160520"/>
+            <a:ext cx="2011680" cy="274320"/>
+          </a:xfrm>
+          <a:prstGeom prst="rect">
+            <a:avLst/>
+          </a:prstGeom>
+          <a:noFill/>
+          <a:ln/>
+        </p:spPr>
+        <p:txBody>
+          <a:bodyPr wrap="square" rtlCol="0" anchor="ctr"/>
+          <a:lstStyle/>
+          <a:p>
+            <a:pPr indent="0" marL="0">
+              <a:buNone/>
+            </a:pPr>
+            <a:r>
+              <a:rPr lang="en-US" sz="900" dirty="0">
                 <a:solidFill>
                   <a:srgbClr val="2C3E50"/>
                 </a:solidFill>
@@ -12753,36 +12431,36 @@
               </a:rPr>
               <a:t>✓ 过期时间配置</a:t>
             </a:r>
-            <a:endParaRPr lang="en-US" sz="1000" dirty="0"/>
-          </a:p>
-        </p:txBody>
-      </p:sp>
-      <p:sp>
-        <p:nvSpPr>
-          <p:cNvPr id="15" name="Text 12"/>
-          <p:cNvSpPr/>
-          <p:nvPr/>
-        </p:nvSpPr>
-        <p:spPr>
-          <a:xfrm>
-            <a:off x="5303520" y="3840480"/>
-            <a:ext cx="3291840" cy="411480"/>
-          </a:xfrm>
-          <a:prstGeom prst="rect">
-            <a:avLst/>
-          </a:prstGeom>
-          <a:noFill/>
-          <a:ln/>
-        </p:spPr>
-        <p:txBody>
-          <a:bodyPr wrap="square" rtlCol="0" anchor="ctr"/>
-          <a:lstStyle/>
-          <a:p>
-            <a:pPr indent="0" marL="0">
-              <a:buNone/>
-            </a:pPr>
-            <a:r>
-              <a:rPr lang="en-US" sz="1000" dirty="0">
+            <a:endParaRPr lang="en-US" sz="900" dirty="0"/>
+          </a:p>
+        </p:txBody>
+      </p:sp>
+      <p:sp>
+        <p:nvSpPr>
+          <p:cNvPr id="14" name="Text 11"/>
+          <p:cNvSpPr/>
+          <p:nvPr/>
+        </p:nvSpPr>
+        <p:spPr>
+          <a:xfrm>
+            <a:off x="6858000" y="4160520"/>
+            <a:ext cx="2011680" cy="274320"/>
+          </a:xfrm>
+          <a:prstGeom prst="rect">
+            <a:avLst/>
+          </a:prstGeom>
+          <a:noFill/>
+          <a:ln/>
+        </p:spPr>
+        <p:txBody>
+          <a:bodyPr wrap="square" rtlCol="0" anchor="ctr"/>
+          <a:lstStyle/>
+          <a:p>
+            <a:pPr indent="0" marL="0">
+              <a:buNone/>
+            </a:pPr>
+            <a:r>
+              <a:rPr lang="en-US" sz="900" dirty="0">
                 <a:solidFill>
                   <a:srgbClr val="2C3E50"/>
                 </a:solidFill>
@@ -12792,7 +12470,7 @@
               </a:rPr>
               <a:t>✓ 积分兑换设置</a:t>
             </a:r>
-            <a:endParaRPr lang="en-US" sz="1000" dirty="0"/>
+            <a:endParaRPr lang="en-US" sz="900" dirty="0"/>
           </a:p>
         </p:txBody>
       </p:sp>
@@ -12856,24 +12534,24 @@
         </p:nvSpPr>
         <p:spPr>
           <a:xfrm>
-            <a:off x="457200" y="320040"/>
-            <a:ext cx="8229600" cy="457200"/>
-          </a:xfrm>
-          <a:prstGeom prst="rect">
-            <a:avLst/>
-          </a:prstGeom>
-          <a:noFill/>
-          <a:ln/>
-        </p:spPr>
-        <p:txBody>
-          <a:bodyPr wrap="square" rtlCol="0" anchor="ctr"/>
-          <a:lstStyle/>
-          <a:p>
-            <a:pPr indent="0" marL="0">
-              <a:buNone/>
-            </a:pPr>
-            <a:r>
-              <a:rPr lang="en-US" sz="2200" b="1" dirty="0">
+            <a:off x="457200" y="274320"/>
+            <a:ext cx="8229600" cy="411480"/>
+          </a:xfrm>
+          <a:prstGeom prst="rect">
+            <a:avLst/>
+          </a:prstGeom>
+          <a:noFill/>
+          <a:ln/>
+        </p:spPr>
+        <p:txBody>
+          <a:bodyPr wrap="square" rtlCol="0" anchor="ctr"/>
+          <a:lstStyle/>
+          <a:p>
+            <a:pPr indent="0" marL="0">
+              <a:buNone/>
+            </a:pPr>
+            <a:r>
+              <a:rPr lang="en-US" sz="2000" b="1" dirty="0">
                 <a:solidFill>
                   <a:srgbClr val="1E3A5F"/>
                 </a:solidFill>
@@ -12883,7 +12561,7 @@
               </a:rPr>
               <a:t>图5-17 系统管理页面</a:t>
             </a:r>
-            <a:endParaRPr lang="en-US" sz="2200" dirty="0"/>
+            <a:endParaRPr lang="en-US" sz="2000" dirty="0"/>
           </a:p>
         </p:txBody>
       </p:sp>
@@ -12895,8 +12573,8 @@
         </p:nvSpPr>
         <p:spPr>
           <a:xfrm>
-            <a:off x="457200" y="777240"/>
-            <a:ext cx="1371600" cy="27432"/>
+            <a:off x="457200" y="685800"/>
+            <a:ext cx="1097280" cy="27432"/>
           </a:xfrm>
           <a:prstGeom prst="rect">
             <a:avLst/>
@@ -12915,12 +12593,12 @@
         </p:nvSpPr>
         <p:spPr>
           <a:xfrm>
-            <a:off x="365760" y="1005840"/>
-            <a:ext cx="4572000" cy="3657600"/>
+            <a:off x="365760" y="914400"/>
+            <a:ext cx="8412480" cy="2286000"/>
           </a:xfrm>
           <a:prstGeom prst="roundRect">
             <a:avLst>
-              <a:gd name="adj" fmla="val 2500"/>
+              <a:gd name="adj" fmla="val 3200"/>
             </a:avLst>
           </a:prstGeom>
           <a:solidFill>
@@ -12928,8 +12606,8 @@
           </a:solidFill>
           <a:ln/>
           <a:effectLst>
-            <a:outerShdw sx="100000" sy="100000" kx="0" ky="0" algn="bl" rotWithShape="0" blurRad="50800" dist="25400" dir="16200000">
-              <a:srgbClr val="00000015">
+            <a:outerShdw sx="100000" sy="100000" kx="0" ky="0" algn="bl" rotWithShape="0" blurRad="38100" dist="12700" dir="16200000">
+              <a:srgbClr val="00000010">
                 <a:alpha val="75000"/>
               </a:srgbClr>
             </a:outerShdw>
@@ -12952,8 +12630,8 @@
         </p:blipFill>
         <p:spPr>
           <a:xfrm>
-            <a:off x="457200" y="1097280"/>
-            <a:ext cx="4389120" cy="3474720"/>
+            <a:off x="457200" y="1005840"/>
+            <a:ext cx="8229600" cy="2103120"/>
           </a:xfrm>
           <a:prstGeom prst="rect">
             <a:avLst/>
@@ -12968,12 +12646,12 @@
         </p:nvSpPr>
         <p:spPr>
           <a:xfrm>
-            <a:off x="5120640" y="1005840"/>
-            <a:ext cx="3657600" cy="3657600"/>
+            <a:off x="365760" y="3337560"/>
+            <a:ext cx="8412480" cy="1417320"/>
           </a:xfrm>
           <a:prstGeom prst="roundRect">
             <a:avLst>
-              <a:gd name="adj" fmla="val 2500"/>
+              <a:gd name="adj" fmla="val 5161"/>
             </a:avLst>
           </a:prstGeom>
           <a:solidFill>
@@ -12981,8 +12659,8 @@
           </a:solidFill>
           <a:ln/>
           <a:effectLst>
-            <a:outerShdw sx="100000" sy="100000" kx="0" ky="0" algn="bl" rotWithShape="0" blurRad="50800" dist="25400" dir="16200000">
-              <a:srgbClr val="00000015">
+            <a:outerShdw sx="100000" sy="100000" kx="0" ky="0" algn="bl" rotWithShape="0" blurRad="38100" dist="12700" dir="16200000">
+              <a:srgbClr val="00000010">
                 <a:alpha val="75000"/>
               </a:srgbClr>
             </a:outerShdw>
@@ -12997,14 +12675,14 @@
         </p:nvSpPr>
         <p:spPr>
           <a:xfrm>
-            <a:off x="5120640" y="1005840"/>
-            <a:ext cx="3657600" cy="457200"/>
-          </a:xfrm>
-          <a:prstGeom prst="rect">
-            <a:avLst/>
-          </a:prstGeom>
-          <a:solidFill>
-            <a:srgbClr val="1E3A5F"/>
+            <a:off x="365760" y="3337560"/>
+            <a:ext cx="54864" cy="1417320"/>
+          </a:xfrm>
+          <a:prstGeom prst="rect">
+            <a:avLst/>
+          </a:prstGeom>
+          <a:solidFill>
+            <a:srgbClr val="C9A227"/>
           </a:solidFill>
           <a:ln/>
         </p:spPr>
@@ -13017,26 +12695,26 @@
         </p:nvSpPr>
         <p:spPr>
           <a:xfrm>
-            <a:off x="5120640" y="1005840"/>
-            <a:ext cx="3657600" cy="457200"/>
-          </a:xfrm>
-          <a:prstGeom prst="rect">
-            <a:avLst/>
-          </a:prstGeom>
-          <a:noFill/>
-          <a:ln/>
-        </p:spPr>
-        <p:txBody>
-          <a:bodyPr wrap="square" rtlCol="0" anchor="ctr"/>
-          <a:lstStyle/>
-          <a:p>
-            <a:pPr algn="ctr" indent="0" marL="0">
-              <a:buNone/>
-            </a:pPr>
-            <a:r>
-              <a:rPr lang="en-US" sz="1400" b="1" dirty="0">
-                <a:solidFill>
-                  <a:srgbClr val="FFFFFF"/>
+            <a:off x="548640" y="3429000"/>
+            <a:ext cx="1828800" cy="320040"/>
+          </a:xfrm>
+          <a:prstGeom prst="rect">
+            <a:avLst/>
+          </a:prstGeom>
+          <a:noFill/>
+          <a:ln/>
+        </p:spPr>
+        <p:txBody>
+          <a:bodyPr wrap="square" rtlCol="0" anchor="ctr"/>
+          <a:lstStyle/>
+          <a:p>
+            <a:pPr indent="0" marL="0">
+              <a:buNone/>
+            </a:pPr>
+            <a:r>
+              <a:rPr lang="en-US" sz="1300" b="1" dirty="0">
+                <a:solidFill>
+                  <a:srgbClr val="1E3A5F"/>
                 </a:solidFill>
                 <a:latin typeface="SimHei" pitchFamily="34" charset="0"/>
                 <a:ea typeface="SimHei" pitchFamily="34" charset="-122"/>
@@ -13044,7 +12722,7 @@
               </a:rPr>
               <a:t>功能说明</a:t>
             </a:r>
-            <a:endParaRPr lang="en-US" sz="1400" dirty="0"/>
+            <a:endParaRPr lang="en-US" sz="1300" dirty="0"/>
           </a:p>
         </p:txBody>
       </p:sp>
@@ -13056,8 +12734,8 @@
         </p:nvSpPr>
         <p:spPr>
           <a:xfrm>
-            <a:off x="5303520" y="1600200"/>
-            <a:ext cx="3291840" cy="731520"/>
+            <a:off x="548640" y="3749040"/>
+            <a:ext cx="8046720" cy="365760"/>
           </a:xfrm>
           <a:prstGeom prst="rect">
             <a:avLst/>
@@ -13070,13 +12748,10 @@
           <a:lstStyle/>
           <a:p>
             <a:pPr indent="0" marL="0">
-              <a:lnSpc>
-                <a:spcPct val="140000"/>
-              </a:lnSpc>
-              <a:buNone/>
-            </a:pPr>
-            <a:r>
-              <a:rPr lang="en-US" sz="1100" dirty="0">
+              <a:buNone/>
+            </a:pPr>
+            <a:r>
+              <a:rPr lang="en-US" sz="1000" dirty="0">
                 <a:solidFill>
                   <a:srgbClr val="2C3E50"/>
                 </a:solidFill>
@@ -13086,56 +12761,36 @@
               </a:rPr>
               <a:t>系统管理功能允许管理员管理轮播图、系统简介等基础信息，配置系统参数，查看操作日志，保障系统安全稳定运行。</a:t>
             </a:r>
-            <a:endParaRPr lang="en-US" sz="1100" dirty="0"/>
-          </a:p>
-        </p:txBody>
-      </p:sp>
-      <p:sp>
-        <p:nvSpPr>
-          <p:cNvPr id="11" name="Shape 8"/>
-          <p:cNvSpPr/>
-          <p:nvPr/>
-        </p:nvSpPr>
-        <p:spPr>
-          <a:xfrm>
-            <a:off x="5303520" y="2331720"/>
-            <a:ext cx="3291840" cy="18288"/>
-          </a:xfrm>
-          <a:prstGeom prst="rect">
-            <a:avLst/>
-          </a:prstGeom>
-          <a:solidFill>
-            <a:srgbClr val="E9ECEF"/>
-          </a:solidFill>
-          <a:ln/>
-        </p:spPr>
-      </p:sp>
-      <p:sp>
-        <p:nvSpPr>
-          <p:cNvPr id="12" name="Text 9"/>
-          <p:cNvSpPr/>
-          <p:nvPr/>
-        </p:nvSpPr>
-        <p:spPr>
-          <a:xfrm>
-            <a:off x="5303520" y="2468880"/>
-            <a:ext cx="3291840" cy="411480"/>
-          </a:xfrm>
-          <a:prstGeom prst="rect">
-            <a:avLst/>
-          </a:prstGeom>
-          <a:noFill/>
-          <a:ln/>
-        </p:spPr>
-        <p:txBody>
-          <a:bodyPr wrap="square" rtlCol="0" anchor="ctr"/>
-          <a:lstStyle/>
-          <a:p>
-            <a:pPr indent="0" marL="0">
-              <a:buNone/>
-            </a:pPr>
-            <a:r>
-              <a:rPr lang="en-US" sz="1000" dirty="0">
+            <a:endParaRPr lang="en-US" sz="1000" dirty="0"/>
+          </a:p>
+        </p:txBody>
+      </p:sp>
+      <p:sp>
+        <p:nvSpPr>
+          <p:cNvPr id="11" name="Text 8"/>
+          <p:cNvSpPr/>
+          <p:nvPr/>
+        </p:nvSpPr>
+        <p:spPr>
+          <a:xfrm>
+            <a:off x="548640" y="4160520"/>
+            <a:ext cx="2011680" cy="274320"/>
+          </a:xfrm>
+          <a:prstGeom prst="rect">
+            <a:avLst/>
+          </a:prstGeom>
+          <a:noFill/>
+          <a:ln/>
+        </p:spPr>
+        <p:txBody>
+          <a:bodyPr wrap="square" rtlCol="0" anchor="ctr"/>
+          <a:lstStyle/>
+          <a:p>
+            <a:pPr indent="0" marL="0">
+              <a:buNone/>
+            </a:pPr>
+            <a:r>
+              <a:rPr lang="en-US" sz="900" dirty="0">
                 <a:solidFill>
                   <a:srgbClr val="2C3E50"/>
                 </a:solidFill>
@@ -13145,36 +12800,36 @@
               </a:rPr>
               <a:t>✓ 轮播图管理</a:t>
             </a:r>
-            <a:endParaRPr lang="en-US" sz="1000" dirty="0"/>
-          </a:p>
-        </p:txBody>
-      </p:sp>
-      <p:sp>
-        <p:nvSpPr>
-          <p:cNvPr id="13" name="Text 10"/>
-          <p:cNvSpPr/>
-          <p:nvPr/>
-        </p:nvSpPr>
-        <p:spPr>
-          <a:xfrm>
-            <a:off x="5303520" y="2926080"/>
-            <a:ext cx="3291840" cy="411480"/>
-          </a:xfrm>
-          <a:prstGeom prst="rect">
-            <a:avLst/>
-          </a:prstGeom>
-          <a:noFill/>
-          <a:ln/>
-        </p:spPr>
-        <p:txBody>
-          <a:bodyPr wrap="square" rtlCol="0" anchor="ctr"/>
-          <a:lstStyle/>
-          <a:p>
-            <a:pPr indent="0" marL="0">
-              <a:buNone/>
-            </a:pPr>
-            <a:r>
-              <a:rPr lang="en-US" sz="1000" dirty="0">
+            <a:endParaRPr lang="en-US" sz="900" dirty="0"/>
+          </a:p>
+        </p:txBody>
+      </p:sp>
+      <p:sp>
+        <p:nvSpPr>
+          <p:cNvPr id="12" name="Text 9"/>
+          <p:cNvSpPr/>
+          <p:nvPr/>
+        </p:nvSpPr>
+        <p:spPr>
+          <a:xfrm>
+            <a:off x="2651760" y="4160520"/>
+            <a:ext cx="2011680" cy="274320"/>
+          </a:xfrm>
+          <a:prstGeom prst="rect">
+            <a:avLst/>
+          </a:prstGeom>
+          <a:noFill/>
+          <a:ln/>
+        </p:spPr>
+        <p:txBody>
+          <a:bodyPr wrap="square" rtlCol="0" anchor="ctr"/>
+          <a:lstStyle/>
+          <a:p>
+            <a:pPr indent="0" marL="0">
+              <a:buNone/>
+            </a:pPr>
+            <a:r>
+              <a:rPr lang="en-US" sz="900" dirty="0">
                 <a:solidFill>
                   <a:srgbClr val="2C3E50"/>
                 </a:solidFill>
@@ -13184,36 +12839,36 @@
               </a:rPr>
               <a:t>✓ 系统简介配置</a:t>
             </a:r>
-            <a:endParaRPr lang="en-US" sz="1000" dirty="0"/>
-          </a:p>
-        </p:txBody>
-      </p:sp>
-      <p:sp>
-        <p:nvSpPr>
-          <p:cNvPr id="14" name="Text 11"/>
-          <p:cNvSpPr/>
-          <p:nvPr/>
-        </p:nvSpPr>
-        <p:spPr>
-          <a:xfrm>
-            <a:off x="5303520" y="3383280"/>
-            <a:ext cx="3291840" cy="411480"/>
-          </a:xfrm>
-          <a:prstGeom prst="rect">
-            <a:avLst/>
-          </a:prstGeom>
-          <a:noFill/>
-          <a:ln/>
-        </p:spPr>
-        <p:txBody>
-          <a:bodyPr wrap="square" rtlCol="0" anchor="ctr"/>
-          <a:lstStyle/>
-          <a:p>
-            <a:pPr indent="0" marL="0">
-              <a:buNone/>
-            </a:pPr>
-            <a:r>
-              <a:rPr lang="en-US" sz="1000" dirty="0">
+            <a:endParaRPr lang="en-US" sz="900" dirty="0"/>
+          </a:p>
+        </p:txBody>
+      </p:sp>
+      <p:sp>
+        <p:nvSpPr>
+          <p:cNvPr id="13" name="Text 10"/>
+          <p:cNvSpPr/>
+          <p:nvPr/>
+        </p:nvSpPr>
+        <p:spPr>
+          <a:xfrm>
+            <a:off x="4754880" y="4160520"/>
+            <a:ext cx="2011680" cy="274320"/>
+          </a:xfrm>
+          <a:prstGeom prst="rect">
+            <a:avLst/>
+          </a:prstGeom>
+          <a:noFill/>
+          <a:ln/>
+        </p:spPr>
+        <p:txBody>
+          <a:bodyPr wrap="square" rtlCol="0" anchor="ctr"/>
+          <a:lstStyle/>
+          <a:p>
+            <a:pPr indent="0" marL="0">
+              <a:buNone/>
+            </a:pPr>
+            <a:r>
+              <a:rPr lang="en-US" sz="900" dirty="0">
                 <a:solidFill>
                   <a:srgbClr val="2C3E50"/>
                 </a:solidFill>
@@ -13223,36 +12878,36 @@
               </a:rPr>
               <a:t>✓ 系统参数设置</a:t>
             </a:r>
-            <a:endParaRPr lang="en-US" sz="1000" dirty="0"/>
-          </a:p>
-        </p:txBody>
-      </p:sp>
-      <p:sp>
-        <p:nvSpPr>
-          <p:cNvPr id="15" name="Text 12"/>
-          <p:cNvSpPr/>
-          <p:nvPr/>
-        </p:nvSpPr>
-        <p:spPr>
-          <a:xfrm>
-            <a:off x="5303520" y="3840480"/>
-            <a:ext cx="3291840" cy="411480"/>
-          </a:xfrm>
-          <a:prstGeom prst="rect">
-            <a:avLst/>
-          </a:prstGeom>
-          <a:noFill/>
-          <a:ln/>
-        </p:spPr>
-        <p:txBody>
-          <a:bodyPr wrap="square" rtlCol="0" anchor="ctr"/>
-          <a:lstStyle/>
-          <a:p>
-            <a:pPr indent="0" marL="0">
-              <a:buNone/>
-            </a:pPr>
-            <a:r>
-              <a:rPr lang="en-US" sz="1000" dirty="0">
+            <a:endParaRPr lang="en-US" sz="900" dirty="0"/>
+          </a:p>
+        </p:txBody>
+      </p:sp>
+      <p:sp>
+        <p:nvSpPr>
+          <p:cNvPr id="14" name="Text 11"/>
+          <p:cNvSpPr/>
+          <p:nvPr/>
+        </p:nvSpPr>
+        <p:spPr>
+          <a:xfrm>
+            <a:off x="6858000" y="4160520"/>
+            <a:ext cx="2011680" cy="274320"/>
+          </a:xfrm>
+          <a:prstGeom prst="rect">
+            <a:avLst/>
+          </a:prstGeom>
+          <a:noFill/>
+          <a:ln/>
+        </p:spPr>
+        <p:txBody>
+          <a:bodyPr wrap="square" rtlCol="0" anchor="ctr"/>
+          <a:lstStyle/>
+          <a:p>
+            <a:pPr indent="0" marL="0">
+              <a:buNone/>
+            </a:pPr>
+            <a:r>
+              <a:rPr lang="en-US" sz="900" dirty="0">
                 <a:solidFill>
                   <a:srgbClr val="2C3E50"/>
                 </a:solidFill>
@@ -13262,7 +12917,7 @@
               </a:rPr>
               <a:t>✓ 操作日志查看</a:t>
             </a:r>
-            <a:endParaRPr lang="en-US" sz="1000" dirty="0"/>
+            <a:endParaRPr lang="en-US" sz="900" dirty="0"/>
           </a:p>
         </p:txBody>
       </p:sp>

--- a/生鲜超市综合管理系统_毕业答辩PPT.pptx
+++ b/生鲜超市综合管理系统_毕业答辩PPT.pptx
@@ -5285,7 +5285,7 @@
         <p:spPr>
           <a:xfrm>
             <a:off x="365760" y="914400"/>
-            <a:ext cx="4114800" cy="3657600"/>
+            <a:ext cx="4389120" cy="3657600"/>
           </a:xfrm>
           <a:prstGeom prst="roundRect">
             <a:avLst>
@@ -5322,7 +5322,7 @@
         <p:spPr>
           <a:xfrm>
             <a:off x="457200" y="1005840"/>
-            <a:ext cx="3931920" cy="3474720"/>
+            <a:ext cx="4206240" cy="3474720"/>
           </a:xfrm>
           <a:prstGeom prst="rect">
             <a:avLst/>
@@ -5337,8 +5337,8 @@
         </p:nvSpPr>
         <p:spPr>
           <a:xfrm>
-            <a:off x="4663440" y="914400"/>
-            <a:ext cx="4114800" cy="3657600"/>
+            <a:off x="4937760" y="914400"/>
+            <a:ext cx="3840480" cy="3657600"/>
           </a:xfrm>
           <a:prstGeom prst="roundRect">
             <a:avLst>
@@ -5366,8 +5366,8 @@
         </p:nvSpPr>
         <p:spPr>
           <a:xfrm>
-            <a:off x="4663440" y="914400"/>
-            <a:ext cx="4114800" cy="457200"/>
+            <a:off x="4937760" y="914400"/>
+            <a:ext cx="3840480" cy="457200"/>
           </a:xfrm>
           <a:prstGeom prst="rect">
             <a:avLst/>
@@ -5386,8 +5386,8 @@
         </p:nvSpPr>
         <p:spPr>
           <a:xfrm>
-            <a:off x="4663440" y="914400"/>
-            <a:ext cx="4114800" cy="457200"/>
+            <a:off x="4937760" y="914400"/>
+            <a:ext cx="3840480" cy="457200"/>
           </a:xfrm>
           <a:prstGeom prst="rect">
             <a:avLst/>
@@ -5425,8 +5425,8 @@
         </p:nvSpPr>
         <p:spPr>
           <a:xfrm>
-            <a:off x="4846320" y="1508760"/>
-            <a:ext cx="3749040" cy="731520"/>
+            <a:off x="5120640" y="1508760"/>
+            <a:ext cx="3474720" cy="731520"/>
           </a:xfrm>
           <a:prstGeom prst="rect">
             <a:avLst/>
@@ -5467,8 +5467,8 @@
         </p:nvSpPr>
         <p:spPr>
           <a:xfrm>
-            <a:off x="4846320" y="2240280"/>
-            <a:ext cx="3749040" cy="18288"/>
+            <a:off x="5120640" y="2240280"/>
+            <a:ext cx="3474720" cy="18288"/>
           </a:xfrm>
           <a:prstGeom prst="rect">
             <a:avLst/>
@@ -5487,8 +5487,8 @@
         </p:nvSpPr>
         <p:spPr>
           <a:xfrm>
-            <a:off x="4846320" y="2377440"/>
-            <a:ext cx="3749040" cy="365760"/>
+            <a:off x="5120640" y="2377440"/>
+            <a:ext cx="3474720" cy="365760"/>
           </a:xfrm>
           <a:prstGeom prst="rect">
             <a:avLst/>
@@ -5526,8 +5526,8 @@
         </p:nvSpPr>
         <p:spPr>
           <a:xfrm>
-            <a:off x="4846320" y="2788920"/>
-            <a:ext cx="3749040" cy="365760"/>
+            <a:off x="5120640" y="2788920"/>
+            <a:ext cx="3474720" cy="365760"/>
           </a:xfrm>
           <a:prstGeom prst="rect">
             <a:avLst/>
@@ -5565,8 +5565,8 @@
         </p:nvSpPr>
         <p:spPr>
           <a:xfrm>
-            <a:off x="4846320" y="3200400"/>
-            <a:ext cx="3749040" cy="365760"/>
+            <a:off x="5120640" y="3200400"/>
+            <a:ext cx="3474720" cy="365760"/>
           </a:xfrm>
           <a:prstGeom prst="rect">
             <a:avLst/>
@@ -5604,8 +5604,8 @@
         </p:nvSpPr>
         <p:spPr>
           <a:xfrm>
-            <a:off x="4846320" y="3611880"/>
-            <a:ext cx="3749040" cy="365760"/>
+            <a:off x="5120640" y="3611880"/>
+            <a:ext cx="3474720" cy="365760"/>
           </a:xfrm>
           <a:prstGeom prst="rect">
             <a:avLst/>
@@ -7609,11 +7609,11 @@
         <p:spPr>
           <a:xfrm>
             <a:off x="365760" y="914400"/>
-            <a:ext cx="8412480" cy="2286000"/>
+            <a:ext cx="4389120" cy="3657600"/>
           </a:xfrm>
           <a:prstGeom prst="roundRect">
             <a:avLst>
-              <a:gd name="adj" fmla="val 3200"/>
+              <a:gd name="adj" fmla="val 2000"/>
             </a:avLst>
           </a:prstGeom>
           <a:solidFill>
@@ -7646,7 +7646,7 @@
         <p:spPr>
           <a:xfrm>
             <a:off x="457200" y="1005840"/>
-            <a:ext cx="8229600" cy="2103120"/>
+            <a:ext cx="4206240" cy="3474720"/>
           </a:xfrm>
           <a:prstGeom prst="rect">
             <a:avLst/>
@@ -7661,12 +7661,12 @@
         </p:nvSpPr>
         <p:spPr>
           <a:xfrm>
-            <a:off x="365760" y="3337560"/>
-            <a:ext cx="8412480" cy="1417320"/>
+            <a:off x="4937760" y="914400"/>
+            <a:ext cx="3840480" cy="3657600"/>
           </a:xfrm>
           <a:prstGeom prst="roundRect">
             <a:avLst>
-              <a:gd name="adj" fmla="val 5161"/>
+              <a:gd name="adj" fmla="val 2000"/>
             </a:avLst>
           </a:prstGeom>
           <a:solidFill>
@@ -7690,14 +7690,14 @@
         </p:nvSpPr>
         <p:spPr>
           <a:xfrm>
-            <a:off x="365760" y="3337560"/>
-            <a:ext cx="54864" cy="1417320"/>
-          </a:xfrm>
-          <a:prstGeom prst="rect">
-            <a:avLst/>
-          </a:prstGeom>
-          <a:solidFill>
-            <a:srgbClr val="C9A227"/>
+            <a:off x="4937760" y="914400"/>
+            <a:ext cx="3840480" cy="457200"/>
+          </a:xfrm>
+          <a:prstGeom prst="rect">
+            <a:avLst/>
+          </a:prstGeom>
+          <a:solidFill>
+            <a:srgbClr val="1E3A5F"/>
           </a:solidFill>
           <a:ln/>
         </p:spPr>
@@ -7710,26 +7710,26 @@
         </p:nvSpPr>
         <p:spPr>
           <a:xfrm>
-            <a:off x="548640" y="3429000"/>
-            <a:ext cx="1828800" cy="320040"/>
-          </a:xfrm>
-          <a:prstGeom prst="rect">
-            <a:avLst/>
-          </a:prstGeom>
-          <a:noFill/>
-          <a:ln/>
-        </p:spPr>
-        <p:txBody>
-          <a:bodyPr wrap="square" rtlCol="0" anchor="ctr"/>
-          <a:lstStyle/>
-          <a:p>
-            <a:pPr indent="0" marL="0">
-              <a:buNone/>
-            </a:pPr>
-            <a:r>
-              <a:rPr lang="en-US" sz="1300" b="1" dirty="0">
-                <a:solidFill>
-                  <a:srgbClr val="1E3A5F"/>
+            <a:off x="4937760" y="914400"/>
+            <a:ext cx="3840480" cy="457200"/>
+          </a:xfrm>
+          <a:prstGeom prst="rect">
+            <a:avLst/>
+          </a:prstGeom>
+          <a:noFill/>
+          <a:ln/>
+        </p:spPr>
+        <p:txBody>
+          <a:bodyPr wrap="square" rtlCol="0" anchor="ctr"/>
+          <a:lstStyle/>
+          <a:p>
+            <a:pPr algn="ctr" indent="0" marL="0">
+              <a:buNone/>
+            </a:pPr>
+            <a:r>
+              <a:rPr lang="en-US" sz="1400" b="1" dirty="0">
+                <a:solidFill>
+                  <a:srgbClr val="FFFFFF"/>
                 </a:solidFill>
                 <a:latin typeface="SimHei" pitchFamily="34" charset="0"/>
                 <a:ea typeface="SimHei" pitchFamily="34" charset="-122"/>
@@ -7737,7 +7737,7 @@
               </a:rPr>
               <a:t>功能说明</a:t>
             </a:r>
-            <a:endParaRPr lang="en-US" sz="1300" dirty="0"/>
+            <a:endParaRPr lang="en-US" sz="1400" dirty="0"/>
           </a:p>
         </p:txBody>
       </p:sp>
@@ -7749,8 +7749,8 @@
         </p:nvSpPr>
         <p:spPr>
           <a:xfrm>
-            <a:off x="548640" y="3749040"/>
-            <a:ext cx="8046720" cy="365760"/>
+            <a:off x="5120640" y="1508760"/>
+            <a:ext cx="3474720" cy="731520"/>
           </a:xfrm>
           <a:prstGeom prst="rect">
             <a:avLst/>
@@ -7763,6 +7763,9 @@
           <a:lstStyle/>
           <a:p>
             <a:pPr indent="0" marL="0">
+              <a:lnSpc>
+                <a:spcPct val="140000"/>
+              </a:lnSpc>
               <a:buNone/>
             </a:pPr>
             <a:r>
@@ -7782,30 +7785,50 @@
       </p:sp>
       <p:sp>
         <p:nvSpPr>
-          <p:cNvPr id="11" name="Text 8"/>
-          <p:cNvSpPr/>
-          <p:nvPr/>
-        </p:nvSpPr>
-        <p:spPr>
-          <a:xfrm>
-            <a:off x="548640" y="4160520"/>
-            <a:ext cx="2011680" cy="274320"/>
-          </a:xfrm>
-          <a:prstGeom prst="rect">
-            <a:avLst/>
-          </a:prstGeom>
-          <a:noFill/>
-          <a:ln/>
-        </p:spPr>
-        <p:txBody>
-          <a:bodyPr wrap="square" rtlCol="0" anchor="ctr"/>
-          <a:lstStyle/>
-          <a:p>
-            <a:pPr indent="0" marL="0">
-              <a:buNone/>
-            </a:pPr>
-            <a:r>
-              <a:rPr lang="en-US" sz="900" dirty="0">
+          <p:cNvPr id="11" name="Shape 8"/>
+          <p:cNvSpPr/>
+          <p:nvPr/>
+        </p:nvSpPr>
+        <p:spPr>
+          <a:xfrm>
+            <a:off x="5120640" y="2240280"/>
+            <a:ext cx="3474720" cy="18288"/>
+          </a:xfrm>
+          <a:prstGeom prst="rect">
+            <a:avLst/>
+          </a:prstGeom>
+          <a:solidFill>
+            <a:srgbClr val="E9ECEF"/>
+          </a:solidFill>
+          <a:ln/>
+        </p:spPr>
+      </p:sp>
+      <p:sp>
+        <p:nvSpPr>
+          <p:cNvPr id="12" name="Text 9"/>
+          <p:cNvSpPr/>
+          <p:nvPr/>
+        </p:nvSpPr>
+        <p:spPr>
+          <a:xfrm>
+            <a:off x="5120640" y="2377440"/>
+            <a:ext cx="3474720" cy="365760"/>
+          </a:xfrm>
+          <a:prstGeom prst="rect">
+            <a:avLst/>
+          </a:prstGeom>
+          <a:noFill/>
+          <a:ln/>
+        </p:spPr>
+        <p:txBody>
+          <a:bodyPr wrap="square" rtlCol="0" anchor="ctr"/>
+          <a:lstStyle/>
+          <a:p>
+            <a:pPr indent="0" marL="0">
+              <a:buNone/>
+            </a:pPr>
+            <a:r>
+              <a:rPr lang="en-US" sz="1000" dirty="0">
                 <a:solidFill>
                   <a:srgbClr val="2C3E50"/>
                 </a:solidFill>
@@ -7815,36 +7838,36 @@
               </a:rPr>
               <a:t>✓ 账号密码登录验证</a:t>
             </a:r>
-            <a:endParaRPr lang="en-US" sz="900" dirty="0"/>
-          </a:p>
-        </p:txBody>
-      </p:sp>
-      <p:sp>
-        <p:nvSpPr>
-          <p:cNvPr id="12" name="Text 9"/>
-          <p:cNvSpPr/>
-          <p:nvPr/>
-        </p:nvSpPr>
-        <p:spPr>
-          <a:xfrm>
-            <a:off x="2651760" y="4160520"/>
-            <a:ext cx="2011680" cy="274320"/>
-          </a:xfrm>
-          <a:prstGeom prst="rect">
-            <a:avLst/>
-          </a:prstGeom>
-          <a:noFill/>
-          <a:ln/>
-        </p:spPr>
-        <p:txBody>
-          <a:bodyPr wrap="square" rtlCol="0" anchor="ctr"/>
-          <a:lstStyle/>
-          <a:p>
-            <a:pPr indent="0" marL="0">
-              <a:buNone/>
-            </a:pPr>
-            <a:r>
-              <a:rPr lang="en-US" sz="900" dirty="0">
+            <a:endParaRPr lang="en-US" sz="1000" dirty="0"/>
+          </a:p>
+        </p:txBody>
+      </p:sp>
+      <p:sp>
+        <p:nvSpPr>
+          <p:cNvPr id="13" name="Text 10"/>
+          <p:cNvSpPr/>
+          <p:nvPr/>
+        </p:nvSpPr>
+        <p:spPr>
+          <a:xfrm>
+            <a:off x="5120640" y="2788920"/>
+            <a:ext cx="3474720" cy="365760"/>
+          </a:xfrm>
+          <a:prstGeom prst="rect">
+            <a:avLst/>
+          </a:prstGeom>
+          <a:noFill/>
+          <a:ln/>
+        </p:spPr>
+        <p:txBody>
+          <a:bodyPr wrap="square" rtlCol="0" anchor="ctr"/>
+          <a:lstStyle/>
+          <a:p>
+            <a:pPr indent="0" marL="0">
+              <a:buNone/>
+            </a:pPr>
+            <a:r>
+              <a:rPr lang="en-US" sz="1000" dirty="0">
                 <a:solidFill>
                   <a:srgbClr val="2C3E50"/>
                 </a:solidFill>
@@ -7854,36 +7877,36 @@
               </a:rPr>
               <a:t>✓ 会话令牌生成</a:t>
             </a:r>
-            <a:endParaRPr lang="en-US" sz="900" dirty="0"/>
-          </a:p>
-        </p:txBody>
-      </p:sp>
-      <p:sp>
-        <p:nvSpPr>
-          <p:cNvPr id="13" name="Text 10"/>
-          <p:cNvSpPr/>
-          <p:nvPr/>
-        </p:nvSpPr>
-        <p:spPr>
-          <a:xfrm>
-            <a:off x="4754880" y="4160520"/>
-            <a:ext cx="2011680" cy="274320"/>
-          </a:xfrm>
-          <a:prstGeom prst="rect">
-            <a:avLst/>
-          </a:prstGeom>
-          <a:noFill/>
-          <a:ln/>
-        </p:spPr>
-        <p:txBody>
-          <a:bodyPr wrap="square" rtlCol="0" anchor="ctr"/>
-          <a:lstStyle/>
-          <a:p>
-            <a:pPr indent="0" marL="0">
-              <a:buNone/>
-            </a:pPr>
-            <a:r>
-              <a:rPr lang="en-US" sz="900" dirty="0">
+            <a:endParaRPr lang="en-US" sz="1000" dirty="0"/>
+          </a:p>
+        </p:txBody>
+      </p:sp>
+      <p:sp>
+        <p:nvSpPr>
+          <p:cNvPr id="14" name="Text 11"/>
+          <p:cNvSpPr/>
+          <p:nvPr/>
+        </p:nvSpPr>
+        <p:spPr>
+          <a:xfrm>
+            <a:off x="5120640" y="3200400"/>
+            <a:ext cx="3474720" cy="365760"/>
+          </a:xfrm>
+          <a:prstGeom prst="rect">
+            <a:avLst/>
+          </a:prstGeom>
+          <a:noFill/>
+          <a:ln/>
+        </p:spPr>
+        <p:txBody>
+          <a:bodyPr wrap="square" rtlCol="0" anchor="ctr"/>
+          <a:lstStyle/>
+          <a:p>
+            <a:pPr indent="0" marL="0">
+              <a:buNone/>
+            </a:pPr>
+            <a:r>
+              <a:rPr lang="en-US" sz="1000" dirty="0">
                 <a:solidFill>
                   <a:srgbClr val="2C3E50"/>
                 </a:solidFill>
@@ -7893,36 +7916,36 @@
               </a:rPr>
               <a:t>✓ 支持用户注册功能</a:t>
             </a:r>
-            <a:endParaRPr lang="en-US" sz="900" dirty="0"/>
-          </a:p>
-        </p:txBody>
-      </p:sp>
-      <p:sp>
-        <p:nvSpPr>
-          <p:cNvPr id="14" name="Text 11"/>
-          <p:cNvSpPr/>
-          <p:nvPr/>
-        </p:nvSpPr>
-        <p:spPr>
-          <a:xfrm>
-            <a:off x="6858000" y="4160520"/>
-            <a:ext cx="2011680" cy="274320"/>
-          </a:xfrm>
-          <a:prstGeom prst="rect">
-            <a:avLst/>
-          </a:prstGeom>
-          <a:noFill/>
-          <a:ln/>
-        </p:spPr>
-        <p:txBody>
-          <a:bodyPr wrap="square" rtlCol="0" anchor="ctr"/>
-          <a:lstStyle/>
-          <a:p>
-            <a:pPr indent="0" marL="0">
-              <a:buNone/>
-            </a:pPr>
-            <a:r>
-              <a:rPr lang="en-US" sz="900" dirty="0">
+            <a:endParaRPr lang="en-US" sz="1000" dirty="0"/>
+          </a:p>
+        </p:txBody>
+      </p:sp>
+      <p:sp>
+        <p:nvSpPr>
+          <p:cNvPr id="15" name="Text 12"/>
+          <p:cNvSpPr/>
+          <p:nvPr/>
+        </p:nvSpPr>
+        <p:spPr>
+          <a:xfrm>
+            <a:off x="5120640" y="3611880"/>
+            <a:ext cx="3474720" cy="365760"/>
+          </a:xfrm>
+          <a:prstGeom prst="rect">
+            <a:avLst/>
+          </a:prstGeom>
+          <a:noFill/>
+          <a:ln/>
+        </p:spPr>
+        <p:txBody>
+          <a:bodyPr wrap="square" rtlCol="0" anchor="ctr"/>
+          <a:lstStyle/>
+          <a:p>
+            <a:pPr indent="0" marL="0">
+              <a:buNone/>
+            </a:pPr>
+            <a:r>
+              <a:rPr lang="en-US" sz="1000" dirty="0">
                 <a:solidFill>
                   <a:srgbClr val="2C3E50"/>
                 </a:solidFill>
@@ -7932,7 +7955,7 @@
               </a:rPr>
               <a:t>✓ 安全身份认证</a:t>
             </a:r>
-            <a:endParaRPr lang="en-US" sz="900" dirty="0"/>
+            <a:endParaRPr lang="en-US" sz="1000" dirty="0"/>
           </a:p>
         </p:txBody>
       </p:sp>
@@ -8056,11 +8079,11 @@
         <p:spPr>
           <a:xfrm>
             <a:off x="365760" y="914400"/>
-            <a:ext cx="8412480" cy="2286000"/>
+            <a:ext cx="3840480" cy="3657600"/>
           </a:xfrm>
           <a:prstGeom prst="roundRect">
             <a:avLst>
-              <a:gd name="adj" fmla="val 3200"/>
+              <a:gd name="adj" fmla="val 2000"/>
             </a:avLst>
           </a:prstGeom>
           <a:solidFill>
@@ -8076,9 +8099,315 @@
           </a:effectLst>
         </p:spPr>
       </p:sp>
+      <p:sp>
+        <p:nvSpPr>
+          <p:cNvPr id="6" name="Shape 4"/>
+          <p:cNvSpPr/>
+          <p:nvPr/>
+        </p:nvSpPr>
+        <p:spPr>
+          <a:xfrm>
+            <a:off x="365760" y="914400"/>
+            <a:ext cx="3840480" cy="457200"/>
+          </a:xfrm>
+          <a:prstGeom prst="rect">
+            <a:avLst/>
+          </a:prstGeom>
+          <a:solidFill>
+            <a:srgbClr val="1E3A5F"/>
+          </a:solidFill>
+          <a:ln/>
+        </p:spPr>
+      </p:sp>
+      <p:sp>
+        <p:nvSpPr>
+          <p:cNvPr id="7" name="Text 5"/>
+          <p:cNvSpPr/>
+          <p:nvPr/>
+        </p:nvSpPr>
+        <p:spPr>
+          <a:xfrm>
+            <a:off x="365760" y="914400"/>
+            <a:ext cx="3840480" cy="457200"/>
+          </a:xfrm>
+          <a:prstGeom prst="rect">
+            <a:avLst/>
+          </a:prstGeom>
+          <a:noFill/>
+          <a:ln/>
+        </p:spPr>
+        <p:txBody>
+          <a:bodyPr wrap="square" rtlCol="0" anchor="ctr"/>
+          <a:lstStyle/>
+          <a:p>
+            <a:pPr algn="ctr" indent="0" marL="0">
+              <a:buNone/>
+            </a:pPr>
+            <a:r>
+              <a:rPr lang="en-US" sz="1400" b="1" dirty="0">
+                <a:solidFill>
+                  <a:srgbClr val="FFFFFF"/>
+                </a:solidFill>
+                <a:latin typeface="SimHei" pitchFamily="34" charset="0"/>
+                <a:ea typeface="SimHei" pitchFamily="34" charset="-122"/>
+                <a:cs typeface="SimHei" pitchFamily="34" charset="-120"/>
+              </a:rPr>
+              <a:t>功能说明</a:t>
+            </a:r>
+            <a:endParaRPr lang="en-US" sz="1400" dirty="0"/>
+          </a:p>
+        </p:txBody>
+      </p:sp>
+      <p:sp>
+        <p:nvSpPr>
+          <p:cNvPr id="8" name="Text 6"/>
+          <p:cNvSpPr/>
+          <p:nvPr/>
+        </p:nvSpPr>
+        <p:spPr>
+          <a:xfrm>
+            <a:off x="548640" y="1508760"/>
+            <a:ext cx="3474720" cy="731520"/>
+          </a:xfrm>
+          <a:prstGeom prst="rect">
+            <a:avLst/>
+          </a:prstGeom>
+          <a:noFill/>
+          <a:ln/>
+        </p:spPr>
+        <p:txBody>
+          <a:bodyPr wrap="square" rtlCol="0" anchor="t"/>
+          <a:lstStyle/>
+          <a:p>
+            <a:pPr indent="0" marL="0">
+              <a:lnSpc>
+                <a:spcPct val="140000"/>
+              </a:lnSpc>
+              <a:buNone/>
+            </a:pPr>
+            <a:r>
+              <a:rPr lang="en-US" sz="1000" dirty="0">
+                <a:solidFill>
+                  <a:srgbClr val="2C3E50"/>
+                </a:solidFill>
+                <a:latin typeface="SimSun" pitchFamily="34" charset="0"/>
+                <a:ea typeface="SimSun" pitchFamily="34" charset="-122"/>
+                <a:cs typeface="SimSun" pitchFamily="34" charset="-120"/>
+              </a:rPr>
+              <a:t>商品购买功能允许用户浏览商品列表，查看商品详情，选择商品加入购物车或直接购买，系统自动跳转至支付页面完成下单流程。</a:t>
+            </a:r>
+            <a:endParaRPr lang="en-US" sz="1000" dirty="0"/>
+          </a:p>
+        </p:txBody>
+      </p:sp>
+      <p:sp>
+        <p:nvSpPr>
+          <p:cNvPr id="9" name="Shape 7"/>
+          <p:cNvSpPr/>
+          <p:nvPr/>
+        </p:nvSpPr>
+        <p:spPr>
+          <a:xfrm>
+            <a:off x="548640" y="2240280"/>
+            <a:ext cx="3474720" cy="18288"/>
+          </a:xfrm>
+          <a:prstGeom prst="rect">
+            <a:avLst/>
+          </a:prstGeom>
+          <a:solidFill>
+            <a:srgbClr val="E9ECEF"/>
+          </a:solidFill>
+          <a:ln/>
+        </p:spPr>
+      </p:sp>
+      <p:sp>
+        <p:nvSpPr>
+          <p:cNvPr id="10" name="Text 8"/>
+          <p:cNvSpPr/>
+          <p:nvPr/>
+        </p:nvSpPr>
+        <p:spPr>
+          <a:xfrm>
+            <a:off x="548640" y="2377440"/>
+            <a:ext cx="3474720" cy="365760"/>
+          </a:xfrm>
+          <a:prstGeom prst="rect">
+            <a:avLst/>
+          </a:prstGeom>
+          <a:noFill/>
+          <a:ln/>
+        </p:spPr>
+        <p:txBody>
+          <a:bodyPr wrap="square" rtlCol="0" anchor="ctr"/>
+          <a:lstStyle/>
+          <a:p>
+            <a:pPr indent="0" marL="0">
+              <a:buNone/>
+            </a:pPr>
+            <a:r>
+              <a:rPr lang="en-US" sz="1000" dirty="0">
+                <a:solidFill>
+                  <a:srgbClr val="2C3E50"/>
+                </a:solidFill>
+                <a:latin typeface="SimSun" pitchFamily="34" charset="0"/>
+                <a:ea typeface="SimSun" pitchFamily="34" charset="-122"/>
+                <a:cs typeface="SimSun" pitchFamily="34" charset="-120"/>
+              </a:rPr>
+              <a:t>✓ 商品列表浏览</a:t>
+            </a:r>
+            <a:endParaRPr lang="en-US" sz="1000" dirty="0"/>
+          </a:p>
+        </p:txBody>
+      </p:sp>
+      <p:sp>
+        <p:nvSpPr>
+          <p:cNvPr id="11" name="Text 9"/>
+          <p:cNvSpPr/>
+          <p:nvPr/>
+        </p:nvSpPr>
+        <p:spPr>
+          <a:xfrm>
+            <a:off x="548640" y="2788920"/>
+            <a:ext cx="3474720" cy="365760"/>
+          </a:xfrm>
+          <a:prstGeom prst="rect">
+            <a:avLst/>
+          </a:prstGeom>
+          <a:noFill/>
+          <a:ln/>
+        </p:spPr>
+        <p:txBody>
+          <a:bodyPr wrap="square" rtlCol="0" anchor="ctr"/>
+          <a:lstStyle/>
+          <a:p>
+            <a:pPr indent="0" marL="0">
+              <a:buNone/>
+            </a:pPr>
+            <a:r>
+              <a:rPr lang="en-US" sz="1000" dirty="0">
+                <a:solidFill>
+                  <a:srgbClr val="2C3E50"/>
+                </a:solidFill>
+                <a:latin typeface="SimSun" pitchFamily="34" charset="0"/>
+                <a:ea typeface="SimSun" pitchFamily="34" charset="-122"/>
+                <a:cs typeface="SimSun" pitchFamily="34" charset="-120"/>
+              </a:rPr>
+              <a:t>✓ 商品详情查看</a:t>
+            </a:r>
+            <a:endParaRPr lang="en-US" sz="1000" dirty="0"/>
+          </a:p>
+        </p:txBody>
+      </p:sp>
+      <p:sp>
+        <p:nvSpPr>
+          <p:cNvPr id="12" name="Text 10"/>
+          <p:cNvSpPr/>
+          <p:nvPr/>
+        </p:nvSpPr>
+        <p:spPr>
+          <a:xfrm>
+            <a:off x="548640" y="3200400"/>
+            <a:ext cx="3474720" cy="365760"/>
+          </a:xfrm>
+          <a:prstGeom prst="rect">
+            <a:avLst/>
+          </a:prstGeom>
+          <a:noFill/>
+          <a:ln/>
+        </p:spPr>
+        <p:txBody>
+          <a:bodyPr wrap="square" rtlCol="0" anchor="ctr"/>
+          <a:lstStyle/>
+          <a:p>
+            <a:pPr indent="0" marL="0">
+              <a:buNone/>
+            </a:pPr>
+            <a:r>
+              <a:rPr lang="en-US" sz="1000" dirty="0">
+                <a:solidFill>
+                  <a:srgbClr val="2C3E50"/>
+                </a:solidFill>
+                <a:latin typeface="SimSun" pitchFamily="34" charset="0"/>
+                <a:ea typeface="SimSun" pitchFamily="34" charset="-122"/>
+                <a:cs typeface="SimSun" pitchFamily="34" charset="-120"/>
+              </a:rPr>
+              <a:t>✓ 购物车管理</a:t>
+            </a:r>
+            <a:endParaRPr lang="en-US" sz="1000" dirty="0"/>
+          </a:p>
+        </p:txBody>
+      </p:sp>
+      <p:sp>
+        <p:nvSpPr>
+          <p:cNvPr id="13" name="Text 11"/>
+          <p:cNvSpPr/>
+          <p:nvPr/>
+        </p:nvSpPr>
+        <p:spPr>
+          <a:xfrm>
+            <a:off x="548640" y="3611880"/>
+            <a:ext cx="3474720" cy="365760"/>
+          </a:xfrm>
+          <a:prstGeom prst="rect">
+            <a:avLst/>
+          </a:prstGeom>
+          <a:noFill/>
+          <a:ln/>
+        </p:spPr>
+        <p:txBody>
+          <a:bodyPr wrap="square" rtlCol="0" anchor="ctr"/>
+          <a:lstStyle/>
+          <a:p>
+            <a:pPr indent="0" marL="0">
+              <a:buNone/>
+            </a:pPr>
+            <a:r>
+              <a:rPr lang="en-US" sz="1000" dirty="0">
+                <a:solidFill>
+                  <a:srgbClr val="2C3E50"/>
+                </a:solidFill>
+                <a:latin typeface="SimSun" pitchFamily="34" charset="0"/>
+                <a:ea typeface="SimSun" pitchFamily="34" charset="-122"/>
+                <a:cs typeface="SimSun" pitchFamily="34" charset="-120"/>
+              </a:rPr>
+              <a:t>✓ 在线支付下单</a:t>
+            </a:r>
+            <a:endParaRPr lang="en-US" sz="1000" dirty="0"/>
+          </a:p>
+        </p:txBody>
+      </p:sp>
+      <p:sp>
+        <p:nvSpPr>
+          <p:cNvPr id="14" name="Shape 12"/>
+          <p:cNvSpPr/>
+          <p:nvPr/>
+        </p:nvSpPr>
+        <p:spPr>
+          <a:xfrm>
+            <a:off x="4389120" y="914400"/>
+            <a:ext cx="4389120" cy="3657600"/>
+          </a:xfrm>
+          <a:prstGeom prst="roundRect">
+            <a:avLst>
+              <a:gd name="adj" fmla="val 2000"/>
+            </a:avLst>
+          </a:prstGeom>
+          <a:solidFill>
+            <a:srgbClr val="FFFFFF"/>
+          </a:solidFill>
+          <a:ln/>
+          <a:effectLst>
+            <a:outerShdw sx="100000" sy="100000" kx="0" ky="0" algn="bl" rotWithShape="0" blurRad="38100" dist="12700" dir="16200000">
+              <a:srgbClr val="00000010">
+                <a:alpha val="75000"/>
+              </a:srgbClr>
+            </a:outerShdw>
+          </a:effectLst>
+        </p:spPr>
+      </p:sp>
       <p:pic>
         <p:nvPicPr>
-          <p:cNvPr id="6" name="Image 0" descr="/workspace/assets/fig5_3_product_purchase.png">    </p:cNvPr>
+          <p:cNvPr id="15" name="Image 0" descr="/workspace/assets/fig5_3_product_purchase.png">    </p:cNvPr>
           <p:cNvPicPr>
             <a:picLocks noChangeAspect="1"/>
           </p:cNvPicPr>
@@ -8092,297 +8421,14 @@
         </p:blipFill>
         <p:spPr>
           <a:xfrm>
-            <a:off x="457200" y="1005840"/>
-            <a:ext cx="8229600" cy="2103120"/>
+            <a:off x="4480560" y="1005840"/>
+            <a:ext cx="4206240" cy="3474720"/>
           </a:xfrm>
           <a:prstGeom prst="rect">
             <a:avLst/>
           </a:prstGeom>
         </p:spPr>
       </p:pic>
-      <p:sp>
-        <p:nvSpPr>
-          <p:cNvPr id="7" name="Shape 4"/>
-          <p:cNvSpPr/>
-          <p:nvPr/>
-        </p:nvSpPr>
-        <p:spPr>
-          <a:xfrm>
-            <a:off x="365760" y="3337560"/>
-            <a:ext cx="8412480" cy="1417320"/>
-          </a:xfrm>
-          <a:prstGeom prst="roundRect">
-            <a:avLst>
-              <a:gd name="adj" fmla="val 5161"/>
-            </a:avLst>
-          </a:prstGeom>
-          <a:solidFill>
-            <a:srgbClr val="FFFFFF"/>
-          </a:solidFill>
-          <a:ln/>
-          <a:effectLst>
-            <a:outerShdw sx="100000" sy="100000" kx="0" ky="0" algn="bl" rotWithShape="0" blurRad="38100" dist="12700" dir="16200000">
-              <a:srgbClr val="00000010">
-                <a:alpha val="75000"/>
-              </a:srgbClr>
-            </a:outerShdw>
-          </a:effectLst>
-        </p:spPr>
-      </p:sp>
-      <p:sp>
-        <p:nvSpPr>
-          <p:cNvPr id="8" name="Shape 5"/>
-          <p:cNvSpPr/>
-          <p:nvPr/>
-        </p:nvSpPr>
-        <p:spPr>
-          <a:xfrm>
-            <a:off x="365760" y="3337560"/>
-            <a:ext cx="54864" cy="1417320"/>
-          </a:xfrm>
-          <a:prstGeom prst="rect">
-            <a:avLst/>
-          </a:prstGeom>
-          <a:solidFill>
-            <a:srgbClr val="C9A227"/>
-          </a:solidFill>
-          <a:ln/>
-        </p:spPr>
-      </p:sp>
-      <p:sp>
-        <p:nvSpPr>
-          <p:cNvPr id="9" name="Text 6"/>
-          <p:cNvSpPr/>
-          <p:nvPr/>
-        </p:nvSpPr>
-        <p:spPr>
-          <a:xfrm>
-            <a:off x="548640" y="3429000"/>
-            <a:ext cx="1828800" cy="320040"/>
-          </a:xfrm>
-          <a:prstGeom prst="rect">
-            <a:avLst/>
-          </a:prstGeom>
-          <a:noFill/>
-          <a:ln/>
-        </p:spPr>
-        <p:txBody>
-          <a:bodyPr wrap="square" rtlCol="0" anchor="ctr"/>
-          <a:lstStyle/>
-          <a:p>
-            <a:pPr indent="0" marL="0">
-              <a:buNone/>
-            </a:pPr>
-            <a:r>
-              <a:rPr lang="en-US" sz="1300" b="1" dirty="0">
-                <a:solidFill>
-                  <a:srgbClr val="1E3A5F"/>
-                </a:solidFill>
-                <a:latin typeface="SimHei" pitchFamily="34" charset="0"/>
-                <a:ea typeface="SimHei" pitchFamily="34" charset="-122"/>
-                <a:cs typeface="SimHei" pitchFamily="34" charset="-120"/>
-              </a:rPr>
-              <a:t>功能说明</a:t>
-            </a:r>
-            <a:endParaRPr lang="en-US" sz="1300" dirty="0"/>
-          </a:p>
-        </p:txBody>
-      </p:sp>
-      <p:sp>
-        <p:nvSpPr>
-          <p:cNvPr id="10" name="Text 7"/>
-          <p:cNvSpPr/>
-          <p:nvPr/>
-        </p:nvSpPr>
-        <p:spPr>
-          <a:xfrm>
-            <a:off x="548640" y="3749040"/>
-            <a:ext cx="8046720" cy="365760"/>
-          </a:xfrm>
-          <a:prstGeom prst="rect">
-            <a:avLst/>
-          </a:prstGeom>
-          <a:noFill/>
-          <a:ln/>
-        </p:spPr>
-        <p:txBody>
-          <a:bodyPr wrap="square" rtlCol="0" anchor="t"/>
-          <a:lstStyle/>
-          <a:p>
-            <a:pPr indent="0" marL="0">
-              <a:buNone/>
-            </a:pPr>
-            <a:r>
-              <a:rPr lang="en-US" sz="1000" dirty="0">
-                <a:solidFill>
-                  <a:srgbClr val="2C3E50"/>
-                </a:solidFill>
-                <a:latin typeface="SimSun" pitchFamily="34" charset="0"/>
-                <a:ea typeface="SimSun" pitchFamily="34" charset="-122"/>
-                <a:cs typeface="SimSun" pitchFamily="34" charset="-120"/>
-              </a:rPr>
-              <a:t>商品购买功能允许用户浏览商品列表，查看商品详情，选择商品加入购物车或直接购买，系统自动跳转至支付页面完成下单流程。</a:t>
-            </a:r>
-            <a:endParaRPr lang="en-US" sz="1000" dirty="0"/>
-          </a:p>
-        </p:txBody>
-      </p:sp>
-      <p:sp>
-        <p:nvSpPr>
-          <p:cNvPr id="11" name="Text 8"/>
-          <p:cNvSpPr/>
-          <p:nvPr/>
-        </p:nvSpPr>
-        <p:spPr>
-          <a:xfrm>
-            <a:off x="548640" y="4160520"/>
-            <a:ext cx="2011680" cy="274320"/>
-          </a:xfrm>
-          <a:prstGeom prst="rect">
-            <a:avLst/>
-          </a:prstGeom>
-          <a:noFill/>
-          <a:ln/>
-        </p:spPr>
-        <p:txBody>
-          <a:bodyPr wrap="square" rtlCol="0" anchor="ctr"/>
-          <a:lstStyle/>
-          <a:p>
-            <a:pPr indent="0" marL="0">
-              <a:buNone/>
-            </a:pPr>
-            <a:r>
-              <a:rPr lang="en-US" sz="900" dirty="0">
-                <a:solidFill>
-                  <a:srgbClr val="2C3E50"/>
-                </a:solidFill>
-                <a:latin typeface="SimSun" pitchFamily="34" charset="0"/>
-                <a:ea typeface="SimSun" pitchFamily="34" charset="-122"/>
-                <a:cs typeface="SimSun" pitchFamily="34" charset="-120"/>
-              </a:rPr>
-              <a:t>✓ 商品列表浏览</a:t>
-            </a:r>
-            <a:endParaRPr lang="en-US" sz="900" dirty="0"/>
-          </a:p>
-        </p:txBody>
-      </p:sp>
-      <p:sp>
-        <p:nvSpPr>
-          <p:cNvPr id="12" name="Text 9"/>
-          <p:cNvSpPr/>
-          <p:nvPr/>
-        </p:nvSpPr>
-        <p:spPr>
-          <a:xfrm>
-            <a:off x="2651760" y="4160520"/>
-            <a:ext cx="2011680" cy="274320"/>
-          </a:xfrm>
-          <a:prstGeom prst="rect">
-            <a:avLst/>
-          </a:prstGeom>
-          <a:noFill/>
-          <a:ln/>
-        </p:spPr>
-        <p:txBody>
-          <a:bodyPr wrap="square" rtlCol="0" anchor="ctr"/>
-          <a:lstStyle/>
-          <a:p>
-            <a:pPr indent="0" marL="0">
-              <a:buNone/>
-            </a:pPr>
-            <a:r>
-              <a:rPr lang="en-US" sz="900" dirty="0">
-                <a:solidFill>
-                  <a:srgbClr val="2C3E50"/>
-                </a:solidFill>
-                <a:latin typeface="SimSun" pitchFamily="34" charset="0"/>
-                <a:ea typeface="SimSun" pitchFamily="34" charset="-122"/>
-                <a:cs typeface="SimSun" pitchFamily="34" charset="-120"/>
-              </a:rPr>
-              <a:t>✓ 商品详情查看</a:t>
-            </a:r>
-            <a:endParaRPr lang="en-US" sz="900" dirty="0"/>
-          </a:p>
-        </p:txBody>
-      </p:sp>
-      <p:sp>
-        <p:nvSpPr>
-          <p:cNvPr id="13" name="Text 10"/>
-          <p:cNvSpPr/>
-          <p:nvPr/>
-        </p:nvSpPr>
-        <p:spPr>
-          <a:xfrm>
-            <a:off x="4754880" y="4160520"/>
-            <a:ext cx="2011680" cy="274320"/>
-          </a:xfrm>
-          <a:prstGeom prst="rect">
-            <a:avLst/>
-          </a:prstGeom>
-          <a:noFill/>
-          <a:ln/>
-        </p:spPr>
-        <p:txBody>
-          <a:bodyPr wrap="square" rtlCol="0" anchor="ctr"/>
-          <a:lstStyle/>
-          <a:p>
-            <a:pPr indent="0" marL="0">
-              <a:buNone/>
-            </a:pPr>
-            <a:r>
-              <a:rPr lang="en-US" sz="900" dirty="0">
-                <a:solidFill>
-                  <a:srgbClr val="2C3E50"/>
-                </a:solidFill>
-                <a:latin typeface="SimSun" pitchFamily="34" charset="0"/>
-                <a:ea typeface="SimSun" pitchFamily="34" charset="-122"/>
-                <a:cs typeface="SimSun" pitchFamily="34" charset="-120"/>
-              </a:rPr>
-              <a:t>✓ 购物车管理</a:t>
-            </a:r>
-            <a:endParaRPr lang="en-US" sz="900" dirty="0"/>
-          </a:p>
-        </p:txBody>
-      </p:sp>
-      <p:sp>
-        <p:nvSpPr>
-          <p:cNvPr id="14" name="Text 11"/>
-          <p:cNvSpPr/>
-          <p:nvPr/>
-        </p:nvSpPr>
-        <p:spPr>
-          <a:xfrm>
-            <a:off x="6858000" y="4160520"/>
-            <a:ext cx="2011680" cy="274320"/>
-          </a:xfrm>
-          <a:prstGeom prst="rect">
-            <a:avLst/>
-          </a:prstGeom>
-          <a:noFill/>
-          <a:ln/>
-        </p:spPr>
-        <p:txBody>
-          <a:bodyPr wrap="square" rtlCol="0" anchor="ctr"/>
-          <a:lstStyle/>
-          <a:p>
-            <a:pPr indent="0" marL="0">
-              <a:buNone/>
-            </a:pPr>
-            <a:r>
-              <a:rPr lang="en-US" sz="900" dirty="0">
-                <a:solidFill>
-                  <a:srgbClr val="2C3E50"/>
-                </a:solidFill>
-                <a:latin typeface="SimSun" pitchFamily="34" charset="0"/>
-                <a:ea typeface="SimSun" pitchFamily="34" charset="-122"/>
-                <a:cs typeface="SimSun" pitchFamily="34" charset="-120"/>
-              </a:rPr>
-              <a:t>✓ 在线支付下单</a:t>
-            </a:r>
-            <a:endParaRPr lang="en-US" sz="900" dirty="0"/>
-          </a:p>
-        </p:txBody>
-      </p:sp>
     </p:spTree>
   </p:cSld>
   <p:clrMapOvr>
@@ -9465,11 +9511,11 @@
         <p:spPr>
           <a:xfrm>
             <a:off x="365760" y="914400"/>
-            <a:ext cx="8412480" cy="2286000"/>
+            <a:ext cx="4389120" cy="3657600"/>
           </a:xfrm>
           <a:prstGeom prst="roundRect">
             <a:avLst>
-              <a:gd name="adj" fmla="val 3200"/>
+              <a:gd name="adj" fmla="val 2000"/>
             </a:avLst>
           </a:prstGeom>
           <a:solidFill>
@@ -9502,7 +9548,7 @@
         <p:spPr>
           <a:xfrm>
             <a:off x="457200" y="1005840"/>
-            <a:ext cx="8229600" cy="2103120"/>
+            <a:ext cx="4206240" cy="3474720"/>
           </a:xfrm>
           <a:prstGeom prst="rect">
             <a:avLst/>
@@ -9517,12 +9563,12 @@
         </p:nvSpPr>
         <p:spPr>
           <a:xfrm>
-            <a:off x="365760" y="3337560"/>
-            <a:ext cx="8412480" cy="1417320"/>
+            <a:off x="4937760" y="914400"/>
+            <a:ext cx="3840480" cy="3657600"/>
           </a:xfrm>
           <a:prstGeom prst="roundRect">
             <a:avLst>
-              <a:gd name="adj" fmla="val 5161"/>
+              <a:gd name="adj" fmla="val 2000"/>
             </a:avLst>
           </a:prstGeom>
           <a:solidFill>
@@ -9546,14 +9592,14 @@
         </p:nvSpPr>
         <p:spPr>
           <a:xfrm>
-            <a:off x="365760" y="3337560"/>
-            <a:ext cx="54864" cy="1417320"/>
-          </a:xfrm>
-          <a:prstGeom prst="rect">
-            <a:avLst/>
-          </a:prstGeom>
-          <a:solidFill>
-            <a:srgbClr val="C9A227"/>
+            <a:off x="4937760" y="914400"/>
+            <a:ext cx="3840480" cy="457200"/>
+          </a:xfrm>
+          <a:prstGeom prst="rect">
+            <a:avLst/>
+          </a:prstGeom>
+          <a:solidFill>
+            <a:srgbClr val="1E3A5F"/>
           </a:solidFill>
           <a:ln/>
         </p:spPr>
@@ -9566,26 +9612,26 @@
         </p:nvSpPr>
         <p:spPr>
           <a:xfrm>
-            <a:off x="548640" y="3429000"/>
-            <a:ext cx="1828800" cy="320040"/>
-          </a:xfrm>
-          <a:prstGeom prst="rect">
-            <a:avLst/>
-          </a:prstGeom>
-          <a:noFill/>
-          <a:ln/>
-        </p:spPr>
-        <p:txBody>
-          <a:bodyPr wrap="square" rtlCol="0" anchor="ctr"/>
-          <a:lstStyle/>
-          <a:p>
-            <a:pPr indent="0" marL="0">
-              <a:buNone/>
-            </a:pPr>
-            <a:r>
-              <a:rPr lang="en-US" sz="1300" b="1" dirty="0">
-                <a:solidFill>
-                  <a:srgbClr val="1E3A5F"/>
+            <a:off x="4937760" y="914400"/>
+            <a:ext cx="3840480" cy="457200"/>
+          </a:xfrm>
+          <a:prstGeom prst="rect">
+            <a:avLst/>
+          </a:prstGeom>
+          <a:noFill/>
+          <a:ln/>
+        </p:spPr>
+        <p:txBody>
+          <a:bodyPr wrap="square" rtlCol="0" anchor="ctr"/>
+          <a:lstStyle/>
+          <a:p>
+            <a:pPr algn="ctr" indent="0" marL="0">
+              <a:buNone/>
+            </a:pPr>
+            <a:r>
+              <a:rPr lang="en-US" sz="1400" b="1" dirty="0">
+                <a:solidFill>
+                  <a:srgbClr val="FFFFFF"/>
                 </a:solidFill>
                 <a:latin typeface="SimHei" pitchFamily="34" charset="0"/>
                 <a:ea typeface="SimHei" pitchFamily="34" charset="-122"/>
@@ -9593,7 +9639,7 @@
               </a:rPr>
               <a:t>功能说明</a:t>
             </a:r>
-            <a:endParaRPr lang="en-US" sz="1300" dirty="0"/>
+            <a:endParaRPr lang="en-US" sz="1400" dirty="0"/>
           </a:p>
         </p:txBody>
       </p:sp>
@@ -9605,8 +9651,8 @@
         </p:nvSpPr>
         <p:spPr>
           <a:xfrm>
-            <a:off x="548640" y="3749040"/>
-            <a:ext cx="8046720" cy="365760"/>
+            <a:off x="5120640" y="1508760"/>
+            <a:ext cx="3474720" cy="731520"/>
           </a:xfrm>
           <a:prstGeom prst="rect">
             <a:avLst/>
@@ -9619,6 +9665,9 @@
           <a:lstStyle/>
           <a:p>
             <a:pPr indent="0" marL="0">
+              <a:lnSpc>
+                <a:spcPct val="140000"/>
+              </a:lnSpc>
               <a:buNone/>
             </a:pPr>
             <a:r>
@@ -9638,30 +9687,50 @@
       </p:sp>
       <p:sp>
         <p:nvSpPr>
-          <p:cNvPr id="11" name="Text 8"/>
-          <p:cNvSpPr/>
-          <p:nvPr/>
-        </p:nvSpPr>
-        <p:spPr>
-          <a:xfrm>
-            <a:off x="548640" y="4160520"/>
-            <a:ext cx="2011680" cy="274320"/>
-          </a:xfrm>
-          <a:prstGeom prst="rect">
-            <a:avLst/>
-          </a:prstGeom>
-          <a:noFill/>
-          <a:ln/>
-        </p:spPr>
-        <p:txBody>
-          <a:bodyPr wrap="square" rtlCol="0" anchor="ctr"/>
-          <a:lstStyle/>
-          <a:p>
-            <a:pPr indent="0" marL="0">
-              <a:buNone/>
-            </a:pPr>
-            <a:r>
-              <a:rPr lang="en-US" sz="900" dirty="0">
+          <p:cNvPr id="11" name="Shape 8"/>
+          <p:cNvSpPr/>
+          <p:nvPr/>
+        </p:nvSpPr>
+        <p:spPr>
+          <a:xfrm>
+            <a:off x="5120640" y="2240280"/>
+            <a:ext cx="3474720" cy="18288"/>
+          </a:xfrm>
+          <a:prstGeom prst="rect">
+            <a:avLst/>
+          </a:prstGeom>
+          <a:solidFill>
+            <a:srgbClr val="E9ECEF"/>
+          </a:solidFill>
+          <a:ln/>
+        </p:spPr>
+      </p:sp>
+      <p:sp>
+        <p:nvSpPr>
+          <p:cNvPr id="12" name="Text 9"/>
+          <p:cNvSpPr/>
+          <p:nvPr/>
+        </p:nvSpPr>
+        <p:spPr>
+          <a:xfrm>
+            <a:off x="5120640" y="2377440"/>
+            <a:ext cx="3474720" cy="365760"/>
+          </a:xfrm>
+          <a:prstGeom prst="rect">
+            <a:avLst/>
+          </a:prstGeom>
+          <a:noFill/>
+          <a:ln/>
+        </p:spPr>
+        <p:txBody>
+          <a:bodyPr wrap="square" rtlCol="0" anchor="ctr"/>
+          <a:lstStyle/>
+          <a:p>
+            <a:pPr indent="0" marL="0">
+              <a:buNone/>
+            </a:pPr>
+            <a:r>
+              <a:rPr lang="en-US" sz="1000" dirty="0">
                 <a:solidFill>
                   <a:srgbClr val="2C3E50"/>
                 </a:solidFill>
@@ -9671,36 +9740,36 @@
               </a:rPr>
               <a:t>✓ 优惠券列表展示</a:t>
             </a:r>
-            <a:endParaRPr lang="en-US" sz="900" dirty="0"/>
-          </a:p>
-        </p:txBody>
-      </p:sp>
-      <p:sp>
-        <p:nvSpPr>
-          <p:cNvPr id="12" name="Text 9"/>
-          <p:cNvSpPr/>
-          <p:nvPr/>
-        </p:nvSpPr>
-        <p:spPr>
-          <a:xfrm>
-            <a:off x="2651760" y="4160520"/>
-            <a:ext cx="2011680" cy="274320"/>
-          </a:xfrm>
-          <a:prstGeom prst="rect">
-            <a:avLst/>
-          </a:prstGeom>
-          <a:noFill/>
-          <a:ln/>
-        </p:spPr>
-        <p:txBody>
-          <a:bodyPr wrap="square" rtlCol="0" anchor="ctr"/>
-          <a:lstStyle/>
-          <a:p>
-            <a:pPr indent="0" marL="0">
-              <a:buNone/>
-            </a:pPr>
-            <a:r>
-              <a:rPr lang="en-US" sz="900" dirty="0">
+            <a:endParaRPr lang="en-US" sz="1000" dirty="0"/>
+          </a:p>
+        </p:txBody>
+      </p:sp>
+      <p:sp>
+        <p:nvSpPr>
+          <p:cNvPr id="13" name="Text 10"/>
+          <p:cNvSpPr/>
+          <p:nvPr/>
+        </p:nvSpPr>
+        <p:spPr>
+          <a:xfrm>
+            <a:off x="5120640" y="2788920"/>
+            <a:ext cx="3474720" cy="365760"/>
+          </a:xfrm>
+          <a:prstGeom prst="rect">
+            <a:avLst/>
+          </a:prstGeom>
+          <a:noFill/>
+          <a:ln/>
+        </p:spPr>
+        <p:txBody>
+          <a:bodyPr wrap="square" rtlCol="0" anchor="ctr"/>
+          <a:lstStyle/>
+          <a:p>
+            <a:pPr indent="0" marL="0">
+              <a:buNone/>
+            </a:pPr>
+            <a:r>
+              <a:rPr lang="en-US" sz="1000" dirty="0">
                 <a:solidFill>
                   <a:srgbClr val="2C3E50"/>
                 </a:solidFill>
@@ -9710,36 +9779,36 @@
               </a:rPr>
               <a:t>✓ 积分兑换功能</a:t>
             </a:r>
-            <a:endParaRPr lang="en-US" sz="900" dirty="0"/>
-          </a:p>
-        </p:txBody>
-      </p:sp>
-      <p:sp>
-        <p:nvSpPr>
-          <p:cNvPr id="13" name="Text 10"/>
-          <p:cNvSpPr/>
-          <p:nvPr/>
-        </p:nvSpPr>
-        <p:spPr>
-          <a:xfrm>
-            <a:off x="4754880" y="4160520"/>
-            <a:ext cx="2011680" cy="274320"/>
-          </a:xfrm>
-          <a:prstGeom prst="rect">
-            <a:avLst/>
-          </a:prstGeom>
-          <a:noFill/>
-          <a:ln/>
-        </p:spPr>
-        <p:txBody>
-          <a:bodyPr wrap="square" rtlCol="0" anchor="ctr"/>
-          <a:lstStyle/>
-          <a:p>
-            <a:pPr indent="0" marL="0">
-              <a:buNone/>
-            </a:pPr>
-            <a:r>
-              <a:rPr lang="en-US" sz="900" dirty="0">
+            <a:endParaRPr lang="en-US" sz="1000" dirty="0"/>
+          </a:p>
+        </p:txBody>
+      </p:sp>
+      <p:sp>
+        <p:nvSpPr>
+          <p:cNvPr id="14" name="Text 11"/>
+          <p:cNvSpPr/>
+          <p:nvPr/>
+        </p:nvSpPr>
+        <p:spPr>
+          <a:xfrm>
+            <a:off x="5120640" y="3200400"/>
+            <a:ext cx="3474720" cy="365760"/>
+          </a:xfrm>
+          <a:prstGeom prst="rect">
+            <a:avLst/>
+          </a:prstGeom>
+          <a:noFill/>
+          <a:ln/>
+        </p:spPr>
+        <p:txBody>
+          <a:bodyPr wrap="square" rtlCol="0" anchor="ctr"/>
+          <a:lstStyle/>
+          <a:p>
+            <a:pPr indent="0" marL="0">
+              <a:buNone/>
+            </a:pPr>
+            <a:r>
+              <a:rPr lang="en-US" sz="1000" dirty="0">
                 <a:solidFill>
                   <a:srgbClr val="2C3E50"/>
                 </a:solidFill>
@@ -9749,36 +9818,36 @@
               </a:rPr>
               <a:t>✓ 优惠券领取</a:t>
             </a:r>
-            <a:endParaRPr lang="en-US" sz="900" dirty="0"/>
-          </a:p>
-        </p:txBody>
-      </p:sp>
-      <p:sp>
-        <p:nvSpPr>
-          <p:cNvPr id="14" name="Text 11"/>
-          <p:cNvSpPr/>
-          <p:nvPr/>
-        </p:nvSpPr>
-        <p:spPr>
-          <a:xfrm>
-            <a:off x="6858000" y="4160520"/>
-            <a:ext cx="2011680" cy="274320"/>
-          </a:xfrm>
-          <a:prstGeom prst="rect">
-            <a:avLst/>
-          </a:prstGeom>
-          <a:noFill/>
-          <a:ln/>
-        </p:spPr>
-        <p:txBody>
-          <a:bodyPr wrap="square" rtlCol="0" anchor="ctr"/>
-          <a:lstStyle/>
-          <a:p>
-            <a:pPr indent="0" marL="0">
-              <a:buNone/>
-            </a:pPr>
-            <a:r>
-              <a:rPr lang="en-US" sz="900" dirty="0">
+            <a:endParaRPr lang="en-US" sz="1000" dirty="0"/>
+          </a:p>
+        </p:txBody>
+      </p:sp>
+      <p:sp>
+        <p:nvSpPr>
+          <p:cNvPr id="15" name="Text 12"/>
+          <p:cNvSpPr/>
+          <p:nvPr/>
+        </p:nvSpPr>
+        <p:spPr>
+          <a:xfrm>
+            <a:off x="5120640" y="3611880"/>
+            <a:ext cx="3474720" cy="365760"/>
+          </a:xfrm>
+          <a:prstGeom prst="rect">
+            <a:avLst/>
+          </a:prstGeom>
+          <a:noFill/>
+          <a:ln/>
+        </p:spPr>
+        <p:txBody>
+          <a:bodyPr wrap="square" rtlCol="0" anchor="ctr"/>
+          <a:lstStyle/>
+          <a:p>
+            <a:pPr indent="0" marL="0">
+              <a:buNone/>
+            </a:pPr>
+            <a:r>
+              <a:rPr lang="en-US" sz="1000" dirty="0">
                 <a:solidFill>
                   <a:srgbClr val="2C3E50"/>
                 </a:solidFill>
@@ -9788,7 +9857,7 @@
               </a:rPr>
               <a:t>✓ 购物抵扣使用</a:t>
             </a:r>
-            <a:endParaRPr lang="en-US" sz="900" dirty="0"/>
+            <a:endParaRPr lang="en-US" sz="1000" dirty="0"/>
           </a:p>
         </p:txBody>
       </p:sp>
@@ -9912,11 +9981,11 @@
         <p:spPr>
           <a:xfrm>
             <a:off x="365760" y="914400"/>
-            <a:ext cx="8412480" cy="2286000"/>
+            <a:ext cx="3840480" cy="3657600"/>
           </a:xfrm>
           <a:prstGeom prst="roundRect">
             <a:avLst>
-              <a:gd name="adj" fmla="val 3200"/>
+              <a:gd name="adj" fmla="val 2000"/>
             </a:avLst>
           </a:prstGeom>
           <a:solidFill>
@@ -9932,9 +10001,315 @@
           </a:effectLst>
         </p:spPr>
       </p:sp>
+      <p:sp>
+        <p:nvSpPr>
+          <p:cNvPr id="6" name="Shape 4"/>
+          <p:cNvSpPr/>
+          <p:nvPr/>
+        </p:nvSpPr>
+        <p:spPr>
+          <a:xfrm>
+            <a:off x="365760" y="914400"/>
+            <a:ext cx="3840480" cy="457200"/>
+          </a:xfrm>
+          <a:prstGeom prst="rect">
+            <a:avLst/>
+          </a:prstGeom>
+          <a:solidFill>
+            <a:srgbClr val="1E3A5F"/>
+          </a:solidFill>
+          <a:ln/>
+        </p:spPr>
+      </p:sp>
+      <p:sp>
+        <p:nvSpPr>
+          <p:cNvPr id="7" name="Text 5"/>
+          <p:cNvSpPr/>
+          <p:nvPr/>
+        </p:nvSpPr>
+        <p:spPr>
+          <a:xfrm>
+            <a:off x="365760" y="914400"/>
+            <a:ext cx="3840480" cy="457200"/>
+          </a:xfrm>
+          <a:prstGeom prst="rect">
+            <a:avLst/>
+          </a:prstGeom>
+          <a:noFill/>
+          <a:ln/>
+        </p:spPr>
+        <p:txBody>
+          <a:bodyPr wrap="square" rtlCol="0" anchor="ctr"/>
+          <a:lstStyle/>
+          <a:p>
+            <a:pPr algn="ctr" indent="0" marL="0">
+              <a:buNone/>
+            </a:pPr>
+            <a:r>
+              <a:rPr lang="en-US" sz="1400" b="1" dirty="0">
+                <a:solidFill>
+                  <a:srgbClr val="FFFFFF"/>
+                </a:solidFill>
+                <a:latin typeface="SimHei" pitchFamily="34" charset="0"/>
+                <a:ea typeface="SimHei" pitchFamily="34" charset="-122"/>
+                <a:cs typeface="SimHei" pitchFamily="34" charset="-120"/>
+              </a:rPr>
+              <a:t>功能说明</a:t>
+            </a:r>
+            <a:endParaRPr lang="en-US" sz="1400" dirty="0"/>
+          </a:p>
+        </p:txBody>
+      </p:sp>
+      <p:sp>
+        <p:nvSpPr>
+          <p:cNvPr id="8" name="Text 6"/>
+          <p:cNvSpPr/>
+          <p:nvPr/>
+        </p:nvSpPr>
+        <p:spPr>
+          <a:xfrm>
+            <a:off x="548640" y="1508760"/>
+            <a:ext cx="3474720" cy="731520"/>
+          </a:xfrm>
+          <a:prstGeom prst="rect">
+            <a:avLst/>
+          </a:prstGeom>
+          <a:noFill/>
+          <a:ln/>
+        </p:spPr>
+        <p:txBody>
+          <a:bodyPr wrap="square" rtlCol="0" anchor="t"/>
+          <a:lstStyle/>
+          <a:p>
+            <a:pPr indent="0" marL="0">
+              <a:lnSpc>
+                <a:spcPct val="140000"/>
+              </a:lnSpc>
+              <a:buNone/>
+            </a:pPr>
+            <a:r>
+              <a:rPr lang="en-US" sz="1000" dirty="0">
+                <a:solidFill>
+                  <a:srgbClr val="2C3E50"/>
+                </a:solidFill>
+                <a:latin typeface="SimSun" pitchFamily="34" charset="0"/>
+                <a:ea typeface="SimSun" pitchFamily="34" charset="-122"/>
+                <a:cs typeface="SimSun" pitchFamily="34" charset="-120"/>
+              </a:rPr>
+              <a:t>个人中心功能允许用户管理个人信息、修改密码、查看订单记录、管理收货地址、查看积分余额等，实现个性化账户管理。</a:t>
+            </a:r>
+            <a:endParaRPr lang="en-US" sz="1000" dirty="0"/>
+          </a:p>
+        </p:txBody>
+      </p:sp>
+      <p:sp>
+        <p:nvSpPr>
+          <p:cNvPr id="9" name="Shape 7"/>
+          <p:cNvSpPr/>
+          <p:nvPr/>
+        </p:nvSpPr>
+        <p:spPr>
+          <a:xfrm>
+            <a:off x="548640" y="2240280"/>
+            <a:ext cx="3474720" cy="18288"/>
+          </a:xfrm>
+          <a:prstGeom prst="rect">
+            <a:avLst/>
+          </a:prstGeom>
+          <a:solidFill>
+            <a:srgbClr val="E9ECEF"/>
+          </a:solidFill>
+          <a:ln/>
+        </p:spPr>
+      </p:sp>
+      <p:sp>
+        <p:nvSpPr>
+          <p:cNvPr id="10" name="Text 8"/>
+          <p:cNvSpPr/>
+          <p:nvPr/>
+        </p:nvSpPr>
+        <p:spPr>
+          <a:xfrm>
+            <a:off x="548640" y="2377440"/>
+            <a:ext cx="3474720" cy="365760"/>
+          </a:xfrm>
+          <a:prstGeom prst="rect">
+            <a:avLst/>
+          </a:prstGeom>
+          <a:noFill/>
+          <a:ln/>
+        </p:spPr>
+        <p:txBody>
+          <a:bodyPr wrap="square" rtlCol="0" anchor="ctr"/>
+          <a:lstStyle/>
+          <a:p>
+            <a:pPr indent="0" marL="0">
+              <a:buNone/>
+            </a:pPr>
+            <a:r>
+              <a:rPr lang="en-US" sz="1000" dirty="0">
+                <a:solidFill>
+                  <a:srgbClr val="2C3E50"/>
+                </a:solidFill>
+                <a:latin typeface="SimSun" pitchFamily="34" charset="0"/>
+                <a:ea typeface="SimSun" pitchFamily="34" charset="-122"/>
+                <a:cs typeface="SimSun" pitchFamily="34" charset="-120"/>
+              </a:rPr>
+              <a:t>✓ 个人信息管理</a:t>
+            </a:r>
+            <a:endParaRPr lang="en-US" sz="1000" dirty="0"/>
+          </a:p>
+        </p:txBody>
+      </p:sp>
+      <p:sp>
+        <p:nvSpPr>
+          <p:cNvPr id="11" name="Text 9"/>
+          <p:cNvSpPr/>
+          <p:nvPr/>
+        </p:nvSpPr>
+        <p:spPr>
+          <a:xfrm>
+            <a:off x="548640" y="2788920"/>
+            <a:ext cx="3474720" cy="365760"/>
+          </a:xfrm>
+          <a:prstGeom prst="rect">
+            <a:avLst/>
+          </a:prstGeom>
+          <a:noFill/>
+          <a:ln/>
+        </p:spPr>
+        <p:txBody>
+          <a:bodyPr wrap="square" rtlCol="0" anchor="ctr"/>
+          <a:lstStyle/>
+          <a:p>
+            <a:pPr indent="0" marL="0">
+              <a:buNone/>
+            </a:pPr>
+            <a:r>
+              <a:rPr lang="en-US" sz="1000" dirty="0">
+                <a:solidFill>
+                  <a:srgbClr val="2C3E50"/>
+                </a:solidFill>
+                <a:latin typeface="SimSun" pitchFamily="34" charset="0"/>
+                <a:ea typeface="SimSun" pitchFamily="34" charset="-122"/>
+                <a:cs typeface="SimSun" pitchFamily="34" charset="-120"/>
+              </a:rPr>
+              <a:t>✓ 订单记录查看</a:t>
+            </a:r>
+            <a:endParaRPr lang="en-US" sz="1000" dirty="0"/>
+          </a:p>
+        </p:txBody>
+      </p:sp>
+      <p:sp>
+        <p:nvSpPr>
+          <p:cNvPr id="12" name="Text 10"/>
+          <p:cNvSpPr/>
+          <p:nvPr/>
+        </p:nvSpPr>
+        <p:spPr>
+          <a:xfrm>
+            <a:off x="548640" y="3200400"/>
+            <a:ext cx="3474720" cy="365760"/>
+          </a:xfrm>
+          <a:prstGeom prst="rect">
+            <a:avLst/>
+          </a:prstGeom>
+          <a:noFill/>
+          <a:ln/>
+        </p:spPr>
+        <p:txBody>
+          <a:bodyPr wrap="square" rtlCol="0" anchor="ctr"/>
+          <a:lstStyle/>
+          <a:p>
+            <a:pPr indent="0" marL="0">
+              <a:buNone/>
+            </a:pPr>
+            <a:r>
+              <a:rPr lang="en-US" sz="1000" dirty="0">
+                <a:solidFill>
+                  <a:srgbClr val="2C3E50"/>
+                </a:solidFill>
+                <a:latin typeface="SimSun" pitchFamily="34" charset="0"/>
+                <a:ea typeface="SimSun" pitchFamily="34" charset="-122"/>
+                <a:cs typeface="SimSun" pitchFamily="34" charset="-120"/>
+              </a:rPr>
+              <a:t>✓ 收货地址管理</a:t>
+            </a:r>
+            <a:endParaRPr lang="en-US" sz="1000" dirty="0"/>
+          </a:p>
+        </p:txBody>
+      </p:sp>
+      <p:sp>
+        <p:nvSpPr>
+          <p:cNvPr id="13" name="Text 11"/>
+          <p:cNvSpPr/>
+          <p:nvPr/>
+        </p:nvSpPr>
+        <p:spPr>
+          <a:xfrm>
+            <a:off x="548640" y="3611880"/>
+            <a:ext cx="3474720" cy="365760"/>
+          </a:xfrm>
+          <a:prstGeom prst="rect">
+            <a:avLst/>
+          </a:prstGeom>
+          <a:noFill/>
+          <a:ln/>
+        </p:spPr>
+        <p:txBody>
+          <a:bodyPr wrap="square" rtlCol="0" anchor="ctr"/>
+          <a:lstStyle/>
+          <a:p>
+            <a:pPr indent="0" marL="0">
+              <a:buNone/>
+            </a:pPr>
+            <a:r>
+              <a:rPr lang="en-US" sz="1000" dirty="0">
+                <a:solidFill>
+                  <a:srgbClr val="2C3E50"/>
+                </a:solidFill>
+                <a:latin typeface="SimSun" pitchFamily="34" charset="0"/>
+                <a:ea typeface="SimSun" pitchFamily="34" charset="-122"/>
+                <a:cs typeface="SimSun" pitchFamily="34" charset="-120"/>
+              </a:rPr>
+              <a:t>✓ 积分余额查询</a:t>
+            </a:r>
+            <a:endParaRPr lang="en-US" sz="1000" dirty="0"/>
+          </a:p>
+        </p:txBody>
+      </p:sp>
+      <p:sp>
+        <p:nvSpPr>
+          <p:cNvPr id="14" name="Shape 12"/>
+          <p:cNvSpPr/>
+          <p:nvPr/>
+        </p:nvSpPr>
+        <p:spPr>
+          <a:xfrm>
+            <a:off x="4389120" y="914400"/>
+            <a:ext cx="4389120" cy="3657600"/>
+          </a:xfrm>
+          <a:prstGeom prst="roundRect">
+            <a:avLst>
+              <a:gd name="adj" fmla="val 2000"/>
+            </a:avLst>
+          </a:prstGeom>
+          <a:solidFill>
+            <a:srgbClr val="FFFFFF"/>
+          </a:solidFill>
+          <a:ln/>
+          <a:effectLst>
+            <a:outerShdw sx="100000" sy="100000" kx="0" ky="0" algn="bl" rotWithShape="0" blurRad="38100" dist="12700" dir="16200000">
+              <a:srgbClr val="00000010">
+                <a:alpha val="75000"/>
+              </a:srgbClr>
+            </a:outerShdw>
+          </a:effectLst>
+        </p:spPr>
+      </p:sp>
       <p:pic>
         <p:nvPicPr>
-          <p:cNvPr id="6" name="Image 0" descr="/workspace/assets/fig5_7_user_center.png">    </p:cNvPr>
+          <p:cNvPr id="15" name="Image 0" descr="/workspace/assets/fig5_7_user_center.png">    </p:cNvPr>
           <p:cNvPicPr>
             <a:picLocks noChangeAspect="1"/>
           </p:cNvPicPr>
@@ -9948,297 +10323,14 @@
         </p:blipFill>
         <p:spPr>
           <a:xfrm>
-            <a:off x="457200" y="1005840"/>
-            <a:ext cx="8229600" cy="2103120"/>
+            <a:off x="4480560" y="1005840"/>
+            <a:ext cx="4206240" cy="3474720"/>
           </a:xfrm>
           <a:prstGeom prst="rect">
             <a:avLst/>
           </a:prstGeom>
         </p:spPr>
       </p:pic>
-      <p:sp>
-        <p:nvSpPr>
-          <p:cNvPr id="7" name="Shape 4"/>
-          <p:cNvSpPr/>
-          <p:nvPr/>
-        </p:nvSpPr>
-        <p:spPr>
-          <a:xfrm>
-            <a:off x="365760" y="3337560"/>
-            <a:ext cx="8412480" cy="1417320"/>
-          </a:xfrm>
-          <a:prstGeom prst="roundRect">
-            <a:avLst>
-              <a:gd name="adj" fmla="val 5161"/>
-            </a:avLst>
-          </a:prstGeom>
-          <a:solidFill>
-            <a:srgbClr val="FFFFFF"/>
-          </a:solidFill>
-          <a:ln/>
-          <a:effectLst>
-            <a:outerShdw sx="100000" sy="100000" kx="0" ky="0" algn="bl" rotWithShape="0" blurRad="38100" dist="12700" dir="16200000">
-              <a:srgbClr val="00000010">
-                <a:alpha val="75000"/>
-              </a:srgbClr>
-            </a:outerShdw>
-          </a:effectLst>
-        </p:spPr>
-      </p:sp>
-      <p:sp>
-        <p:nvSpPr>
-          <p:cNvPr id="8" name="Shape 5"/>
-          <p:cNvSpPr/>
-          <p:nvPr/>
-        </p:nvSpPr>
-        <p:spPr>
-          <a:xfrm>
-            <a:off x="365760" y="3337560"/>
-            <a:ext cx="54864" cy="1417320"/>
-          </a:xfrm>
-          <a:prstGeom prst="rect">
-            <a:avLst/>
-          </a:prstGeom>
-          <a:solidFill>
-            <a:srgbClr val="C9A227"/>
-          </a:solidFill>
-          <a:ln/>
-        </p:spPr>
-      </p:sp>
-      <p:sp>
-        <p:nvSpPr>
-          <p:cNvPr id="9" name="Text 6"/>
-          <p:cNvSpPr/>
-          <p:nvPr/>
-        </p:nvSpPr>
-        <p:spPr>
-          <a:xfrm>
-            <a:off x="548640" y="3429000"/>
-            <a:ext cx="1828800" cy="320040"/>
-          </a:xfrm>
-          <a:prstGeom prst="rect">
-            <a:avLst/>
-          </a:prstGeom>
-          <a:noFill/>
-          <a:ln/>
-        </p:spPr>
-        <p:txBody>
-          <a:bodyPr wrap="square" rtlCol="0" anchor="ctr"/>
-          <a:lstStyle/>
-          <a:p>
-            <a:pPr indent="0" marL="0">
-              <a:buNone/>
-            </a:pPr>
-            <a:r>
-              <a:rPr lang="en-US" sz="1300" b="1" dirty="0">
-                <a:solidFill>
-                  <a:srgbClr val="1E3A5F"/>
-                </a:solidFill>
-                <a:latin typeface="SimHei" pitchFamily="34" charset="0"/>
-                <a:ea typeface="SimHei" pitchFamily="34" charset="-122"/>
-                <a:cs typeface="SimHei" pitchFamily="34" charset="-120"/>
-              </a:rPr>
-              <a:t>功能说明</a:t>
-            </a:r>
-            <a:endParaRPr lang="en-US" sz="1300" dirty="0"/>
-          </a:p>
-        </p:txBody>
-      </p:sp>
-      <p:sp>
-        <p:nvSpPr>
-          <p:cNvPr id="10" name="Text 7"/>
-          <p:cNvSpPr/>
-          <p:nvPr/>
-        </p:nvSpPr>
-        <p:spPr>
-          <a:xfrm>
-            <a:off x="548640" y="3749040"/>
-            <a:ext cx="8046720" cy="365760"/>
-          </a:xfrm>
-          <a:prstGeom prst="rect">
-            <a:avLst/>
-          </a:prstGeom>
-          <a:noFill/>
-          <a:ln/>
-        </p:spPr>
-        <p:txBody>
-          <a:bodyPr wrap="square" rtlCol="0" anchor="t"/>
-          <a:lstStyle/>
-          <a:p>
-            <a:pPr indent="0" marL="0">
-              <a:buNone/>
-            </a:pPr>
-            <a:r>
-              <a:rPr lang="en-US" sz="1000" dirty="0">
-                <a:solidFill>
-                  <a:srgbClr val="2C3E50"/>
-                </a:solidFill>
-                <a:latin typeface="SimSun" pitchFamily="34" charset="0"/>
-                <a:ea typeface="SimSun" pitchFamily="34" charset="-122"/>
-                <a:cs typeface="SimSun" pitchFamily="34" charset="-120"/>
-              </a:rPr>
-              <a:t>个人中心功能允许用户管理个人信息、修改密码、查看订单记录、管理收货地址、查看积分余额等，实现个性化账户管理。</a:t>
-            </a:r>
-            <a:endParaRPr lang="en-US" sz="1000" dirty="0"/>
-          </a:p>
-        </p:txBody>
-      </p:sp>
-      <p:sp>
-        <p:nvSpPr>
-          <p:cNvPr id="11" name="Text 8"/>
-          <p:cNvSpPr/>
-          <p:nvPr/>
-        </p:nvSpPr>
-        <p:spPr>
-          <a:xfrm>
-            <a:off x="548640" y="4160520"/>
-            <a:ext cx="2011680" cy="274320"/>
-          </a:xfrm>
-          <a:prstGeom prst="rect">
-            <a:avLst/>
-          </a:prstGeom>
-          <a:noFill/>
-          <a:ln/>
-        </p:spPr>
-        <p:txBody>
-          <a:bodyPr wrap="square" rtlCol="0" anchor="ctr"/>
-          <a:lstStyle/>
-          <a:p>
-            <a:pPr indent="0" marL="0">
-              <a:buNone/>
-            </a:pPr>
-            <a:r>
-              <a:rPr lang="en-US" sz="900" dirty="0">
-                <a:solidFill>
-                  <a:srgbClr val="2C3E50"/>
-                </a:solidFill>
-                <a:latin typeface="SimSun" pitchFamily="34" charset="0"/>
-                <a:ea typeface="SimSun" pitchFamily="34" charset="-122"/>
-                <a:cs typeface="SimSun" pitchFamily="34" charset="-120"/>
-              </a:rPr>
-              <a:t>✓ 个人信息管理</a:t>
-            </a:r>
-            <a:endParaRPr lang="en-US" sz="900" dirty="0"/>
-          </a:p>
-        </p:txBody>
-      </p:sp>
-      <p:sp>
-        <p:nvSpPr>
-          <p:cNvPr id="12" name="Text 9"/>
-          <p:cNvSpPr/>
-          <p:nvPr/>
-        </p:nvSpPr>
-        <p:spPr>
-          <a:xfrm>
-            <a:off x="2651760" y="4160520"/>
-            <a:ext cx="2011680" cy="274320"/>
-          </a:xfrm>
-          <a:prstGeom prst="rect">
-            <a:avLst/>
-          </a:prstGeom>
-          <a:noFill/>
-          <a:ln/>
-        </p:spPr>
-        <p:txBody>
-          <a:bodyPr wrap="square" rtlCol="0" anchor="ctr"/>
-          <a:lstStyle/>
-          <a:p>
-            <a:pPr indent="0" marL="0">
-              <a:buNone/>
-            </a:pPr>
-            <a:r>
-              <a:rPr lang="en-US" sz="900" dirty="0">
-                <a:solidFill>
-                  <a:srgbClr val="2C3E50"/>
-                </a:solidFill>
-                <a:latin typeface="SimSun" pitchFamily="34" charset="0"/>
-                <a:ea typeface="SimSun" pitchFamily="34" charset="-122"/>
-                <a:cs typeface="SimSun" pitchFamily="34" charset="-120"/>
-              </a:rPr>
-              <a:t>✓ 订单记录查看</a:t>
-            </a:r>
-            <a:endParaRPr lang="en-US" sz="900" dirty="0"/>
-          </a:p>
-        </p:txBody>
-      </p:sp>
-      <p:sp>
-        <p:nvSpPr>
-          <p:cNvPr id="13" name="Text 10"/>
-          <p:cNvSpPr/>
-          <p:nvPr/>
-        </p:nvSpPr>
-        <p:spPr>
-          <a:xfrm>
-            <a:off x="4754880" y="4160520"/>
-            <a:ext cx="2011680" cy="274320"/>
-          </a:xfrm>
-          <a:prstGeom prst="rect">
-            <a:avLst/>
-          </a:prstGeom>
-          <a:noFill/>
-          <a:ln/>
-        </p:spPr>
-        <p:txBody>
-          <a:bodyPr wrap="square" rtlCol="0" anchor="ctr"/>
-          <a:lstStyle/>
-          <a:p>
-            <a:pPr indent="0" marL="0">
-              <a:buNone/>
-            </a:pPr>
-            <a:r>
-              <a:rPr lang="en-US" sz="900" dirty="0">
-                <a:solidFill>
-                  <a:srgbClr val="2C3E50"/>
-                </a:solidFill>
-                <a:latin typeface="SimSun" pitchFamily="34" charset="0"/>
-                <a:ea typeface="SimSun" pitchFamily="34" charset="-122"/>
-                <a:cs typeface="SimSun" pitchFamily="34" charset="-120"/>
-              </a:rPr>
-              <a:t>✓ 收货地址管理</a:t>
-            </a:r>
-            <a:endParaRPr lang="en-US" sz="900" dirty="0"/>
-          </a:p>
-        </p:txBody>
-      </p:sp>
-      <p:sp>
-        <p:nvSpPr>
-          <p:cNvPr id="14" name="Text 11"/>
-          <p:cNvSpPr/>
-          <p:nvPr/>
-        </p:nvSpPr>
-        <p:spPr>
-          <a:xfrm>
-            <a:off x="6858000" y="4160520"/>
-            <a:ext cx="2011680" cy="274320"/>
-          </a:xfrm>
-          <a:prstGeom prst="rect">
-            <a:avLst/>
-          </a:prstGeom>
-          <a:noFill/>
-          <a:ln/>
-        </p:spPr>
-        <p:txBody>
-          <a:bodyPr wrap="square" rtlCol="0" anchor="ctr"/>
-          <a:lstStyle/>
-          <a:p>
-            <a:pPr indent="0" marL="0">
-              <a:buNone/>
-            </a:pPr>
-            <a:r>
-              <a:rPr lang="en-US" sz="900" dirty="0">
-                <a:solidFill>
-                  <a:srgbClr val="2C3E50"/>
-                </a:solidFill>
-                <a:latin typeface="SimSun" pitchFamily="34" charset="0"/>
-                <a:ea typeface="SimSun" pitchFamily="34" charset="-122"/>
-                <a:cs typeface="SimSun" pitchFamily="34" charset="-120"/>
-              </a:rPr>
-              <a:t>✓ 积分余额查询</a:t>
-            </a:r>
-            <a:endParaRPr lang="en-US" sz="900" dirty="0"/>
-          </a:p>
-        </p:txBody>
-      </p:sp>
     </p:spTree>
   </p:cSld>
   <p:clrMapOvr>
@@ -10359,11 +10451,11 @@
         <p:spPr>
           <a:xfrm>
             <a:off x="365760" y="914400"/>
-            <a:ext cx="8412480" cy="2286000"/>
+            <a:ext cx="4389120" cy="3657600"/>
           </a:xfrm>
           <a:prstGeom prst="roundRect">
             <a:avLst>
-              <a:gd name="adj" fmla="val 3200"/>
+              <a:gd name="adj" fmla="val 2000"/>
             </a:avLst>
           </a:prstGeom>
           <a:solidFill>
@@ -10396,7 +10488,7 @@
         <p:spPr>
           <a:xfrm>
             <a:off x="457200" y="1005840"/>
-            <a:ext cx="8229600" cy="2103120"/>
+            <a:ext cx="4206240" cy="3474720"/>
           </a:xfrm>
           <a:prstGeom prst="rect">
             <a:avLst/>
@@ -10411,12 +10503,12 @@
         </p:nvSpPr>
         <p:spPr>
           <a:xfrm>
-            <a:off x="365760" y="3337560"/>
-            <a:ext cx="8412480" cy="1417320"/>
+            <a:off x="4937760" y="914400"/>
+            <a:ext cx="3840480" cy="3657600"/>
           </a:xfrm>
           <a:prstGeom prst="roundRect">
             <a:avLst>
-              <a:gd name="adj" fmla="val 5161"/>
+              <a:gd name="adj" fmla="val 2000"/>
             </a:avLst>
           </a:prstGeom>
           <a:solidFill>
@@ -10440,14 +10532,14 @@
         </p:nvSpPr>
         <p:spPr>
           <a:xfrm>
-            <a:off x="365760" y="3337560"/>
-            <a:ext cx="54864" cy="1417320"/>
-          </a:xfrm>
-          <a:prstGeom prst="rect">
-            <a:avLst/>
-          </a:prstGeom>
-          <a:solidFill>
-            <a:srgbClr val="C9A227"/>
+            <a:off x="4937760" y="914400"/>
+            <a:ext cx="3840480" cy="457200"/>
+          </a:xfrm>
+          <a:prstGeom prst="rect">
+            <a:avLst/>
+          </a:prstGeom>
+          <a:solidFill>
+            <a:srgbClr val="1E3A5F"/>
           </a:solidFill>
           <a:ln/>
         </p:spPr>
@@ -10460,26 +10552,26 @@
         </p:nvSpPr>
         <p:spPr>
           <a:xfrm>
-            <a:off x="548640" y="3429000"/>
-            <a:ext cx="1828800" cy="320040"/>
-          </a:xfrm>
-          <a:prstGeom prst="rect">
-            <a:avLst/>
-          </a:prstGeom>
-          <a:noFill/>
-          <a:ln/>
-        </p:spPr>
-        <p:txBody>
-          <a:bodyPr wrap="square" rtlCol="0" anchor="ctr"/>
-          <a:lstStyle/>
-          <a:p>
-            <a:pPr indent="0" marL="0">
-              <a:buNone/>
-            </a:pPr>
-            <a:r>
-              <a:rPr lang="en-US" sz="1300" b="1" dirty="0">
-                <a:solidFill>
-                  <a:srgbClr val="1E3A5F"/>
+            <a:off x="4937760" y="914400"/>
+            <a:ext cx="3840480" cy="457200"/>
+          </a:xfrm>
+          <a:prstGeom prst="rect">
+            <a:avLst/>
+          </a:prstGeom>
+          <a:noFill/>
+          <a:ln/>
+        </p:spPr>
+        <p:txBody>
+          <a:bodyPr wrap="square" rtlCol="0" anchor="ctr"/>
+          <a:lstStyle/>
+          <a:p>
+            <a:pPr algn="ctr" indent="0" marL="0">
+              <a:buNone/>
+            </a:pPr>
+            <a:r>
+              <a:rPr lang="en-US" sz="1400" b="1" dirty="0">
+                <a:solidFill>
+                  <a:srgbClr val="FFFFFF"/>
                 </a:solidFill>
                 <a:latin typeface="SimHei" pitchFamily="34" charset="0"/>
                 <a:ea typeface="SimHei" pitchFamily="34" charset="-122"/>
@@ -10487,7 +10579,7 @@
               </a:rPr>
               <a:t>功能说明</a:t>
             </a:r>
-            <a:endParaRPr lang="en-US" sz="1300" dirty="0"/>
+            <a:endParaRPr lang="en-US" sz="1400" dirty="0"/>
           </a:p>
         </p:txBody>
       </p:sp>
@@ -10499,8 +10591,8 @@
         </p:nvSpPr>
         <p:spPr>
           <a:xfrm>
-            <a:off x="548640" y="3749040"/>
-            <a:ext cx="8046720" cy="365760"/>
+            <a:off x="5120640" y="1508760"/>
+            <a:ext cx="3474720" cy="731520"/>
           </a:xfrm>
           <a:prstGeom prst="rect">
             <a:avLst/>
@@ -10513,6 +10605,9 @@
           <a:lstStyle/>
           <a:p>
             <a:pPr indent="0" marL="0">
+              <a:lnSpc>
+                <a:spcPct val="140000"/>
+              </a:lnSpc>
               <a:buNone/>
             </a:pPr>
             <a:r>
@@ -10532,30 +10627,50 @@
       </p:sp>
       <p:sp>
         <p:nvSpPr>
-          <p:cNvPr id="11" name="Text 8"/>
-          <p:cNvSpPr/>
-          <p:nvPr/>
-        </p:nvSpPr>
-        <p:spPr>
-          <a:xfrm>
-            <a:off x="548640" y="4160520"/>
-            <a:ext cx="2011680" cy="274320"/>
-          </a:xfrm>
-          <a:prstGeom prst="rect">
-            <a:avLst/>
-          </a:prstGeom>
-          <a:noFill/>
-          <a:ln/>
-        </p:spPr>
-        <p:txBody>
-          <a:bodyPr wrap="square" rtlCol="0" anchor="ctr"/>
-          <a:lstStyle/>
-          <a:p>
-            <a:pPr indent="0" marL="0">
-              <a:buNone/>
-            </a:pPr>
-            <a:r>
-              <a:rPr lang="en-US" sz="900" dirty="0">
+          <p:cNvPr id="11" name="Shape 8"/>
+          <p:cNvSpPr/>
+          <p:nvPr/>
+        </p:nvSpPr>
+        <p:spPr>
+          <a:xfrm>
+            <a:off x="5120640" y="2240280"/>
+            <a:ext cx="3474720" cy="18288"/>
+          </a:xfrm>
+          <a:prstGeom prst="rect">
+            <a:avLst/>
+          </a:prstGeom>
+          <a:solidFill>
+            <a:srgbClr val="E9ECEF"/>
+          </a:solidFill>
+          <a:ln/>
+        </p:spPr>
+      </p:sp>
+      <p:sp>
+        <p:nvSpPr>
+          <p:cNvPr id="12" name="Text 9"/>
+          <p:cNvSpPr/>
+          <p:nvPr/>
+        </p:nvSpPr>
+        <p:spPr>
+          <a:xfrm>
+            <a:off x="5120640" y="2377440"/>
+            <a:ext cx="3474720" cy="365760"/>
+          </a:xfrm>
+          <a:prstGeom prst="rect">
+            <a:avLst/>
+          </a:prstGeom>
+          <a:noFill/>
+          <a:ln/>
+        </p:spPr>
+        <p:txBody>
+          <a:bodyPr wrap="square" rtlCol="0" anchor="ctr"/>
+          <a:lstStyle/>
+          <a:p>
+            <a:pPr indent="0" marL="0">
+              <a:buNone/>
+            </a:pPr>
+            <a:r>
+              <a:rPr lang="en-US" sz="1000" dirty="0">
                 <a:solidFill>
                   <a:srgbClr val="2C3E50"/>
                 </a:solidFill>
@@ -10565,36 +10680,36 @@
               </a:rPr>
               <a:t>✓ 管理员身份验证</a:t>
             </a:r>
-            <a:endParaRPr lang="en-US" sz="900" dirty="0"/>
-          </a:p>
-        </p:txBody>
-      </p:sp>
-      <p:sp>
-        <p:nvSpPr>
-          <p:cNvPr id="12" name="Text 9"/>
-          <p:cNvSpPr/>
-          <p:nvPr/>
-        </p:nvSpPr>
-        <p:spPr>
-          <a:xfrm>
-            <a:off x="2651760" y="4160520"/>
-            <a:ext cx="2011680" cy="274320"/>
-          </a:xfrm>
-          <a:prstGeom prst="rect">
-            <a:avLst/>
-          </a:prstGeom>
-          <a:noFill/>
-          <a:ln/>
-        </p:spPr>
-        <p:txBody>
-          <a:bodyPr wrap="square" rtlCol="0" anchor="ctr"/>
-          <a:lstStyle/>
-          <a:p>
-            <a:pPr indent="0" marL="0">
-              <a:buNone/>
-            </a:pPr>
-            <a:r>
-              <a:rPr lang="en-US" sz="900" dirty="0">
+            <a:endParaRPr lang="en-US" sz="1000" dirty="0"/>
+          </a:p>
+        </p:txBody>
+      </p:sp>
+      <p:sp>
+        <p:nvSpPr>
+          <p:cNvPr id="13" name="Text 10"/>
+          <p:cNvSpPr/>
+          <p:nvPr/>
+        </p:nvSpPr>
+        <p:spPr>
+          <a:xfrm>
+            <a:off x="5120640" y="2788920"/>
+            <a:ext cx="3474720" cy="365760"/>
+          </a:xfrm>
+          <a:prstGeom prst="rect">
+            <a:avLst/>
+          </a:prstGeom>
+          <a:noFill/>
+          <a:ln/>
+        </p:spPr>
+        <p:txBody>
+          <a:bodyPr wrap="square" rtlCol="0" anchor="ctr"/>
+          <a:lstStyle/>
+          <a:p>
+            <a:pPr indent="0" marL="0">
+              <a:buNone/>
+            </a:pPr>
+            <a:r>
+              <a:rPr lang="en-US" sz="1000" dirty="0">
                 <a:solidFill>
                   <a:srgbClr val="2C3E50"/>
                 </a:solidFill>
@@ -10604,36 +10719,36 @@
               </a:rPr>
               <a:t>✓ 会话标识生成</a:t>
             </a:r>
-            <a:endParaRPr lang="en-US" sz="900" dirty="0"/>
-          </a:p>
-        </p:txBody>
-      </p:sp>
-      <p:sp>
-        <p:nvSpPr>
-          <p:cNvPr id="13" name="Text 10"/>
-          <p:cNvSpPr/>
-          <p:nvPr/>
-        </p:nvSpPr>
-        <p:spPr>
-          <a:xfrm>
-            <a:off x="4754880" y="4160520"/>
-            <a:ext cx="2011680" cy="274320"/>
-          </a:xfrm>
-          <a:prstGeom prst="rect">
-            <a:avLst/>
-          </a:prstGeom>
-          <a:noFill/>
-          <a:ln/>
-        </p:spPr>
-        <p:txBody>
-          <a:bodyPr wrap="square" rtlCol="0" anchor="ctr"/>
-          <a:lstStyle/>
-          <a:p>
-            <a:pPr indent="0" marL="0">
-              <a:buNone/>
-            </a:pPr>
-            <a:r>
-              <a:rPr lang="en-US" sz="900" dirty="0">
+            <a:endParaRPr lang="en-US" sz="1000" dirty="0"/>
+          </a:p>
+        </p:txBody>
+      </p:sp>
+      <p:sp>
+        <p:nvSpPr>
+          <p:cNvPr id="14" name="Text 11"/>
+          <p:cNvSpPr/>
+          <p:nvPr/>
+        </p:nvSpPr>
+        <p:spPr>
+          <a:xfrm>
+            <a:off x="5120640" y="3200400"/>
+            <a:ext cx="3474720" cy="365760"/>
+          </a:xfrm>
+          <a:prstGeom prst="rect">
+            <a:avLst/>
+          </a:prstGeom>
+          <a:noFill/>
+          <a:ln/>
+        </p:spPr>
+        <p:txBody>
+          <a:bodyPr wrap="square" rtlCol="0" anchor="ctr"/>
+          <a:lstStyle/>
+          <a:p>
+            <a:pPr indent="0" marL="0">
+              <a:buNone/>
+            </a:pPr>
+            <a:r>
+              <a:rPr lang="en-US" sz="1000" dirty="0">
                 <a:solidFill>
                   <a:srgbClr val="2C3E50"/>
                 </a:solidFill>
@@ -10643,36 +10758,36 @@
               </a:rPr>
               <a:t>✓ 权限控制</a:t>
             </a:r>
-            <a:endParaRPr lang="en-US" sz="900" dirty="0"/>
-          </a:p>
-        </p:txBody>
-      </p:sp>
-      <p:sp>
-        <p:nvSpPr>
-          <p:cNvPr id="14" name="Text 11"/>
-          <p:cNvSpPr/>
-          <p:nvPr/>
-        </p:nvSpPr>
-        <p:spPr>
-          <a:xfrm>
-            <a:off x="6858000" y="4160520"/>
-            <a:ext cx="2011680" cy="274320"/>
-          </a:xfrm>
-          <a:prstGeom prst="rect">
-            <a:avLst/>
-          </a:prstGeom>
-          <a:noFill/>
-          <a:ln/>
-        </p:spPr>
-        <p:txBody>
-          <a:bodyPr wrap="square" rtlCol="0" anchor="ctr"/>
-          <a:lstStyle/>
-          <a:p>
-            <a:pPr indent="0" marL="0">
-              <a:buNone/>
-            </a:pPr>
-            <a:r>
-              <a:rPr lang="en-US" sz="900" dirty="0">
+            <a:endParaRPr lang="en-US" sz="1000" dirty="0"/>
+          </a:p>
+        </p:txBody>
+      </p:sp>
+      <p:sp>
+        <p:nvSpPr>
+          <p:cNvPr id="15" name="Text 12"/>
+          <p:cNvSpPr/>
+          <p:nvPr/>
+        </p:nvSpPr>
+        <p:spPr>
+          <a:xfrm>
+            <a:off x="5120640" y="3611880"/>
+            <a:ext cx="3474720" cy="365760"/>
+          </a:xfrm>
+          <a:prstGeom prst="rect">
+            <a:avLst/>
+          </a:prstGeom>
+          <a:noFill/>
+          <a:ln/>
+        </p:spPr>
+        <p:txBody>
+          <a:bodyPr wrap="square" rtlCol="0" anchor="ctr"/>
+          <a:lstStyle/>
+          <a:p>
+            <a:pPr indent="0" marL="0">
+              <a:buNone/>
+            </a:pPr>
+            <a:r>
+              <a:rPr lang="en-US" sz="1000" dirty="0">
                 <a:solidFill>
                   <a:srgbClr val="2C3E50"/>
                 </a:solidFill>
@@ -10682,7 +10797,7 @@
               </a:rPr>
               <a:t>✓ 后台首页跳转</a:t>
             </a:r>
-            <a:endParaRPr lang="en-US" sz="900" dirty="0"/>
+            <a:endParaRPr lang="en-US" sz="1000" dirty="0"/>
           </a:p>
         </p:txBody>
       </p:sp>
@@ -10806,11 +10921,11 @@
         <p:spPr>
           <a:xfrm>
             <a:off x="365760" y="914400"/>
-            <a:ext cx="8412480" cy="2286000"/>
+            <a:ext cx="3840480" cy="3657600"/>
           </a:xfrm>
           <a:prstGeom prst="roundRect">
             <a:avLst>
-              <a:gd name="adj" fmla="val 3200"/>
+              <a:gd name="adj" fmla="val 2000"/>
             </a:avLst>
           </a:prstGeom>
           <a:solidFill>
@@ -10826,9 +10941,315 @@
           </a:effectLst>
         </p:spPr>
       </p:sp>
+      <p:sp>
+        <p:nvSpPr>
+          <p:cNvPr id="6" name="Shape 4"/>
+          <p:cNvSpPr/>
+          <p:nvPr/>
+        </p:nvSpPr>
+        <p:spPr>
+          <a:xfrm>
+            <a:off x="365760" y="914400"/>
+            <a:ext cx="3840480" cy="457200"/>
+          </a:xfrm>
+          <a:prstGeom prst="rect">
+            <a:avLst/>
+          </a:prstGeom>
+          <a:solidFill>
+            <a:srgbClr val="1E3A5F"/>
+          </a:solidFill>
+          <a:ln/>
+        </p:spPr>
+      </p:sp>
+      <p:sp>
+        <p:nvSpPr>
+          <p:cNvPr id="7" name="Text 5"/>
+          <p:cNvSpPr/>
+          <p:nvPr/>
+        </p:nvSpPr>
+        <p:spPr>
+          <a:xfrm>
+            <a:off x="365760" y="914400"/>
+            <a:ext cx="3840480" cy="457200"/>
+          </a:xfrm>
+          <a:prstGeom prst="rect">
+            <a:avLst/>
+          </a:prstGeom>
+          <a:noFill/>
+          <a:ln/>
+        </p:spPr>
+        <p:txBody>
+          <a:bodyPr wrap="square" rtlCol="0" anchor="ctr"/>
+          <a:lstStyle/>
+          <a:p>
+            <a:pPr algn="ctr" indent="0" marL="0">
+              <a:buNone/>
+            </a:pPr>
+            <a:r>
+              <a:rPr lang="en-US" sz="1400" b="1" dirty="0">
+                <a:solidFill>
+                  <a:srgbClr val="FFFFFF"/>
+                </a:solidFill>
+                <a:latin typeface="SimHei" pitchFamily="34" charset="0"/>
+                <a:ea typeface="SimHei" pitchFamily="34" charset="-122"/>
+                <a:cs typeface="SimHei" pitchFamily="34" charset="-120"/>
+              </a:rPr>
+              <a:t>功能说明</a:t>
+            </a:r>
+            <a:endParaRPr lang="en-US" sz="1400" dirty="0"/>
+          </a:p>
+        </p:txBody>
+      </p:sp>
+      <p:sp>
+        <p:nvSpPr>
+          <p:cNvPr id="8" name="Text 6"/>
+          <p:cNvSpPr/>
+          <p:nvPr/>
+        </p:nvSpPr>
+        <p:spPr>
+          <a:xfrm>
+            <a:off x="548640" y="1508760"/>
+            <a:ext cx="3474720" cy="731520"/>
+          </a:xfrm>
+          <a:prstGeom prst="rect">
+            <a:avLst/>
+          </a:prstGeom>
+          <a:noFill/>
+          <a:ln/>
+        </p:spPr>
+        <p:txBody>
+          <a:bodyPr wrap="square" rtlCol="0" anchor="t"/>
+          <a:lstStyle/>
+          <a:p>
+            <a:pPr indent="0" marL="0">
+              <a:lnSpc>
+                <a:spcPct val="140000"/>
+              </a:lnSpc>
+              <a:buNone/>
+            </a:pPr>
+            <a:r>
+              <a:rPr lang="en-US" sz="1000" dirty="0">
+                <a:solidFill>
+                  <a:srgbClr val="2C3E50"/>
+                </a:solidFill>
+                <a:latin typeface="SimSun" pitchFamily="34" charset="0"/>
+                <a:ea typeface="SimSun" pitchFamily="34" charset="-122"/>
+                <a:cs typeface="SimSun" pitchFamily="34" charset="-120"/>
+              </a:rPr>
+              <a:t>用户管理功能允许管理员查看所有注册用户信息，支持用户信息的增删改查操作，管理用户账号状态，保障系统访问安全。</a:t>
+            </a:r>
+            <a:endParaRPr lang="en-US" sz="1000" dirty="0"/>
+          </a:p>
+        </p:txBody>
+      </p:sp>
+      <p:sp>
+        <p:nvSpPr>
+          <p:cNvPr id="9" name="Shape 7"/>
+          <p:cNvSpPr/>
+          <p:nvPr/>
+        </p:nvSpPr>
+        <p:spPr>
+          <a:xfrm>
+            <a:off x="548640" y="2240280"/>
+            <a:ext cx="3474720" cy="18288"/>
+          </a:xfrm>
+          <a:prstGeom prst="rect">
+            <a:avLst/>
+          </a:prstGeom>
+          <a:solidFill>
+            <a:srgbClr val="E9ECEF"/>
+          </a:solidFill>
+          <a:ln/>
+        </p:spPr>
+      </p:sp>
+      <p:sp>
+        <p:nvSpPr>
+          <p:cNvPr id="10" name="Text 8"/>
+          <p:cNvSpPr/>
+          <p:nvPr/>
+        </p:nvSpPr>
+        <p:spPr>
+          <a:xfrm>
+            <a:off x="548640" y="2377440"/>
+            <a:ext cx="3474720" cy="365760"/>
+          </a:xfrm>
+          <a:prstGeom prst="rect">
+            <a:avLst/>
+          </a:prstGeom>
+          <a:noFill/>
+          <a:ln/>
+        </p:spPr>
+        <p:txBody>
+          <a:bodyPr wrap="square" rtlCol="0" anchor="ctr"/>
+          <a:lstStyle/>
+          <a:p>
+            <a:pPr indent="0" marL="0">
+              <a:buNone/>
+            </a:pPr>
+            <a:r>
+              <a:rPr lang="en-US" sz="1000" dirty="0">
+                <a:solidFill>
+                  <a:srgbClr val="2C3E50"/>
+                </a:solidFill>
+                <a:latin typeface="SimSun" pitchFamily="34" charset="0"/>
+                <a:ea typeface="SimSun" pitchFamily="34" charset="-122"/>
+                <a:cs typeface="SimSun" pitchFamily="34" charset="-120"/>
+              </a:rPr>
+              <a:t>✓ 用户信息查看</a:t>
+            </a:r>
+            <a:endParaRPr lang="en-US" sz="1000" dirty="0"/>
+          </a:p>
+        </p:txBody>
+      </p:sp>
+      <p:sp>
+        <p:nvSpPr>
+          <p:cNvPr id="11" name="Text 9"/>
+          <p:cNvSpPr/>
+          <p:nvPr/>
+        </p:nvSpPr>
+        <p:spPr>
+          <a:xfrm>
+            <a:off x="548640" y="2788920"/>
+            <a:ext cx="3474720" cy="365760"/>
+          </a:xfrm>
+          <a:prstGeom prst="rect">
+            <a:avLst/>
+          </a:prstGeom>
+          <a:noFill/>
+          <a:ln/>
+        </p:spPr>
+        <p:txBody>
+          <a:bodyPr wrap="square" rtlCol="0" anchor="ctr"/>
+          <a:lstStyle/>
+          <a:p>
+            <a:pPr indent="0" marL="0">
+              <a:buNone/>
+            </a:pPr>
+            <a:r>
+              <a:rPr lang="en-US" sz="1000" dirty="0">
+                <a:solidFill>
+                  <a:srgbClr val="2C3E50"/>
+                </a:solidFill>
+                <a:latin typeface="SimSun" pitchFamily="34" charset="0"/>
+                <a:ea typeface="SimSun" pitchFamily="34" charset="-122"/>
+                <a:cs typeface="SimSun" pitchFamily="34" charset="-120"/>
+              </a:rPr>
+              <a:t>✓ 用户增删改查</a:t>
+            </a:r>
+            <a:endParaRPr lang="en-US" sz="1000" dirty="0"/>
+          </a:p>
+        </p:txBody>
+      </p:sp>
+      <p:sp>
+        <p:nvSpPr>
+          <p:cNvPr id="12" name="Text 10"/>
+          <p:cNvSpPr/>
+          <p:nvPr/>
+        </p:nvSpPr>
+        <p:spPr>
+          <a:xfrm>
+            <a:off x="548640" y="3200400"/>
+            <a:ext cx="3474720" cy="365760"/>
+          </a:xfrm>
+          <a:prstGeom prst="rect">
+            <a:avLst/>
+          </a:prstGeom>
+          <a:noFill/>
+          <a:ln/>
+        </p:spPr>
+        <p:txBody>
+          <a:bodyPr wrap="square" rtlCol="0" anchor="ctr"/>
+          <a:lstStyle/>
+          <a:p>
+            <a:pPr indent="0" marL="0">
+              <a:buNone/>
+            </a:pPr>
+            <a:r>
+              <a:rPr lang="en-US" sz="1000" dirty="0">
+                <a:solidFill>
+                  <a:srgbClr val="2C3E50"/>
+                </a:solidFill>
+                <a:latin typeface="SimSun" pitchFamily="34" charset="0"/>
+                <a:ea typeface="SimSun" pitchFamily="34" charset="-122"/>
+                <a:cs typeface="SimSun" pitchFamily="34" charset="-120"/>
+              </a:rPr>
+              <a:t>✓ 账号状态管理</a:t>
+            </a:r>
+            <a:endParaRPr lang="en-US" sz="1000" dirty="0"/>
+          </a:p>
+        </p:txBody>
+      </p:sp>
+      <p:sp>
+        <p:nvSpPr>
+          <p:cNvPr id="13" name="Text 11"/>
+          <p:cNvSpPr/>
+          <p:nvPr/>
+        </p:nvSpPr>
+        <p:spPr>
+          <a:xfrm>
+            <a:off x="548640" y="3611880"/>
+            <a:ext cx="3474720" cy="365760"/>
+          </a:xfrm>
+          <a:prstGeom prst="rect">
+            <a:avLst/>
+          </a:prstGeom>
+          <a:noFill/>
+          <a:ln/>
+        </p:spPr>
+        <p:txBody>
+          <a:bodyPr wrap="square" rtlCol="0" anchor="ctr"/>
+          <a:lstStyle/>
+          <a:p>
+            <a:pPr indent="0" marL="0">
+              <a:buNone/>
+            </a:pPr>
+            <a:r>
+              <a:rPr lang="en-US" sz="1000" dirty="0">
+                <a:solidFill>
+                  <a:srgbClr val="2C3E50"/>
+                </a:solidFill>
+                <a:latin typeface="SimSun" pitchFamily="34" charset="0"/>
+                <a:ea typeface="SimSun" pitchFamily="34" charset="-122"/>
+                <a:cs typeface="SimSun" pitchFamily="34" charset="-120"/>
+              </a:rPr>
+              <a:t>✓ 访问安全保障</a:t>
+            </a:r>
+            <a:endParaRPr lang="en-US" sz="1000" dirty="0"/>
+          </a:p>
+        </p:txBody>
+      </p:sp>
+      <p:sp>
+        <p:nvSpPr>
+          <p:cNvPr id="14" name="Shape 12"/>
+          <p:cNvSpPr/>
+          <p:nvPr/>
+        </p:nvSpPr>
+        <p:spPr>
+          <a:xfrm>
+            <a:off x="4389120" y="914400"/>
+            <a:ext cx="4389120" cy="3657600"/>
+          </a:xfrm>
+          <a:prstGeom prst="roundRect">
+            <a:avLst>
+              <a:gd name="adj" fmla="val 2000"/>
+            </a:avLst>
+          </a:prstGeom>
+          <a:solidFill>
+            <a:srgbClr val="FFFFFF"/>
+          </a:solidFill>
+          <a:ln/>
+          <a:effectLst>
+            <a:outerShdw sx="100000" sy="100000" kx="0" ky="0" algn="bl" rotWithShape="0" blurRad="38100" dist="12700" dir="16200000">
+              <a:srgbClr val="00000010">
+                <a:alpha val="75000"/>
+              </a:srgbClr>
+            </a:outerShdw>
+          </a:effectLst>
+        </p:spPr>
+      </p:sp>
       <p:pic>
         <p:nvPicPr>
-          <p:cNvPr id="6" name="Image 0" descr="/workspace/assets/fig5_10_user_manage.png">    </p:cNvPr>
+          <p:cNvPr id="15" name="Image 0" descr="/workspace/assets/fig5_10_user_manage.png">    </p:cNvPr>
           <p:cNvPicPr>
             <a:picLocks noChangeAspect="1"/>
           </p:cNvPicPr>
@@ -10842,297 +11263,14 @@
         </p:blipFill>
         <p:spPr>
           <a:xfrm>
-            <a:off x="457200" y="1005840"/>
-            <a:ext cx="8229600" cy="2103120"/>
+            <a:off x="4480560" y="1005840"/>
+            <a:ext cx="4206240" cy="3474720"/>
           </a:xfrm>
           <a:prstGeom prst="rect">
             <a:avLst/>
           </a:prstGeom>
         </p:spPr>
       </p:pic>
-      <p:sp>
-        <p:nvSpPr>
-          <p:cNvPr id="7" name="Shape 4"/>
-          <p:cNvSpPr/>
-          <p:nvPr/>
-        </p:nvSpPr>
-        <p:spPr>
-          <a:xfrm>
-            <a:off x="365760" y="3337560"/>
-            <a:ext cx="8412480" cy="1417320"/>
-          </a:xfrm>
-          <a:prstGeom prst="roundRect">
-            <a:avLst>
-              <a:gd name="adj" fmla="val 5161"/>
-            </a:avLst>
-          </a:prstGeom>
-          <a:solidFill>
-            <a:srgbClr val="FFFFFF"/>
-          </a:solidFill>
-          <a:ln/>
-          <a:effectLst>
-            <a:outerShdw sx="100000" sy="100000" kx="0" ky="0" algn="bl" rotWithShape="0" blurRad="38100" dist="12700" dir="16200000">
-              <a:srgbClr val="00000010">
-                <a:alpha val="75000"/>
-              </a:srgbClr>
-            </a:outerShdw>
-          </a:effectLst>
-        </p:spPr>
-      </p:sp>
-      <p:sp>
-        <p:nvSpPr>
-          <p:cNvPr id="8" name="Shape 5"/>
-          <p:cNvSpPr/>
-          <p:nvPr/>
-        </p:nvSpPr>
-        <p:spPr>
-          <a:xfrm>
-            <a:off x="365760" y="3337560"/>
-            <a:ext cx="54864" cy="1417320"/>
-          </a:xfrm>
-          <a:prstGeom prst="rect">
-            <a:avLst/>
-          </a:prstGeom>
-          <a:solidFill>
-            <a:srgbClr val="C9A227"/>
-          </a:solidFill>
-          <a:ln/>
-        </p:spPr>
-      </p:sp>
-      <p:sp>
-        <p:nvSpPr>
-          <p:cNvPr id="9" name="Text 6"/>
-          <p:cNvSpPr/>
-          <p:nvPr/>
-        </p:nvSpPr>
-        <p:spPr>
-          <a:xfrm>
-            <a:off x="548640" y="3429000"/>
-            <a:ext cx="1828800" cy="320040"/>
-          </a:xfrm>
-          <a:prstGeom prst="rect">
-            <a:avLst/>
-          </a:prstGeom>
-          <a:noFill/>
-          <a:ln/>
-        </p:spPr>
-        <p:txBody>
-          <a:bodyPr wrap="square" rtlCol="0" anchor="ctr"/>
-          <a:lstStyle/>
-          <a:p>
-            <a:pPr indent="0" marL="0">
-              <a:buNone/>
-            </a:pPr>
-            <a:r>
-              <a:rPr lang="en-US" sz="1300" b="1" dirty="0">
-                <a:solidFill>
-                  <a:srgbClr val="1E3A5F"/>
-                </a:solidFill>
-                <a:latin typeface="SimHei" pitchFamily="34" charset="0"/>
-                <a:ea typeface="SimHei" pitchFamily="34" charset="-122"/>
-                <a:cs typeface="SimHei" pitchFamily="34" charset="-120"/>
-              </a:rPr>
-              <a:t>功能说明</a:t>
-            </a:r>
-            <a:endParaRPr lang="en-US" sz="1300" dirty="0"/>
-          </a:p>
-        </p:txBody>
-      </p:sp>
-      <p:sp>
-        <p:nvSpPr>
-          <p:cNvPr id="10" name="Text 7"/>
-          <p:cNvSpPr/>
-          <p:nvPr/>
-        </p:nvSpPr>
-        <p:spPr>
-          <a:xfrm>
-            <a:off x="548640" y="3749040"/>
-            <a:ext cx="8046720" cy="365760"/>
-          </a:xfrm>
-          <a:prstGeom prst="rect">
-            <a:avLst/>
-          </a:prstGeom>
-          <a:noFill/>
-          <a:ln/>
-        </p:spPr>
-        <p:txBody>
-          <a:bodyPr wrap="square" rtlCol="0" anchor="t"/>
-          <a:lstStyle/>
-          <a:p>
-            <a:pPr indent="0" marL="0">
-              <a:buNone/>
-            </a:pPr>
-            <a:r>
-              <a:rPr lang="en-US" sz="1000" dirty="0">
-                <a:solidFill>
-                  <a:srgbClr val="2C3E50"/>
-                </a:solidFill>
-                <a:latin typeface="SimSun" pitchFamily="34" charset="0"/>
-                <a:ea typeface="SimSun" pitchFamily="34" charset="-122"/>
-                <a:cs typeface="SimSun" pitchFamily="34" charset="-120"/>
-              </a:rPr>
-              <a:t>用户管理功能允许管理员查看所有注册用户信息，支持用户信息的增删改查操作，管理用户账号状态，保障系统访问安全。</a:t>
-            </a:r>
-            <a:endParaRPr lang="en-US" sz="1000" dirty="0"/>
-          </a:p>
-        </p:txBody>
-      </p:sp>
-      <p:sp>
-        <p:nvSpPr>
-          <p:cNvPr id="11" name="Text 8"/>
-          <p:cNvSpPr/>
-          <p:nvPr/>
-        </p:nvSpPr>
-        <p:spPr>
-          <a:xfrm>
-            <a:off x="548640" y="4160520"/>
-            <a:ext cx="2011680" cy="274320"/>
-          </a:xfrm>
-          <a:prstGeom prst="rect">
-            <a:avLst/>
-          </a:prstGeom>
-          <a:noFill/>
-          <a:ln/>
-        </p:spPr>
-        <p:txBody>
-          <a:bodyPr wrap="square" rtlCol="0" anchor="ctr"/>
-          <a:lstStyle/>
-          <a:p>
-            <a:pPr indent="0" marL="0">
-              <a:buNone/>
-            </a:pPr>
-            <a:r>
-              <a:rPr lang="en-US" sz="900" dirty="0">
-                <a:solidFill>
-                  <a:srgbClr val="2C3E50"/>
-                </a:solidFill>
-                <a:latin typeface="SimSun" pitchFamily="34" charset="0"/>
-                <a:ea typeface="SimSun" pitchFamily="34" charset="-122"/>
-                <a:cs typeface="SimSun" pitchFamily="34" charset="-120"/>
-              </a:rPr>
-              <a:t>✓ 用户信息查看</a:t>
-            </a:r>
-            <a:endParaRPr lang="en-US" sz="900" dirty="0"/>
-          </a:p>
-        </p:txBody>
-      </p:sp>
-      <p:sp>
-        <p:nvSpPr>
-          <p:cNvPr id="12" name="Text 9"/>
-          <p:cNvSpPr/>
-          <p:nvPr/>
-        </p:nvSpPr>
-        <p:spPr>
-          <a:xfrm>
-            <a:off x="2651760" y="4160520"/>
-            <a:ext cx="2011680" cy="274320"/>
-          </a:xfrm>
-          <a:prstGeom prst="rect">
-            <a:avLst/>
-          </a:prstGeom>
-          <a:noFill/>
-          <a:ln/>
-        </p:spPr>
-        <p:txBody>
-          <a:bodyPr wrap="square" rtlCol="0" anchor="ctr"/>
-          <a:lstStyle/>
-          <a:p>
-            <a:pPr indent="0" marL="0">
-              <a:buNone/>
-            </a:pPr>
-            <a:r>
-              <a:rPr lang="en-US" sz="900" dirty="0">
-                <a:solidFill>
-                  <a:srgbClr val="2C3E50"/>
-                </a:solidFill>
-                <a:latin typeface="SimSun" pitchFamily="34" charset="0"/>
-                <a:ea typeface="SimSun" pitchFamily="34" charset="-122"/>
-                <a:cs typeface="SimSun" pitchFamily="34" charset="-120"/>
-              </a:rPr>
-              <a:t>✓ 用户增删改查</a:t>
-            </a:r>
-            <a:endParaRPr lang="en-US" sz="900" dirty="0"/>
-          </a:p>
-        </p:txBody>
-      </p:sp>
-      <p:sp>
-        <p:nvSpPr>
-          <p:cNvPr id="13" name="Text 10"/>
-          <p:cNvSpPr/>
-          <p:nvPr/>
-        </p:nvSpPr>
-        <p:spPr>
-          <a:xfrm>
-            <a:off x="4754880" y="4160520"/>
-            <a:ext cx="2011680" cy="274320"/>
-          </a:xfrm>
-          <a:prstGeom prst="rect">
-            <a:avLst/>
-          </a:prstGeom>
-          <a:noFill/>
-          <a:ln/>
-        </p:spPr>
-        <p:txBody>
-          <a:bodyPr wrap="square" rtlCol="0" anchor="ctr"/>
-          <a:lstStyle/>
-          <a:p>
-            <a:pPr indent="0" marL="0">
-              <a:buNone/>
-            </a:pPr>
-            <a:r>
-              <a:rPr lang="en-US" sz="900" dirty="0">
-                <a:solidFill>
-                  <a:srgbClr val="2C3E50"/>
-                </a:solidFill>
-                <a:latin typeface="SimSun" pitchFamily="34" charset="0"/>
-                <a:ea typeface="SimSun" pitchFamily="34" charset="-122"/>
-                <a:cs typeface="SimSun" pitchFamily="34" charset="-120"/>
-              </a:rPr>
-              <a:t>✓ 账号状态管理</a:t>
-            </a:r>
-            <a:endParaRPr lang="en-US" sz="900" dirty="0"/>
-          </a:p>
-        </p:txBody>
-      </p:sp>
-      <p:sp>
-        <p:nvSpPr>
-          <p:cNvPr id="14" name="Text 11"/>
-          <p:cNvSpPr/>
-          <p:nvPr/>
-        </p:nvSpPr>
-        <p:spPr>
-          <a:xfrm>
-            <a:off x="6858000" y="4160520"/>
-            <a:ext cx="2011680" cy="274320"/>
-          </a:xfrm>
-          <a:prstGeom prst="rect">
-            <a:avLst/>
-          </a:prstGeom>
-          <a:noFill/>
-          <a:ln/>
-        </p:spPr>
-        <p:txBody>
-          <a:bodyPr wrap="square" rtlCol="0" anchor="ctr"/>
-          <a:lstStyle/>
-          <a:p>
-            <a:pPr indent="0" marL="0">
-              <a:buNone/>
-            </a:pPr>
-            <a:r>
-              <a:rPr lang="en-US" sz="900" dirty="0">
-                <a:solidFill>
-                  <a:srgbClr val="2C3E50"/>
-                </a:solidFill>
-                <a:latin typeface="SimSun" pitchFamily="34" charset="0"/>
-                <a:ea typeface="SimSun" pitchFamily="34" charset="-122"/>
-                <a:cs typeface="SimSun" pitchFamily="34" charset="-120"/>
-              </a:rPr>
-              <a:t>✓ 访问安全保障</a:t>
-            </a:r>
-            <a:endParaRPr lang="en-US" sz="900" dirty="0"/>
-          </a:p>
-        </p:txBody>
-      </p:sp>
     </p:spTree>
   </p:cSld>
   <p:clrMapOvr>
@@ -11253,11 +11391,11 @@
         <p:spPr>
           <a:xfrm>
             <a:off x="365760" y="914400"/>
-            <a:ext cx="8412480" cy="2286000"/>
+            <a:ext cx="4389120" cy="3657600"/>
           </a:xfrm>
           <a:prstGeom prst="roundRect">
             <a:avLst>
-              <a:gd name="adj" fmla="val 3200"/>
+              <a:gd name="adj" fmla="val 2000"/>
             </a:avLst>
           </a:prstGeom>
           <a:solidFill>
@@ -11290,7 +11428,7 @@
         <p:spPr>
           <a:xfrm>
             <a:off x="457200" y="1005840"/>
-            <a:ext cx="8229600" cy="2103120"/>
+            <a:ext cx="4206240" cy="3474720"/>
           </a:xfrm>
           <a:prstGeom prst="rect">
             <a:avLst/>
@@ -11305,12 +11443,12 @@
         </p:nvSpPr>
         <p:spPr>
           <a:xfrm>
-            <a:off x="365760" y="3337560"/>
-            <a:ext cx="8412480" cy="1417320"/>
+            <a:off x="4937760" y="914400"/>
+            <a:ext cx="3840480" cy="3657600"/>
           </a:xfrm>
           <a:prstGeom prst="roundRect">
             <a:avLst>
-              <a:gd name="adj" fmla="val 5161"/>
+              <a:gd name="adj" fmla="val 2000"/>
             </a:avLst>
           </a:prstGeom>
           <a:solidFill>
@@ -11334,14 +11472,14 @@
         </p:nvSpPr>
         <p:spPr>
           <a:xfrm>
-            <a:off x="365760" y="3337560"/>
-            <a:ext cx="54864" cy="1417320"/>
-          </a:xfrm>
-          <a:prstGeom prst="rect">
-            <a:avLst/>
-          </a:prstGeom>
-          <a:solidFill>
-            <a:srgbClr val="C9A227"/>
+            <a:off x="4937760" y="914400"/>
+            <a:ext cx="3840480" cy="457200"/>
+          </a:xfrm>
+          <a:prstGeom prst="rect">
+            <a:avLst/>
+          </a:prstGeom>
+          <a:solidFill>
+            <a:srgbClr val="1E3A5F"/>
           </a:solidFill>
           <a:ln/>
         </p:spPr>
@@ -11354,26 +11492,26 @@
         </p:nvSpPr>
         <p:spPr>
           <a:xfrm>
-            <a:off x="548640" y="3429000"/>
-            <a:ext cx="1828800" cy="320040"/>
-          </a:xfrm>
-          <a:prstGeom prst="rect">
-            <a:avLst/>
-          </a:prstGeom>
-          <a:noFill/>
-          <a:ln/>
-        </p:spPr>
-        <p:txBody>
-          <a:bodyPr wrap="square" rtlCol="0" anchor="ctr"/>
-          <a:lstStyle/>
-          <a:p>
-            <a:pPr indent="0" marL="0">
-              <a:buNone/>
-            </a:pPr>
-            <a:r>
-              <a:rPr lang="en-US" sz="1300" b="1" dirty="0">
-                <a:solidFill>
-                  <a:srgbClr val="1E3A5F"/>
+            <a:off x="4937760" y="914400"/>
+            <a:ext cx="3840480" cy="457200"/>
+          </a:xfrm>
+          <a:prstGeom prst="rect">
+            <a:avLst/>
+          </a:prstGeom>
+          <a:noFill/>
+          <a:ln/>
+        </p:spPr>
+        <p:txBody>
+          <a:bodyPr wrap="square" rtlCol="0" anchor="ctr"/>
+          <a:lstStyle/>
+          <a:p>
+            <a:pPr algn="ctr" indent="0" marL="0">
+              <a:buNone/>
+            </a:pPr>
+            <a:r>
+              <a:rPr lang="en-US" sz="1400" b="1" dirty="0">
+                <a:solidFill>
+                  <a:srgbClr val="FFFFFF"/>
                 </a:solidFill>
                 <a:latin typeface="SimHei" pitchFamily="34" charset="0"/>
                 <a:ea typeface="SimHei" pitchFamily="34" charset="-122"/>
@@ -11381,7 +11519,7 @@
               </a:rPr>
               <a:t>功能说明</a:t>
             </a:r>
-            <a:endParaRPr lang="en-US" sz="1300" dirty="0"/>
+            <a:endParaRPr lang="en-US" sz="1400" dirty="0"/>
           </a:p>
         </p:txBody>
       </p:sp>
@@ -11393,8 +11531,8 @@
         </p:nvSpPr>
         <p:spPr>
           <a:xfrm>
-            <a:off x="548640" y="3749040"/>
-            <a:ext cx="8046720" cy="365760"/>
+            <a:off x="5120640" y="1508760"/>
+            <a:ext cx="3474720" cy="731520"/>
           </a:xfrm>
           <a:prstGeom prst="rect">
             <a:avLst/>
@@ -11407,6 +11545,9 @@
           <a:lstStyle/>
           <a:p>
             <a:pPr indent="0" marL="0">
+              <a:lnSpc>
+                <a:spcPct val="140000"/>
+              </a:lnSpc>
               <a:buNone/>
             </a:pPr>
             <a:r>
@@ -11426,30 +11567,50 @@
       </p:sp>
       <p:sp>
         <p:nvSpPr>
-          <p:cNvPr id="11" name="Text 8"/>
-          <p:cNvSpPr/>
-          <p:nvPr/>
-        </p:nvSpPr>
-        <p:spPr>
-          <a:xfrm>
-            <a:off x="548640" y="4160520"/>
-            <a:ext cx="2011680" cy="274320"/>
-          </a:xfrm>
-          <a:prstGeom prst="rect">
-            <a:avLst/>
-          </a:prstGeom>
-          <a:noFill/>
-          <a:ln/>
-        </p:spPr>
-        <p:txBody>
-          <a:bodyPr wrap="square" rtlCol="0" anchor="ctr"/>
-          <a:lstStyle/>
-          <a:p>
-            <a:pPr indent="0" marL="0">
-              <a:buNone/>
-            </a:pPr>
-            <a:r>
-              <a:rPr lang="en-US" sz="900" dirty="0">
+          <p:cNvPr id="11" name="Shape 8"/>
+          <p:cNvSpPr/>
+          <p:nvPr/>
+        </p:nvSpPr>
+        <p:spPr>
+          <a:xfrm>
+            <a:off x="5120640" y="2240280"/>
+            <a:ext cx="3474720" cy="18288"/>
+          </a:xfrm>
+          <a:prstGeom prst="rect">
+            <a:avLst/>
+          </a:prstGeom>
+          <a:solidFill>
+            <a:srgbClr val="E9ECEF"/>
+          </a:solidFill>
+          <a:ln/>
+        </p:spPr>
+      </p:sp>
+      <p:sp>
+        <p:nvSpPr>
+          <p:cNvPr id="12" name="Text 9"/>
+          <p:cNvSpPr/>
+          <p:nvPr/>
+        </p:nvSpPr>
+        <p:spPr>
+          <a:xfrm>
+            <a:off x="5120640" y="2377440"/>
+            <a:ext cx="3474720" cy="365760"/>
+          </a:xfrm>
+          <a:prstGeom prst="rect">
+            <a:avLst/>
+          </a:prstGeom>
+          <a:noFill/>
+          <a:ln/>
+        </p:spPr>
+        <p:txBody>
+          <a:bodyPr wrap="square" rtlCol="0" anchor="ctr"/>
+          <a:lstStyle/>
+          <a:p>
+            <a:pPr indent="0" marL="0">
+              <a:buNone/>
+            </a:pPr>
+            <a:r>
+              <a:rPr lang="en-US" sz="1000" dirty="0">
                 <a:solidFill>
                   <a:srgbClr val="2C3E50"/>
                 </a:solidFill>
@@ -11459,36 +11620,36 @@
               </a:rPr>
               <a:t>✓ 商品信息增删改</a:t>
             </a:r>
-            <a:endParaRPr lang="en-US" sz="900" dirty="0"/>
-          </a:p>
-        </p:txBody>
-      </p:sp>
-      <p:sp>
-        <p:nvSpPr>
-          <p:cNvPr id="12" name="Text 9"/>
-          <p:cNvSpPr/>
-          <p:nvPr/>
-        </p:nvSpPr>
-        <p:spPr>
-          <a:xfrm>
-            <a:off x="2651760" y="4160520"/>
-            <a:ext cx="2011680" cy="274320"/>
-          </a:xfrm>
-          <a:prstGeom prst="rect">
-            <a:avLst/>
-          </a:prstGeom>
-          <a:noFill/>
-          <a:ln/>
-        </p:spPr>
-        <p:txBody>
-          <a:bodyPr wrap="square" rtlCol="0" anchor="ctr"/>
-          <a:lstStyle/>
-          <a:p>
-            <a:pPr indent="0" marL="0">
-              <a:buNone/>
-            </a:pPr>
-            <a:r>
-              <a:rPr lang="en-US" sz="900" dirty="0">
+            <a:endParaRPr lang="en-US" sz="1000" dirty="0"/>
+          </a:p>
+        </p:txBody>
+      </p:sp>
+      <p:sp>
+        <p:nvSpPr>
+          <p:cNvPr id="13" name="Text 10"/>
+          <p:cNvSpPr/>
+          <p:nvPr/>
+        </p:nvSpPr>
+        <p:spPr>
+          <a:xfrm>
+            <a:off x="5120640" y="2788920"/>
+            <a:ext cx="3474720" cy="365760"/>
+          </a:xfrm>
+          <a:prstGeom prst="rect">
+            <a:avLst/>
+          </a:prstGeom>
+          <a:noFill/>
+          <a:ln/>
+        </p:spPr>
+        <p:txBody>
+          <a:bodyPr wrap="square" rtlCol="0" anchor="ctr"/>
+          <a:lstStyle/>
+          <a:p>
+            <a:pPr indent="0" marL="0">
+              <a:buNone/>
+            </a:pPr>
+            <a:r>
+              <a:rPr lang="en-US" sz="1000" dirty="0">
                 <a:solidFill>
                   <a:srgbClr val="2C3E50"/>
                 </a:solidFill>
@@ -11498,36 +11659,36 @@
               </a:rPr>
               <a:t>✓ 价格库存设置</a:t>
             </a:r>
-            <a:endParaRPr lang="en-US" sz="900" dirty="0"/>
-          </a:p>
-        </p:txBody>
-      </p:sp>
-      <p:sp>
-        <p:nvSpPr>
-          <p:cNvPr id="13" name="Text 10"/>
-          <p:cNvSpPr/>
-          <p:nvPr/>
-        </p:nvSpPr>
-        <p:spPr>
-          <a:xfrm>
-            <a:off x="4754880" y="4160520"/>
-            <a:ext cx="2011680" cy="274320"/>
-          </a:xfrm>
-          <a:prstGeom prst="rect">
-            <a:avLst/>
-          </a:prstGeom>
-          <a:noFill/>
-          <a:ln/>
-        </p:spPr>
-        <p:txBody>
-          <a:bodyPr wrap="square" rtlCol="0" anchor="ctr"/>
-          <a:lstStyle/>
-          <a:p>
-            <a:pPr indent="0" marL="0">
-              <a:buNone/>
-            </a:pPr>
-            <a:r>
-              <a:rPr lang="en-US" sz="900" dirty="0">
+            <a:endParaRPr lang="en-US" sz="1000" dirty="0"/>
+          </a:p>
+        </p:txBody>
+      </p:sp>
+      <p:sp>
+        <p:nvSpPr>
+          <p:cNvPr id="14" name="Text 11"/>
+          <p:cNvSpPr/>
+          <p:nvPr/>
+        </p:nvSpPr>
+        <p:spPr>
+          <a:xfrm>
+            <a:off x="5120640" y="3200400"/>
+            <a:ext cx="3474720" cy="365760"/>
+          </a:xfrm>
+          <a:prstGeom prst="rect">
+            <a:avLst/>
+          </a:prstGeom>
+          <a:noFill/>
+          <a:ln/>
+        </p:spPr>
+        <p:txBody>
+          <a:bodyPr wrap="square" rtlCol="0" anchor="ctr"/>
+          <a:lstStyle/>
+          <a:p>
+            <a:pPr indent="0" marL="0">
+              <a:buNone/>
+            </a:pPr>
+            <a:r>
+              <a:rPr lang="en-US" sz="1000" dirty="0">
                 <a:solidFill>
                   <a:srgbClr val="2C3E50"/>
                 </a:solidFill>
@@ -11537,36 +11698,36 @@
               </a:rPr>
               <a:t>✓ 库存预警配置</a:t>
             </a:r>
-            <a:endParaRPr lang="en-US" sz="900" dirty="0"/>
-          </a:p>
-        </p:txBody>
-      </p:sp>
-      <p:sp>
-        <p:nvSpPr>
-          <p:cNvPr id="14" name="Text 11"/>
-          <p:cNvSpPr/>
-          <p:nvPr/>
-        </p:nvSpPr>
-        <p:spPr>
-          <a:xfrm>
-            <a:off x="6858000" y="4160520"/>
-            <a:ext cx="2011680" cy="274320"/>
-          </a:xfrm>
-          <a:prstGeom prst="rect">
-            <a:avLst/>
-          </a:prstGeom>
-          <a:noFill/>
-          <a:ln/>
-        </p:spPr>
-        <p:txBody>
-          <a:bodyPr wrap="square" rtlCol="0" anchor="ctr"/>
-          <a:lstStyle/>
-          <a:p>
-            <a:pPr indent="0" marL="0">
-              <a:buNone/>
-            </a:pPr>
-            <a:r>
-              <a:rPr lang="en-US" sz="900" dirty="0">
+            <a:endParaRPr lang="en-US" sz="1000" dirty="0"/>
+          </a:p>
+        </p:txBody>
+      </p:sp>
+      <p:sp>
+        <p:nvSpPr>
+          <p:cNvPr id="15" name="Text 12"/>
+          <p:cNvSpPr/>
+          <p:nvPr/>
+        </p:nvSpPr>
+        <p:spPr>
+          <a:xfrm>
+            <a:off x="5120640" y="3611880"/>
+            <a:ext cx="3474720" cy="365760"/>
+          </a:xfrm>
+          <a:prstGeom prst="rect">
+            <a:avLst/>
+          </a:prstGeom>
+          <a:noFill/>
+          <a:ln/>
+        </p:spPr>
+        <p:txBody>
+          <a:bodyPr wrap="square" rtlCol="0" anchor="ctr"/>
+          <a:lstStyle/>
+          <a:p>
+            <a:pPr indent="0" marL="0">
+              <a:buNone/>
+            </a:pPr>
+            <a:r>
+              <a:rPr lang="en-US" sz="1000" dirty="0">
                 <a:solidFill>
                   <a:srgbClr val="2C3E50"/>
                 </a:solidFill>
@@ -11576,7 +11737,7 @@
               </a:rPr>
               <a:t>✓ 上下架状态管理</a:t>
             </a:r>
-            <a:endParaRPr lang="en-US" sz="900" dirty="0"/>
+            <a:endParaRPr lang="en-US" sz="1000" dirty="0"/>
           </a:p>
         </p:txBody>
       </p:sp>
@@ -11700,11 +11861,11 @@
         <p:spPr>
           <a:xfrm>
             <a:off x="365760" y="914400"/>
-            <a:ext cx="8412480" cy="2286000"/>
+            <a:ext cx="3840480" cy="3657600"/>
           </a:xfrm>
           <a:prstGeom prst="roundRect">
             <a:avLst>
-              <a:gd name="adj" fmla="val 3200"/>
+              <a:gd name="adj" fmla="val 2000"/>
             </a:avLst>
           </a:prstGeom>
           <a:solidFill>
@@ -11720,9 +11881,315 @@
           </a:effectLst>
         </p:spPr>
       </p:sp>
+      <p:sp>
+        <p:nvSpPr>
+          <p:cNvPr id="6" name="Shape 4"/>
+          <p:cNvSpPr/>
+          <p:nvPr/>
+        </p:nvSpPr>
+        <p:spPr>
+          <a:xfrm>
+            <a:off x="365760" y="914400"/>
+            <a:ext cx="3840480" cy="457200"/>
+          </a:xfrm>
+          <a:prstGeom prst="rect">
+            <a:avLst/>
+          </a:prstGeom>
+          <a:solidFill>
+            <a:srgbClr val="1E3A5F"/>
+          </a:solidFill>
+          <a:ln/>
+        </p:spPr>
+      </p:sp>
+      <p:sp>
+        <p:nvSpPr>
+          <p:cNvPr id="7" name="Text 5"/>
+          <p:cNvSpPr/>
+          <p:nvPr/>
+        </p:nvSpPr>
+        <p:spPr>
+          <a:xfrm>
+            <a:off x="365760" y="914400"/>
+            <a:ext cx="3840480" cy="457200"/>
+          </a:xfrm>
+          <a:prstGeom prst="rect">
+            <a:avLst/>
+          </a:prstGeom>
+          <a:noFill/>
+          <a:ln/>
+        </p:spPr>
+        <p:txBody>
+          <a:bodyPr wrap="square" rtlCol="0" anchor="ctr"/>
+          <a:lstStyle/>
+          <a:p>
+            <a:pPr algn="ctr" indent="0" marL="0">
+              <a:buNone/>
+            </a:pPr>
+            <a:r>
+              <a:rPr lang="en-US" sz="1400" b="1" dirty="0">
+                <a:solidFill>
+                  <a:srgbClr val="FFFFFF"/>
+                </a:solidFill>
+                <a:latin typeface="SimHei" pitchFamily="34" charset="0"/>
+                <a:ea typeface="SimHei" pitchFamily="34" charset="-122"/>
+                <a:cs typeface="SimHei" pitchFamily="34" charset="-120"/>
+              </a:rPr>
+              <a:t>功能说明</a:t>
+            </a:r>
+            <a:endParaRPr lang="en-US" sz="1400" dirty="0"/>
+          </a:p>
+        </p:txBody>
+      </p:sp>
+      <p:sp>
+        <p:nvSpPr>
+          <p:cNvPr id="8" name="Text 6"/>
+          <p:cNvSpPr/>
+          <p:nvPr/>
+        </p:nvSpPr>
+        <p:spPr>
+          <a:xfrm>
+            <a:off x="548640" y="1508760"/>
+            <a:ext cx="3474720" cy="731520"/>
+          </a:xfrm>
+          <a:prstGeom prst="rect">
+            <a:avLst/>
+          </a:prstGeom>
+          <a:noFill/>
+          <a:ln/>
+        </p:spPr>
+        <p:txBody>
+          <a:bodyPr wrap="square" rtlCol="0" anchor="t"/>
+          <a:lstStyle/>
+          <a:p>
+            <a:pPr indent="0" marL="0">
+              <a:lnSpc>
+                <a:spcPct val="140000"/>
+              </a:lnSpc>
+              <a:buNone/>
+            </a:pPr>
+            <a:r>
+              <a:rPr lang="en-US" sz="1000" dirty="0">
+                <a:solidFill>
+                  <a:srgbClr val="2C3E50"/>
+                </a:solidFill>
+                <a:latin typeface="SimSun" pitchFamily="34" charset="0"/>
+                <a:ea typeface="SimSun" pitchFamily="34" charset="-122"/>
+                <a:cs typeface="SimSun" pitchFamily="34" charset="-120"/>
+              </a:rPr>
+              <a:t>公告管理功能允许管理员发布、编辑、删除公告信息，公告内容支持富文本编辑，发布后用户端可实时查看最新公告动态。</a:t>
+            </a:r>
+            <a:endParaRPr lang="en-US" sz="1000" dirty="0"/>
+          </a:p>
+        </p:txBody>
+      </p:sp>
+      <p:sp>
+        <p:nvSpPr>
+          <p:cNvPr id="9" name="Shape 7"/>
+          <p:cNvSpPr/>
+          <p:nvPr/>
+        </p:nvSpPr>
+        <p:spPr>
+          <a:xfrm>
+            <a:off x="548640" y="2240280"/>
+            <a:ext cx="3474720" cy="18288"/>
+          </a:xfrm>
+          <a:prstGeom prst="rect">
+            <a:avLst/>
+          </a:prstGeom>
+          <a:solidFill>
+            <a:srgbClr val="E9ECEF"/>
+          </a:solidFill>
+          <a:ln/>
+        </p:spPr>
+      </p:sp>
+      <p:sp>
+        <p:nvSpPr>
+          <p:cNvPr id="10" name="Text 8"/>
+          <p:cNvSpPr/>
+          <p:nvPr/>
+        </p:nvSpPr>
+        <p:spPr>
+          <a:xfrm>
+            <a:off x="548640" y="2377440"/>
+            <a:ext cx="3474720" cy="365760"/>
+          </a:xfrm>
+          <a:prstGeom prst="rect">
+            <a:avLst/>
+          </a:prstGeom>
+          <a:noFill/>
+          <a:ln/>
+        </p:spPr>
+        <p:txBody>
+          <a:bodyPr wrap="square" rtlCol="0" anchor="ctr"/>
+          <a:lstStyle/>
+          <a:p>
+            <a:pPr indent="0" marL="0">
+              <a:buNone/>
+            </a:pPr>
+            <a:r>
+              <a:rPr lang="en-US" sz="1000" dirty="0">
+                <a:solidFill>
+                  <a:srgbClr val="2C3E50"/>
+                </a:solidFill>
+                <a:latin typeface="SimSun" pitchFamily="34" charset="0"/>
+                <a:ea typeface="SimSun" pitchFamily="34" charset="-122"/>
+                <a:cs typeface="SimSun" pitchFamily="34" charset="-120"/>
+              </a:rPr>
+              <a:t>✓ 公告发布编辑</a:t>
+            </a:r>
+            <a:endParaRPr lang="en-US" sz="1000" dirty="0"/>
+          </a:p>
+        </p:txBody>
+      </p:sp>
+      <p:sp>
+        <p:nvSpPr>
+          <p:cNvPr id="11" name="Text 9"/>
+          <p:cNvSpPr/>
+          <p:nvPr/>
+        </p:nvSpPr>
+        <p:spPr>
+          <a:xfrm>
+            <a:off x="548640" y="2788920"/>
+            <a:ext cx="3474720" cy="365760"/>
+          </a:xfrm>
+          <a:prstGeom prst="rect">
+            <a:avLst/>
+          </a:prstGeom>
+          <a:noFill/>
+          <a:ln/>
+        </p:spPr>
+        <p:txBody>
+          <a:bodyPr wrap="square" rtlCol="0" anchor="ctr"/>
+          <a:lstStyle/>
+          <a:p>
+            <a:pPr indent="0" marL="0">
+              <a:buNone/>
+            </a:pPr>
+            <a:r>
+              <a:rPr lang="en-US" sz="1000" dirty="0">
+                <a:solidFill>
+                  <a:srgbClr val="2C3E50"/>
+                </a:solidFill>
+                <a:latin typeface="SimSun" pitchFamily="34" charset="0"/>
+                <a:ea typeface="SimSun" pitchFamily="34" charset="-122"/>
+                <a:cs typeface="SimSun" pitchFamily="34" charset="-120"/>
+              </a:rPr>
+              <a:t>✓ 富文本编辑支持</a:t>
+            </a:r>
+            <a:endParaRPr lang="en-US" sz="1000" dirty="0"/>
+          </a:p>
+        </p:txBody>
+      </p:sp>
+      <p:sp>
+        <p:nvSpPr>
+          <p:cNvPr id="12" name="Text 10"/>
+          <p:cNvSpPr/>
+          <p:nvPr/>
+        </p:nvSpPr>
+        <p:spPr>
+          <a:xfrm>
+            <a:off x="548640" y="3200400"/>
+            <a:ext cx="3474720" cy="365760"/>
+          </a:xfrm>
+          <a:prstGeom prst="rect">
+            <a:avLst/>
+          </a:prstGeom>
+          <a:noFill/>
+          <a:ln/>
+        </p:spPr>
+        <p:txBody>
+          <a:bodyPr wrap="square" rtlCol="0" anchor="ctr"/>
+          <a:lstStyle/>
+          <a:p>
+            <a:pPr indent="0" marL="0">
+              <a:buNone/>
+            </a:pPr>
+            <a:r>
+              <a:rPr lang="en-US" sz="1000" dirty="0">
+                <a:solidFill>
+                  <a:srgbClr val="2C3E50"/>
+                </a:solidFill>
+                <a:latin typeface="SimSun" pitchFamily="34" charset="0"/>
+                <a:ea typeface="SimSun" pitchFamily="34" charset="-122"/>
+                <a:cs typeface="SimSun" pitchFamily="34" charset="-120"/>
+              </a:rPr>
+              <a:t>✓ 公告删除管理</a:t>
+            </a:r>
+            <a:endParaRPr lang="en-US" sz="1000" dirty="0"/>
+          </a:p>
+        </p:txBody>
+      </p:sp>
+      <p:sp>
+        <p:nvSpPr>
+          <p:cNvPr id="13" name="Text 11"/>
+          <p:cNvSpPr/>
+          <p:nvPr/>
+        </p:nvSpPr>
+        <p:spPr>
+          <a:xfrm>
+            <a:off x="548640" y="3611880"/>
+            <a:ext cx="3474720" cy="365760"/>
+          </a:xfrm>
+          <a:prstGeom prst="rect">
+            <a:avLst/>
+          </a:prstGeom>
+          <a:noFill/>
+          <a:ln/>
+        </p:spPr>
+        <p:txBody>
+          <a:bodyPr wrap="square" rtlCol="0" anchor="ctr"/>
+          <a:lstStyle/>
+          <a:p>
+            <a:pPr indent="0" marL="0">
+              <a:buNone/>
+            </a:pPr>
+            <a:r>
+              <a:rPr lang="en-US" sz="1000" dirty="0">
+                <a:solidFill>
+                  <a:srgbClr val="2C3E50"/>
+                </a:solidFill>
+                <a:latin typeface="SimSun" pitchFamily="34" charset="0"/>
+                <a:ea typeface="SimSun" pitchFamily="34" charset="-122"/>
+                <a:cs typeface="SimSun" pitchFamily="34" charset="-120"/>
+              </a:rPr>
+              <a:t>✓ 用户端实时展示</a:t>
+            </a:r>
+            <a:endParaRPr lang="en-US" sz="1000" dirty="0"/>
+          </a:p>
+        </p:txBody>
+      </p:sp>
+      <p:sp>
+        <p:nvSpPr>
+          <p:cNvPr id="14" name="Shape 12"/>
+          <p:cNvSpPr/>
+          <p:nvPr/>
+        </p:nvSpPr>
+        <p:spPr>
+          <a:xfrm>
+            <a:off x="4389120" y="914400"/>
+            <a:ext cx="4389120" cy="3657600"/>
+          </a:xfrm>
+          <a:prstGeom prst="roundRect">
+            <a:avLst>
+              <a:gd name="adj" fmla="val 2000"/>
+            </a:avLst>
+          </a:prstGeom>
+          <a:solidFill>
+            <a:srgbClr val="FFFFFF"/>
+          </a:solidFill>
+          <a:ln/>
+          <a:effectLst>
+            <a:outerShdw sx="100000" sy="100000" kx="0" ky="0" algn="bl" rotWithShape="0" blurRad="38100" dist="12700" dir="16200000">
+              <a:srgbClr val="00000010">
+                <a:alpha val="75000"/>
+              </a:srgbClr>
+            </a:outerShdw>
+          </a:effectLst>
+        </p:spPr>
+      </p:sp>
       <p:pic>
         <p:nvPicPr>
-          <p:cNvPr id="6" name="Image 0" descr="/workspace/assets/fig5_13_news_manage.png">    </p:cNvPr>
+          <p:cNvPr id="15" name="Image 0" descr="/workspace/assets/fig5_13_news_manage.png">    </p:cNvPr>
           <p:cNvPicPr>
             <a:picLocks noChangeAspect="1"/>
           </p:cNvPicPr>
@@ -11736,297 +12203,14 @@
         </p:blipFill>
         <p:spPr>
           <a:xfrm>
-            <a:off x="457200" y="1005840"/>
-            <a:ext cx="8229600" cy="2103120"/>
+            <a:off x="4480560" y="1005840"/>
+            <a:ext cx="4206240" cy="3474720"/>
           </a:xfrm>
           <a:prstGeom prst="rect">
             <a:avLst/>
           </a:prstGeom>
         </p:spPr>
       </p:pic>
-      <p:sp>
-        <p:nvSpPr>
-          <p:cNvPr id="7" name="Shape 4"/>
-          <p:cNvSpPr/>
-          <p:nvPr/>
-        </p:nvSpPr>
-        <p:spPr>
-          <a:xfrm>
-            <a:off x="365760" y="3337560"/>
-            <a:ext cx="8412480" cy="1417320"/>
-          </a:xfrm>
-          <a:prstGeom prst="roundRect">
-            <a:avLst>
-              <a:gd name="adj" fmla="val 5161"/>
-            </a:avLst>
-          </a:prstGeom>
-          <a:solidFill>
-            <a:srgbClr val="FFFFFF"/>
-          </a:solidFill>
-          <a:ln/>
-          <a:effectLst>
-            <a:outerShdw sx="100000" sy="100000" kx="0" ky="0" algn="bl" rotWithShape="0" blurRad="38100" dist="12700" dir="16200000">
-              <a:srgbClr val="00000010">
-                <a:alpha val="75000"/>
-              </a:srgbClr>
-            </a:outerShdw>
-          </a:effectLst>
-        </p:spPr>
-      </p:sp>
-      <p:sp>
-        <p:nvSpPr>
-          <p:cNvPr id="8" name="Shape 5"/>
-          <p:cNvSpPr/>
-          <p:nvPr/>
-        </p:nvSpPr>
-        <p:spPr>
-          <a:xfrm>
-            <a:off x="365760" y="3337560"/>
-            <a:ext cx="54864" cy="1417320"/>
-          </a:xfrm>
-          <a:prstGeom prst="rect">
-            <a:avLst/>
-          </a:prstGeom>
-          <a:solidFill>
-            <a:srgbClr val="C9A227"/>
-          </a:solidFill>
-          <a:ln/>
-        </p:spPr>
-      </p:sp>
-      <p:sp>
-        <p:nvSpPr>
-          <p:cNvPr id="9" name="Text 6"/>
-          <p:cNvSpPr/>
-          <p:nvPr/>
-        </p:nvSpPr>
-        <p:spPr>
-          <a:xfrm>
-            <a:off x="548640" y="3429000"/>
-            <a:ext cx="1828800" cy="320040"/>
-          </a:xfrm>
-          <a:prstGeom prst="rect">
-            <a:avLst/>
-          </a:prstGeom>
-          <a:noFill/>
-          <a:ln/>
-        </p:spPr>
-        <p:txBody>
-          <a:bodyPr wrap="square" rtlCol="0" anchor="ctr"/>
-          <a:lstStyle/>
-          <a:p>
-            <a:pPr indent="0" marL="0">
-              <a:buNone/>
-            </a:pPr>
-            <a:r>
-              <a:rPr lang="en-US" sz="1300" b="1" dirty="0">
-                <a:solidFill>
-                  <a:srgbClr val="1E3A5F"/>
-                </a:solidFill>
-                <a:latin typeface="SimHei" pitchFamily="34" charset="0"/>
-                <a:ea typeface="SimHei" pitchFamily="34" charset="-122"/>
-                <a:cs typeface="SimHei" pitchFamily="34" charset="-120"/>
-              </a:rPr>
-              <a:t>功能说明</a:t>
-            </a:r>
-            <a:endParaRPr lang="en-US" sz="1300" dirty="0"/>
-          </a:p>
-        </p:txBody>
-      </p:sp>
-      <p:sp>
-        <p:nvSpPr>
-          <p:cNvPr id="10" name="Text 7"/>
-          <p:cNvSpPr/>
-          <p:nvPr/>
-        </p:nvSpPr>
-        <p:spPr>
-          <a:xfrm>
-            <a:off x="548640" y="3749040"/>
-            <a:ext cx="8046720" cy="365760"/>
-          </a:xfrm>
-          <a:prstGeom prst="rect">
-            <a:avLst/>
-          </a:prstGeom>
-          <a:noFill/>
-          <a:ln/>
-        </p:spPr>
-        <p:txBody>
-          <a:bodyPr wrap="square" rtlCol="0" anchor="t"/>
-          <a:lstStyle/>
-          <a:p>
-            <a:pPr indent="0" marL="0">
-              <a:buNone/>
-            </a:pPr>
-            <a:r>
-              <a:rPr lang="en-US" sz="1000" dirty="0">
-                <a:solidFill>
-                  <a:srgbClr val="2C3E50"/>
-                </a:solidFill>
-                <a:latin typeface="SimSun" pitchFamily="34" charset="0"/>
-                <a:ea typeface="SimSun" pitchFamily="34" charset="-122"/>
-                <a:cs typeface="SimSun" pitchFamily="34" charset="-120"/>
-              </a:rPr>
-              <a:t>公告管理功能允许管理员发布、编辑、删除公告信息，公告内容支持富文本编辑，发布后用户端可实时查看最新公告动态。</a:t>
-            </a:r>
-            <a:endParaRPr lang="en-US" sz="1000" dirty="0"/>
-          </a:p>
-        </p:txBody>
-      </p:sp>
-      <p:sp>
-        <p:nvSpPr>
-          <p:cNvPr id="11" name="Text 8"/>
-          <p:cNvSpPr/>
-          <p:nvPr/>
-        </p:nvSpPr>
-        <p:spPr>
-          <a:xfrm>
-            <a:off x="548640" y="4160520"/>
-            <a:ext cx="2011680" cy="274320"/>
-          </a:xfrm>
-          <a:prstGeom prst="rect">
-            <a:avLst/>
-          </a:prstGeom>
-          <a:noFill/>
-          <a:ln/>
-        </p:spPr>
-        <p:txBody>
-          <a:bodyPr wrap="square" rtlCol="0" anchor="ctr"/>
-          <a:lstStyle/>
-          <a:p>
-            <a:pPr indent="0" marL="0">
-              <a:buNone/>
-            </a:pPr>
-            <a:r>
-              <a:rPr lang="en-US" sz="900" dirty="0">
-                <a:solidFill>
-                  <a:srgbClr val="2C3E50"/>
-                </a:solidFill>
-                <a:latin typeface="SimSun" pitchFamily="34" charset="0"/>
-                <a:ea typeface="SimSun" pitchFamily="34" charset="-122"/>
-                <a:cs typeface="SimSun" pitchFamily="34" charset="-120"/>
-              </a:rPr>
-              <a:t>✓ 公告发布编辑</a:t>
-            </a:r>
-            <a:endParaRPr lang="en-US" sz="900" dirty="0"/>
-          </a:p>
-        </p:txBody>
-      </p:sp>
-      <p:sp>
-        <p:nvSpPr>
-          <p:cNvPr id="12" name="Text 9"/>
-          <p:cNvSpPr/>
-          <p:nvPr/>
-        </p:nvSpPr>
-        <p:spPr>
-          <a:xfrm>
-            <a:off x="2651760" y="4160520"/>
-            <a:ext cx="2011680" cy="274320"/>
-          </a:xfrm>
-          <a:prstGeom prst="rect">
-            <a:avLst/>
-          </a:prstGeom>
-          <a:noFill/>
-          <a:ln/>
-        </p:spPr>
-        <p:txBody>
-          <a:bodyPr wrap="square" rtlCol="0" anchor="ctr"/>
-          <a:lstStyle/>
-          <a:p>
-            <a:pPr indent="0" marL="0">
-              <a:buNone/>
-            </a:pPr>
-            <a:r>
-              <a:rPr lang="en-US" sz="900" dirty="0">
-                <a:solidFill>
-                  <a:srgbClr val="2C3E50"/>
-                </a:solidFill>
-                <a:latin typeface="SimSun" pitchFamily="34" charset="0"/>
-                <a:ea typeface="SimSun" pitchFamily="34" charset="-122"/>
-                <a:cs typeface="SimSun" pitchFamily="34" charset="-120"/>
-              </a:rPr>
-              <a:t>✓ 富文本编辑支持</a:t>
-            </a:r>
-            <a:endParaRPr lang="en-US" sz="900" dirty="0"/>
-          </a:p>
-        </p:txBody>
-      </p:sp>
-      <p:sp>
-        <p:nvSpPr>
-          <p:cNvPr id="13" name="Text 10"/>
-          <p:cNvSpPr/>
-          <p:nvPr/>
-        </p:nvSpPr>
-        <p:spPr>
-          <a:xfrm>
-            <a:off x="4754880" y="4160520"/>
-            <a:ext cx="2011680" cy="274320"/>
-          </a:xfrm>
-          <a:prstGeom prst="rect">
-            <a:avLst/>
-          </a:prstGeom>
-          <a:noFill/>
-          <a:ln/>
-        </p:spPr>
-        <p:txBody>
-          <a:bodyPr wrap="square" rtlCol="0" anchor="ctr"/>
-          <a:lstStyle/>
-          <a:p>
-            <a:pPr indent="0" marL="0">
-              <a:buNone/>
-            </a:pPr>
-            <a:r>
-              <a:rPr lang="en-US" sz="900" dirty="0">
-                <a:solidFill>
-                  <a:srgbClr val="2C3E50"/>
-                </a:solidFill>
-                <a:latin typeface="SimSun" pitchFamily="34" charset="0"/>
-                <a:ea typeface="SimSun" pitchFamily="34" charset="-122"/>
-                <a:cs typeface="SimSun" pitchFamily="34" charset="-120"/>
-              </a:rPr>
-              <a:t>✓ 公告删除管理</a:t>
-            </a:r>
-            <a:endParaRPr lang="en-US" sz="900" dirty="0"/>
-          </a:p>
-        </p:txBody>
-      </p:sp>
-      <p:sp>
-        <p:nvSpPr>
-          <p:cNvPr id="14" name="Text 11"/>
-          <p:cNvSpPr/>
-          <p:nvPr/>
-        </p:nvSpPr>
-        <p:spPr>
-          <a:xfrm>
-            <a:off x="6858000" y="4160520"/>
-            <a:ext cx="2011680" cy="274320"/>
-          </a:xfrm>
-          <a:prstGeom prst="rect">
-            <a:avLst/>
-          </a:prstGeom>
-          <a:noFill/>
-          <a:ln/>
-        </p:spPr>
-        <p:txBody>
-          <a:bodyPr wrap="square" rtlCol="0" anchor="ctr"/>
-          <a:lstStyle/>
-          <a:p>
-            <a:pPr indent="0" marL="0">
-              <a:buNone/>
-            </a:pPr>
-            <a:r>
-              <a:rPr lang="en-US" sz="900" dirty="0">
-                <a:solidFill>
-                  <a:srgbClr val="2C3E50"/>
-                </a:solidFill>
-                <a:latin typeface="SimSun" pitchFamily="34" charset="0"/>
-                <a:ea typeface="SimSun" pitchFamily="34" charset="-122"/>
-                <a:cs typeface="SimSun" pitchFamily="34" charset="-120"/>
-              </a:rPr>
-              <a:t>✓ 用户端实时展示</a:t>
-            </a:r>
-            <a:endParaRPr lang="en-US" sz="900" dirty="0"/>
-          </a:p>
-        </p:txBody>
-      </p:sp>
     </p:spTree>
   </p:cSld>
   <p:clrMapOvr>
@@ -12147,11 +12331,11 @@
         <p:spPr>
           <a:xfrm>
             <a:off x="365760" y="914400"/>
-            <a:ext cx="8412480" cy="2286000"/>
+            <a:ext cx="4389120" cy="3657600"/>
           </a:xfrm>
           <a:prstGeom prst="roundRect">
             <a:avLst>
-              <a:gd name="adj" fmla="val 3200"/>
+              <a:gd name="adj" fmla="val 2000"/>
             </a:avLst>
           </a:prstGeom>
           <a:solidFill>
@@ -12184,7 +12368,7 @@
         <p:spPr>
           <a:xfrm>
             <a:off x="457200" y="1005840"/>
-            <a:ext cx="8229600" cy="2103120"/>
+            <a:ext cx="4206240" cy="3474720"/>
           </a:xfrm>
           <a:prstGeom prst="rect">
             <a:avLst/>
@@ -12199,12 +12383,12 @@
         </p:nvSpPr>
         <p:spPr>
           <a:xfrm>
-            <a:off x="365760" y="3337560"/>
-            <a:ext cx="8412480" cy="1417320"/>
+            <a:off x="4937760" y="914400"/>
+            <a:ext cx="3840480" cy="3657600"/>
           </a:xfrm>
           <a:prstGeom prst="roundRect">
             <a:avLst>
-              <a:gd name="adj" fmla="val 5161"/>
+              <a:gd name="adj" fmla="val 2000"/>
             </a:avLst>
           </a:prstGeom>
           <a:solidFill>
@@ -12228,14 +12412,14 @@
         </p:nvSpPr>
         <p:spPr>
           <a:xfrm>
-            <a:off x="365760" y="3337560"/>
-            <a:ext cx="54864" cy="1417320"/>
-          </a:xfrm>
-          <a:prstGeom prst="rect">
-            <a:avLst/>
-          </a:prstGeom>
-          <a:solidFill>
-            <a:srgbClr val="C9A227"/>
+            <a:off x="4937760" y="914400"/>
+            <a:ext cx="3840480" cy="457200"/>
+          </a:xfrm>
+          <a:prstGeom prst="rect">
+            <a:avLst/>
+          </a:prstGeom>
+          <a:solidFill>
+            <a:srgbClr val="1E3A5F"/>
           </a:solidFill>
           <a:ln/>
         </p:spPr>
@@ -12248,26 +12432,26 @@
         </p:nvSpPr>
         <p:spPr>
           <a:xfrm>
-            <a:off x="548640" y="3429000"/>
-            <a:ext cx="1828800" cy="320040"/>
-          </a:xfrm>
-          <a:prstGeom prst="rect">
-            <a:avLst/>
-          </a:prstGeom>
-          <a:noFill/>
-          <a:ln/>
-        </p:spPr>
-        <p:txBody>
-          <a:bodyPr wrap="square" rtlCol="0" anchor="ctr"/>
-          <a:lstStyle/>
-          <a:p>
-            <a:pPr indent="0" marL="0">
-              <a:buNone/>
-            </a:pPr>
-            <a:r>
-              <a:rPr lang="en-US" sz="1300" b="1" dirty="0">
-                <a:solidFill>
-                  <a:srgbClr val="1E3A5F"/>
+            <a:off x="4937760" y="914400"/>
+            <a:ext cx="3840480" cy="457200"/>
+          </a:xfrm>
+          <a:prstGeom prst="rect">
+            <a:avLst/>
+          </a:prstGeom>
+          <a:noFill/>
+          <a:ln/>
+        </p:spPr>
+        <p:txBody>
+          <a:bodyPr wrap="square" rtlCol="0" anchor="ctr"/>
+          <a:lstStyle/>
+          <a:p>
+            <a:pPr algn="ctr" indent="0" marL="0">
+              <a:buNone/>
+            </a:pPr>
+            <a:r>
+              <a:rPr lang="en-US" sz="1400" b="1" dirty="0">
+                <a:solidFill>
+                  <a:srgbClr val="FFFFFF"/>
                 </a:solidFill>
                 <a:latin typeface="SimHei" pitchFamily="34" charset="0"/>
                 <a:ea typeface="SimHei" pitchFamily="34" charset="-122"/>
@@ -12275,7 +12459,7 @@
               </a:rPr>
               <a:t>功能说明</a:t>
             </a:r>
-            <a:endParaRPr lang="en-US" sz="1300" dirty="0"/>
+            <a:endParaRPr lang="en-US" sz="1400" dirty="0"/>
           </a:p>
         </p:txBody>
       </p:sp>
@@ -12287,8 +12471,8 @@
         </p:nvSpPr>
         <p:spPr>
           <a:xfrm>
-            <a:off x="548640" y="3749040"/>
-            <a:ext cx="8046720" cy="365760"/>
+            <a:off x="5120640" y="1508760"/>
+            <a:ext cx="3474720" cy="731520"/>
           </a:xfrm>
           <a:prstGeom prst="rect">
             <a:avLst/>
@@ -12301,6 +12485,9 @@
           <a:lstStyle/>
           <a:p>
             <a:pPr indent="0" marL="0">
+              <a:lnSpc>
+                <a:spcPct val="140000"/>
+              </a:lnSpc>
               <a:buNone/>
             </a:pPr>
             <a:r>
@@ -12320,30 +12507,50 @@
       </p:sp>
       <p:sp>
         <p:nvSpPr>
-          <p:cNvPr id="11" name="Text 8"/>
-          <p:cNvSpPr/>
-          <p:nvPr/>
-        </p:nvSpPr>
-        <p:spPr>
-          <a:xfrm>
-            <a:off x="548640" y="4160520"/>
-            <a:ext cx="2011680" cy="274320"/>
-          </a:xfrm>
-          <a:prstGeom prst="rect">
-            <a:avLst/>
-          </a:prstGeom>
-          <a:noFill/>
-          <a:ln/>
-        </p:spPr>
-        <p:txBody>
-          <a:bodyPr wrap="square" rtlCol="0" anchor="ctr"/>
-          <a:lstStyle/>
-          <a:p>
-            <a:pPr indent="0" marL="0">
-              <a:buNone/>
-            </a:pPr>
-            <a:r>
-              <a:rPr lang="en-US" sz="900" dirty="0">
+          <p:cNvPr id="11" name="Shape 8"/>
+          <p:cNvSpPr/>
+          <p:nvPr/>
+        </p:nvSpPr>
+        <p:spPr>
+          <a:xfrm>
+            <a:off x="5120640" y="2240280"/>
+            <a:ext cx="3474720" cy="18288"/>
+          </a:xfrm>
+          <a:prstGeom prst="rect">
+            <a:avLst/>
+          </a:prstGeom>
+          <a:solidFill>
+            <a:srgbClr val="E9ECEF"/>
+          </a:solidFill>
+          <a:ln/>
+        </p:spPr>
+      </p:sp>
+      <p:sp>
+        <p:nvSpPr>
+          <p:cNvPr id="12" name="Text 9"/>
+          <p:cNvSpPr/>
+          <p:nvPr/>
+        </p:nvSpPr>
+        <p:spPr>
+          <a:xfrm>
+            <a:off x="5120640" y="2377440"/>
+            <a:ext cx="3474720" cy="365760"/>
+          </a:xfrm>
+          <a:prstGeom prst="rect">
+            <a:avLst/>
+          </a:prstGeom>
+          <a:noFill/>
+          <a:ln/>
+        </p:spPr>
+        <p:txBody>
+          <a:bodyPr wrap="square" rtlCol="0" anchor="ctr"/>
+          <a:lstStyle/>
+          <a:p>
+            <a:pPr indent="0" marL="0">
+              <a:buNone/>
+            </a:pPr>
+            <a:r>
+              <a:rPr lang="en-US" sz="1000" dirty="0">
                 <a:solidFill>
                   <a:srgbClr val="2C3E50"/>
                 </a:solidFill>
@@ -12353,36 +12560,36 @@
               </a:rPr>
               <a:t>✓ 满减券/折扣券创建</a:t>
             </a:r>
-            <a:endParaRPr lang="en-US" sz="900" dirty="0"/>
-          </a:p>
-        </p:txBody>
-      </p:sp>
-      <p:sp>
-        <p:nvSpPr>
-          <p:cNvPr id="12" name="Text 9"/>
-          <p:cNvSpPr/>
-          <p:nvPr/>
-        </p:nvSpPr>
-        <p:spPr>
-          <a:xfrm>
-            <a:off x="2651760" y="4160520"/>
-            <a:ext cx="2011680" cy="274320"/>
-          </a:xfrm>
-          <a:prstGeom prst="rect">
-            <a:avLst/>
-          </a:prstGeom>
-          <a:noFill/>
-          <a:ln/>
-        </p:spPr>
-        <p:txBody>
-          <a:bodyPr wrap="square" rtlCol="0" anchor="ctr"/>
-          <a:lstStyle/>
-          <a:p>
-            <a:pPr indent="0" marL="0">
-              <a:buNone/>
-            </a:pPr>
-            <a:r>
-              <a:rPr lang="en-US" sz="900" dirty="0">
+            <a:endParaRPr lang="en-US" sz="1000" dirty="0"/>
+          </a:p>
+        </p:txBody>
+      </p:sp>
+      <p:sp>
+        <p:nvSpPr>
+          <p:cNvPr id="13" name="Text 10"/>
+          <p:cNvSpPr/>
+          <p:nvPr/>
+        </p:nvSpPr>
+        <p:spPr>
+          <a:xfrm>
+            <a:off x="5120640" y="2788920"/>
+            <a:ext cx="3474720" cy="365760"/>
+          </a:xfrm>
+          <a:prstGeom prst="rect">
+            <a:avLst/>
+          </a:prstGeom>
+          <a:noFill/>
+          <a:ln/>
+        </p:spPr>
+        <p:txBody>
+          <a:bodyPr wrap="square" rtlCol="0" anchor="ctr"/>
+          <a:lstStyle/>
+          <a:p>
+            <a:pPr indent="0" marL="0">
+              <a:buNone/>
+            </a:pPr>
+            <a:r>
+              <a:rPr lang="en-US" sz="1000" dirty="0">
                 <a:solidFill>
                   <a:srgbClr val="2C3E50"/>
                 </a:solidFill>
@@ -12392,36 +12599,36 @@
               </a:rPr>
               <a:t>✓ 使用门槛设置</a:t>
             </a:r>
-            <a:endParaRPr lang="en-US" sz="900" dirty="0"/>
-          </a:p>
-        </p:txBody>
-      </p:sp>
-      <p:sp>
-        <p:nvSpPr>
-          <p:cNvPr id="13" name="Text 10"/>
-          <p:cNvSpPr/>
-          <p:nvPr/>
-        </p:nvSpPr>
-        <p:spPr>
-          <a:xfrm>
-            <a:off x="4754880" y="4160520"/>
-            <a:ext cx="2011680" cy="274320"/>
-          </a:xfrm>
-          <a:prstGeom prst="rect">
-            <a:avLst/>
-          </a:prstGeom>
-          <a:noFill/>
-          <a:ln/>
-        </p:spPr>
-        <p:txBody>
-          <a:bodyPr wrap="square" rtlCol="0" anchor="ctr"/>
-          <a:lstStyle/>
-          <a:p>
-            <a:pPr indent="0" marL="0">
-              <a:buNone/>
-            </a:pPr>
-            <a:r>
-              <a:rPr lang="en-US" sz="900" dirty="0">
+            <a:endParaRPr lang="en-US" sz="1000" dirty="0"/>
+          </a:p>
+        </p:txBody>
+      </p:sp>
+      <p:sp>
+        <p:nvSpPr>
+          <p:cNvPr id="14" name="Text 11"/>
+          <p:cNvSpPr/>
+          <p:nvPr/>
+        </p:nvSpPr>
+        <p:spPr>
+          <a:xfrm>
+            <a:off x="5120640" y="3200400"/>
+            <a:ext cx="3474720" cy="365760"/>
+          </a:xfrm>
+          <a:prstGeom prst="rect">
+            <a:avLst/>
+          </a:prstGeom>
+          <a:noFill/>
+          <a:ln/>
+        </p:spPr>
+        <p:txBody>
+          <a:bodyPr wrap="square" rtlCol="0" anchor="ctr"/>
+          <a:lstStyle/>
+          <a:p>
+            <a:pPr indent="0" marL="0">
+              <a:buNone/>
+            </a:pPr>
+            <a:r>
+              <a:rPr lang="en-US" sz="1000" dirty="0">
                 <a:solidFill>
                   <a:srgbClr val="2C3E50"/>
                 </a:solidFill>
@@ -12431,36 +12638,36 @@
               </a:rPr>
               <a:t>✓ 过期时间配置</a:t>
             </a:r>
-            <a:endParaRPr lang="en-US" sz="900" dirty="0"/>
-          </a:p>
-        </p:txBody>
-      </p:sp>
-      <p:sp>
-        <p:nvSpPr>
-          <p:cNvPr id="14" name="Text 11"/>
-          <p:cNvSpPr/>
-          <p:nvPr/>
-        </p:nvSpPr>
-        <p:spPr>
-          <a:xfrm>
-            <a:off x="6858000" y="4160520"/>
-            <a:ext cx="2011680" cy="274320"/>
-          </a:xfrm>
-          <a:prstGeom prst="rect">
-            <a:avLst/>
-          </a:prstGeom>
-          <a:noFill/>
-          <a:ln/>
-        </p:spPr>
-        <p:txBody>
-          <a:bodyPr wrap="square" rtlCol="0" anchor="ctr"/>
-          <a:lstStyle/>
-          <a:p>
-            <a:pPr indent="0" marL="0">
-              <a:buNone/>
-            </a:pPr>
-            <a:r>
-              <a:rPr lang="en-US" sz="900" dirty="0">
+            <a:endParaRPr lang="en-US" sz="1000" dirty="0"/>
+          </a:p>
+        </p:txBody>
+      </p:sp>
+      <p:sp>
+        <p:nvSpPr>
+          <p:cNvPr id="15" name="Text 12"/>
+          <p:cNvSpPr/>
+          <p:nvPr/>
+        </p:nvSpPr>
+        <p:spPr>
+          <a:xfrm>
+            <a:off x="5120640" y="3611880"/>
+            <a:ext cx="3474720" cy="365760"/>
+          </a:xfrm>
+          <a:prstGeom prst="rect">
+            <a:avLst/>
+          </a:prstGeom>
+          <a:noFill/>
+          <a:ln/>
+        </p:spPr>
+        <p:txBody>
+          <a:bodyPr wrap="square" rtlCol="0" anchor="ctr"/>
+          <a:lstStyle/>
+          <a:p>
+            <a:pPr indent="0" marL="0">
+              <a:buNone/>
+            </a:pPr>
+            <a:r>
+              <a:rPr lang="en-US" sz="1000" dirty="0">
                 <a:solidFill>
                   <a:srgbClr val="2C3E50"/>
                 </a:solidFill>
@@ -12470,7 +12677,7 @@
               </a:rPr>
               <a:t>✓ 积分兑换设置</a:t>
             </a:r>
-            <a:endParaRPr lang="en-US" sz="900" dirty="0"/>
+            <a:endParaRPr lang="en-US" sz="1000" dirty="0"/>
           </a:p>
         </p:txBody>
       </p:sp>
@@ -12594,11 +12801,11 @@
         <p:spPr>
           <a:xfrm>
             <a:off x="365760" y="914400"/>
-            <a:ext cx="8412480" cy="2286000"/>
+            <a:ext cx="3840480" cy="3657600"/>
           </a:xfrm>
           <a:prstGeom prst="roundRect">
             <a:avLst>
-              <a:gd name="adj" fmla="val 3200"/>
+              <a:gd name="adj" fmla="val 2000"/>
             </a:avLst>
           </a:prstGeom>
           <a:solidFill>
@@ -12614,9 +12821,315 @@
           </a:effectLst>
         </p:spPr>
       </p:sp>
+      <p:sp>
+        <p:nvSpPr>
+          <p:cNvPr id="6" name="Shape 4"/>
+          <p:cNvSpPr/>
+          <p:nvPr/>
+        </p:nvSpPr>
+        <p:spPr>
+          <a:xfrm>
+            <a:off x="365760" y="914400"/>
+            <a:ext cx="3840480" cy="457200"/>
+          </a:xfrm>
+          <a:prstGeom prst="rect">
+            <a:avLst/>
+          </a:prstGeom>
+          <a:solidFill>
+            <a:srgbClr val="1E3A5F"/>
+          </a:solidFill>
+          <a:ln/>
+        </p:spPr>
+      </p:sp>
+      <p:sp>
+        <p:nvSpPr>
+          <p:cNvPr id="7" name="Text 5"/>
+          <p:cNvSpPr/>
+          <p:nvPr/>
+        </p:nvSpPr>
+        <p:spPr>
+          <a:xfrm>
+            <a:off x="365760" y="914400"/>
+            <a:ext cx="3840480" cy="457200"/>
+          </a:xfrm>
+          <a:prstGeom prst="rect">
+            <a:avLst/>
+          </a:prstGeom>
+          <a:noFill/>
+          <a:ln/>
+        </p:spPr>
+        <p:txBody>
+          <a:bodyPr wrap="square" rtlCol="0" anchor="ctr"/>
+          <a:lstStyle/>
+          <a:p>
+            <a:pPr algn="ctr" indent="0" marL="0">
+              <a:buNone/>
+            </a:pPr>
+            <a:r>
+              <a:rPr lang="en-US" sz="1400" b="1" dirty="0">
+                <a:solidFill>
+                  <a:srgbClr val="FFFFFF"/>
+                </a:solidFill>
+                <a:latin typeface="SimHei" pitchFamily="34" charset="0"/>
+                <a:ea typeface="SimHei" pitchFamily="34" charset="-122"/>
+                <a:cs typeface="SimHei" pitchFamily="34" charset="-120"/>
+              </a:rPr>
+              <a:t>功能说明</a:t>
+            </a:r>
+            <a:endParaRPr lang="en-US" sz="1400" dirty="0"/>
+          </a:p>
+        </p:txBody>
+      </p:sp>
+      <p:sp>
+        <p:nvSpPr>
+          <p:cNvPr id="8" name="Text 6"/>
+          <p:cNvSpPr/>
+          <p:nvPr/>
+        </p:nvSpPr>
+        <p:spPr>
+          <a:xfrm>
+            <a:off x="548640" y="1508760"/>
+            <a:ext cx="3474720" cy="731520"/>
+          </a:xfrm>
+          <a:prstGeom prst="rect">
+            <a:avLst/>
+          </a:prstGeom>
+          <a:noFill/>
+          <a:ln/>
+        </p:spPr>
+        <p:txBody>
+          <a:bodyPr wrap="square" rtlCol="0" anchor="t"/>
+          <a:lstStyle/>
+          <a:p>
+            <a:pPr indent="0" marL="0">
+              <a:lnSpc>
+                <a:spcPct val="140000"/>
+              </a:lnSpc>
+              <a:buNone/>
+            </a:pPr>
+            <a:r>
+              <a:rPr lang="en-US" sz="1000" dirty="0">
+                <a:solidFill>
+                  <a:srgbClr val="2C3E50"/>
+                </a:solidFill>
+                <a:latin typeface="SimSun" pitchFamily="34" charset="0"/>
+                <a:ea typeface="SimSun" pitchFamily="34" charset="-122"/>
+                <a:cs typeface="SimSun" pitchFamily="34" charset="-120"/>
+              </a:rPr>
+              <a:t>系统管理功能允许管理员管理轮播图、系统简介等基础信息，配置系统参数，查看操作日志，保障系统安全稳定运行。</a:t>
+            </a:r>
+            <a:endParaRPr lang="en-US" sz="1000" dirty="0"/>
+          </a:p>
+        </p:txBody>
+      </p:sp>
+      <p:sp>
+        <p:nvSpPr>
+          <p:cNvPr id="9" name="Shape 7"/>
+          <p:cNvSpPr/>
+          <p:nvPr/>
+        </p:nvSpPr>
+        <p:spPr>
+          <a:xfrm>
+            <a:off x="548640" y="2240280"/>
+            <a:ext cx="3474720" cy="18288"/>
+          </a:xfrm>
+          <a:prstGeom prst="rect">
+            <a:avLst/>
+          </a:prstGeom>
+          <a:solidFill>
+            <a:srgbClr val="E9ECEF"/>
+          </a:solidFill>
+          <a:ln/>
+        </p:spPr>
+      </p:sp>
+      <p:sp>
+        <p:nvSpPr>
+          <p:cNvPr id="10" name="Text 8"/>
+          <p:cNvSpPr/>
+          <p:nvPr/>
+        </p:nvSpPr>
+        <p:spPr>
+          <a:xfrm>
+            <a:off x="548640" y="2377440"/>
+            <a:ext cx="3474720" cy="365760"/>
+          </a:xfrm>
+          <a:prstGeom prst="rect">
+            <a:avLst/>
+          </a:prstGeom>
+          <a:noFill/>
+          <a:ln/>
+        </p:spPr>
+        <p:txBody>
+          <a:bodyPr wrap="square" rtlCol="0" anchor="ctr"/>
+          <a:lstStyle/>
+          <a:p>
+            <a:pPr indent="0" marL="0">
+              <a:buNone/>
+            </a:pPr>
+            <a:r>
+              <a:rPr lang="en-US" sz="1000" dirty="0">
+                <a:solidFill>
+                  <a:srgbClr val="2C3E50"/>
+                </a:solidFill>
+                <a:latin typeface="SimSun" pitchFamily="34" charset="0"/>
+                <a:ea typeface="SimSun" pitchFamily="34" charset="-122"/>
+                <a:cs typeface="SimSun" pitchFamily="34" charset="-120"/>
+              </a:rPr>
+              <a:t>✓ 轮播图管理</a:t>
+            </a:r>
+            <a:endParaRPr lang="en-US" sz="1000" dirty="0"/>
+          </a:p>
+        </p:txBody>
+      </p:sp>
+      <p:sp>
+        <p:nvSpPr>
+          <p:cNvPr id="11" name="Text 9"/>
+          <p:cNvSpPr/>
+          <p:nvPr/>
+        </p:nvSpPr>
+        <p:spPr>
+          <a:xfrm>
+            <a:off x="548640" y="2788920"/>
+            <a:ext cx="3474720" cy="365760"/>
+          </a:xfrm>
+          <a:prstGeom prst="rect">
+            <a:avLst/>
+          </a:prstGeom>
+          <a:noFill/>
+          <a:ln/>
+        </p:spPr>
+        <p:txBody>
+          <a:bodyPr wrap="square" rtlCol="0" anchor="ctr"/>
+          <a:lstStyle/>
+          <a:p>
+            <a:pPr indent="0" marL="0">
+              <a:buNone/>
+            </a:pPr>
+            <a:r>
+              <a:rPr lang="en-US" sz="1000" dirty="0">
+                <a:solidFill>
+                  <a:srgbClr val="2C3E50"/>
+                </a:solidFill>
+                <a:latin typeface="SimSun" pitchFamily="34" charset="0"/>
+                <a:ea typeface="SimSun" pitchFamily="34" charset="-122"/>
+                <a:cs typeface="SimSun" pitchFamily="34" charset="-120"/>
+              </a:rPr>
+              <a:t>✓ 系统简介配置</a:t>
+            </a:r>
+            <a:endParaRPr lang="en-US" sz="1000" dirty="0"/>
+          </a:p>
+        </p:txBody>
+      </p:sp>
+      <p:sp>
+        <p:nvSpPr>
+          <p:cNvPr id="12" name="Text 10"/>
+          <p:cNvSpPr/>
+          <p:nvPr/>
+        </p:nvSpPr>
+        <p:spPr>
+          <a:xfrm>
+            <a:off x="548640" y="3200400"/>
+            <a:ext cx="3474720" cy="365760"/>
+          </a:xfrm>
+          <a:prstGeom prst="rect">
+            <a:avLst/>
+          </a:prstGeom>
+          <a:noFill/>
+          <a:ln/>
+        </p:spPr>
+        <p:txBody>
+          <a:bodyPr wrap="square" rtlCol="0" anchor="ctr"/>
+          <a:lstStyle/>
+          <a:p>
+            <a:pPr indent="0" marL="0">
+              <a:buNone/>
+            </a:pPr>
+            <a:r>
+              <a:rPr lang="en-US" sz="1000" dirty="0">
+                <a:solidFill>
+                  <a:srgbClr val="2C3E50"/>
+                </a:solidFill>
+                <a:latin typeface="SimSun" pitchFamily="34" charset="0"/>
+                <a:ea typeface="SimSun" pitchFamily="34" charset="-122"/>
+                <a:cs typeface="SimSun" pitchFamily="34" charset="-120"/>
+              </a:rPr>
+              <a:t>✓ 系统参数设置</a:t>
+            </a:r>
+            <a:endParaRPr lang="en-US" sz="1000" dirty="0"/>
+          </a:p>
+        </p:txBody>
+      </p:sp>
+      <p:sp>
+        <p:nvSpPr>
+          <p:cNvPr id="13" name="Text 11"/>
+          <p:cNvSpPr/>
+          <p:nvPr/>
+        </p:nvSpPr>
+        <p:spPr>
+          <a:xfrm>
+            <a:off x="548640" y="3611880"/>
+            <a:ext cx="3474720" cy="365760"/>
+          </a:xfrm>
+          <a:prstGeom prst="rect">
+            <a:avLst/>
+          </a:prstGeom>
+          <a:noFill/>
+          <a:ln/>
+        </p:spPr>
+        <p:txBody>
+          <a:bodyPr wrap="square" rtlCol="0" anchor="ctr"/>
+          <a:lstStyle/>
+          <a:p>
+            <a:pPr indent="0" marL="0">
+              <a:buNone/>
+            </a:pPr>
+            <a:r>
+              <a:rPr lang="en-US" sz="1000" dirty="0">
+                <a:solidFill>
+                  <a:srgbClr val="2C3E50"/>
+                </a:solidFill>
+                <a:latin typeface="SimSun" pitchFamily="34" charset="0"/>
+                <a:ea typeface="SimSun" pitchFamily="34" charset="-122"/>
+                <a:cs typeface="SimSun" pitchFamily="34" charset="-120"/>
+              </a:rPr>
+              <a:t>✓ 操作日志查看</a:t>
+            </a:r>
+            <a:endParaRPr lang="en-US" sz="1000" dirty="0"/>
+          </a:p>
+        </p:txBody>
+      </p:sp>
+      <p:sp>
+        <p:nvSpPr>
+          <p:cNvPr id="14" name="Shape 12"/>
+          <p:cNvSpPr/>
+          <p:nvPr/>
+        </p:nvSpPr>
+        <p:spPr>
+          <a:xfrm>
+            <a:off x="4389120" y="914400"/>
+            <a:ext cx="4389120" cy="3657600"/>
+          </a:xfrm>
+          <a:prstGeom prst="roundRect">
+            <a:avLst>
+              <a:gd name="adj" fmla="val 2000"/>
+            </a:avLst>
+          </a:prstGeom>
+          <a:solidFill>
+            <a:srgbClr val="FFFFFF"/>
+          </a:solidFill>
+          <a:ln/>
+          <a:effectLst>
+            <a:outerShdw sx="100000" sy="100000" kx="0" ky="0" algn="bl" rotWithShape="0" blurRad="38100" dist="12700" dir="16200000">
+              <a:srgbClr val="00000010">
+                <a:alpha val="75000"/>
+              </a:srgbClr>
+            </a:outerShdw>
+          </a:effectLst>
+        </p:spPr>
+      </p:sp>
       <p:pic>
         <p:nvPicPr>
-          <p:cNvPr id="6" name="Image 0" descr="/workspace/assets/fig5_17_system_manage.png">    </p:cNvPr>
+          <p:cNvPr id="15" name="Image 0" descr="/workspace/assets/fig5_17_system_manage.png">    </p:cNvPr>
           <p:cNvPicPr>
             <a:picLocks noChangeAspect="1"/>
           </p:cNvPicPr>
@@ -12630,297 +13143,14 @@
         </p:blipFill>
         <p:spPr>
           <a:xfrm>
-            <a:off x="457200" y="1005840"/>
-            <a:ext cx="8229600" cy="2103120"/>
+            <a:off x="4480560" y="1005840"/>
+            <a:ext cx="4206240" cy="3474720"/>
           </a:xfrm>
           <a:prstGeom prst="rect">
             <a:avLst/>
           </a:prstGeom>
         </p:spPr>
       </p:pic>
-      <p:sp>
-        <p:nvSpPr>
-          <p:cNvPr id="7" name="Shape 4"/>
-          <p:cNvSpPr/>
-          <p:nvPr/>
-        </p:nvSpPr>
-        <p:spPr>
-          <a:xfrm>
-            <a:off x="365760" y="3337560"/>
-            <a:ext cx="8412480" cy="1417320"/>
-          </a:xfrm>
-          <a:prstGeom prst="roundRect">
-            <a:avLst>
-              <a:gd name="adj" fmla="val 5161"/>
-            </a:avLst>
-          </a:prstGeom>
-          <a:solidFill>
-            <a:srgbClr val="FFFFFF"/>
-          </a:solidFill>
-          <a:ln/>
-          <a:effectLst>
-            <a:outerShdw sx="100000" sy="100000" kx="0" ky="0" algn="bl" rotWithShape="0" blurRad="38100" dist="12700" dir="16200000">
-              <a:srgbClr val="00000010">
-                <a:alpha val="75000"/>
-              </a:srgbClr>
-            </a:outerShdw>
-          </a:effectLst>
-        </p:spPr>
-      </p:sp>
-      <p:sp>
-        <p:nvSpPr>
-          <p:cNvPr id="8" name="Shape 5"/>
-          <p:cNvSpPr/>
-          <p:nvPr/>
-        </p:nvSpPr>
-        <p:spPr>
-          <a:xfrm>
-            <a:off x="365760" y="3337560"/>
-            <a:ext cx="54864" cy="1417320"/>
-          </a:xfrm>
-          <a:prstGeom prst="rect">
-            <a:avLst/>
-          </a:prstGeom>
-          <a:solidFill>
-            <a:srgbClr val="C9A227"/>
-          </a:solidFill>
-          <a:ln/>
-        </p:spPr>
-      </p:sp>
-      <p:sp>
-        <p:nvSpPr>
-          <p:cNvPr id="9" name="Text 6"/>
-          <p:cNvSpPr/>
-          <p:nvPr/>
-        </p:nvSpPr>
-        <p:spPr>
-          <a:xfrm>
-            <a:off x="548640" y="3429000"/>
-            <a:ext cx="1828800" cy="320040"/>
-          </a:xfrm>
-          <a:prstGeom prst="rect">
-            <a:avLst/>
-          </a:prstGeom>
-          <a:noFill/>
-          <a:ln/>
-        </p:spPr>
-        <p:txBody>
-          <a:bodyPr wrap="square" rtlCol="0" anchor="ctr"/>
-          <a:lstStyle/>
-          <a:p>
-            <a:pPr indent="0" marL="0">
-              <a:buNone/>
-            </a:pPr>
-            <a:r>
-              <a:rPr lang="en-US" sz="1300" b="1" dirty="0">
-                <a:solidFill>
-                  <a:srgbClr val="1E3A5F"/>
-                </a:solidFill>
-                <a:latin typeface="SimHei" pitchFamily="34" charset="0"/>
-                <a:ea typeface="SimHei" pitchFamily="34" charset="-122"/>
-                <a:cs typeface="SimHei" pitchFamily="34" charset="-120"/>
-              </a:rPr>
-              <a:t>功能说明</a:t>
-            </a:r>
-            <a:endParaRPr lang="en-US" sz="1300" dirty="0"/>
-          </a:p>
-        </p:txBody>
-      </p:sp>
-      <p:sp>
-        <p:nvSpPr>
-          <p:cNvPr id="10" name="Text 7"/>
-          <p:cNvSpPr/>
-          <p:nvPr/>
-        </p:nvSpPr>
-        <p:spPr>
-          <a:xfrm>
-            <a:off x="548640" y="3749040"/>
-            <a:ext cx="8046720" cy="365760"/>
-          </a:xfrm>
-          <a:prstGeom prst="rect">
-            <a:avLst/>
-          </a:prstGeom>
-          <a:noFill/>
-          <a:ln/>
-        </p:spPr>
-        <p:txBody>
-          <a:bodyPr wrap="square" rtlCol="0" anchor="t"/>
-          <a:lstStyle/>
-          <a:p>
-            <a:pPr indent="0" marL="0">
-              <a:buNone/>
-            </a:pPr>
-            <a:r>
-              <a:rPr lang="en-US" sz="1000" dirty="0">
-                <a:solidFill>
-                  <a:srgbClr val="2C3E50"/>
-                </a:solidFill>
-                <a:latin typeface="SimSun" pitchFamily="34" charset="0"/>
-                <a:ea typeface="SimSun" pitchFamily="34" charset="-122"/>
-                <a:cs typeface="SimSun" pitchFamily="34" charset="-120"/>
-              </a:rPr>
-              <a:t>系统管理功能允许管理员管理轮播图、系统简介等基础信息，配置系统参数，查看操作日志，保障系统安全稳定运行。</a:t>
-            </a:r>
-            <a:endParaRPr lang="en-US" sz="1000" dirty="0"/>
-          </a:p>
-        </p:txBody>
-      </p:sp>
-      <p:sp>
-        <p:nvSpPr>
-          <p:cNvPr id="11" name="Text 8"/>
-          <p:cNvSpPr/>
-          <p:nvPr/>
-        </p:nvSpPr>
-        <p:spPr>
-          <a:xfrm>
-            <a:off x="548640" y="4160520"/>
-            <a:ext cx="2011680" cy="274320"/>
-          </a:xfrm>
-          <a:prstGeom prst="rect">
-            <a:avLst/>
-          </a:prstGeom>
-          <a:noFill/>
-          <a:ln/>
-        </p:spPr>
-        <p:txBody>
-          <a:bodyPr wrap="square" rtlCol="0" anchor="ctr"/>
-          <a:lstStyle/>
-          <a:p>
-            <a:pPr indent="0" marL="0">
-              <a:buNone/>
-            </a:pPr>
-            <a:r>
-              <a:rPr lang="en-US" sz="900" dirty="0">
-                <a:solidFill>
-                  <a:srgbClr val="2C3E50"/>
-                </a:solidFill>
-                <a:latin typeface="SimSun" pitchFamily="34" charset="0"/>
-                <a:ea typeface="SimSun" pitchFamily="34" charset="-122"/>
-                <a:cs typeface="SimSun" pitchFamily="34" charset="-120"/>
-              </a:rPr>
-              <a:t>✓ 轮播图管理</a:t>
-            </a:r>
-            <a:endParaRPr lang="en-US" sz="900" dirty="0"/>
-          </a:p>
-        </p:txBody>
-      </p:sp>
-      <p:sp>
-        <p:nvSpPr>
-          <p:cNvPr id="12" name="Text 9"/>
-          <p:cNvSpPr/>
-          <p:nvPr/>
-        </p:nvSpPr>
-        <p:spPr>
-          <a:xfrm>
-            <a:off x="2651760" y="4160520"/>
-            <a:ext cx="2011680" cy="274320"/>
-          </a:xfrm>
-          <a:prstGeom prst="rect">
-            <a:avLst/>
-          </a:prstGeom>
-          <a:noFill/>
-          <a:ln/>
-        </p:spPr>
-        <p:txBody>
-          <a:bodyPr wrap="square" rtlCol="0" anchor="ctr"/>
-          <a:lstStyle/>
-          <a:p>
-            <a:pPr indent="0" marL="0">
-              <a:buNone/>
-            </a:pPr>
-            <a:r>
-              <a:rPr lang="en-US" sz="900" dirty="0">
-                <a:solidFill>
-                  <a:srgbClr val="2C3E50"/>
-                </a:solidFill>
-                <a:latin typeface="SimSun" pitchFamily="34" charset="0"/>
-                <a:ea typeface="SimSun" pitchFamily="34" charset="-122"/>
-                <a:cs typeface="SimSun" pitchFamily="34" charset="-120"/>
-              </a:rPr>
-              <a:t>✓ 系统简介配置</a:t>
-            </a:r>
-            <a:endParaRPr lang="en-US" sz="900" dirty="0"/>
-          </a:p>
-        </p:txBody>
-      </p:sp>
-      <p:sp>
-        <p:nvSpPr>
-          <p:cNvPr id="13" name="Text 10"/>
-          <p:cNvSpPr/>
-          <p:nvPr/>
-        </p:nvSpPr>
-        <p:spPr>
-          <a:xfrm>
-            <a:off x="4754880" y="4160520"/>
-            <a:ext cx="2011680" cy="274320"/>
-          </a:xfrm>
-          <a:prstGeom prst="rect">
-            <a:avLst/>
-          </a:prstGeom>
-          <a:noFill/>
-          <a:ln/>
-        </p:spPr>
-        <p:txBody>
-          <a:bodyPr wrap="square" rtlCol="0" anchor="ctr"/>
-          <a:lstStyle/>
-          <a:p>
-            <a:pPr indent="0" marL="0">
-              <a:buNone/>
-            </a:pPr>
-            <a:r>
-              <a:rPr lang="en-US" sz="900" dirty="0">
-                <a:solidFill>
-                  <a:srgbClr val="2C3E50"/>
-                </a:solidFill>
-                <a:latin typeface="SimSun" pitchFamily="34" charset="0"/>
-                <a:ea typeface="SimSun" pitchFamily="34" charset="-122"/>
-                <a:cs typeface="SimSun" pitchFamily="34" charset="-120"/>
-              </a:rPr>
-              <a:t>✓ 系统参数设置</a:t>
-            </a:r>
-            <a:endParaRPr lang="en-US" sz="900" dirty="0"/>
-          </a:p>
-        </p:txBody>
-      </p:sp>
-      <p:sp>
-        <p:nvSpPr>
-          <p:cNvPr id="14" name="Text 11"/>
-          <p:cNvSpPr/>
-          <p:nvPr/>
-        </p:nvSpPr>
-        <p:spPr>
-          <a:xfrm>
-            <a:off x="6858000" y="4160520"/>
-            <a:ext cx="2011680" cy="274320"/>
-          </a:xfrm>
-          <a:prstGeom prst="rect">
-            <a:avLst/>
-          </a:prstGeom>
-          <a:noFill/>
-          <a:ln/>
-        </p:spPr>
-        <p:txBody>
-          <a:bodyPr wrap="square" rtlCol="0" anchor="ctr"/>
-          <a:lstStyle/>
-          <a:p>
-            <a:pPr indent="0" marL="0">
-              <a:buNone/>
-            </a:pPr>
-            <a:r>
-              <a:rPr lang="en-US" sz="900" dirty="0">
-                <a:solidFill>
-                  <a:srgbClr val="2C3E50"/>
-                </a:solidFill>
-                <a:latin typeface="SimSun" pitchFamily="34" charset="0"/>
-                <a:ea typeface="SimSun" pitchFamily="34" charset="-122"/>
-                <a:cs typeface="SimSun" pitchFamily="34" charset="-120"/>
-              </a:rPr>
-              <a:t>✓ 操作日志查看</a:t>
-            </a:r>
-            <a:endParaRPr lang="en-US" sz="900" dirty="0"/>
-          </a:p>
-        </p:txBody>
-      </p:sp>
     </p:spTree>
   </p:cSld>
   <p:clrMapOvr>

--- a/生鲜超市综合管理系统_毕业答辩PPT.pptx
+++ b/生鲜超市综合管理系统_毕业答辩PPT.pptx
@@ -4271,6 +4271,45 @@
           </a:p>
         </p:txBody>
       </p:sp>
+      <p:sp>
+        <p:nvSpPr>
+          <p:cNvPr id="21" name="Watermark"/>
+          <p:cNvSpPr txBox="1"/>
+          <p:nvPr/>
+        </p:nvSpPr>
+        <p:spPr>
+          <a:xfrm rot="0">
+            <a:off x="6836000" y="4685500"/>
+            <a:ext cx="2200000" cy="350000"/>
+          </a:xfrm>
+          <a:prstGeom prst="rect">
+            <a:avLst/>
+          </a:prstGeom>
+          <a:noFill/>
+          <a:ln>
+            <a:noFill/>
+          </a:ln>
+        </p:spPr>
+        <p:txBody>
+          <a:bodyPr wrap="square" rtlCol="0" anchor="b" lIns="0" tIns="0" rIns="91440" bIns="45720"/>
+          <a:lstStyle/>
+          <a:p>
+            <a:pPr algn="r"/>
+            <a:r>
+              <a:rPr lang="zh-CN" sz="1600" dirty="0">
+                <a:solidFill>
+                  <a:srgbClr val="808080">
+                    <a:alpha val="19999"/>
+                  </a:srgbClr>
+                </a:solidFill>
+                <a:latin typeface="Arial"/>
+                <a:ea typeface="SimSun"/>
+              </a:rPr>
+              <a:t>TRAE AI 生成</a:t>
+            </a:r>
+          </a:p>
+        </p:txBody>
+      </p:sp>
     </p:spTree>
   </p:cSld>
   <p:clrMapOvr>
@@ -4679,6 +4718,45 @@
           </a:p>
         </p:txBody>
       </p:sp>
+      <p:sp>
+        <p:nvSpPr>
+          <p:cNvPr id="14" name="Watermark"/>
+          <p:cNvSpPr txBox="1"/>
+          <p:nvPr/>
+        </p:nvSpPr>
+        <p:spPr>
+          <a:xfrm rot="0">
+            <a:off x="6836000" y="4685500"/>
+            <a:ext cx="2200000" cy="350000"/>
+          </a:xfrm>
+          <a:prstGeom prst="rect">
+            <a:avLst/>
+          </a:prstGeom>
+          <a:noFill/>
+          <a:ln>
+            <a:noFill/>
+          </a:ln>
+        </p:spPr>
+        <p:txBody>
+          <a:bodyPr wrap="square" rtlCol="0" anchor="b" lIns="0" tIns="0" rIns="91440" bIns="45720"/>
+          <a:lstStyle/>
+          <a:p>
+            <a:pPr algn="r"/>
+            <a:r>
+              <a:rPr lang="zh-CN" sz="1600" dirty="0">
+                <a:solidFill>
+                  <a:srgbClr val="808080">
+                    <a:alpha val="19999"/>
+                  </a:srgbClr>
+                </a:solidFill>
+                <a:latin typeface="Arial"/>
+                <a:ea typeface="SimSun"/>
+              </a:rPr>
+              <a:t>TRAE AI 生成</a:t>
+            </a:r>
+          </a:p>
+        </p:txBody>
+      </p:sp>
     </p:spTree>
   </p:cSld>
   <p:clrMapOvr>
@@ -5165,6 +5243,45 @@
           </a:p>
         </p:txBody>
       </p:sp>
+      <p:sp>
+        <p:nvSpPr>
+          <p:cNvPr id="16" name="Watermark"/>
+          <p:cNvSpPr txBox="1"/>
+          <p:nvPr/>
+        </p:nvSpPr>
+        <p:spPr>
+          <a:xfrm rot="0">
+            <a:off x="6836000" y="4685500"/>
+            <a:ext cx="2200000" cy="350000"/>
+          </a:xfrm>
+          <a:prstGeom prst="rect">
+            <a:avLst/>
+          </a:prstGeom>
+          <a:noFill/>
+          <a:ln>
+            <a:noFill/>
+          </a:ln>
+        </p:spPr>
+        <p:txBody>
+          <a:bodyPr wrap="square" rtlCol="0" anchor="b" lIns="0" tIns="0" rIns="91440" bIns="45720"/>
+          <a:lstStyle/>
+          <a:p>
+            <a:pPr algn="r"/>
+            <a:r>
+              <a:rPr lang="zh-CN" sz="1600" dirty="0">
+                <a:solidFill>
+                  <a:srgbClr val="808080">
+                    <a:alpha val="19999"/>
+                  </a:srgbClr>
+                </a:solidFill>
+                <a:latin typeface="Arial"/>
+                <a:ea typeface="SimSun"/>
+              </a:rPr>
+              <a:t>TRAE AI 生成</a:t>
+            </a:r>
+          </a:p>
+        </p:txBody>
+      </p:sp>
     </p:spTree>
   </p:cSld>
   <p:clrMapOvr>
@@ -5635,6 +5752,45 @@
           </a:p>
         </p:txBody>
       </p:sp>
+      <p:sp>
+        <p:nvSpPr>
+          <p:cNvPr id="16" name="Watermark"/>
+          <p:cNvSpPr txBox="1"/>
+          <p:nvPr/>
+        </p:nvSpPr>
+        <p:spPr>
+          <a:xfrm rot="0">
+            <a:off x="6836000" y="4685500"/>
+            <a:ext cx="2200000" cy="350000"/>
+          </a:xfrm>
+          <a:prstGeom prst="rect">
+            <a:avLst/>
+          </a:prstGeom>
+          <a:noFill/>
+          <a:ln>
+            <a:noFill/>
+          </a:ln>
+        </p:spPr>
+        <p:txBody>
+          <a:bodyPr wrap="square" rtlCol="0" anchor="b" lIns="0" tIns="0" rIns="91440" bIns="45720"/>
+          <a:lstStyle/>
+          <a:p>
+            <a:pPr algn="r"/>
+            <a:r>
+              <a:rPr lang="zh-CN" sz="1600" dirty="0">
+                <a:solidFill>
+                  <a:srgbClr val="808080">
+                    <a:alpha val="19999"/>
+                  </a:srgbClr>
+                </a:solidFill>
+                <a:latin typeface="Arial"/>
+                <a:ea typeface="SimSun"/>
+              </a:rPr>
+              <a:t>TRAE AI 生成</a:t>
+            </a:r>
+          </a:p>
+        </p:txBody>
+      </p:sp>
     </p:spTree>
   </p:cSld>
   <p:clrMapOvr>
@@ -6082,6 +6238,45 @@
           </a:p>
         </p:txBody>
       </p:sp>
+      <p:sp>
+        <p:nvSpPr>
+          <p:cNvPr id="15" name="Watermark"/>
+          <p:cNvSpPr txBox="1"/>
+          <p:nvPr/>
+        </p:nvSpPr>
+        <p:spPr>
+          <a:xfrm rot="0">
+            <a:off x="6836000" y="4685500"/>
+            <a:ext cx="2200000" cy="350000"/>
+          </a:xfrm>
+          <a:prstGeom prst="rect">
+            <a:avLst/>
+          </a:prstGeom>
+          <a:noFill/>
+          <a:ln>
+            <a:noFill/>
+          </a:ln>
+        </p:spPr>
+        <p:txBody>
+          <a:bodyPr wrap="square" rtlCol="0" anchor="b" lIns="0" tIns="0" rIns="91440" bIns="45720"/>
+          <a:lstStyle/>
+          <a:p>
+            <a:pPr algn="r"/>
+            <a:r>
+              <a:rPr lang="zh-CN" sz="1600" dirty="0">
+                <a:solidFill>
+                  <a:srgbClr val="808080">
+                    <a:alpha val="19999"/>
+                  </a:srgbClr>
+                </a:solidFill>
+                <a:latin typeface="Arial"/>
+                <a:ea typeface="SimSun"/>
+              </a:rPr>
+              <a:t>TRAE AI 生成</a:t>
+            </a:r>
+          </a:p>
+        </p:txBody>
+      </p:sp>
     </p:spTree>
   </p:cSld>
   <p:clrMapOvr>
@@ -6358,6 +6553,45 @@
           </a:p>
         </p:txBody>
       </p:sp>
+      <p:sp>
+        <p:nvSpPr>
+          <p:cNvPr id="10" name="Watermark"/>
+          <p:cNvSpPr txBox="1"/>
+          <p:nvPr/>
+        </p:nvSpPr>
+        <p:spPr>
+          <a:xfrm rot="0">
+            <a:off x="6836000" y="4685500"/>
+            <a:ext cx="2200000" cy="350000"/>
+          </a:xfrm>
+          <a:prstGeom prst="rect">
+            <a:avLst/>
+          </a:prstGeom>
+          <a:noFill/>
+          <a:ln>
+            <a:noFill/>
+          </a:ln>
+        </p:spPr>
+        <p:txBody>
+          <a:bodyPr wrap="square" rtlCol="0" anchor="b" lIns="0" tIns="0" rIns="91440" bIns="45720"/>
+          <a:lstStyle/>
+          <a:p>
+            <a:pPr algn="r"/>
+            <a:r>
+              <a:rPr lang="zh-CN" sz="1600" dirty="0">
+                <a:solidFill>
+                  <a:srgbClr val="808080">
+                    <a:alpha val="19999"/>
+                  </a:srgbClr>
+                </a:solidFill>
+                <a:latin typeface="Arial"/>
+                <a:ea typeface="SimSun"/>
+              </a:rPr>
+              <a:t>TRAE AI 生成</a:t>
+            </a:r>
+          </a:p>
+        </p:txBody>
+      </p:sp>
     </p:spTree>
   </p:cSld>
   <p:clrMapOvr>
@@ -6766,6 +7000,45 @@
           </a:p>
         </p:txBody>
       </p:sp>
+      <p:sp>
+        <p:nvSpPr>
+          <p:cNvPr id="14" name="Watermark"/>
+          <p:cNvSpPr txBox="1"/>
+          <p:nvPr/>
+        </p:nvSpPr>
+        <p:spPr>
+          <a:xfrm rot="0">
+            <a:off x="6836000" y="4685500"/>
+            <a:ext cx="2200000" cy="350000"/>
+          </a:xfrm>
+          <a:prstGeom prst="rect">
+            <a:avLst/>
+          </a:prstGeom>
+          <a:noFill/>
+          <a:ln>
+            <a:noFill/>
+          </a:ln>
+        </p:spPr>
+        <p:txBody>
+          <a:bodyPr wrap="square" rtlCol="0" anchor="b" lIns="0" tIns="0" rIns="91440" bIns="45720"/>
+          <a:lstStyle/>
+          <a:p>
+            <a:pPr algn="r"/>
+            <a:r>
+              <a:rPr lang="zh-CN" sz="1600" dirty="0">
+                <a:solidFill>
+                  <a:srgbClr val="808080">
+                    <a:alpha val="19999"/>
+                  </a:srgbClr>
+                </a:solidFill>
+                <a:latin typeface="Arial"/>
+                <a:ea typeface="SimSun"/>
+              </a:rPr>
+              <a:t>TRAE AI 生成</a:t>
+            </a:r>
+          </a:p>
+        </p:txBody>
+      </p:sp>
     </p:spTree>
   </p:cSld>
   <p:clrMapOvr>
@@ -7213,6 +7486,45 @@
           </a:p>
         </p:txBody>
       </p:sp>
+      <p:sp>
+        <p:nvSpPr>
+          <p:cNvPr id="15" name="Watermark"/>
+          <p:cNvSpPr txBox="1"/>
+          <p:nvPr/>
+        </p:nvSpPr>
+        <p:spPr>
+          <a:xfrm rot="0">
+            <a:off x="6836000" y="4685500"/>
+            <a:ext cx="2200000" cy="350000"/>
+          </a:xfrm>
+          <a:prstGeom prst="rect">
+            <a:avLst/>
+          </a:prstGeom>
+          <a:noFill/>
+          <a:ln>
+            <a:noFill/>
+          </a:ln>
+        </p:spPr>
+        <p:txBody>
+          <a:bodyPr wrap="square" rtlCol="0" anchor="b" lIns="0" tIns="0" rIns="91440" bIns="45720"/>
+          <a:lstStyle/>
+          <a:p>
+            <a:pPr algn="r"/>
+            <a:r>
+              <a:rPr lang="zh-CN" sz="1600" dirty="0">
+                <a:solidFill>
+                  <a:srgbClr val="808080">
+                    <a:alpha val="19999"/>
+                  </a:srgbClr>
+                </a:solidFill>
+                <a:latin typeface="Arial"/>
+                <a:ea typeface="SimSun"/>
+              </a:rPr>
+              <a:t>TRAE AI 生成</a:t>
+            </a:r>
+          </a:p>
+        </p:txBody>
+      </p:sp>
     </p:spTree>
   </p:cSld>
   <p:clrMapOvr>
@@ -7489,6 +7801,45 @@
           </a:p>
         </p:txBody>
       </p:sp>
+      <p:sp>
+        <p:nvSpPr>
+          <p:cNvPr id="10" name="Watermark"/>
+          <p:cNvSpPr txBox="1"/>
+          <p:nvPr/>
+        </p:nvSpPr>
+        <p:spPr>
+          <a:xfrm rot="0">
+            <a:off x="6836000" y="4685500"/>
+            <a:ext cx="2200000" cy="350000"/>
+          </a:xfrm>
+          <a:prstGeom prst="rect">
+            <a:avLst/>
+          </a:prstGeom>
+          <a:noFill/>
+          <a:ln>
+            <a:noFill/>
+          </a:ln>
+        </p:spPr>
+        <p:txBody>
+          <a:bodyPr wrap="square" rtlCol="0" anchor="b" lIns="0" tIns="0" rIns="91440" bIns="45720"/>
+          <a:lstStyle/>
+          <a:p>
+            <a:pPr algn="r"/>
+            <a:r>
+              <a:rPr lang="zh-CN" sz="1600" dirty="0">
+                <a:solidFill>
+                  <a:srgbClr val="808080">
+                    <a:alpha val="19999"/>
+                  </a:srgbClr>
+                </a:solidFill>
+                <a:latin typeface="Arial"/>
+                <a:ea typeface="SimSun"/>
+              </a:rPr>
+              <a:t>TRAE AI 生成</a:t>
+            </a:r>
+          </a:p>
+        </p:txBody>
+      </p:sp>
     </p:spTree>
   </p:cSld>
   <p:clrMapOvr>
@@ -7959,6 +8310,45 @@
           </a:p>
         </p:txBody>
       </p:sp>
+      <p:sp>
+        <p:nvSpPr>
+          <p:cNvPr id="16" name="Watermark"/>
+          <p:cNvSpPr txBox="1"/>
+          <p:nvPr/>
+        </p:nvSpPr>
+        <p:spPr>
+          <a:xfrm rot="0">
+            <a:off x="6836000" y="4685500"/>
+            <a:ext cx="2200000" cy="350000"/>
+          </a:xfrm>
+          <a:prstGeom prst="rect">
+            <a:avLst/>
+          </a:prstGeom>
+          <a:noFill/>
+          <a:ln>
+            <a:noFill/>
+          </a:ln>
+        </p:spPr>
+        <p:txBody>
+          <a:bodyPr wrap="square" rtlCol="0" anchor="b" lIns="0" tIns="0" rIns="91440" bIns="45720"/>
+          <a:lstStyle/>
+          <a:p>
+            <a:pPr algn="r"/>
+            <a:r>
+              <a:rPr lang="zh-CN" sz="1600" dirty="0">
+                <a:solidFill>
+                  <a:srgbClr val="808080">
+                    <a:alpha val="19999"/>
+                  </a:srgbClr>
+                </a:solidFill>
+                <a:latin typeface="Arial"/>
+                <a:ea typeface="SimSun"/>
+              </a:rPr>
+              <a:t>TRAE AI 生成</a:t>
+            </a:r>
+          </a:p>
+        </p:txBody>
+      </p:sp>
     </p:spTree>
   </p:cSld>
   <p:clrMapOvr>
@@ -8429,6 +8819,45 @@
           </a:prstGeom>
         </p:spPr>
       </p:pic>
+      <p:sp>
+        <p:nvSpPr>
+          <p:cNvPr id="16" name="Watermark"/>
+          <p:cNvSpPr txBox="1"/>
+          <p:nvPr/>
+        </p:nvSpPr>
+        <p:spPr>
+          <a:xfrm rot="0">
+            <a:off x="6836000" y="4685500"/>
+            <a:ext cx="2200000" cy="350000"/>
+          </a:xfrm>
+          <a:prstGeom prst="rect">
+            <a:avLst/>
+          </a:prstGeom>
+          <a:noFill/>
+          <a:ln>
+            <a:noFill/>
+          </a:ln>
+        </p:spPr>
+        <p:txBody>
+          <a:bodyPr wrap="square" rtlCol="0" anchor="b" lIns="0" tIns="0" rIns="91440" bIns="45720"/>
+          <a:lstStyle/>
+          <a:p>
+            <a:pPr algn="r"/>
+            <a:r>
+              <a:rPr lang="zh-CN" sz="1600" dirty="0">
+                <a:solidFill>
+                  <a:srgbClr val="808080">
+                    <a:alpha val="19999"/>
+                  </a:srgbClr>
+                </a:solidFill>
+                <a:latin typeface="Arial"/>
+                <a:ea typeface="SimSun"/>
+              </a:rPr>
+              <a:t>TRAE AI 生成</a:t>
+            </a:r>
+          </a:p>
+        </p:txBody>
+      </p:sp>
     </p:spTree>
   </p:cSld>
   <p:clrMapOvr>
@@ -9391,6 +9820,45 @@
           </a:p>
         </p:txBody>
       </p:sp>
+      <p:sp>
+        <p:nvSpPr>
+          <p:cNvPr id="33" name="Watermark"/>
+          <p:cNvSpPr txBox="1"/>
+          <p:nvPr/>
+        </p:nvSpPr>
+        <p:spPr>
+          <a:xfrm rot="0">
+            <a:off x="6836000" y="4685500"/>
+            <a:ext cx="2200000" cy="350000"/>
+          </a:xfrm>
+          <a:prstGeom prst="rect">
+            <a:avLst/>
+          </a:prstGeom>
+          <a:noFill/>
+          <a:ln>
+            <a:noFill/>
+          </a:ln>
+        </p:spPr>
+        <p:txBody>
+          <a:bodyPr wrap="square" rtlCol="0" anchor="b" lIns="0" tIns="0" rIns="91440" bIns="45720"/>
+          <a:lstStyle/>
+          <a:p>
+            <a:pPr algn="r"/>
+            <a:r>
+              <a:rPr lang="zh-CN" sz="1600" dirty="0">
+                <a:solidFill>
+                  <a:srgbClr val="808080">
+                    <a:alpha val="19999"/>
+                  </a:srgbClr>
+                </a:solidFill>
+                <a:latin typeface="Arial"/>
+                <a:ea typeface="SimSun"/>
+              </a:rPr>
+              <a:t>TRAE AI 生成</a:t>
+            </a:r>
+          </a:p>
+        </p:txBody>
+      </p:sp>
     </p:spTree>
   </p:cSld>
   <p:clrMapOvr>
@@ -9861,6 +10329,45 @@
           </a:p>
         </p:txBody>
       </p:sp>
+      <p:sp>
+        <p:nvSpPr>
+          <p:cNvPr id="16" name="Watermark"/>
+          <p:cNvSpPr txBox="1"/>
+          <p:nvPr/>
+        </p:nvSpPr>
+        <p:spPr>
+          <a:xfrm rot="0">
+            <a:off x="6836000" y="4685500"/>
+            <a:ext cx="2200000" cy="350000"/>
+          </a:xfrm>
+          <a:prstGeom prst="rect">
+            <a:avLst/>
+          </a:prstGeom>
+          <a:noFill/>
+          <a:ln>
+            <a:noFill/>
+          </a:ln>
+        </p:spPr>
+        <p:txBody>
+          <a:bodyPr wrap="square" rtlCol="0" anchor="b" lIns="0" tIns="0" rIns="91440" bIns="45720"/>
+          <a:lstStyle/>
+          <a:p>
+            <a:pPr algn="r"/>
+            <a:r>
+              <a:rPr lang="zh-CN" sz="1600" dirty="0">
+                <a:solidFill>
+                  <a:srgbClr val="808080">
+                    <a:alpha val="19999"/>
+                  </a:srgbClr>
+                </a:solidFill>
+                <a:latin typeface="Arial"/>
+                <a:ea typeface="SimSun"/>
+              </a:rPr>
+              <a:t>TRAE AI 生成</a:t>
+            </a:r>
+          </a:p>
+        </p:txBody>
+      </p:sp>
     </p:spTree>
   </p:cSld>
   <p:clrMapOvr>
@@ -10331,6 +10838,45 @@
           </a:prstGeom>
         </p:spPr>
       </p:pic>
+      <p:sp>
+        <p:nvSpPr>
+          <p:cNvPr id="16" name="Watermark"/>
+          <p:cNvSpPr txBox="1"/>
+          <p:nvPr/>
+        </p:nvSpPr>
+        <p:spPr>
+          <a:xfrm rot="0">
+            <a:off x="6836000" y="4685500"/>
+            <a:ext cx="2200000" cy="350000"/>
+          </a:xfrm>
+          <a:prstGeom prst="rect">
+            <a:avLst/>
+          </a:prstGeom>
+          <a:noFill/>
+          <a:ln>
+            <a:noFill/>
+          </a:ln>
+        </p:spPr>
+        <p:txBody>
+          <a:bodyPr wrap="square" rtlCol="0" anchor="b" lIns="0" tIns="0" rIns="91440" bIns="45720"/>
+          <a:lstStyle/>
+          <a:p>
+            <a:pPr algn="r"/>
+            <a:r>
+              <a:rPr lang="zh-CN" sz="1600" dirty="0">
+                <a:solidFill>
+                  <a:srgbClr val="808080">
+                    <a:alpha val="19999"/>
+                  </a:srgbClr>
+                </a:solidFill>
+                <a:latin typeface="Arial"/>
+                <a:ea typeface="SimSun"/>
+              </a:rPr>
+              <a:t>TRAE AI 生成</a:t>
+            </a:r>
+          </a:p>
+        </p:txBody>
+      </p:sp>
     </p:spTree>
   </p:cSld>
   <p:clrMapOvr>
@@ -10801,6 +11347,45 @@
           </a:p>
         </p:txBody>
       </p:sp>
+      <p:sp>
+        <p:nvSpPr>
+          <p:cNvPr id="16" name="Watermark"/>
+          <p:cNvSpPr txBox="1"/>
+          <p:nvPr/>
+        </p:nvSpPr>
+        <p:spPr>
+          <a:xfrm rot="0">
+            <a:off x="6836000" y="4685500"/>
+            <a:ext cx="2200000" cy="350000"/>
+          </a:xfrm>
+          <a:prstGeom prst="rect">
+            <a:avLst/>
+          </a:prstGeom>
+          <a:noFill/>
+          <a:ln>
+            <a:noFill/>
+          </a:ln>
+        </p:spPr>
+        <p:txBody>
+          <a:bodyPr wrap="square" rtlCol="0" anchor="b" lIns="0" tIns="0" rIns="91440" bIns="45720"/>
+          <a:lstStyle/>
+          <a:p>
+            <a:pPr algn="r"/>
+            <a:r>
+              <a:rPr lang="zh-CN" sz="1600" dirty="0">
+                <a:solidFill>
+                  <a:srgbClr val="808080">
+                    <a:alpha val="19999"/>
+                  </a:srgbClr>
+                </a:solidFill>
+                <a:latin typeface="Arial"/>
+                <a:ea typeface="SimSun"/>
+              </a:rPr>
+              <a:t>TRAE AI 生成</a:t>
+            </a:r>
+          </a:p>
+        </p:txBody>
+      </p:sp>
     </p:spTree>
   </p:cSld>
   <p:clrMapOvr>
@@ -11271,6 +11856,45 @@
           </a:prstGeom>
         </p:spPr>
       </p:pic>
+      <p:sp>
+        <p:nvSpPr>
+          <p:cNvPr id="16" name="Watermark"/>
+          <p:cNvSpPr txBox="1"/>
+          <p:nvPr/>
+        </p:nvSpPr>
+        <p:spPr>
+          <a:xfrm rot="0">
+            <a:off x="6836000" y="4685500"/>
+            <a:ext cx="2200000" cy="350000"/>
+          </a:xfrm>
+          <a:prstGeom prst="rect">
+            <a:avLst/>
+          </a:prstGeom>
+          <a:noFill/>
+          <a:ln>
+            <a:noFill/>
+          </a:ln>
+        </p:spPr>
+        <p:txBody>
+          <a:bodyPr wrap="square" rtlCol="0" anchor="b" lIns="0" tIns="0" rIns="91440" bIns="45720"/>
+          <a:lstStyle/>
+          <a:p>
+            <a:pPr algn="r"/>
+            <a:r>
+              <a:rPr lang="zh-CN" sz="1600" dirty="0">
+                <a:solidFill>
+                  <a:srgbClr val="808080">
+                    <a:alpha val="19999"/>
+                  </a:srgbClr>
+                </a:solidFill>
+                <a:latin typeface="Arial"/>
+                <a:ea typeface="SimSun"/>
+              </a:rPr>
+              <a:t>TRAE AI 生成</a:t>
+            </a:r>
+          </a:p>
+        </p:txBody>
+      </p:sp>
     </p:spTree>
   </p:cSld>
   <p:clrMapOvr>
@@ -11741,6 +12365,45 @@
           </a:p>
         </p:txBody>
       </p:sp>
+      <p:sp>
+        <p:nvSpPr>
+          <p:cNvPr id="16" name="Watermark"/>
+          <p:cNvSpPr txBox="1"/>
+          <p:nvPr/>
+        </p:nvSpPr>
+        <p:spPr>
+          <a:xfrm rot="0">
+            <a:off x="6836000" y="4685500"/>
+            <a:ext cx="2200000" cy="350000"/>
+          </a:xfrm>
+          <a:prstGeom prst="rect">
+            <a:avLst/>
+          </a:prstGeom>
+          <a:noFill/>
+          <a:ln>
+            <a:noFill/>
+          </a:ln>
+        </p:spPr>
+        <p:txBody>
+          <a:bodyPr wrap="square" rtlCol="0" anchor="b" lIns="0" tIns="0" rIns="91440" bIns="45720"/>
+          <a:lstStyle/>
+          <a:p>
+            <a:pPr algn="r"/>
+            <a:r>
+              <a:rPr lang="zh-CN" sz="1600" dirty="0">
+                <a:solidFill>
+                  <a:srgbClr val="808080">
+                    <a:alpha val="19999"/>
+                  </a:srgbClr>
+                </a:solidFill>
+                <a:latin typeface="Arial"/>
+                <a:ea typeface="SimSun"/>
+              </a:rPr>
+              <a:t>TRAE AI 生成</a:t>
+            </a:r>
+          </a:p>
+        </p:txBody>
+      </p:sp>
     </p:spTree>
   </p:cSld>
   <p:clrMapOvr>
@@ -12211,6 +12874,45 @@
           </a:prstGeom>
         </p:spPr>
       </p:pic>
+      <p:sp>
+        <p:nvSpPr>
+          <p:cNvPr id="16" name="Watermark"/>
+          <p:cNvSpPr txBox="1"/>
+          <p:nvPr/>
+        </p:nvSpPr>
+        <p:spPr>
+          <a:xfrm rot="0">
+            <a:off x="6836000" y="4685500"/>
+            <a:ext cx="2200000" cy="350000"/>
+          </a:xfrm>
+          <a:prstGeom prst="rect">
+            <a:avLst/>
+          </a:prstGeom>
+          <a:noFill/>
+          <a:ln>
+            <a:noFill/>
+          </a:ln>
+        </p:spPr>
+        <p:txBody>
+          <a:bodyPr wrap="square" rtlCol="0" anchor="b" lIns="0" tIns="0" rIns="91440" bIns="45720"/>
+          <a:lstStyle/>
+          <a:p>
+            <a:pPr algn="r"/>
+            <a:r>
+              <a:rPr lang="zh-CN" sz="1600" dirty="0">
+                <a:solidFill>
+                  <a:srgbClr val="808080">
+                    <a:alpha val="19999"/>
+                  </a:srgbClr>
+                </a:solidFill>
+                <a:latin typeface="Arial"/>
+                <a:ea typeface="SimSun"/>
+              </a:rPr>
+              <a:t>TRAE AI 生成</a:t>
+            </a:r>
+          </a:p>
+        </p:txBody>
+      </p:sp>
     </p:spTree>
   </p:cSld>
   <p:clrMapOvr>
@@ -12681,6 +13383,45 @@
           </a:p>
         </p:txBody>
       </p:sp>
+      <p:sp>
+        <p:nvSpPr>
+          <p:cNvPr id="16" name="Watermark"/>
+          <p:cNvSpPr txBox="1"/>
+          <p:nvPr/>
+        </p:nvSpPr>
+        <p:spPr>
+          <a:xfrm rot="0">
+            <a:off x="6836000" y="4685500"/>
+            <a:ext cx="2200000" cy="350000"/>
+          </a:xfrm>
+          <a:prstGeom prst="rect">
+            <a:avLst/>
+          </a:prstGeom>
+          <a:noFill/>
+          <a:ln>
+            <a:noFill/>
+          </a:ln>
+        </p:spPr>
+        <p:txBody>
+          <a:bodyPr wrap="square" rtlCol="0" anchor="b" lIns="0" tIns="0" rIns="91440" bIns="45720"/>
+          <a:lstStyle/>
+          <a:p>
+            <a:pPr algn="r"/>
+            <a:r>
+              <a:rPr lang="zh-CN" sz="1600" dirty="0">
+                <a:solidFill>
+                  <a:srgbClr val="808080">
+                    <a:alpha val="19999"/>
+                  </a:srgbClr>
+                </a:solidFill>
+                <a:latin typeface="Arial"/>
+                <a:ea typeface="SimSun"/>
+              </a:rPr>
+              <a:t>TRAE AI 生成</a:t>
+            </a:r>
+          </a:p>
+        </p:txBody>
+      </p:sp>
     </p:spTree>
   </p:cSld>
   <p:clrMapOvr>
@@ -13151,6 +13892,45 @@
           </a:prstGeom>
         </p:spPr>
       </p:pic>
+      <p:sp>
+        <p:nvSpPr>
+          <p:cNvPr id="16" name="Watermark"/>
+          <p:cNvSpPr txBox="1"/>
+          <p:nvPr/>
+        </p:nvSpPr>
+        <p:spPr>
+          <a:xfrm rot="0">
+            <a:off x="6836000" y="4685500"/>
+            <a:ext cx="2200000" cy="350000"/>
+          </a:xfrm>
+          <a:prstGeom prst="rect">
+            <a:avLst/>
+          </a:prstGeom>
+          <a:noFill/>
+          <a:ln>
+            <a:noFill/>
+          </a:ln>
+        </p:spPr>
+        <p:txBody>
+          <a:bodyPr wrap="square" rtlCol="0" anchor="b" lIns="0" tIns="0" rIns="91440" bIns="45720"/>
+          <a:lstStyle/>
+          <a:p>
+            <a:pPr algn="r"/>
+            <a:r>
+              <a:rPr lang="zh-CN" sz="1600" dirty="0">
+                <a:solidFill>
+                  <a:srgbClr val="808080">
+                    <a:alpha val="19999"/>
+                  </a:srgbClr>
+                </a:solidFill>
+                <a:latin typeface="Arial"/>
+                <a:ea typeface="SimSun"/>
+              </a:rPr>
+              <a:t>TRAE AI 生成</a:t>
+            </a:r>
+          </a:p>
+        </p:txBody>
+      </p:sp>
     </p:spTree>
   </p:cSld>
   <p:clrMapOvr>
@@ -13427,6 +14207,45 @@
           </a:p>
         </p:txBody>
       </p:sp>
+      <p:sp>
+        <p:nvSpPr>
+          <p:cNvPr id="10" name="Watermark"/>
+          <p:cNvSpPr txBox="1"/>
+          <p:nvPr/>
+        </p:nvSpPr>
+        <p:spPr>
+          <a:xfrm rot="0">
+            <a:off x="6836000" y="4685500"/>
+            <a:ext cx="2200000" cy="350000"/>
+          </a:xfrm>
+          <a:prstGeom prst="rect">
+            <a:avLst/>
+          </a:prstGeom>
+          <a:noFill/>
+          <a:ln>
+            <a:noFill/>
+          </a:ln>
+        </p:spPr>
+        <p:txBody>
+          <a:bodyPr wrap="square" rtlCol="0" anchor="b" lIns="0" tIns="0" rIns="91440" bIns="45720"/>
+          <a:lstStyle/>
+          <a:p>
+            <a:pPr algn="r"/>
+            <a:r>
+              <a:rPr lang="zh-CN" sz="1600" dirty="0">
+                <a:solidFill>
+                  <a:srgbClr val="808080">
+                    <a:alpha val="19999"/>
+                  </a:srgbClr>
+                </a:solidFill>
+                <a:latin typeface="Arial"/>
+                <a:ea typeface="SimSun"/>
+              </a:rPr>
+              <a:t>TRAE AI 生成</a:t>
+            </a:r>
+          </a:p>
+        </p:txBody>
+      </p:sp>
     </p:spTree>
   </p:cSld>
   <p:clrMapOvr>
@@ -14468,6 +15287,45 @@
           </a:p>
         </p:txBody>
       </p:sp>
+      <p:sp>
+        <p:nvSpPr>
+          <p:cNvPr id="31" name="Watermark"/>
+          <p:cNvSpPr txBox="1"/>
+          <p:nvPr/>
+        </p:nvSpPr>
+        <p:spPr>
+          <a:xfrm rot="0">
+            <a:off x="6836000" y="4685500"/>
+            <a:ext cx="2200000" cy="350000"/>
+          </a:xfrm>
+          <a:prstGeom prst="rect">
+            <a:avLst/>
+          </a:prstGeom>
+          <a:noFill/>
+          <a:ln>
+            <a:noFill/>
+          </a:ln>
+        </p:spPr>
+        <p:txBody>
+          <a:bodyPr wrap="square" rtlCol="0" anchor="b" lIns="0" tIns="0" rIns="91440" bIns="45720"/>
+          <a:lstStyle/>
+          <a:p>
+            <a:pPr algn="r"/>
+            <a:r>
+              <a:rPr lang="zh-CN" sz="1600" dirty="0">
+                <a:solidFill>
+                  <a:srgbClr val="808080">
+                    <a:alpha val="19999"/>
+                  </a:srgbClr>
+                </a:solidFill>
+                <a:latin typeface="Arial"/>
+                <a:ea typeface="SimSun"/>
+              </a:rPr>
+              <a:t>TRAE AI 生成</a:t>
+            </a:r>
+          </a:p>
+        </p:txBody>
+      </p:sp>
     </p:spTree>
   </p:cSld>
   <p:clrMapOvr>
@@ -14744,6 +15602,45 @@
           </a:p>
         </p:txBody>
       </p:sp>
+      <p:sp>
+        <p:nvSpPr>
+          <p:cNvPr id="10" name="Watermark"/>
+          <p:cNvSpPr txBox="1"/>
+          <p:nvPr/>
+        </p:nvSpPr>
+        <p:spPr>
+          <a:xfrm rot="0">
+            <a:off x="6836000" y="4685500"/>
+            <a:ext cx="2200000" cy="350000"/>
+          </a:xfrm>
+          <a:prstGeom prst="rect">
+            <a:avLst/>
+          </a:prstGeom>
+          <a:noFill/>
+          <a:ln>
+            <a:noFill/>
+          </a:ln>
+        </p:spPr>
+        <p:txBody>
+          <a:bodyPr wrap="square" rtlCol="0" anchor="b" lIns="0" tIns="0" rIns="91440" bIns="45720"/>
+          <a:lstStyle/>
+          <a:p>
+            <a:pPr algn="r"/>
+            <a:r>
+              <a:rPr lang="zh-CN" sz="1600" dirty="0">
+                <a:solidFill>
+                  <a:srgbClr val="808080">
+                    <a:alpha val="19999"/>
+                  </a:srgbClr>
+                </a:solidFill>
+                <a:latin typeface="Arial"/>
+                <a:ea typeface="SimSun"/>
+              </a:rPr>
+              <a:t>TRAE AI 生成</a:t>
+            </a:r>
+          </a:p>
+        </p:txBody>
+      </p:sp>
     </p:spTree>
   </p:cSld>
   <p:clrMapOvr>
@@ -15020,6 +15917,45 @@
           </a:p>
         </p:txBody>
       </p:sp>
+      <p:sp>
+        <p:nvSpPr>
+          <p:cNvPr id="10" name="Watermark"/>
+          <p:cNvSpPr txBox="1"/>
+          <p:nvPr/>
+        </p:nvSpPr>
+        <p:spPr>
+          <a:xfrm rot="0">
+            <a:off x="6836000" y="4685500"/>
+            <a:ext cx="2200000" cy="350000"/>
+          </a:xfrm>
+          <a:prstGeom prst="rect">
+            <a:avLst/>
+          </a:prstGeom>
+          <a:noFill/>
+          <a:ln>
+            <a:noFill/>
+          </a:ln>
+        </p:spPr>
+        <p:txBody>
+          <a:bodyPr wrap="square" rtlCol="0" anchor="b" lIns="0" tIns="0" rIns="91440" bIns="45720"/>
+          <a:lstStyle/>
+          <a:p>
+            <a:pPr algn="r"/>
+            <a:r>
+              <a:rPr lang="zh-CN" sz="1600" dirty="0">
+                <a:solidFill>
+                  <a:srgbClr val="808080">
+                    <a:alpha val="19999"/>
+                  </a:srgbClr>
+                </a:solidFill>
+                <a:latin typeface="Arial"/>
+                <a:ea typeface="SimSun"/>
+              </a:rPr>
+              <a:t>TRAE AI 生成</a:t>
+            </a:r>
+          </a:p>
+        </p:txBody>
+      </p:sp>
     </p:spTree>
   </p:cSld>
   <p:clrMapOvr>
@@ -15667,6 +16603,45 @@
           </a:p>
         </p:txBody>
       </p:sp>
+      <p:sp>
+        <p:nvSpPr>
+          <p:cNvPr id="13" name="Watermark"/>
+          <p:cNvSpPr txBox="1"/>
+          <p:nvPr/>
+        </p:nvSpPr>
+        <p:spPr>
+          <a:xfrm rot="0">
+            <a:off x="6836000" y="4685500"/>
+            <a:ext cx="2200000" cy="350000"/>
+          </a:xfrm>
+          <a:prstGeom prst="rect">
+            <a:avLst/>
+          </a:prstGeom>
+          <a:noFill/>
+          <a:ln>
+            <a:noFill/>
+          </a:ln>
+        </p:spPr>
+        <p:txBody>
+          <a:bodyPr wrap="square" rtlCol="0" anchor="b" lIns="0" tIns="0" rIns="91440" bIns="45720"/>
+          <a:lstStyle/>
+          <a:p>
+            <a:pPr algn="r"/>
+            <a:r>
+              <a:rPr lang="zh-CN" sz="1600" dirty="0">
+                <a:solidFill>
+                  <a:srgbClr val="808080">
+                    <a:alpha val="19999"/>
+                  </a:srgbClr>
+                </a:solidFill>
+                <a:latin typeface="Arial"/>
+                <a:ea typeface="SimSun"/>
+              </a:rPr>
+              <a:t>TRAE AI 生成</a:t>
+            </a:r>
+          </a:p>
+        </p:txBody>
+      </p:sp>
     </p:spTree>
   </p:cSld>
   <p:clrMapOvr>
@@ -15945,6 +16920,45 @@
           </a:p>
         </p:txBody>
       </p:sp>
+      <p:sp>
+        <p:nvSpPr>
+          <p:cNvPr id="10" name="Watermark"/>
+          <p:cNvSpPr txBox="1"/>
+          <p:nvPr/>
+        </p:nvSpPr>
+        <p:spPr>
+          <a:xfrm rot="0">
+            <a:off x="6836000" y="4685500"/>
+            <a:ext cx="2200000" cy="350000"/>
+          </a:xfrm>
+          <a:prstGeom prst="rect">
+            <a:avLst/>
+          </a:prstGeom>
+          <a:noFill/>
+          <a:ln>
+            <a:noFill/>
+          </a:ln>
+        </p:spPr>
+        <p:txBody>
+          <a:bodyPr wrap="square" rtlCol="0" anchor="b" lIns="0" tIns="0" rIns="91440" bIns="45720"/>
+          <a:lstStyle/>
+          <a:p>
+            <a:pPr algn="r"/>
+            <a:r>
+              <a:rPr lang="zh-CN" sz="1600" dirty="0">
+                <a:solidFill>
+                  <a:srgbClr val="808080">
+                    <a:alpha val="19999"/>
+                  </a:srgbClr>
+                </a:solidFill>
+                <a:latin typeface="Arial"/>
+                <a:ea typeface="SimSun"/>
+              </a:rPr>
+              <a:t>TRAE AI 生成</a:t>
+            </a:r>
+          </a:p>
+        </p:txBody>
+      </p:sp>
     </p:spTree>
   </p:cSld>
   <p:clrMapOvr>
@@ -16615,6 +17629,45 @@
           </a:p>
         </p:txBody>
       </p:sp>
+      <p:sp>
+        <p:nvSpPr>
+          <p:cNvPr id="22" name="Watermark"/>
+          <p:cNvSpPr txBox="1"/>
+          <p:nvPr/>
+        </p:nvSpPr>
+        <p:spPr>
+          <a:xfrm rot="0">
+            <a:off x="6836000" y="4685500"/>
+            <a:ext cx="2200000" cy="350000"/>
+          </a:xfrm>
+          <a:prstGeom prst="rect">
+            <a:avLst/>
+          </a:prstGeom>
+          <a:noFill/>
+          <a:ln>
+            <a:noFill/>
+          </a:ln>
+        </p:spPr>
+        <p:txBody>
+          <a:bodyPr wrap="square" rtlCol="0" anchor="b" lIns="0" tIns="0" rIns="91440" bIns="45720"/>
+          <a:lstStyle/>
+          <a:p>
+            <a:pPr algn="r"/>
+            <a:r>
+              <a:rPr lang="zh-CN" sz="1600" dirty="0">
+                <a:solidFill>
+                  <a:srgbClr val="808080">
+                    <a:alpha val="19999"/>
+                  </a:srgbClr>
+                </a:solidFill>
+                <a:latin typeface="Arial"/>
+                <a:ea typeface="SimSun"/>
+              </a:rPr>
+              <a:t>TRAE AI 生成</a:t>
+            </a:r>
+          </a:p>
+        </p:txBody>
+      </p:sp>
     </p:spTree>
   </p:cSld>
   <p:clrMapOvr>
@@ -17332,6 +18385,45 @@
           </a:p>
         </p:txBody>
       </p:sp>
+      <p:sp>
+        <p:nvSpPr>
+          <p:cNvPr id="24" name="Watermark"/>
+          <p:cNvSpPr txBox="1"/>
+          <p:nvPr/>
+        </p:nvSpPr>
+        <p:spPr>
+          <a:xfrm rot="0">
+            <a:off x="6836000" y="4685500"/>
+            <a:ext cx="2200000" cy="350000"/>
+          </a:xfrm>
+          <a:prstGeom prst="rect">
+            <a:avLst/>
+          </a:prstGeom>
+          <a:noFill/>
+          <a:ln>
+            <a:noFill/>
+          </a:ln>
+        </p:spPr>
+        <p:txBody>
+          <a:bodyPr wrap="square" rtlCol="0" anchor="b" lIns="0" tIns="0" rIns="91440" bIns="45720"/>
+          <a:lstStyle/>
+          <a:p>
+            <a:pPr algn="r"/>
+            <a:r>
+              <a:rPr lang="zh-CN" sz="1600" dirty="0">
+                <a:solidFill>
+                  <a:srgbClr val="808080">
+                    <a:alpha val="19999"/>
+                  </a:srgbClr>
+                </a:solidFill>
+                <a:latin typeface="Arial"/>
+                <a:ea typeface="SimSun"/>
+              </a:rPr>
+              <a:t>TRAE AI 生成</a:t>
+            </a:r>
+          </a:p>
+        </p:txBody>
+      </p:sp>
     </p:spTree>
   </p:cSld>
   <p:clrMapOvr>
@@ -17608,6 +18700,45 @@
           </a:p>
         </p:txBody>
       </p:sp>
+      <p:sp>
+        <p:nvSpPr>
+          <p:cNvPr id="10" name="Watermark"/>
+          <p:cNvSpPr txBox="1"/>
+          <p:nvPr/>
+        </p:nvSpPr>
+        <p:spPr>
+          <a:xfrm rot="0">
+            <a:off x="6836000" y="4685500"/>
+            <a:ext cx="2200000" cy="350000"/>
+          </a:xfrm>
+          <a:prstGeom prst="rect">
+            <a:avLst/>
+          </a:prstGeom>
+          <a:noFill/>
+          <a:ln>
+            <a:noFill/>
+          </a:ln>
+        </p:spPr>
+        <p:txBody>
+          <a:bodyPr wrap="square" rtlCol="0" anchor="b" lIns="0" tIns="0" rIns="91440" bIns="45720"/>
+          <a:lstStyle/>
+          <a:p>
+            <a:pPr algn="r"/>
+            <a:r>
+              <a:rPr lang="zh-CN" sz="1600" dirty="0">
+                <a:solidFill>
+                  <a:srgbClr val="808080">
+                    <a:alpha val="19999"/>
+                  </a:srgbClr>
+                </a:solidFill>
+                <a:latin typeface="Arial"/>
+                <a:ea typeface="SimSun"/>
+              </a:rPr>
+              <a:t>TRAE AI 生成</a:t>
+            </a:r>
+          </a:p>
+        </p:txBody>
+      </p:sp>
     </p:spTree>
   </p:cSld>
   <p:clrMapOvr>
@@ -18358,6 +19489,45 @@
           </a:p>
         </p:txBody>
       </p:sp>
+      <p:sp>
+        <p:nvSpPr>
+          <p:cNvPr id="26" name="Watermark"/>
+          <p:cNvSpPr txBox="1"/>
+          <p:nvPr/>
+        </p:nvSpPr>
+        <p:spPr>
+          <a:xfrm rot="0">
+            <a:off x="6836000" y="4685500"/>
+            <a:ext cx="2200000" cy="350000"/>
+          </a:xfrm>
+          <a:prstGeom prst="rect">
+            <a:avLst/>
+          </a:prstGeom>
+          <a:noFill/>
+          <a:ln>
+            <a:noFill/>
+          </a:ln>
+        </p:spPr>
+        <p:txBody>
+          <a:bodyPr wrap="square" rtlCol="0" anchor="b" lIns="0" tIns="0" rIns="91440" bIns="45720"/>
+          <a:lstStyle/>
+          <a:p>
+            <a:pPr algn="r"/>
+            <a:r>
+              <a:rPr lang="zh-CN" sz="1600" dirty="0">
+                <a:solidFill>
+                  <a:srgbClr val="808080">
+                    <a:alpha val="19999"/>
+                  </a:srgbClr>
+                </a:solidFill>
+                <a:latin typeface="Arial"/>
+                <a:ea typeface="SimSun"/>
+              </a:rPr>
+              <a:t>TRAE AI 生成</a:t>
+            </a:r>
+          </a:p>
+        </p:txBody>
+      </p:sp>
     </p:spTree>
   </p:cSld>
   <p:clrMapOvr>
@@ -19240,6 +20410,45 @@
           </a:p>
         </p:txBody>
       </p:sp>
+      <p:sp>
+        <p:nvSpPr>
+          <p:cNvPr id="27" name="Watermark"/>
+          <p:cNvSpPr txBox="1"/>
+          <p:nvPr/>
+        </p:nvSpPr>
+        <p:spPr>
+          <a:xfrm rot="0">
+            <a:off x="6836000" y="4685500"/>
+            <a:ext cx="2200000" cy="350000"/>
+          </a:xfrm>
+          <a:prstGeom prst="rect">
+            <a:avLst/>
+          </a:prstGeom>
+          <a:noFill/>
+          <a:ln>
+            <a:noFill/>
+          </a:ln>
+        </p:spPr>
+        <p:txBody>
+          <a:bodyPr wrap="square" rtlCol="0" anchor="b" lIns="0" tIns="0" rIns="91440" bIns="45720"/>
+          <a:lstStyle/>
+          <a:p>
+            <a:pPr algn="r"/>
+            <a:r>
+              <a:rPr lang="zh-CN" sz="1600" dirty="0">
+                <a:solidFill>
+                  <a:srgbClr val="808080">
+                    <a:alpha val="19999"/>
+                  </a:srgbClr>
+                </a:solidFill>
+                <a:latin typeface="Arial"/>
+                <a:ea typeface="SimSun"/>
+              </a:rPr>
+              <a:t>TRAE AI 生成</a:t>
+            </a:r>
+          </a:p>
+        </p:txBody>
+      </p:sp>
     </p:spTree>
   </p:cSld>
   <p:clrMapOvr>
@@ -19513,6 +20722,45 @@
               <a:t>西安思源学院</a:t>
             </a:r>
             <a:endParaRPr lang="en-US" sz="1200" dirty="0"/>
+          </a:p>
+        </p:txBody>
+      </p:sp>
+      <p:sp>
+        <p:nvSpPr>
+          <p:cNvPr id="10" name="Watermark"/>
+          <p:cNvSpPr txBox="1"/>
+          <p:nvPr/>
+        </p:nvSpPr>
+        <p:spPr>
+          <a:xfrm rot="0">
+            <a:off x="6836000" y="4685500"/>
+            <a:ext cx="2200000" cy="350000"/>
+          </a:xfrm>
+          <a:prstGeom prst="rect">
+            <a:avLst/>
+          </a:prstGeom>
+          <a:noFill/>
+          <a:ln>
+            <a:noFill/>
+          </a:ln>
+        </p:spPr>
+        <p:txBody>
+          <a:bodyPr wrap="square" rtlCol="0" anchor="b" lIns="0" tIns="0" rIns="91440" bIns="45720"/>
+          <a:lstStyle/>
+          <a:p>
+            <a:pPr algn="r"/>
+            <a:r>
+              <a:rPr lang="zh-CN" sz="1600" dirty="0">
+                <a:solidFill>
+                  <a:srgbClr val="808080">
+                    <a:alpha val="19999"/>
+                  </a:srgbClr>
+                </a:solidFill>
+                <a:latin typeface="Arial"/>
+                <a:ea typeface="SimSun"/>
+              </a:rPr>
+              <a:t>TRAE AI 生成</a:t>
+            </a:r>
           </a:p>
         </p:txBody>
       </p:sp>
